--- a/slides/pptx/第04回_数字と判断のAI化.pptx
+++ b/slides/pptx/第04回_数字と判断のAI化.pptx
@@ -12,9 +12,14 @@
     <p:sldId id="260" r:id="rId6"/>
     <p:sldId id="261" r:id="rId7"/>
     <p:sldId id="262" r:id="rId8"/>
+    <p:sldId id="263" r:id="rId9"/>
+    <p:sldId id="264" r:id="rId10"/>
+    <p:sldId id="265" r:id="rId11"/>
+    <p:sldId id="266" r:id="rId12"/>
+    <p:sldId id="267" r:id="rId13"/>
   </p:sldIdLst>
   <p:notesMasterIdLst>
-    <p:notesMasterId r:id="rId9"/>
+    <p:notesMasterId r:id="rId14"/>
   </p:notesMasterIdLst>
   <p:sldSz cx="12192000" cy="6858000"/>
   <p:notesSz cx="6858000" cy="12192000"/>
@@ -508,8 +513,7 @@
           <a:p>
             <a:r>
               <a:rPr lang="en-US" dirty="0"/>
-              <a:t>今日がいちばん食いつきのよい回で、いちばん事故りやすい回でもあります。
-【ゴール】自社の数字をAIに読ませて、示唆を3つ引き出します。あわせて、必ず検算する手順を身につけます。</a:t>
+              <a:t>前回の宿題（社員の反応）を丁寧に聞く。ここは急がない。第6回のお披露目の材料になるので、否定的な意見ほど詳しく聞き出す。</a:t>
             </a:r>
             <a:endParaRPr lang="en-US" dirty="0"/>
           </a:p>
@@ -533,6 +537,270 @@
             <a:fld id="{F7021451-1387-4CA6-816F-3879F97B5CBC}" type="slidenum">
               <a:rPr lang="en-US"/>
               <a:t>1</a:t>
+            </a:fld>
+            <a:endParaRPr lang="en-US"/>
+          </a:p>
+        </p:txBody>
+      </p:sp>
+    </p:spTree>
+    <p:extLst>
+      <p:ext uri="{BB962C8B-B14F-4D97-AF65-F5344CB8AC3E}">
+        <p14:creationId xmlns:p14="http://schemas.microsoft.com/office/powerpoint/2010/main" val="1024086991"/>
+      </p:ext>
+    </p:extLst>
+  </p:cSld>
+  <p:clrMapOvr>
+    <a:masterClrMapping/>
+  </p:clrMapOvr>
+</p:notes>
+</file>
+
+<file path=ppt/notesSlides/notesSlide10.xml><?xml version="1.0" encoding="utf-8"?>
+<p:notes xmlns:a="http://schemas.openxmlformats.org/drawingml/2006/main" xmlns:r="http://schemas.openxmlformats.org/officeDocument/2006/relationships" xmlns:p="http://schemas.openxmlformats.org/presentationml/2006/main">
+  <p:cSld>
+    <p:spTree>
+      <p:nvGrpSpPr>
+        <p:cNvPr id="1" name=""/>
+        <p:cNvGrpSpPr/>
+        <p:nvPr/>
+      </p:nvGrpSpPr>
+      <p:grpSpPr>
+        <a:xfrm>
+          <a:off x="0" y="0"/>
+          <a:ext cx="0" cy="0"/>
+          <a:chOff x="0" y="0"/>
+          <a:chExt cx="0" cy="0"/>
+        </a:xfrm>
+      </p:grpSpPr>
+      <p:sp>
+        <p:nvSpPr>
+          <p:cNvPr id="2" name="Slide Image Placeholder 1"/>
+          <p:cNvSpPr>
+            <a:spLocks noGrp="1" noRot="1" noChangeAspect="1"/>
+          </p:cNvSpPr>
+          <p:nvPr>
+            <p:ph type="sldImg"/>
+          </p:nvPr>
+        </p:nvSpPr>
+        <p:spPr/>
+      </p:sp>
+      <p:sp>
+        <p:nvSpPr>
+          <p:cNvPr id="3" name="Notes Placeholder 2"/>
+          <p:cNvSpPr>
+            <a:spLocks noGrp="1"/>
+          </p:cNvSpPr>
+          <p:nvPr>
+            <p:ph type="body" idx="1"/>
+          </p:nvPr>
+        </p:nvSpPr>
+        <p:spPr/>
+        <p:txBody>
+          <a:bodyPr/>
+          <a:lstStyle/>
+          <a:p>
+            <a:r>
+              <a:rPr lang="en-US" dirty="0"/>
+              <a:t>「毎月いつ」を決めないと、翌月には忘れられている。締め日から逆算して日付を決め、その場でカレンダーに入れてもらう。</a:t>
+            </a:r>
+            <a:endParaRPr lang="en-US" dirty="0"/>
+          </a:p>
+        </p:txBody>
+      </p:sp>
+      <p:sp>
+        <p:nvSpPr>
+          <p:cNvPr id="4" name="Slide Number Placeholder 3"/>
+          <p:cNvSpPr>
+            <a:spLocks noGrp="1"/>
+          </p:cNvSpPr>
+          <p:nvPr>
+            <p:ph type="sldNum" sz="quarter" idx="10"/>
+          </p:nvPr>
+        </p:nvSpPr>
+        <p:spPr/>
+        <p:txBody>
+          <a:bodyPr/>
+          <a:lstStyle/>
+          <a:p>
+            <a:fld id="{F7021451-1387-4CA6-816F-3879F97B5CBC}" type="slidenum">
+              <a:rPr lang="en-US"/>
+              <a:t>10</a:t>
+            </a:fld>
+            <a:endParaRPr lang="en-US"/>
+          </a:p>
+        </p:txBody>
+      </p:sp>
+    </p:spTree>
+    <p:extLst>
+      <p:ext uri="{BB962C8B-B14F-4D97-AF65-F5344CB8AC3E}">
+        <p14:creationId xmlns:p14="http://schemas.microsoft.com/office/powerpoint/2010/main" val="1024086991"/>
+      </p:ext>
+    </p:extLst>
+  </p:cSld>
+  <p:clrMapOvr>
+    <a:masterClrMapping/>
+  </p:clrMapOvr>
+</p:notes>
+</file>
+
+<file path=ppt/notesSlides/notesSlide11.xml><?xml version="1.0" encoding="utf-8"?>
+<p:notes xmlns:a="http://schemas.openxmlformats.org/drawingml/2006/main" xmlns:r="http://schemas.openxmlformats.org/officeDocument/2006/relationships" xmlns:p="http://schemas.openxmlformats.org/presentationml/2006/main">
+  <p:cSld>
+    <p:spTree>
+      <p:nvGrpSpPr>
+        <p:cNvPr id="1" name=""/>
+        <p:cNvGrpSpPr/>
+        <p:nvPr/>
+      </p:nvGrpSpPr>
+      <p:grpSpPr>
+        <a:xfrm>
+          <a:off x="0" y="0"/>
+          <a:ext cx="0" cy="0"/>
+          <a:chOff x="0" y="0"/>
+          <a:chExt cx="0" cy="0"/>
+        </a:xfrm>
+      </p:grpSpPr>
+      <p:sp>
+        <p:nvSpPr>
+          <p:cNvPr id="2" name="Slide Image Placeholder 1"/>
+          <p:cNvSpPr>
+            <a:spLocks noGrp="1" noRot="1" noChangeAspect="1"/>
+          </p:cNvSpPr>
+          <p:nvPr>
+            <p:ph type="sldImg"/>
+          </p:nvPr>
+        </p:nvSpPr>
+        <p:spPr/>
+      </p:sp>
+      <p:sp>
+        <p:nvSpPr>
+          <p:cNvPr id="3" name="Notes Placeholder 2"/>
+          <p:cNvSpPr>
+            <a:spLocks noGrp="1"/>
+          </p:cNvSpPr>
+          <p:nvPr>
+            <p:ph type="body" idx="1"/>
+          </p:nvPr>
+        </p:nvSpPr>
+        <p:spPr/>
+        <p:txBody>
+          <a:bodyPr/>
+          <a:lstStyle/>
+          <a:p>
+            <a:r>
+              <a:rPr lang="en-US" dirty="0"/>
+              <a:t>この事例は期待値管理そのもの。毎案件で必ず出す。ここを言わずに進めると、2か月目に「効かないですね」と言われる。</a:t>
+            </a:r>
+            <a:endParaRPr lang="en-US" dirty="0"/>
+          </a:p>
+        </p:txBody>
+      </p:sp>
+      <p:sp>
+        <p:nvSpPr>
+          <p:cNvPr id="4" name="Slide Number Placeholder 3"/>
+          <p:cNvSpPr>
+            <a:spLocks noGrp="1"/>
+          </p:cNvSpPr>
+          <p:nvPr>
+            <p:ph type="sldNum" sz="quarter" idx="10"/>
+          </p:nvPr>
+        </p:nvSpPr>
+        <p:spPr/>
+        <p:txBody>
+          <a:bodyPr/>
+          <a:lstStyle/>
+          <a:p>
+            <a:fld id="{F7021451-1387-4CA6-816F-3879F97B5CBC}" type="slidenum">
+              <a:rPr lang="en-US"/>
+              <a:t>11</a:t>
+            </a:fld>
+            <a:endParaRPr lang="en-US"/>
+          </a:p>
+        </p:txBody>
+      </p:sp>
+    </p:spTree>
+    <p:extLst>
+      <p:ext uri="{BB962C8B-B14F-4D97-AF65-F5344CB8AC3E}">
+        <p14:creationId xmlns:p14="http://schemas.microsoft.com/office/powerpoint/2010/main" val="1024086991"/>
+      </p:ext>
+    </p:extLst>
+  </p:cSld>
+  <p:clrMapOvr>
+    <a:masterClrMapping/>
+  </p:clrMapOvr>
+</p:notes>
+</file>
+
+<file path=ppt/notesSlides/notesSlide12.xml><?xml version="1.0" encoding="utf-8"?>
+<p:notes xmlns:a="http://schemas.openxmlformats.org/drawingml/2006/main" xmlns:r="http://schemas.openxmlformats.org/officeDocument/2006/relationships" xmlns:p="http://schemas.openxmlformats.org/presentationml/2006/main">
+  <p:cSld>
+    <p:spTree>
+      <p:nvGrpSpPr>
+        <p:cNvPr id="1" name=""/>
+        <p:cNvGrpSpPr/>
+        <p:nvPr/>
+      </p:nvGrpSpPr>
+      <p:grpSpPr>
+        <a:xfrm>
+          <a:off x="0" y="0"/>
+          <a:ext cx="0" cy="0"/>
+          <a:chOff x="0" y="0"/>
+          <a:chExt cx="0" cy="0"/>
+        </a:xfrm>
+      </p:grpSpPr>
+      <p:sp>
+        <p:nvSpPr>
+          <p:cNvPr id="2" name="Slide Image Placeholder 1"/>
+          <p:cNvSpPr>
+            <a:spLocks noGrp="1" noRot="1" noChangeAspect="1"/>
+          </p:cNvSpPr>
+          <p:nvPr>
+            <p:ph type="sldImg"/>
+          </p:nvPr>
+        </p:nvSpPr>
+        <p:spPr/>
+      </p:sp>
+      <p:sp>
+        <p:nvSpPr>
+          <p:cNvPr id="3" name="Notes Placeholder 2"/>
+          <p:cNvSpPr>
+            <a:spLocks noGrp="1"/>
+          </p:cNvSpPr>
+          <p:nvPr>
+            <p:ph type="body" idx="1"/>
+          </p:nvPr>
+        </p:nvSpPr>
+        <p:spPr/>
+        <p:txBody>
+          <a:bodyPr/>
+          <a:lstStyle/>
+          <a:p>
+            <a:r>
+              <a:rPr lang="en-US" dirty="0"/>
+              <a:t>回してみて足りない前提が見つかったら、それを書き足すところまでが宿題。次回冒頭で、書き足した前提を見せてもらう。</a:t>
+            </a:r>
+            <a:endParaRPr lang="en-US" dirty="0"/>
+          </a:p>
+        </p:txBody>
+      </p:sp>
+      <p:sp>
+        <p:nvSpPr>
+          <p:cNvPr id="4" name="Slide Number Placeholder 3"/>
+          <p:cNvSpPr>
+            <a:spLocks noGrp="1"/>
+          </p:cNvSpPr>
+          <p:nvPr>
+            <p:ph type="sldNum" sz="quarter" idx="10"/>
+          </p:nvPr>
+        </p:nvSpPr>
+        <p:spPr/>
+        <p:txBody>
+          <a:bodyPr/>
+          <a:lstStyle/>
+          <a:p>
+            <a:fld id="{F7021451-1387-4CA6-816F-3879F97B5CBC}" type="slidenum">
+              <a:rPr lang="en-US"/>
+              <a:t>12</a:t>
             </a:fld>
             <a:endParaRPr lang="en-US"/>
           </a:p>
@@ -597,7 +865,7 @@
           <a:p>
             <a:r>
               <a:rPr lang="en-US" dirty="0"/>
-              <a:t>ここは30秒で。今日の到達点だけ言って、すぐ本題へ。</a:t>
+              <a:t>「ここまでは書く作業が速くなっただけ」と正直に言う。受講者もそう感じている。そのうえで今日から位置づけが変わる、と宣言する。</a:t>
             </a:r>
             <a:endParaRPr lang="en-US" dirty="0"/>
           </a:p>
@@ -685,7 +953,7 @@
           <a:p>
             <a:r>
               <a:rPr lang="en-US" dirty="0"/>
-              <a:t>先に結論を言わず、受講者の実物を題材にしてこの型に当てはめて見せる。</a:t>
+              <a:t>「いちばん事故りやすい回」と先に言っておく。検算の手順を飛ばさせないための布石。</a:t>
             </a:r>
             <a:endParaRPr lang="en-US" dirty="0"/>
           </a:p>
@@ -773,7 +1041,7 @@
           <a:p>
             <a:r>
               <a:rPr lang="en-US" dirty="0"/>
-              <a:t>必ず左（失敗例）から。自分の失敗として話す。うまくいく例だけ見せると、受講者は自分の失敗を言わなくなる。</a:t>
+              <a:t>3原則のうち1つ目を最も強く。ここを飛ばすと、間違った数字が社外に出る。1対1では講師が唯一の歯止めであることを、講師自身が自覚しておく。</a:t>
             </a:r>
             <a:endParaRPr lang="en-US" dirty="0"/>
           </a:p>
@@ -861,7 +1129,7 @@
           <a:p>
             <a:r>
               <a:rPr lang="en-US" dirty="0"/>
-              <a:t>ここから講師は口頭指示のみ。画面を操作するのは必ず受講者。歯がゆくても手を出さない。</a:t>
+              <a:t>5項目のうち1と2を指差して「ここはAIにやらせません」と言う。役割分担が腹に落ちると、以後の使い方が安定する。</a:t>
             </a:r>
             <a:endParaRPr lang="en-US" dirty="0"/>
           </a:p>
@@ -949,7 +1217,7 @@
           <a:p>
             <a:r>
               <a:rPr lang="en-US" dirty="0"/>
-              <a:t>ここは資料を読み上げない。自分の言葉と、匿名事例で話す。</a:t>
+              <a:t>デモではあえて計算を間違えさせる。合計を電卓で検算して見せると効果が大きい。ずれていなかった場合は「今回は合っていました。でも毎回確かめてください」と言う。合っていたことを根拠に信用させない。</a:t>
             </a:r>
             <a:endParaRPr lang="en-US" dirty="0"/>
           </a:p>
@@ -1037,7 +1305,7 @@
           <a:p>
             <a:r>
               <a:rPr lang="en-US" dirty="0"/>
-              <a:t>その場でカレンダーに入れてもらう。口頭の約束で終わらせない。</a:t>
+              <a:t>「気になる点」と「反論」で出力がどう変わるか、実際に両方流して見せる。言葉ひとつで変わることが分かると、受講者の指示の出し方が変わる。</a:t>
             </a:r>
             <a:endParaRPr lang="en-US" dirty="0"/>
           </a:p>
@@ -1061,6 +1329,182 @@
             <a:fld id="{F7021451-1387-4CA6-816F-3879F97B5CBC}" type="slidenum">
               <a:rPr lang="en-US"/>
               <a:t>7</a:t>
+            </a:fld>
+            <a:endParaRPr lang="en-US"/>
+          </a:p>
+        </p:txBody>
+      </p:sp>
+    </p:spTree>
+    <p:extLst>
+      <p:ext uri="{BB962C8B-B14F-4D97-AF65-F5344CB8AC3E}">
+        <p14:creationId xmlns:p14="http://schemas.microsoft.com/office/powerpoint/2010/main" val="1024086991"/>
+      </p:ext>
+    </p:extLst>
+  </p:cSld>
+  <p:clrMapOvr>
+    <a:masterClrMapping/>
+  </p:clrMapOvr>
+</p:notes>
+</file>
+
+<file path=ppt/notesSlides/notesSlide8.xml><?xml version="1.0" encoding="utf-8"?>
+<p:notes xmlns:a="http://schemas.openxmlformats.org/drawingml/2006/main" xmlns:r="http://schemas.openxmlformats.org/officeDocument/2006/relationships" xmlns:p="http://schemas.openxmlformats.org/presentationml/2006/main">
+  <p:cSld>
+    <p:spTree>
+      <p:nvGrpSpPr>
+        <p:cNvPr id="1" name=""/>
+        <p:cNvGrpSpPr/>
+        <p:nvPr/>
+      </p:nvGrpSpPr>
+      <p:grpSpPr>
+        <a:xfrm>
+          <a:off x="0" y="0"/>
+          <a:ext cx="0" cy="0"/>
+          <a:chOff x="0" y="0"/>
+          <a:chExt cx="0" cy="0"/>
+        </a:xfrm>
+      </p:grpSpPr>
+      <p:sp>
+        <p:nvSpPr>
+          <p:cNvPr id="2" name="Slide Image Placeholder 1"/>
+          <p:cNvSpPr>
+            <a:spLocks noGrp="1" noRot="1" noChangeAspect="1"/>
+          </p:cNvSpPr>
+          <p:nvPr>
+            <p:ph type="sldImg"/>
+          </p:nvPr>
+        </p:nvSpPr>
+        <p:spPr/>
+      </p:sp>
+      <p:sp>
+        <p:nvSpPr>
+          <p:cNvPr id="3" name="Notes Placeholder 2"/>
+          <p:cNvSpPr>
+            <a:spLocks noGrp="1"/>
+          </p:cNvSpPr>
+          <p:nvPr>
+            <p:ph type="body" idx="1"/>
+          </p:nvPr>
+        </p:nvSpPr>
+        <p:spPr/>
+        <p:txBody>
+          <a:bodyPr/>
+          <a:lstStyle/>
+          <a:p>
+            <a:r>
+              <a:rPr lang="en-US" dirty="0"/>
+              <a:t>2つ目（個人情報）は必ずその場で一緒に手を動かす。口で説明しても、実際の列を前にすると迷う。</a:t>
+            </a:r>
+            <a:endParaRPr lang="en-US" dirty="0"/>
+          </a:p>
+        </p:txBody>
+      </p:sp>
+      <p:sp>
+        <p:nvSpPr>
+          <p:cNvPr id="4" name="Slide Number Placeholder 3"/>
+          <p:cNvSpPr>
+            <a:spLocks noGrp="1"/>
+          </p:cNvSpPr>
+          <p:nvPr>
+            <p:ph type="sldNum" sz="quarter" idx="10"/>
+          </p:nvPr>
+        </p:nvSpPr>
+        <p:spPr/>
+        <p:txBody>
+          <a:bodyPr/>
+          <a:lstStyle/>
+          <a:p>
+            <a:fld id="{F7021451-1387-4CA6-816F-3879F97B5CBC}" type="slidenum">
+              <a:rPr lang="en-US"/>
+              <a:t>8</a:t>
+            </a:fld>
+            <a:endParaRPr lang="en-US"/>
+          </a:p>
+        </p:txBody>
+      </p:sp>
+    </p:spTree>
+    <p:extLst>
+      <p:ext uri="{BB962C8B-B14F-4D97-AF65-F5344CB8AC3E}">
+        <p14:creationId xmlns:p14="http://schemas.microsoft.com/office/powerpoint/2010/main" val="1024086991"/>
+      </p:ext>
+    </p:extLst>
+  </p:cSld>
+  <p:clrMapOvr>
+    <a:masterClrMapping/>
+  </p:clrMapOvr>
+</p:notes>
+</file>
+
+<file path=ppt/notesSlides/notesSlide9.xml><?xml version="1.0" encoding="utf-8"?>
+<p:notes xmlns:a="http://schemas.openxmlformats.org/drawingml/2006/main" xmlns:r="http://schemas.openxmlformats.org/officeDocument/2006/relationships" xmlns:p="http://schemas.openxmlformats.org/presentationml/2006/main">
+  <p:cSld>
+    <p:spTree>
+      <p:nvGrpSpPr>
+        <p:cNvPr id="1" name=""/>
+        <p:cNvGrpSpPr/>
+        <p:nvPr/>
+      </p:nvGrpSpPr>
+      <p:grpSpPr>
+        <a:xfrm>
+          <a:off x="0" y="0"/>
+          <a:ext cx="0" cy="0"/>
+          <a:chOff x="0" y="0"/>
+          <a:chExt cx="0" cy="0"/>
+        </a:xfrm>
+      </p:grpSpPr>
+      <p:sp>
+        <p:nvSpPr>
+          <p:cNvPr id="2" name="Slide Image Placeholder 1"/>
+          <p:cNvSpPr>
+            <a:spLocks noGrp="1" noRot="1" noChangeAspect="1"/>
+          </p:cNvSpPr>
+          <p:nvPr>
+            <p:ph type="sldImg"/>
+          </p:nvPr>
+        </p:nvSpPr>
+        <p:spPr/>
+      </p:sp>
+      <p:sp>
+        <p:nvSpPr>
+          <p:cNvPr id="3" name="Notes Placeholder 2"/>
+          <p:cNvSpPr>
+            <a:spLocks noGrp="1"/>
+          </p:cNvSpPr>
+          <p:nvPr>
+            <p:ph type="body" idx="1"/>
+          </p:nvPr>
+        </p:nvSpPr>
+        <p:spPr/>
+        <p:txBody>
+          <a:bodyPr/>
+          <a:lstStyle/>
+          <a:p>
+            <a:r>
+              <a:rPr lang="en-US" dirty="0"/>
+              <a:t>検算を必ずやらせる。ここを飛ばすと事故る。時間が足りなければ雛形化を次回冒頭に持ち越してでも、検算はやる。</a:t>
+            </a:r>
+            <a:endParaRPr lang="en-US" dirty="0"/>
+          </a:p>
+        </p:txBody>
+      </p:sp>
+      <p:sp>
+        <p:nvSpPr>
+          <p:cNvPr id="4" name="Slide Number Placeholder 3"/>
+          <p:cNvSpPr>
+            <a:spLocks noGrp="1"/>
+          </p:cNvSpPr>
+          <p:nvPr>
+            <p:ph type="sldNum" sz="quarter" idx="10"/>
+          </p:nvPr>
+        </p:nvSpPr>
+        <p:spPr/>
+        <p:txBody>
+          <a:bodyPr/>
+          <a:lstStyle/>
+          <a:p>
+            <a:fld id="{F7021451-1387-4CA6-816F-3879F97B5CBC}" type="slidenum">
+              <a:rPr lang="en-US"/>
+              <a:t>9</a:t>
             </a:fld>
             <a:endParaRPr lang="en-US"/>
           </a:p>
@@ -1680,6 +2124,1284 @@
 </p:sld>
 </file>
 
+<file path=ppt/slides/slide10.xml><?xml version="1.0" encoding="utf-8"?>
+<p:sld xmlns:a="http://schemas.openxmlformats.org/drawingml/2006/main" xmlns:r="http://schemas.openxmlformats.org/officeDocument/2006/relationships" xmlns:p="http://schemas.openxmlformats.org/presentationml/2006/main">
+  <p:cSld name="Slide 10">
+    <p:bg>
+      <p:bgPr>
+        <a:solidFill>
+          <a:srgbClr val="F6F2EA"/>
+        </a:solidFill>
+      </p:bgPr>
+    </p:bg>
+    <p:spTree>
+      <p:nvGrpSpPr>
+        <p:cNvPr id="1" name=""/>
+        <p:cNvGrpSpPr/>
+        <p:nvPr/>
+      </p:nvGrpSpPr>
+      <p:grpSpPr>
+        <a:xfrm>
+          <a:off x="0" y="0"/>
+          <a:ext cx="0" cy="0"/>
+          <a:chOff x="0" y="0"/>
+          <a:chExt cx="0" cy="0"/>
+        </a:xfrm>
+      </p:grpSpPr>
+      <p:sp>
+        <p:nvSpPr>
+          <p:cNvPr id="2" name="Text 0"/>
+          <p:cNvSpPr txBox="1"/>
+          <p:nvPr/>
+        </p:nvSpPr>
+        <p:spPr>
+          <a:xfrm>
+            <a:off x="777240" y="566928"/>
+            <a:ext cx="10607040" cy="274320"/>
+          </a:xfrm>
+          <a:prstGeom prst="rect">
+            <a:avLst/>
+          </a:prstGeom>
+          <a:noFill/>
+          <a:ln/>
+        </p:spPr>
+        <p:txBody>
+          <a:bodyPr wrap="square" lIns="0" tIns="0" rIns="0" bIns="0" rtlCol="0" anchor="ctr"/>
+          <a:lstStyle/>
+          <a:p>
+            <a:pPr indent="0" marL="0">
+              <a:buNone/>
+            </a:pPr>
+            <a:r>
+              <a:rPr lang="en-US" sz="1100" b="1" spc="250" kern="0" dirty="0">
+                <a:solidFill>
+                  <a:srgbClr val="3B6B4A"/>
+                </a:solidFill>
+                <a:latin typeface="Yu Gothic" pitchFamily="34" charset="0"/>
+                <a:ea typeface="Yu Gothic" pitchFamily="34" charset="-122"/>
+                <a:cs typeface="Yu Gothic" pitchFamily="34" charset="-120"/>
+              </a:rPr>
+              <a:t>業務への組み込み</a:t>
+            </a:r>
+            <a:endParaRPr lang="en-US" sz="1100" dirty="0"/>
+          </a:p>
+        </p:txBody>
+      </p:sp>
+      <p:sp>
+        <p:nvSpPr>
+          <p:cNvPr id="3" name="Text 1"/>
+          <p:cNvSpPr txBox="1"/>
+          <p:nvPr/>
+        </p:nvSpPr>
+        <p:spPr>
+          <a:xfrm>
+            <a:off x="777240" y="896112"/>
+            <a:ext cx="10607040" cy="640080"/>
+          </a:xfrm>
+          <a:prstGeom prst="rect">
+            <a:avLst/>
+          </a:prstGeom>
+          <a:noFill/>
+          <a:ln/>
+        </p:spPr>
+        <p:txBody>
+          <a:bodyPr wrap="square" lIns="0" tIns="0" rIns="0" bIns="0" rtlCol="0" anchor="ctr"/>
+          <a:lstStyle/>
+          <a:p>
+            <a:pPr indent="0" marL="0">
+              <a:buNone/>
+            </a:pPr>
+            <a:r>
+              <a:rPr lang="en-US" sz="2600" b="1" dirty="0">
+                <a:solidFill>
+                  <a:srgbClr val="23201D"/>
+                </a:solidFill>
+                <a:latin typeface="Yu Gothic" pitchFamily="34" charset="0"/>
+                <a:ea typeface="Yu Gothic" pitchFamily="34" charset="-122"/>
+                <a:cs typeface="Yu Gothic" pitchFamily="34" charset="-120"/>
+              </a:rPr>
+              <a:t>帰る前に決めること</a:t>
+            </a:r>
+            <a:endParaRPr lang="en-US" sz="2600" dirty="0"/>
+          </a:p>
+        </p:txBody>
+      </p:sp>
+      <p:sp>
+        <p:nvSpPr>
+          <p:cNvPr id="4" name="Text 2"/>
+          <p:cNvSpPr txBox="1"/>
+          <p:nvPr/>
+        </p:nvSpPr>
+        <p:spPr>
+          <a:xfrm>
+            <a:off x="777240" y="1572768"/>
+            <a:ext cx="10607040" cy="320040"/>
+          </a:xfrm>
+          <a:prstGeom prst="rect">
+            <a:avLst/>
+          </a:prstGeom>
+          <a:noFill/>
+          <a:ln/>
+        </p:spPr>
+        <p:txBody>
+          <a:bodyPr wrap="square" lIns="0" tIns="0" rIns="0" bIns="0" rtlCol="0" anchor="ctr"/>
+          <a:lstStyle/>
+          <a:p>
+            <a:pPr indent="0" marL="0">
+              <a:buNone/>
+            </a:pPr>
+            <a:r>
+              <a:rPr lang="en-US" sz="1250" b="1" dirty="0">
+                <a:solidFill>
+                  <a:srgbClr val="3B6B4A"/>
+                </a:solidFill>
+                <a:latin typeface="Yu Gothic" pitchFamily="34" charset="0"/>
+                <a:ea typeface="Yu Gothic" pitchFamily="34" charset="-122"/>
+                <a:cs typeface="Yu Gothic" pitchFamily="34" charset="-120"/>
+              </a:rPr>
+              <a:t>ここを決めないと、持ち帰っても使われません。紙に書きます。</a:t>
+            </a:r>
+            <a:endParaRPr lang="en-US" sz="1250" dirty="0"/>
+          </a:p>
+        </p:txBody>
+      </p:sp>
+      <p:sp>
+        <p:nvSpPr>
+          <p:cNvPr id="5" name="Shape 3"/>
+          <p:cNvSpPr/>
+          <p:nvPr/>
+        </p:nvSpPr>
+        <p:spPr>
+          <a:xfrm>
+            <a:off x="777240" y="2103120"/>
+            <a:ext cx="10607040" cy="914400"/>
+          </a:xfrm>
+          <a:prstGeom prst="rect">
+            <a:avLst/>
+          </a:prstGeom>
+          <a:solidFill>
+            <a:srgbClr val="FFFFFF"/>
+          </a:solidFill>
+          <a:ln w="12700">
+            <a:solidFill>
+              <a:srgbClr val="EDE7DB"/>
+            </a:solidFill>
+            <a:prstDash val="solid"/>
+          </a:ln>
+        </p:spPr>
+      </p:sp>
+      <p:sp>
+        <p:nvSpPr>
+          <p:cNvPr id="6" name="Shape 4"/>
+          <p:cNvSpPr/>
+          <p:nvPr/>
+        </p:nvSpPr>
+        <p:spPr>
+          <a:xfrm>
+            <a:off x="777240" y="2103120"/>
+            <a:ext cx="54864" cy="914400"/>
+          </a:xfrm>
+          <a:prstGeom prst="rect">
+            <a:avLst/>
+          </a:prstGeom>
+          <a:solidFill>
+            <a:srgbClr val="3B6B4A"/>
+          </a:solidFill>
+          <a:ln w="12700">
+            <a:solidFill>
+              <a:srgbClr val="333333"/>
+            </a:solidFill>
+            <a:prstDash val="solid"/>
+          </a:ln>
+        </p:spPr>
+      </p:sp>
+      <p:sp>
+        <p:nvSpPr>
+          <p:cNvPr id="7" name="Text 5"/>
+          <p:cNvSpPr txBox="1"/>
+          <p:nvPr/>
+        </p:nvSpPr>
+        <p:spPr>
+          <a:xfrm>
+            <a:off x="1143000" y="2176272"/>
+            <a:ext cx="2757830" cy="768096"/>
+          </a:xfrm>
+          <a:prstGeom prst="rect">
+            <a:avLst/>
+          </a:prstGeom>
+          <a:noFill/>
+          <a:ln/>
+        </p:spPr>
+        <p:txBody>
+          <a:bodyPr wrap="square" lIns="0" tIns="0" rIns="0" bIns="0" rtlCol="0" anchor="ctr"/>
+          <a:lstStyle/>
+          <a:p>
+            <a:pPr indent="0" marL="0">
+              <a:buNone/>
+            </a:pPr>
+            <a:r>
+              <a:rPr lang="en-US" sz="1400" b="1" dirty="0">
+                <a:solidFill>
+                  <a:srgbClr val="3B6B4A"/>
+                </a:solidFill>
+                <a:latin typeface="Yu Gothic" pitchFamily="34" charset="0"/>
+                <a:ea typeface="Yu Gothic" pitchFamily="34" charset="-122"/>
+                <a:cs typeface="Yu Gothic" pitchFamily="34" charset="-120"/>
+              </a:rPr>
+              <a:t>毎月いつ回すか</a:t>
+            </a:r>
+            <a:endParaRPr lang="en-US" sz="1400" dirty="0"/>
+          </a:p>
+        </p:txBody>
+      </p:sp>
+      <p:sp>
+        <p:nvSpPr>
+          <p:cNvPr id="8" name="Text 6"/>
+          <p:cNvSpPr txBox="1"/>
+          <p:nvPr/>
+        </p:nvSpPr>
+        <p:spPr>
+          <a:xfrm>
+            <a:off x="4006901" y="2176272"/>
+            <a:ext cx="7011619" cy="768096"/>
+          </a:xfrm>
+          <a:prstGeom prst="rect">
+            <a:avLst/>
+          </a:prstGeom>
+          <a:noFill/>
+          <a:ln/>
+        </p:spPr>
+        <p:txBody>
+          <a:bodyPr wrap="square" lIns="0" tIns="0" rIns="0" bIns="0" rtlCol="0" anchor="ctr"/>
+          <a:lstStyle/>
+          <a:p>
+            <a:pPr indent="0" marL="0">
+              <a:lnSpc>
+                <a:spcPct val="130000"/>
+              </a:lnSpc>
+              <a:buNone/>
+            </a:pPr>
+            <a:r>
+              <a:rPr lang="en-US" sz="1250" dirty="0">
+                <a:solidFill>
+                  <a:srgbClr val="3F3933"/>
+                </a:solidFill>
+                <a:latin typeface="Yu Gothic" pitchFamily="34" charset="0"/>
+                <a:ea typeface="Yu Gothic" pitchFamily="34" charset="-122"/>
+                <a:cs typeface="Yu Gothic" pitchFamily="34" charset="-120"/>
+              </a:rPr>
+              <a:t>締め日の翌◯日、と決めてカレンダーに入れます</a:t>
+            </a:r>
+            <a:endParaRPr lang="en-US" sz="1250" dirty="0"/>
+          </a:p>
+        </p:txBody>
+      </p:sp>
+      <p:sp>
+        <p:nvSpPr>
+          <p:cNvPr id="9" name="Shape 7"/>
+          <p:cNvSpPr/>
+          <p:nvPr/>
+        </p:nvSpPr>
+        <p:spPr>
+          <a:xfrm>
+            <a:off x="777240" y="3154680"/>
+            <a:ext cx="10607040" cy="914400"/>
+          </a:xfrm>
+          <a:prstGeom prst="rect">
+            <a:avLst/>
+          </a:prstGeom>
+          <a:solidFill>
+            <a:srgbClr val="FFFFFF"/>
+          </a:solidFill>
+          <a:ln w="12700">
+            <a:solidFill>
+              <a:srgbClr val="EDE7DB"/>
+            </a:solidFill>
+            <a:prstDash val="solid"/>
+          </a:ln>
+        </p:spPr>
+      </p:sp>
+      <p:sp>
+        <p:nvSpPr>
+          <p:cNvPr id="10" name="Shape 8"/>
+          <p:cNvSpPr/>
+          <p:nvPr/>
+        </p:nvSpPr>
+        <p:spPr>
+          <a:xfrm>
+            <a:off x="777240" y="3154680"/>
+            <a:ext cx="54864" cy="914400"/>
+          </a:xfrm>
+          <a:prstGeom prst="rect">
+            <a:avLst/>
+          </a:prstGeom>
+          <a:solidFill>
+            <a:srgbClr val="3B6B4A"/>
+          </a:solidFill>
+          <a:ln w="12700">
+            <a:solidFill>
+              <a:srgbClr val="333333"/>
+            </a:solidFill>
+            <a:prstDash val="solid"/>
+          </a:ln>
+        </p:spPr>
+      </p:sp>
+      <p:sp>
+        <p:nvSpPr>
+          <p:cNvPr id="11" name="Text 9"/>
+          <p:cNvSpPr txBox="1"/>
+          <p:nvPr/>
+        </p:nvSpPr>
+        <p:spPr>
+          <a:xfrm>
+            <a:off x="1143000" y="3227832"/>
+            <a:ext cx="2757830" cy="768096"/>
+          </a:xfrm>
+          <a:prstGeom prst="rect">
+            <a:avLst/>
+          </a:prstGeom>
+          <a:noFill/>
+          <a:ln/>
+        </p:spPr>
+        <p:txBody>
+          <a:bodyPr wrap="square" lIns="0" tIns="0" rIns="0" bIns="0" rtlCol="0" anchor="ctr"/>
+          <a:lstStyle/>
+          <a:p>
+            <a:pPr indent="0" marL="0">
+              <a:buNone/>
+            </a:pPr>
+            <a:r>
+              <a:rPr lang="en-US" sz="1400" b="1" dirty="0">
+                <a:solidFill>
+                  <a:srgbClr val="3B6B4A"/>
+                </a:solidFill>
+                <a:latin typeface="Yu Gothic" pitchFamily="34" charset="0"/>
+                <a:ea typeface="Yu Gothic" pitchFamily="34" charset="-122"/>
+                <a:cs typeface="Yu Gothic" pitchFamily="34" charset="-120"/>
+              </a:rPr>
+              <a:t>誰が回すか</a:t>
+            </a:r>
+            <a:endParaRPr lang="en-US" sz="1400" dirty="0"/>
+          </a:p>
+        </p:txBody>
+      </p:sp>
+      <p:sp>
+        <p:nvSpPr>
+          <p:cNvPr id="12" name="Text 10"/>
+          <p:cNvSpPr txBox="1"/>
+          <p:nvPr/>
+        </p:nvSpPr>
+        <p:spPr>
+          <a:xfrm>
+            <a:off x="4006901" y="3227832"/>
+            <a:ext cx="7011619" cy="768096"/>
+          </a:xfrm>
+          <a:prstGeom prst="rect">
+            <a:avLst/>
+          </a:prstGeom>
+          <a:noFill/>
+          <a:ln/>
+        </p:spPr>
+        <p:txBody>
+          <a:bodyPr wrap="square" lIns="0" tIns="0" rIns="0" bIns="0" rtlCol="0" anchor="ctr"/>
+          <a:lstStyle/>
+          <a:p>
+            <a:pPr indent="0" marL="0">
+              <a:lnSpc>
+                <a:spcPct val="130000"/>
+              </a:lnSpc>
+              <a:buNone/>
+            </a:pPr>
+            <a:r>
+              <a:rPr lang="en-US" sz="1250" dirty="0">
+                <a:solidFill>
+                  <a:srgbClr val="3F3933"/>
+                </a:solidFill>
+                <a:latin typeface="Yu Gothic" pitchFamily="34" charset="0"/>
+                <a:ea typeface="Yu Gothic" pitchFamily="34" charset="-122"/>
+                <a:cs typeface="Yu Gothic" pitchFamily="34" charset="-120"/>
+              </a:rPr>
+              <a:t>当面は社長。第11回で担当を移します</a:t>
+            </a:r>
+            <a:endParaRPr lang="en-US" sz="1250" dirty="0"/>
+          </a:p>
+        </p:txBody>
+      </p:sp>
+      <p:sp>
+        <p:nvSpPr>
+          <p:cNvPr id="13" name="Shape 11"/>
+          <p:cNvSpPr/>
+          <p:nvPr/>
+        </p:nvSpPr>
+        <p:spPr>
+          <a:xfrm>
+            <a:off x="777240" y="4206240"/>
+            <a:ext cx="10607040" cy="914400"/>
+          </a:xfrm>
+          <a:prstGeom prst="rect">
+            <a:avLst/>
+          </a:prstGeom>
+          <a:solidFill>
+            <a:srgbClr val="FFFFFF"/>
+          </a:solidFill>
+          <a:ln w="12700">
+            <a:solidFill>
+              <a:srgbClr val="EDE7DB"/>
+            </a:solidFill>
+            <a:prstDash val="solid"/>
+          </a:ln>
+        </p:spPr>
+      </p:sp>
+      <p:sp>
+        <p:nvSpPr>
+          <p:cNvPr id="14" name="Shape 12"/>
+          <p:cNvSpPr/>
+          <p:nvPr/>
+        </p:nvSpPr>
+        <p:spPr>
+          <a:xfrm>
+            <a:off x="777240" y="4206240"/>
+            <a:ext cx="54864" cy="914400"/>
+          </a:xfrm>
+          <a:prstGeom prst="rect">
+            <a:avLst/>
+          </a:prstGeom>
+          <a:solidFill>
+            <a:srgbClr val="3B6B4A"/>
+          </a:solidFill>
+          <a:ln w="12700">
+            <a:solidFill>
+              <a:srgbClr val="333333"/>
+            </a:solidFill>
+            <a:prstDash val="solid"/>
+          </a:ln>
+        </p:spPr>
+      </p:sp>
+      <p:sp>
+        <p:nvSpPr>
+          <p:cNvPr id="15" name="Text 13"/>
+          <p:cNvSpPr txBox="1"/>
+          <p:nvPr/>
+        </p:nvSpPr>
+        <p:spPr>
+          <a:xfrm>
+            <a:off x="1143000" y="4279392"/>
+            <a:ext cx="2757830" cy="768096"/>
+          </a:xfrm>
+          <a:prstGeom prst="rect">
+            <a:avLst/>
+          </a:prstGeom>
+          <a:noFill/>
+          <a:ln/>
+        </p:spPr>
+        <p:txBody>
+          <a:bodyPr wrap="square" lIns="0" tIns="0" rIns="0" bIns="0" rtlCol="0" anchor="ctr"/>
+          <a:lstStyle/>
+          <a:p>
+            <a:pPr indent="0" marL="0">
+              <a:buNone/>
+            </a:pPr>
+            <a:r>
+              <a:rPr lang="en-US" sz="1400" b="1" dirty="0">
+                <a:solidFill>
+                  <a:srgbClr val="3B6B4A"/>
+                </a:solidFill>
+                <a:latin typeface="Yu Gothic" pitchFamily="34" charset="0"/>
+                <a:ea typeface="Yu Gothic" pitchFamily="34" charset="-122"/>
+                <a:cs typeface="Yu Gothic" pitchFamily="34" charset="-120"/>
+              </a:rPr>
+              <a:t>どこまで社内に出すか</a:t>
+            </a:r>
+            <a:endParaRPr lang="en-US" sz="1400" dirty="0"/>
+          </a:p>
+        </p:txBody>
+      </p:sp>
+      <p:sp>
+        <p:nvSpPr>
+          <p:cNvPr id="16" name="Text 14"/>
+          <p:cNvSpPr txBox="1"/>
+          <p:nvPr/>
+        </p:nvSpPr>
+        <p:spPr>
+          <a:xfrm>
+            <a:off x="4006901" y="4279392"/>
+            <a:ext cx="7011619" cy="768096"/>
+          </a:xfrm>
+          <a:prstGeom prst="rect">
+            <a:avLst/>
+          </a:prstGeom>
+          <a:noFill/>
+          <a:ln/>
+        </p:spPr>
+        <p:txBody>
+          <a:bodyPr wrap="square" lIns="0" tIns="0" rIns="0" bIns="0" rtlCol="0" anchor="ctr"/>
+          <a:lstStyle/>
+          <a:p>
+            <a:pPr indent="0" marL="0">
+              <a:lnSpc>
+                <a:spcPct val="130000"/>
+              </a:lnSpc>
+              <a:buNone/>
+            </a:pPr>
+            <a:r>
+              <a:rPr lang="en-US" sz="1250" dirty="0">
+                <a:solidFill>
+                  <a:srgbClr val="3F3933"/>
+                </a:solidFill>
+                <a:latin typeface="Yu Gothic" pitchFamily="34" charset="0"/>
+                <a:ea typeface="Yu Gothic" pitchFamily="34" charset="-122"/>
+                <a:cs typeface="Yu Gothic" pitchFamily="34" charset="-120"/>
+              </a:rPr>
+              <a:t>仮説はあくまで仮説。そのまま数字として配らないことを決めておきます</a:t>
+            </a:r>
+            <a:endParaRPr lang="en-US" sz="1250" dirty="0"/>
+          </a:p>
+        </p:txBody>
+      </p:sp>
+      <p:sp>
+        <p:nvSpPr>
+          <p:cNvPr id="17" name="Text 15"/>
+          <p:cNvSpPr txBox="1"/>
+          <p:nvPr/>
+        </p:nvSpPr>
+        <p:spPr>
+          <a:xfrm>
+            <a:off x="777240" y="6382512"/>
+            <a:ext cx="7424928" cy="256032"/>
+          </a:xfrm>
+          <a:prstGeom prst="rect">
+            <a:avLst/>
+          </a:prstGeom>
+          <a:noFill/>
+          <a:ln/>
+        </p:spPr>
+        <p:txBody>
+          <a:bodyPr wrap="square" lIns="0" tIns="0" rIns="0" bIns="0" rtlCol="0" anchor="ctr"/>
+          <a:lstStyle/>
+          <a:p>
+            <a:pPr indent="0" marL="0">
+              <a:buNone/>
+            </a:pPr>
+            <a:r>
+              <a:rPr lang="en-US" sz="900" dirty="0">
+                <a:solidFill>
+                  <a:srgbClr val="8A8177"/>
+                </a:solidFill>
+                <a:latin typeface="Yu Gothic" pitchFamily="34" charset="0"/>
+                <a:ea typeface="Yu Gothic" pitchFamily="34" charset="-122"/>
+                <a:cs typeface="Yu Gothic" pitchFamily="34" charset="-120"/>
+              </a:rPr>
+              <a:t>第4回　数字と判断のAI化</a:t>
+            </a:r>
+            <a:endParaRPr lang="en-US" sz="900" dirty="0"/>
+          </a:p>
+        </p:txBody>
+      </p:sp>
+      <p:sp>
+        <p:nvSpPr>
+          <p:cNvPr id="18" name="Text 16"/>
+          <p:cNvSpPr txBox="1"/>
+          <p:nvPr/>
+        </p:nvSpPr>
+        <p:spPr>
+          <a:xfrm>
+            <a:off x="8202168" y="6382512"/>
+            <a:ext cx="3182112" cy="256032"/>
+          </a:xfrm>
+          <a:prstGeom prst="rect">
+            <a:avLst/>
+          </a:prstGeom>
+          <a:noFill/>
+          <a:ln/>
+        </p:spPr>
+        <p:txBody>
+          <a:bodyPr wrap="square" lIns="0" tIns="0" rIns="0" bIns="0" rtlCol="0" anchor="ctr"/>
+          <a:lstStyle/>
+          <a:p>
+            <a:pPr algn="r" indent="0" marL="0">
+              <a:buNone/>
+            </a:pPr>
+            <a:r>
+              <a:rPr lang="en-US" sz="900" dirty="0">
+                <a:solidFill>
+                  <a:srgbClr val="8A8177"/>
+                </a:solidFill>
+                <a:latin typeface="Yu Gothic" pitchFamily="34" charset="0"/>
+                <a:ea typeface="Yu Gothic" pitchFamily="34" charset="-122"/>
+                <a:cs typeface="Yu Gothic" pitchFamily="34" charset="-120"/>
+              </a:rPr>
+              <a:t>組み込み</a:t>
+            </a:r>
+            <a:endParaRPr lang="en-US" sz="900" dirty="0"/>
+          </a:p>
+        </p:txBody>
+      </p:sp>
+    </p:spTree>
+  </p:cSld>
+  <p:clrMapOvr>
+    <a:masterClrMapping/>
+  </p:clrMapOvr>
+</p:sld>
+</file>
+
+<file path=ppt/slides/slide11.xml><?xml version="1.0" encoding="utf-8"?>
+<p:sld xmlns:a="http://schemas.openxmlformats.org/drawingml/2006/main" xmlns:r="http://schemas.openxmlformats.org/officeDocument/2006/relationships" xmlns:p="http://schemas.openxmlformats.org/presentationml/2006/main">
+  <p:cSld name="Slide 11">
+    <p:bg>
+      <p:bgPr>
+        <a:solidFill>
+          <a:srgbClr val="F6F2EA"/>
+        </a:solidFill>
+      </p:bgPr>
+    </p:bg>
+    <p:spTree>
+      <p:nvGrpSpPr>
+        <p:cNvPr id="1" name=""/>
+        <p:cNvGrpSpPr/>
+        <p:nvPr/>
+      </p:nvGrpSpPr>
+      <p:grpSpPr>
+        <a:xfrm>
+          <a:off x="0" y="0"/>
+          <a:ext cx="0" cy="0"/>
+          <a:chOff x="0" y="0"/>
+          <a:chExt cx="0" cy="0"/>
+        </a:xfrm>
+      </p:grpSpPr>
+      <p:sp>
+        <p:nvSpPr>
+          <p:cNvPr id="2" name="Text 0"/>
+          <p:cNvSpPr txBox="1"/>
+          <p:nvPr/>
+        </p:nvSpPr>
+        <p:spPr>
+          <a:xfrm>
+            <a:off x="777240" y="566928"/>
+            <a:ext cx="10607040" cy="274320"/>
+          </a:xfrm>
+          <a:prstGeom prst="rect">
+            <a:avLst/>
+          </a:prstGeom>
+          <a:noFill/>
+          <a:ln/>
+        </p:spPr>
+        <p:txBody>
+          <a:bodyPr wrap="square" lIns="0" tIns="0" rIns="0" bIns="0" rtlCol="0" anchor="ctr"/>
+          <a:lstStyle/>
+          <a:p>
+            <a:pPr indent="0" marL="0">
+              <a:buNone/>
+            </a:pPr>
+            <a:r>
+              <a:rPr lang="en-US" sz="1100" b="1" spc="250" kern="0" dirty="0">
+                <a:solidFill>
+                  <a:srgbClr val="B04A2F"/>
+                </a:solidFill>
+                <a:latin typeface="Yu Gothic" pitchFamily="34" charset="0"/>
+                <a:ea typeface="Yu Gothic" pitchFamily="34" charset="-122"/>
+                <a:cs typeface="Yu Gothic" pitchFamily="34" charset="-120"/>
+              </a:rPr>
+              <a:t>ここだけは</a:t>
+            </a:r>
+            <a:endParaRPr lang="en-US" sz="1100" dirty="0"/>
+          </a:p>
+        </p:txBody>
+      </p:sp>
+      <p:sp>
+        <p:nvSpPr>
+          <p:cNvPr id="3" name="Text 1"/>
+          <p:cNvSpPr txBox="1"/>
+          <p:nvPr/>
+        </p:nvSpPr>
+        <p:spPr>
+          <a:xfrm>
+            <a:off x="777240" y="1097280"/>
+            <a:ext cx="10607040" cy="640080"/>
+          </a:xfrm>
+          <a:prstGeom prst="rect">
+            <a:avLst/>
+          </a:prstGeom>
+          <a:noFill/>
+          <a:ln/>
+        </p:spPr>
+        <p:txBody>
+          <a:bodyPr wrap="square" lIns="0" tIns="0" rIns="0" bIns="0" rtlCol="0" anchor="ctr"/>
+          <a:lstStyle/>
+          <a:p>
+            <a:pPr indent="0" marL="0">
+              <a:buNone/>
+            </a:pPr>
+            <a:r>
+              <a:rPr lang="en-US" sz="2600" b="1" dirty="0">
+                <a:solidFill>
+                  <a:srgbClr val="23201D"/>
+                </a:solidFill>
+                <a:latin typeface="Yu Gothic" pitchFamily="34" charset="0"/>
+                <a:ea typeface="Yu Gothic" pitchFamily="34" charset="-122"/>
+                <a:cs typeface="Yu Gothic" pitchFamily="34" charset="-120"/>
+              </a:rPr>
+              <a:t>最初の3か月は、示唆が当たりません</a:t>
+            </a:r>
+            <a:endParaRPr lang="en-US" sz="2600" dirty="0"/>
+          </a:p>
+        </p:txBody>
+      </p:sp>
+      <p:sp>
+        <p:nvSpPr>
+          <p:cNvPr id="4" name="Shape 2"/>
+          <p:cNvSpPr/>
+          <p:nvPr/>
+        </p:nvSpPr>
+        <p:spPr>
+          <a:xfrm>
+            <a:off x="777240" y="2148840"/>
+            <a:ext cx="64008" cy="2194560"/>
+          </a:xfrm>
+          <a:prstGeom prst="rect">
+            <a:avLst/>
+          </a:prstGeom>
+          <a:solidFill>
+            <a:srgbClr val="B04A2F"/>
+          </a:solidFill>
+          <a:ln w="12700">
+            <a:solidFill>
+              <a:srgbClr val="333333"/>
+            </a:solidFill>
+            <a:prstDash val="solid"/>
+          </a:ln>
+        </p:spPr>
+      </p:sp>
+      <p:sp>
+        <p:nvSpPr>
+          <p:cNvPr id="5" name="Text 3"/>
+          <p:cNvSpPr txBox="1"/>
+          <p:nvPr/>
+        </p:nvSpPr>
+        <p:spPr>
+          <a:xfrm>
+            <a:off x="1188720" y="2148840"/>
+            <a:ext cx="9966960" cy="2194560"/>
+          </a:xfrm>
+          <a:prstGeom prst="rect">
+            <a:avLst/>
+          </a:prstGeom>
+          <a:noFill/>
+          <a:ln/>
+        </p:spPr>
+        <p:txBody>
+          <a:bodyPr wrap="square" lIns="0" tIns="0" rIns="0" bIns="0" rtlCol="0" anchor="ctr"/>
+          <a:lstStyle/>
+          <a:p>
+            <a:pPr indent="0" marL="0">
+              <a:lnSpc>
+                <a:spcPct val="160000"/>
+              </a:lnSpc>
+              <a:buNone/>
+            </a:pPr>
+            <a:r>
+              <a:rPr lang="en-US" sz="1650" dirty="0">
+                <a:solidFill>
+                  <a:srgbClr val="3F3933"/>
+                </a:solidFill>
+                <a:latin typeface="Yu Gothic" pitchFamily="34" charset="0"/>
+                <a:ea typeface="Yu Gothic" pitchFamily="34" charset="-122"/>
+                <a:cs typeface="Yu Gothic" pitchFamily="34" charset="-120"/>
+              </a:rPr>
+              <a:t>前提情報が足りていないためです。これは失敗ではなく、通る道です。使いながら前提を書き足していくと、3〜4か月目から実務で使える示唆が出るようになります。ここを先に伝えておかないと、2か月目でやめてしまいます。</a:t>
+            </a:r>
+            <a:endParaRPr lang="en-US" sz="1650" dirty="0"/>
+          </a:p>
+        </p:txBody>
+      </p:sp>
+      <p:sp>
+        <p:nvSpPr>
+          <p:cNvPr id="6" name="Shape 4"/>
+          <p:cNvSpPr/>
+          <p:nvPr/>
+        </p:nvSpPr>
+        <p:spPr>
+          <a:xfrm>
+            <a:off x="777240" y="4709160"/>
+            <a:ext cx="10607040" cy="960120"/>
+          </a:xfrm>
+          <a:prstGeom prst="rect">
+            <a:avLst/>
+          </a:prstGeom>
+          <a:solidFill>
+            <a:srgbClr val="EDE7DB"/>
+          </a:solidFill>
+          <a:ln w="12700">
+            <a:solidFill>
+              <a:srgbClr val="333333"/>
+            </a:solidFill>
+            <a:prstDash val="solid"/>
+          </a:ln>
+        </p:spPr>
+      </p:sp>
+      <p:sp>
+        <p:nvSpPr>
+          <p:cNvPr id="7" name="Text 5"/>
+          <p:cNvSpPr txBox="1"/>
+          <p:nvPr/>
+        </p:nvSpPr>
+        <p:spPr>
+          <a:xfrm>
+            <a:off x="1051560" y="4800600"/>
+            <a:ext cx="1463040" cy="256032"/>
+          </a:xfrm>
+          <a:prstGeom prst="rect">
+            <a:avLst/>
+          </a:prstGeom>
+          <a:noFill/>
+          <a:ln/>
+        </p:spPr>
+        <p:txBody>
+          <a:bodyPr wrap="square" lIns="0" tIns="0" rIns="0" bIns="0" rtlCol="0" anchor="ctr"/>
+          <a:lstStyle/>
+          <a:p>
+            <a:pPr indent="0" marL="0">
+              <a:buNone/>
+            </a:pPr>
+            <a:r>
+              <a:rPr lang="en-US" sz="900" b="1" spc="150" kern="0" dirty="0">
+                <a:solidFill>
+                  <a:srgbClr val="B04A2F"/>
+                </a:solidFill>
+                <a:latin typeface="Yu Gothic" pitchFamily="34" charset="0"/>
+                <a:ea typeface="Yu Gothic" pitchFamily="34" charset="-122"/>
+                <a:cs typeface="Yu Gothic" pitchFamily="34" charset="-120"/>
+              </a:rPr>
+              <a:t>他社では</a:t>
+            </a:r>
+            <a:endParaRPr lang="en-US" sz="900" dirty="0"/>
+          </a:p>
+        </p:txBody>
+      </p:sp>
+      <p:sp>
+        <p:nvSpPr>
+          <p:cNvPr id="8" name="Text 6"/>
+          <p:cNvSpPr txBox="1"/>
+          <p:nvPr/>
+        </p:nvSpPr>
+        <p:spPr>
+          <a:xfrm>
+            <a:off x="1051560" y="5029200"/>
+            <a:ext cx="10058400" cy="566928"/>
+          </a:xfrm>
+          <a:prstGeom prst="rect">
+            <a:avLst/>
+          </a:prstGeom>
+          <a:noFill/>
+          <a:ln/>
+        </p:spPr>
+        <p:txBody>
+          <a:bodyPr wrap="square" lIns="0" tIns="0" rIns="0" bIns="0" rtlCol="0" anchor="ctr"/>
+          <a:lstStyle/>
+          <a:p>
+            <a:pPr indent="0" marL="0">
+              <a:lnSpc>
+                <a:spcPct val="130000"/>
+              </a:lnSpc>
+              <a:buNone/>
+            </a:pPr>
+            <a:r>
+              <a:rPr lang="en-US" sz="1250" dirty="0">
+                <a:solidFill>
+                  <a:srgbClr val="3F3933"/>
+                </a:solidFill>
+                <a:latin typeface="Yu Gothic" pitchFamily="34" charset="0"/>
+                <a:ea typeface="Yu Gothic" pitchFamily="34" charset="-122"/>
+                <a:cs typeface="Yu Gothic" pitchFamily="34" charset="-120"/>
+              </a:rPr>
+              <a:t>毎月の売上会議の資料づくりに2日かけていた会社が、雛形化で半日にしました。ただし最初の3か月の示唆はほとんど的外れで、前提を書き足し続けた結果、4か月目から使えるようになりました。</a:t>
+            </a:r>
+            <a:endParaRPr lang="en-US" sz="1250" dirty="0"/>
+          </a:p>
+        </p:txBody>
+      </p:sp>
+      <p:sp>
+        <p:nvSpPr>
+          <p:cNvPr id="9" name="Text 7"/>
+          <p:cNvSpPr txBox="1"/>
+          <p:nvPr/>
+        </p:nvSpPr>
+        <p:spPr>
+          <a:xfrm>
+            <a:off x="777240" y="6382512"/>
+            <a:ext cx="7424928" cy="256032"/>
+          </a:xfrm>
+          <a:prstGeom prst="rect">
+            <a:avLst/>
+          </a:prstGeom>
+          <a:noFill/>
+          <a:ln/>
+        </p:spPr>
+        <p:txBody>
+          <a:bodyPr wrap="square" lIns="0" tIns="0" rIns="0" bIns="0" rtlCol="0" anchor="ctr"/>
+          <a:lstStyle/>
+          <a:p>
+            <a:pPr indent="0" marL="0">
+              <a:buNone/>
+            </a:pPr>
+            <a:r>
+              <a:rPr lang="en-US" sz="900" dirty="0">
+                <a:solidFill>
+                  <a:srgbClr val="8A8177"/>
+                </a:solidFill>
+                <a:latin typeface="Yu Gothic" pitchFamily="34" charset="0"/>
+                <a:ea typeface="Yu Gothic" pitchFamily="34" charset="-122"/>
+                <a:cs typeface="Yu Gothic" pitchFamily="34" charset="-120"/>
+              </a:rPr>
+              <a:t>第4回　数字と判断のAI化</a:t>
+            </a:r>
+            <a:endParaRPr lang="en-US" sz="900" dirty="0"/>
+          </a:p>
+        </p:txBody>
+      </p:sp>
+      <p:sp>
+        <p:nvSpPr>
+          <p:cNvPr id="10" name="Text 8"/>
+          <p:cNvSpPr txBox="1"/>
+          <p:nvPr/>
+        </p:nvSpPr>
+        <p:spPr>
+          <a:xfrm>
+            <a:off x="8202168" y="6382512"/>
+            <a:ext cx="3182112" cy="256032"/>
+          </a:xfrm>
+          <a:prstGeom prst="rect">
+            <a:avLst/>
+          </a:prstGeom>
+          <a:noFill/>
+          <a:ln/>
+        </p:spPr>
+        <p:txBody>
+          <a:bodyPr wrap="square" lIns="0" tIns="0" rIns="0" bIns="0" rtlCol="0" anchor="ctr"/>
+          <a:lstStyle/>
+          <a:p>
+            <a:pPr algn="r" indent="0" marL="0">
+              <a:buNone/>
+            </a:pPr>
+            <a:r>
+              <a:rPr lang="en-US" sz="900" dirty="0">
+                <a:solidFill>
+                  <a:srgbClr val="8A8177"/>
+                </a:solidFill>
+                <a:latin typeface="Yu Gothic" pitchFamily="34" charset="0"/>
+                <a:ea typeface="Yu Gothic" pitchFamily="34" charset="-122"/>
+                <a:cs typeface="Yu Gothic" pitchFamily="34" charset="-120"/>
+              </a:rPr>
+              <a:t>ここだけは</a:t>
+            </a:r>
+            <a:endParaRPr lang="en-US" sz="900" dirty="0"/>
+          </a:p>
+        </p:txBody>
+      </p:sp>
+    </p:spTree>
+  </p:cSld>
+  <p:clrMapOvr>
+    <a:masterClrMapping/>
+  </p:clrMapOvr>
+</p:sld>
+</file>
+
+<file path=ppt/slides/slide12.xml><?xml version="1.0" encoding="utf-8"?>
+<p:sld xmlns:a="http://schemas.openxmlformats.org/drawingml/2006/main" xmlns:r="http://schemas.openxmlformats.org/officeDocument/2006/relationships" xmlns:p="http://schemas.openxmlformats.org/presentationml/2006/main">
+  <p:cSld name="Slide 12">
+    <p:bg>
+      <p:bgPr>
+        <a:solidFill>
+          <a:srgbClr val="23201D"/>
+        </a:solidFill>
+      </p:bgPr>
+    </p:bg>
+    <p:spTree>
+      <p:nvGrpSpPr>
+        <p:cNvPr id="1" name=""/>
+        <p:cNvGrpSpPr/>
+        <p:nvPr/>
+      </p:nvGrpSpPr>
+      <p:grpSpPr>
+        <a:xfrm>
+          <a:off x="0" y="0"/>
+          <a:ext cx="0" cy="0"/>
+          <a:chOff x="0" y="0"/>
+          <a:chExt cx="0" cy="0"/>
+        </a:xfrm>
+      </p:grpSpPr>
+      <p:sp>
+        <p:nvSpPr>
+          <p:cNvPr id="2" name="Text 0"/>
+          <p:cNvSpPr txBox="1"/>
+          <p:nvPr/>
+        </p:nvSpPr>
+        <p:spPr>
+          <a:xfrm>
+            <a:off x="777240" y="1280160"/>
+            <a:ext cx="10607040" cy="365760"/>
+          </a:xfrm>
+          <a:prstGeom prst="rect">
+            <a:avLst/>
+          </a:prstGeom>
+          <a:noFill/>
+          <a:ln/>
+        </p:spPr>
+        <p:txBody>
+          <a:bodyPr wrap="square" lIns="0" tIns="0" rIns="0" bIns="0" rtlCol="0" anchor="ctr"/>
+          <a:lstStyle/>
+          <a:p>
+            <a:pPr indent="0" marL="0">
+              <a:buNone/>
+            </a:pPr>
+            <a:r>
+              <a:rPr lang="en-US" sz="1200" b="1" spc="300" kern="0" dirty="0">
+                <a:solidFill>
+                  <a:srgbClr val="B04A2F"/>
+                </a:solidFill>
+                <a:latin typeface="Yu Gothic" pitchFamily="34" charset="0"/>
+                <a:ea typeface="Yu Gothic" pitchFamily="34" charset="-122"/>
+                <a:cs typeface="Yu Gothic" pitchFamily="34" charset="-120"/>
+              </a:rPr>
+              <a:t>今日の宿題</a:t>
+            </a:r>
+            <a:endParaRPr lang="en-US" sz="1200" dirty="0"/>
+          </a:p>
+        </p:txBody>
+      </p:sp>
+      <p:sp>
+        <p:nvSpPr>
+          <p:cNvPr id="3" name="Text 1"/>
+          <p:cNvSpPr txBox="1"/>
+          <p:nvPr/>
+        </p:nvSpPr>
+        <p:spPr>
+          <a:xfrm>
+            <a:off x="777240" y="1691640"/>
+            <a:ext cx="10607040" cy="640080"/>
+          </a:xfrm>
+          <a:prstGeom prst="rect">
+            <a:avLst/>
+          </a:prstGeom>
+          <a:noFill/>
+          <a:ln/>
+        </p:spPr>
+        <p:txBody>
+          <a:bodyPr wrap="square" lIns="0" tIns="0" rIns="0" bIns="0" rtlCol="0" anchor="ctr"/>
+          <a:lstStyle/>
+          <a:p>
+            <a:pPr indent="0" marL="0">
+              <a:buNone/>
+            </a:pPr>
+            <a:r>
+              <a:rPr lang="en-US" sz="3200" b="1" dirty="0">
+                <a:solidFill>
+                  <a:srgbClr val="FFFFFF"/>
+                </a:solidFill>
+                <a:latin typeface="Yu Gothic" pitchFamily="34" charset="0"/>
+                <a:ea typeface="Yu Gothic" pitchFamily="34" charset="-122"/>
+                <a:cs typeface="Yu Gothic" pitchFamily="34" charset="-120"/>
+              </a:rPr>
+              <a:t>ひとつだけ</a:t>
+            </a:r>
+            <a:endParaRPr lang="en-US" sz="3200" dirty="0"/>
+          </a:p>
+        </p:txBody>
+      </p:sp>
+      <p:sp>
+        <p:nvSpPr>
+          <p:cNvPr id="4" name="Shape 2"/>
+          <p:cNvSpPr/>
+          <p:nvPr/>
+        </p:nvSpPr>
+        <p:spPr>
+          <a:xfrm>
+            <a:off x="777240" y="2651760"/>
+            <a:ext cx="10607040" cy="1371600"/>
+          </a:xfrm>
+          <a:prstGeom prst="rect">
+            <a:avLst/>
+          </a:prstGeom>
+          <a:solidFill>
+            <a:srgbClr val="2E2A26"/>
+          </a:solidFill>
+          <a:ln w="12700">
+            <a:solidFill>
+              <a:srgbClr val="B04A2F"/>
+            </a:solidFill>
+            <a:prstDash val="solid"/>
+          </a:ln>
+        </p:spPr>
+      </p:sp>
+      <p:sp>
+        <p:nvSpPr>
+          <p:cNvPr id="5" name="Text 3"/>
+          <p:cNvSpPr txBox="1"/>
+          <p:nvPr/>
+        </p:nvSpPr>
+        <p:spPr>
+          <a:xfrm>
+            <a:off x="1234440" y="2743200"/>
+            <a:ext cx="9692640" cy="1188720"/>
+          </a:xfrm>
+          <a:prstGeom prst="rect">
+            <a:avLst/>
+          </a:prstGeom>
+          <a:noFill/>
+          <a:ln/>
+        </p:spPr>
+        <p:txBody>
+          <a:bodyPr wrap="square" lIns="0" tIns="0" rIns="0" bIns="0" rtlCol="0" anchor="ctr"/>
+          <a:lstStyle/>
+          <a:p>
+            <a:pPr indent="0" marL="0">
+              <a:lnSpc>
+                <a:spcPct val="140000"/>
+              </a:lnSpc>
+              <a:buNone/>
+            </a:pPr>
+            <a:r>
+              <a:rPr lang="en-US" sz="1900" b="1" dirty="0">
+                <a:solidFill>
+                  <a:srgbClr val="FFFFFF"/>
+                </a:solidFill>
+                <a:latin typeface="Yu Gothic" pitchFamily="34" charset="0"/>
+                <a:ea typeface="Yu Gothic" pitchFamily="34" charset="-122"/>
+                <a:cs typeface="Yu Gothic" pitchFamily="34" charset="-120"/>
+              </a:rPr>
+              <a:t>月次レポートの雛形を、今月の数字で1回そのまま回してみる。</a:t>
+            </a:r>
+            <a:endParaRPr lang="en-US" sz="1900" dirty="0"/>
+          </a:p>
+        </p:txBody>
+      </p:sp>
+      <p:sp>
+        <p:nvSpPr>
+          <p:cNvPr id="6" name="Text 4"/>
+          <p:cNvSpPr txBox="1"/>
+          <p:nvPr/>
+        </p:nvSpPr>
+        <p:spPr>
+          <a:xfrm>
+            <a:off x="777240" y="4297680"/>
+            <a:ext cx="10607040" cy="274320"/>
+          </a:xfrm>
+          <a:prstGeom prst="rect">
+            <a:avLst/>
+          </a:prstGeom>
+          <a:noFill/>
+          <a:ln/>
+        </p:spPr>
+        <p:txBody>
+          <a:bodyPr wrap="square" lIns="0" tIns="0" rIns="0" bIns="0" rtlCol="0" anchor="ctr"/>
+          <a:lstStyle/>
+          <a:p>
+            <a:pPr indent="0" marL="0">
+              <a:buNone/>
+            </a:pPr>
+            <a:r>
+              <a:rPr lang="en-US" sz="1000" b="1" spc="200" kern="0" dirty="0">
+                <a:solidFill>
+                  <a:srgbClr val="B04A2F"/>
+                </a:solidFill>
+                <a:latin typeface="Yu Gothic" pitchFamily="34" charset="0"/>
+                <a:ea typeface="Yu Gothic" pitchFamily="34" charset="-122"/>
+                <a:cs typeface="Yu Gothic" pitchFamily="34" charset="-120"/>
+              </a:rPr>
+              <a:t>なぜこの宿題か</a:t>
+            </a:r>
+            <a:endParaRPr lang="en-US" sz="1000" dirty="0"/>
+          </a:p>
+        </p:txBody>
+      </p:sp>
+      <p:sp>
+        <p:nvSpPr>
+          <p:cNvPr id="7" name="Text 5"/>
+          <p:cNvSpPr txBox="1"/>
+          <p:nvPr/>
+        </p:nvSpPr>
+        <p:spPr>
+          <a:xfrm>
+            <a:off x="777240" y="4572000"/>
+            <a:ext cx="9546336" cy="914400"/>
+          </a:xfrm>
+          <a:prstGeom prst="rect">
+            <a:avLst/>
+          </a:prstGeom>
+          <a:noFill/>
+          <a:ln/>
+        </p:spPr>
+        <p:txBody>
+          <a:bodyPr wrap="square" lIns="0" tIns="0" rIns="0" bIns="0" rtlCol="0" anchor="ctr"/>
+          <a:lstStyle/>
+          <a:p>
+            <a:pPr indent="0" marL="0">
+              <a:lnSpc>
+                <a:spcPct val="145000"/>
+              </a:lnSpc>
+              <a:buNone/>
+            </a:pPr>
+            <a:r>
+              <a:rPr lang="en-US" sz="1350" dirty="0">
+                <a:solidFill>
+                  <a:srgbClr val="CFC6B8"/>
+                </a:solidFill>
+                <a:latin typeface="Yu Gothic" pitchFamily="34" charset="0"/>
+                <a:ea typeface="Yu Gothic" pitchFamily="34" charset="-122"/>
+                <a:cs typeface="Yu Gothic" pitchFamily="34" charset="-120"/>
+              </a:rPr>
+              <a:t>雛形は、一度回すまで完成しません。実際に埋めてみると、足りない前提が必ず見つかります。それを書き足すところまでが今回の宿題です。</a:t>
+            </a:r>
+            <a:endParaRPr lang="en-US" sz="1350" dirty="0"/>
+          </a:p>
+        </p:txBody>
+      </p:sp>
+      <p:sp>
+        <p:nvSpPr>
+          <p:cNvPr id="8" name="Text 6"/>
+          <p:cNvSpPr txBox="1"/>
+          <p:nvPr/>
+        </p:nvSpPr>
+        <p:spPr>
+          <a:xfrm>
+            <a:off x="777240" y="6382512"/>
+            <a:ext cx="10607040" cy="256032"/>
+          </a:xfrm>
+          <a:prstGeom prst="rect">
+            <a:avLst/>
+          </a:prstGeom>
+          <a:noFill/>
+          <a:ln/>
+        </p:spPr>
+        <p:txBody>
+          <a:bodyPr wrap="square" lIns="0" tIns="0" rIns="0" bIns="0" rtlCol="0" anchor="ctr"/>
+          <a:lstStyle/>
+          <a:p>
+            <a:pPr indent="0" marL="0">
+              <a:buNone/>
+            </a:pPr>
+            <a:r>
+              <a:rPr lang="en-US" sz="900" dirty="0">
+                <a:solidFill>
+                  <a:srgbClr val="6E6558"/>
+                </a:solidFill>
+                <a:latin typeface="Yu Gothic" pitchFamily="34" charset="0"/>
+                <a:ea typeface="Yu Gothic" pitchFamily="34" charset="-122"/>
+                <a:cs typeface="Yu Gothic" pitchFamily="34" charset="-120"/>
+              </a:rPr>
+              <a:t>第4回　数字と判断のAI化</a:t>
+            </a:r>
+            <a:endParaRPr lang="en-US" sz="900" dirty="0"/>
+          </a:p>
+        </p:txBody>
+      </p:sp>
+    </p:spTree>
+  </p:cSld>
+  <p:clrMapOvr>
+    <a:masterClrMapping/>
+  </p:clrMapOvr>
+</p:sld>
+</file>
+
 <file path=ppt/slides/slide2.xml><?xml version="1.0" encoding="utf-8"?>
 <p:sld xmlns:a="http://schemas.openxmlformats.org/drawingml/2006/main" xmlns:r="http://schemas.openxmlformats.org/officeDocument/2006/relationships" xmlns:p="http://schemas.openxmlformats.org/presentationml/2006/main">
   <p:cSld name="Slide 2">
@@ -1712,7 +3434,7 @@
         </p:nvSpPr>
         <p:spPr>
           <a:xfrm>
-            <a:off x="777240" y="777240"/>
+            <a:off x="777240" y="566928"/>
             <a:ext cx="10607040" cy="274320"/>
           </a:xfrm>
           <a:prstGeom prst="rect">
@@ -1737,7 +3459,7 @@
                 <a:ea typeface="Yu Gothic" pitchFamily="34" charset="-122"/>
                 <a:cs typeface="Yu Gothic" pitchFamily="34" charset="-120"/>
               </a:rPr>
-              <a:t>今日のゴール</a:t>
+              <a:t>今日の出発点</a:t>
             </a:r>
             <a:endParaRPr lang="en-US" sz="1100" dirty="0"/>
           </a:p>
@@ -1751,27 +3473,24 @@
         </p:nvSpPr>
         <p:spPr>
           <a:xfrm>
-            <a:off x="777240" y="1280160"/>
-            <a:ext cx="9758477" cy="1828800"/>
-          </a:xfrm>
-          <a:prstGeom prst="rect">
-            <a:avLst/>
-          </a:prstGeom>
-          <a:noFill/>
-          <a:ln/>
-        </p:spPr>
-        <p:txBody>
-          <a:bodyPr wrap="square" lIns="0" tIns="0" rIns="0" bIns="0" rtlCol="0" anchor="ctr"/>
-          <a:lstStyle/>
-          <a:p>
-            <a:pPr indent="0" marL="0">
-              <a:lnSpc>
-                <a:spcPct val="145000"/>
-              </a:lnSpc>
-              <a:buNone/>
-            </a:pPr>
-            <a:r>
-              <a:rPr lang="en-US" sz="2800" b="1" dirty="0">
+            <a:off x="777240" y="896112"/>
+            <a:ext cx="10607040" cy="640080"/>
+          </a:xfrm>
+          <a:prstGeom prst="rect">
+            <a:avLst/>
+          </a:prstGeom>
+          <a:noFill/>
+          <a:ln/>
+        </p:spPr>
+        <p:txBody>
+          <a:bodyPr wrap="square" lIns="0" tIns="0" rIns="0" bIns="0" rtlCol="0" anchor="ctr"/>
+          <a:lstStyle/>
+          <a:p>
+            <a:pPr indent="0" marL="0">
+              <a:buNone/>
+            </a:pPr>
+            <a:r>
+              <a:rPr lang="en-US" sz="2600" b="1" dirty="0">
                 <a:solidFill>
                   <a:srgbClr val="23201D"/>
                 </a:solidFill>
@@ -1779,9 +3498,9 @@
                 <a:ea typeface="Yu Gothic" pitchFamily="34" charset="-122"/>
                 <a:cs typeface="Yu Gothic" pitchFamily="34" charset="-120"/>
               </a:rPr>
-              <a:t>自社の数字をAIに読ませて、示唆を3つ引き出します。あわせて、必ず検算する手順を身につけます。</a:t>
-            </a:r>
-            <a:endParaRPr lang="en-US" sz="2800" dirty="0"/>
+              <a:t>AIは文章の道具だ、と思われたままだと、そこで止まります。</a:t>
+            </a:r>
+            <a:endParaRPr lang="en-US" sz="2600" dirty="0"/>
           </a:p>
         </p:txBody>
       </p:sp>
@@ -1793,14 +3512,323 @@
         </p:nvSpPr>
         <p:spPr>
           <a:xfrm>
-            <a:off x="777240" y="3429000"/>
-            <a:ext cx="10607040" cy="18288"/>
+            <a:off x="777240" y="1783080"/>
+            <a:ext cx="10607040" cy="713232"/>
           </a:xfrm>
           <a:prstGeom prst="rect">
             <a:avLst/>
           </a:prstGeom>
           <a:solidFill>
-            <a:srgbClr val="EDE7DB"/>
+            <a:srgbClr val="FFFFFF"/>
+          </a:solidFill>
+          <a:ln w="12700">
+            <a:solidFill>
+              <a:srgbClr val="EDE7DB"/>
+            </a:solidFill>
+            <a:prstDash val="solid"/>
+          </a:ln>
+        </p:spPr>
+      </p:sp>
+      <p:sp>
+        <p:nvSpPr>
+          <p:cNvPr id="5" name="Text 3"/>
+          <p:cNvSpPr txBox="1"/>
+          <p:nvPr/>
+        </p:nvSpPr>
+        <p:spPr>
+          <a:xfrm>
+            <a:off x="1051560" y="1783080"/>
+            <a:ext cx="365760" cy="713232"/>
+          </a:xfrm>
+          <a:prstGeom prst="rect">
+            <a:avLst/>
+          </a:prstGeom>
+          <a:noFill/>
+          <a:ln/>
+        </p:spPr>
+        <p:txBody>
+          <a:bodyPr wrap="square" lIns="0" tIns="0" rIns="0" bIns="0" rtlCol="0" anchor="ctr"/>
+          <a:lstStyle/>
+          <a:p>
+            <a:pPr indent="0" marL="0">
+              <a:buNone/>
+            </a:pPr>
+            <a:r>
+              <a:rPr lang="en-US" sz="1400" dirty="0">
+                <a:solidFill>
+                  <a:srgbClr val="8A8177"/>
+                </a:solidFill>
+                <a:latin typeface="Yu Gothic" pitchFamily="34" charset="0"/>
+                <a:ea typeface="Yu Gothic" pitchFamily="34" charset="-122"/>
+                <a:cs typeface="Yu Gothic" pitchFamily="34" charset="-120"/>
+              </a:rPr>
+              <a:t>―</a:t>
+            </a:r>
+            <a:endParaRPr lang="en-US" sz="1400" dirty="0"/>
+          </a:p>
+        </p:txBody>
+      </p:sp>
+      <p:sp>
+        <p:nvSpPr>
+          <p:cNvPr id="6" name="Text 4"/>
+          <p:cNvSpPr txBox="1"/>
+          <p:nvPr/>
+        </p:nvSpPr>
+        <p:spPr>
+          <a:xfrm>
+            <a:off x="1508760" y="1783080"/>
+            <a:ext cx="9601200" cy="713232"/>
+          </a:xfrm>
+          <a:prstGeom prst="rect">
+            <a:avLst/>
+          </a:prstGeom>
+          <a:noFill/>
+          <a:ln/>
+        </p:spPr>
+        <p:txBody>
+          <a:bodyPr wrap="square" lIns="0" tIns="0" rIns="0" bIns="0" rtlCol="0" anchor="ctr"/>
+          <a:lstStyle/>
+          <a:p>
+            <a:pPr indent="0" marL="0">
+              <a:buNone/>
+            </a:pPr>
+            <a:r>
+              <a:rPr lang="en-US" sz="1500" dirty="0">
+                <a:solidFill>
+                  <a:srgbClr val="23201D"/>
+                </a:solidFill>
+                <a:latin typeface="Yu Gothic" pitchFamily="34" charset="0"/>
+                <a:ea typeface="Yu Gothic" pitchFamily="34" charset="-122"/>
+                <a:cs typeface="Yu Gothic" pitchFamily="34" charset="-120"/>
+              </a:rPr>
+              <a:t>ここまでは、書く作業が速くなっただけ</a:t>
+            </a:r>
+            <a:endParaRPr lang="en-US" sz="1500" dirty="0"/>
+          </a:p>
+        </p:txBody>
+      </p:sp>
+      <p:sp>
+        <p:nvSpPr>
+          <p:cNvPr id="7" name="Shape 5"/>
+          <p:cNvSpPr/>
+          <p:nvPr/>
+        </p:nvSpPr>
+        <p:spPr>
+          <a:xfrm>
+            <a:off x="777240" y="2624328"/>
+            <a:ext cx="10607040" cy="713232"/>
+          </a:xfrm>
+          <a:prstGeom prst="rect">
+            <a:avLst/>
+          </a:prstGeom>
+          <a:solidFill>
+            <a:srgbClr val="FFFFFF"/>
+          </a:solidFill>
+          <a:ln w="12700">
+            <a:solidFill>
+              <a:srgbClr val="EDE7DB"/>
+            </a:solidFill>
+            <a:prstDash val="solid"/>
+          </a:ln>
+        </p:spPr>
+      </p:sp>
+      <p:sp>
+        <p:nvSpPr>
+          <p:cNvPr id="8" name="Text 6"/>
+          <p:cNvSpPr txBox="1"/>
+          <p:nvPr/>
+        </p:nvSpPr>
+        <p:spPr>
+          <a:xfrm>
+            <a:off x="1051560" y="2624328"/>
+            <a:ext cx="365760" cy="713232"/>
+          </a:xfrm>
+          <a:prstGeom prst="rect">
+            <a:avLst/>
+          </a:prstGeom>
+          <a:noFill/>
+          <a:ln/>
+        </p:spPr>
+        <p:txBody>
+          <a:bodyPr wrap="square" lIns="0" tIns="0" rIns="0" bIns="0" rtlCol="0" anchor="ctr"/>
+          <a:lstStyle/>
+          <a:p>
+            <a:pPr indent="0" marL="0">
+              <a:buNone/>
+            </a:pPr>
+            <a:r>
+              <a:rPr lang="en-US" sz="1400" dirty="0">
+                <a:solidFill>
+                  <a:srgbClr val="8A8177"/>
+                </a:solidFill>
+                <a:latin typeface="Yu Gothic" pitchFamily="34" charset="0"/>
+                <a:ea typeface="Yu Gothic" pitchFamily="34" charset="-122"/>
+                <a:cs typeface="Yu Gothic" pitchFamily="34" charset="-120"/>
+              </a:rPr>
+              <a:t>―</a:t>
+            </a:r>
+            <a:endParaRPr lang="en-US" sz="1400" dirty="0"/>
+          </a:p>
+        </p:txBody>
+      </p:sp>
+      <p:sp>
+        <p:nvSpPr>
+          <p:cNvPr id="9" name="Text 7"/>
+          <p:cNvSpPr txBox="1"/>
+          <p:nvPr/>
+        </p:nvSpPr>
+        <p:spPr>
+          <a:xfrm>
+            <a:off x="1508760" y="2624328"/>
+            <a:ext cx="9601200" cy="713232"/>
+          </a:xfrm>
+          <a:prstGeom prst="rect">
+            <a:avLst/>
+          </a:prstGeom>
+          <a:noFill/>
+          <a:ln/>
+        </p:spPr>
+        <p:txBody>
+          <a:bodyPr wrap="square" lIns="0" tIns="0" rIns="0" bIns="0" rtlCol="0" anchor="ctr"/>
+          <a:lstStyle/>
+          <a:p>
+            <a:pPr indent="0" marL="0">
+              <a:buNone/>
+            </a:pPr>
+            <a:r>
+              <a:rPr lang="en-US" sz="1500" dirty="0">
+                <a:solidFill>
+                  <a:srgbClr val="23201D"/>
+                </a:solidFill>
+                <a:latin typeface="Yu Gothic" pitchFamily="34" charset="0"/>
+                <a:ea typeface="Yu Gothic" pitchFamily="34" charset="-122"/>
+                <a:cs typeface="Yu Gothic" pitchFamily="34" charset="-120"/>
+              </a:rPr>
+              <a:t>経営の意思決定には、まだ何も効いていない</a:t>
+            </a:r>
+            <a:endParaRPr lang="en-US" sz="1500" dirty="0"/>
+          </a:p>
+        </p:txBody>
+      </p:sp>
+      <p:sp>
+        <p:nvSpPr>
+          <p:cNvPr id="10" name="Shape 8"/>
+          <p:cNvSpPr/>
+          <p:nvPr/>
+        </p:nvSpPr>
+        <p:spPr>
+          <a:xfrm>
+            <a:off x="777240" y="3465576"/>
+            <a:ext cx="10607040" cy="713232"/>
+          </a:xfrm>
+          <a:prstGeom prst="rect">
+            <a:avLst/>
+          </a:prstGeom>
+          <a:solidFill>
+            <a:srgbClr val="FFFFFF"/>
+          </a:solidFill>
+          <a:ln w="12700">
+            <a:solidFill>
+              <a:srgbClr val="EDE7DB"/>
+            </a:solidFill>
+            <a:prstDash val="solid"/>
+          </a:ln>
+        </p:spPr>
+      </p:sp>
+      <p:sp>
+        <p:nvSpPr>
+          <p:cNvPr id="11" name="Text 9"/>
+          <p:cNvSpPr txBox="1"/>
+          <p:nvPr/>
+        </p:nvSpPr>
+        <p:spPr>
+          <a:xfrm>
+            <a:off x="1051560" y="3465576"/>
+            <a:ext cx="365760" cy="713232"/>
+          </a:xfrm>
+          <a:prstGeom prst="rect">
+            <a:avLst/>
+          </a:prstGeom>
+          <a:noFill/>
+          <a:ln/>
+        </p:spPr>
+        <p:txBody>
+          <a:bodyPr wrap="square" lIns="0" tIns="0" rIns="0" bIns="0" rtlCol="0" anchor="ctr"/>
+          <a:lstStyle/>
+          <a:p>
+            <a:pPr indent="0" marL="0">
+              <a:buNone/>
+            </a:pPr>
+            <a:r>
+              <a:rPr lang="en-US" sz="1400" dirty="0">
+                <a:solidFill>
+                  <a:srgbClr val="8A8177"/>
+                </a:solidFill>
+                <a:latin typeface="Yu Gothic" pitchFamily="34" charset="0"/>
+                <a:ea typeface="Yu Gothic" pitchFamily="34" charset="-122"/>
+                <a:cs typeface="Yu Gothic" pitchFamily="34" charset="-120"/>
+              </a:rPr>
+              <a:t>―</a:t>
+            </a:r>
+            <a:endParaRPr lang="en-US" sz="1400" dirty="0"/>
+          </a:p>
+        </p:txBody>
+      </p:sp>
+      <p:sp>
+        <p:nvSpPr>
+          <p:cNvPr id="12" name="Text 10"/>
+          <p:cNvSpPr txBox="1"/>
+          <p:nvPr/>
+        </p:nvSpPr>
+        <p:spPr>
+          <a:xfrm>
+            <a:off x="1508760" y="3465576"/>
+            <a:ext cx="9601200" cy="713232"/>
+          </a:xfrm>
+          <a:prstGeom prst="rect">
+            <a:avLst/>
+          </a:prstGeom>
+          <a:noFill/>
+          <a:ln/>
+        </p:spPr>
+        <p:txBody>
+          <a:bodyPr wrap="square" lIns="0" tIns="0" rIns="0" bIns="0" rtlCol="0" anchor="ctr"/>
+          <a:lstStyle/>
+          <a:p>
+            <a:pPr indent="0" marL="0">
+              <a:buNone/>
+            </a:pPr>
+            <a:r>
+              <a:rPr lang="en-US" sz="1500" dirty="0">
+                <a:solidFill>
+                  <a:srgbClr val="23201D"/>
+                </a:solidFill>
+                <a:latin typeface="Yu Gothic" pitchFamily="34" charset="0"/>
+                <a:ea typeface="Yu Gothic" pitchFamily="34" charset="-122"/>
+                <a:cs typeface="Yu Gothic" pitchFamily="34" charset="-120"/>
+              </a:rPr>
+              <a:t>数字を扱えるようになると、AIの位置づけが変わります</a:t>
+            </a:r>
+            <a:endParaRPr lang="en-US" sz="1500" dirty="0"/>
+          </a:p>
+        </p:txBody>
+      </p:sp>
+      <p:sp>
+        <p:nvSpPr>
+          <p:cNvPr id="13" name="Shape 11"/>
+          <p:cNvSpPr/>
+          <p:nvPr/>
+        </p:nvSpPr>
+        <p:spPr>
+          <a:xfrm>
+            <a:off x="777240" y="4526280"/>
+            <a:ext cx="10607040" cy="914400"/>
+          </a:xfrm>
+          <a:prstGeom prst="rect">
+            <a:avLst/>
+          </a:prstGeom>
+          <a:solidFill>
+            <a:srgbClr val="B04A2F"/>
           </a:solidFill>
           <a:ln w="12700">
             <a:solidFill>
@@ -1812,14 +3840,14 @@
       </p:sp>
       <p:sp>
         <p:nvSpPr>
-          <p:cNvPr id="5" name="Text 3"/>
-          <p:cNvSpPr txBox="1"/>
-          <p:nvPr/>
-        </p:nvSpPr>
-        <p:spPr>
-          <a:xfrm>
-            <a:off x="777240" y="3657600"/>
-            <a:ext cx="9015984" cy="822960"/>
+          <p:cNvPr id="14" name="Text 12"/>
+          <p:cNvSpPr txBox="1"/>
+          <p:nvPr/>
+        </p:nvSpPr>
+        <p:spPr>
+          <a:xfrm>
+            <a:off x="1143000" y="4526280"/>
+            <a:ext cx="9875520" cy="914400"/>
           </a:xfrm>
           <a:prstGeom prst="rect">
             <a:avLst/>
@@ -1833,84 +3861,59 @@
           <a:p>
             <a:pPr indent="0" marL="0">
               <a:lnSpc>
-                <a:spcPct val="140000"/>
+                <a:spcPct val="130000"/>
               </a:lnSpc>
               <a:buNone/>
             </a:pPr>
             <a:r>
-              <a:rPr lang="en-US" sz="1500" dirty="0">
-                <a:solidFill>
-                  <a:srgbClr val="5A534A"/>
-                </a:solidFill>
-                <a:latin typeface="Yu Gothic" pitchFamily="34" charset="0"/>
-                <a:ea typeface="Yu Gothic" pitchFamily="34" charset="-122"/>
-                <a:cs typeface="Yu Gothic" pitchFamily="34" charset="-120"/>
-              </a:rPr>
-              <a:t>今日がいちばん食いつきのよい回で、いちばん事故りやすい回でもあります。</a:t>
-            </a:r>
-            <a:endParaRPr lang="en-US" sz="1500" dirty="0"/>
-          </a:p>
-        </p:txBody>
-      </p:sp>
-      <p:sp>
-        <p:nvSpPr>
-          <p:cNvPr id="6" name="Shape 4"/>
-          <p:cNvSpPr/>
-          <p:nvPr/>
-        </p:nvSpPr>
-        <p:spPr>
-          <a:xfrm>
-            <a:off x="777240" y="4846320"/>
-            <a:ext cx="10607040" cy="777240"/>
-          </a:xfrm>
-          <a:prstGeom prst="rect">
-            <a:avLst/>
-          </a:prstGeom>
-          <a:solidFill>
-            <a:srgbClr val="EDE7DB"/>
-          </a:solidFill>
-          <a:ln w="12700">
-            <a:solidFill>
-              <a:srgbClr val="333333"/>
-            </a:solidFill>
-            <a:prstDash val="solid"/>
-          </a:ln>
-        </p:spPr>
-      </p:sp>
-      <p:sp>
-        <p:nvSpPr>
-          <p:cNvPr id="7" name="Text 5"/>
-          <p:cNvSpPr txBox="1"/>
-          <p:nvPr/>
-        </p:nvSpPr>
-        <p:spPr>
-          <a:xfrm>
-            <a:off x="960120" y="4956048"/>
-            <a:ext cx="1956816" cy="237744"/>
-          </a:xfrm>
-          <a:prstGeom prst="rect">
-            <a:avLst/>
-          </a:prstGeom>
-          <a:noFill/>
-          <a:ln/>
-        </p:spPr>
-        <p:txBody>
-          <a:bodyPr wrap="square" lIns="0" tIns="0" rIns="0" bIns="0" rtlCol="0" anchor="ctr"/>
-          <a:lstStyle/>
-          <a:p>
-            <a:pPr indent="0" marL="0">
-              <a:buNone/>
-            </a:pPr>
-            <a:r>
-              <a:rPr lang="en-US" sz="900" b="1" dirty="0">
-                <a:solidFill>
-                  <a:srgbClr val="B04A2F"/>
-                </a:solidFill>
-                <a:latin typeface="Yu Gothic" pitchFamily="34" charset="0"/>
-                <a:ea typeface="Yu Gothic" pitchFamily="34" charset="-122"/>
-                <a:cs typeface="Yu Gothic" pitchFamily="34" charset="-120"/>
-              </a:rPr>
-              <a:t>0-15分</a:t>
+              <a:rPr lang="en-US" sz="1800" b="1" dirty="0">
+                <a:solidFill>
+                  <a:srgbClr val="FFFFFF"/>
+                </a:solidFill>
+                <a:latin typeface="Yu Gothic" pitchFamily="34" charset="0"/>
+                <a:ea typeface="Yu Gothic" pitchFamily="34" charset="-122"/>
+                <a:cs typeface="Yu Gothic" pitchFamily="34" charset="-120"/>
+              </a:rPr>
+              <a:t>今日から、AIは判断の材料をつくる道具になります。ただし計算はさせません。</a:t>
+            </a:r>
+            <a:endParaRPr lang="en-US" sz="1800" dirty="0"/>
+          </a:p>
+        </p:txBody>
+      </p:sp>
+      <p:sp>
+        <p:nvSpPr>
+          <p:cNvPr id="15" name="Text 13"/>
+          <p:cNvSpPr txBox="1"/>
+          <p:nvPr/>
+        </p:nvSpPr>
+        <p:spPr>
+          <a:xfrm>
+            <a:off x="777240" y="6382512"/>
+            <a:ext cx="7424928" cy="256032"/>
+          </a:xfrm>
+          <a:prstGeom prst="rect">
+            <a:avLst/>
+          </a:prstGeom>
+          <a:noFill/>
+          <a:ln/>
+        </p:spPr>
+        <p:txBody>
+          <a:bodyPr wrap="square" lIns="0" tIns="0" rIns="0" bIns="0" rtlCol="0" anchor="ctr"/>
+          <a:lstStyle/>
+          <a:p>
+            <a:pPr indent="0" marL="0">
+              <a:buNone/>
+            </a:pPr>
+            <a:r>
+              <a:rPr lang="en-US" sz="900" dirty="0">
+                <a:solidFill>
+                  <a:srgbClr val="8A8177"/>
+                </a:solidFill>
+                <a:latin typeface="Yu Gothic" pitchFamily="34" charset="0"/>
+                <a:ea typeface="Yu Gothic" pitchFamily="34" charset="-122"/>
+                <a:cs typeface="Yu Gothic" pitchFamily="34" charset="-120"/>
+              </a:rPr>
+              <a:t>第4回　数字と判断のAI化</a:t>
             </a:r>
             <a:endParaRPr lang="en-US" sz="900" dirty="0"/>
           </a:p>
@@ -1918,377 +3921,26 @@
       </p:sp>
       <p:sp>
         <p:nvSpPr>
-          <p:cNvPr id="8" name="Text 6"/>
-          <p:cNvSpPr txBox="1"/>
-          <p:nvPr/>
-        </p:nvSpPr>
-        <p:spPr>
-          <a:xfrm>
-            <a:off x="960120" y="5193792"/>
-            <a:ext cx="1956816" cy="365760"/>
-          </a:xfrm>
-          <a:prstGeom prst="rect">
-            <a:avLst/>
-          </a:prstGeom>
-          <a:noFill/>
-          <a:ln/>
-        </p:spPr>
-        <p:txBody>
-          <a:bodyPr wrap="square" lIns="0" tIns="0" rIns="0" bIns="0" rtlCol="0" anchor="ctr"/>
-          <a:lstStyle/>
-          <a:p>
-            <a:pPr indent="0" marL="0">
-              <a:buNone/>
-            </a:pPr>
-            <a:r>
-              <a:rPr lang="en-US" sz="1100" dirty="0">
-                <a:solidFill>
-                  <a:srgbClr val="23201D"/>
-                </a:solidFill>
-                <a:latin typeface="Yu Gothic" pitchFamily="34" charset="0"/>
-                <a:ea typeface="Yu Gothic" pitchFamily="34" charset="-122"/>
-                <a:cs typeface="Yu Gothic" pitchFamily="34" charset="-120"/>
-              </a:rPr>
-              <a:t>前回の宿題を実物で</a:t>
-            </a:r>
-            <a:endParaRPr lang="en-US" sz="1100" dirty="0"/>
-          </a:p>
-        </p:txBody>
-      </p:sp>
-      <p:sp>
-        <p:nvSpPr>
-          <p:cNvPr id="9" name="Text 7"/>
-          <p:cNvSpPr txBox="1"/>
-          <p:nvPr/>
-        </p:nvSpPr>
-        <p:spPr>
-          <a:xfrm>
-            <a:off x="3008376" y="4956048"/>
-            <a:ext cx="1956816" cy="237744"/>
-          </a:xfrm>
-          <a:prstGeom prst="rect">
-            <a:avLst/>
-          </a:prstGeom>
-          <a:noFill/>
-          <a:ln/>
-        </p:spPr>
-        <p:txBody>
-          <a:bodyPr wrap="square" lIns="0" tIns="0" rIns="0" bIns="0" rtlCol="0" anchor="ctr"/>
-          <a:lstStyle/>
-          <a:p>
-            <a:pPr indent="0" marL="0">
-              <a:buNone/>
-            </a:pPr>
-            <a:r>
-              <a:rPr lang="en-US" sz="900" b="1" dirty="0">
-                <a:solidFill>
-                  <a:srgbClr val="B04A2F"/>
-                </a:solidFill>
-                <a:latin typeface="Yu Gothic" pitchFamily="34" charset="0"/>
-                <a:ea typeface="Yu Gothic" pitchFamily="34" charset="-122"/>
-                <a:cs typeface="Yu Gothic" pitchFamily="34" charset="-120"/>
-              </a:rPr>
-              <a:t>15-35分</a:t>
-            </a:r>
-            <a:endParaRPr lang="en-US" sz="900" dirty="0"/>
-          </a:p>
-        </p:txBody>
-      </p:sp>
-      <p:sp>
-        <p:nvSpPr>
-          <p:cNvPr id="10" name="Text 8"/>
-          <p:cNvSpPr txBox="1"/>
-          <p:nvPr/>
-        </p:nvSpPr>
-        <p:spPr>
-          <a:xfrm>
-            <a:off x="3008376" y="5193792"/>
-            <a:ext cx="1956816" cy="365760"/>
-          </a:xfrm>
-          <a:prstGeom prst="rect">
-            <a:avLst/>
-          </a:prstGeom>
-          <a:noFill/>
-          <a:ln/>
-        </p:spPr>
-        <p:txBody>
-          <a:bodyPr wrap="square" lIns="0" tIns="0" rIns="0" bIns="0" rtlCol="0" anchor="ctr"/>
-          <a:lstStyle/>
-          <a:p>
-            <a:pPr indent="0" marL="0">
-              <a:buNone/>
-            </a:pPr>
-            <a:r>
-              <a:rPr lang="en-US" sz="1100" dirty="0">
-                <a:solidFill>
-                  <a:srgbClr val="23201D"/>
-                </a:solidFill>
-                <a:latin typeface="Yu Gothic" pitchFamily="34" charset="0"/>
-                <a:ea typeface="Yu Gothic" pitchFamily="34" charset="-122"/>
-                <a:cs typeface="Yu Gothic" pitchFamily="34" charset="-120"/>
-              </a:rPr>
-              <a:t>テーマとデモ</a:t>
-            </a:r>
-            <a:endParaRPr lang="en-US" sz="1100" dirty="0"/>
-          </a:p>
-        </p:txBody>
-      </p:sp>
-      <p:sp>
-        <p:nvSpPr>
-          <p:cNvPr id="11" name="Text 9"/>
-          <p:cNvSpPr txBox="1"/>
-          <p:nvPr/>
-        </p:nvSpPr>
-        <p:spPr>
-          <a:xfrm>
-            <a:off x="5056632" y="4956048"/>
-            <a:ext cx="1956816" cy="237744"/>
-          </a:xfrm>
-          <a:prstGeom prst="rect">
-            <a:avLst/>
-          </a:prstGeom>
-          <a:noFill/>
-          <a:ln/>
-        </p:spPr>
-        <p:txBody>
-          <a:bodyPr wrap="square" lIns="0" tIns="0" rIns="0" bIns="0" rtlCol="0" anchor="ctr"/>
-          <a:lstStyle/>
-          <a:p>
-            <a:pPr indent="0" marL="0">
-              <a:buNone/>
-            </a:pPr>
-            <a:r>
-              <a:rPr lang="en-US" sz="900" b="1" dirty="0">
-                <a:solidFill>
-                  <a:srgbClr val="B04A2F"/>
-                </a:solidFill>
-                <a:latin typeface="Yu Gothic" pitchFamily="34" charset="0"/>
-                <a:ea typeface="Yu Gothic" pitchFamily="34" charset="-122"/>
-                <a:cs typeface="Yu Gothic" pitchFamily="34" charset="-120"/>
-              </a:rPr>
-              <a:t>35-90分</a:t>
-            </a:r>
-            <a:endParaRPr lang="en-US" sz="900" dirty="0"/>
-          </a:p>
-        </p:txBody>
-      </p:sp>
-      <p:sp>
-        <p:nvSpPr>
-          <p:cNvPr id="12" name="Text 10"/>
-          <p:cNvSpPr txBox="1"/>
-          <p:nvPr/>
-        </p:nvSpPr>
-        <p:spPr>
-          <a:xfrm>
-            <a:off x="5056632" y="5193792"/>
-            <a:ext cx="1956816" cy="365760"/>
-          </a:xfrm>
-          <a:prstGeom prst="rect">
-            <a:avLst/>
-          </a:prstGeom>
-          <a:noFill/>
-          <a:ln/>
-        </p:spPr>
-        <p:txBody>
-          <a:bodyPr wrap="square" lIns="0" tIns="0" rIns="0" bIns="0" rtlCol="0" anchor="ctr"/>
-          <a:lstStyle/>
-          <a:p>
-            <a:pPr indent="0" marL="0">
-              <a:buNone/>
-            </a:pPr>
-            <a:r>
-              <a:rPr lang="en-US" sz="1100" dirty="0">
-                <a:solidFill>
-                  <a:srgbClr val="23201D"/>
-                </a:solidFill>
-                <a:latin typeface="Yu Gothic" pitchFamily="34" charset="0"/>
-                <a:ea typeface="Yu Gothic" pitchFamily="34" charset="-122"/>
-                <a:cs typeface="Yu Gothic" pitchFamily="34" charset="-120"/>
-              </a:rPr>
-              <a:t>一緒に手を動かす</a:t>
-            </a:r>
-            <a:endParaRPr lang="en-US" sz="1100" dirty="0"/>
-          </a:p>
-        </p:txBody>
-      </p:sp>
-      <p:sp>
-        <p:nvSpPr>
-          <p:cNvPr id="13" name="Text 11"/>
-          <p:cNvSpPr txBox="1"/>
-          <p:nvPr/>
-        </p:nvSpPr>
-        <p:spPr>
-          <a:xfrm>
-            <a:off x="7104888" y="4956048"/>
-            <a:ext cx="1956816" cy="237744"/>
-          </a:xfrm>
-          <a:prstGeom prst="rect">
-            <a:avLst/>
-          </a:prstGeom>
-          <a:noFill/>
-          <a:ln/>
-        </p:spPr>
-        <p:txBody>
-          <a:bodyPr wrap="square" lIns="0" tIns="0" rIns="0" bIns="0" rtlCol="0" anchor="ctr"/>
-          <a:lstStyle/>
-          <a:p>
-            <a:pPr indent="0" marL="0">
-              <a:buNone/>
-            </a:pPr>
-            <a:r>
-              <a:rPr lang="en-US" sz="900" b="1" dirty="0">
-                <a:solidFill>
-                  <a:srgbClr val="B04A2F"/>
-                </a:solidFill>
-                <a:latin typeface="Yu Gothic" pitchFamily="34" charset="0"/>
-                <a:ea typeface="Yu Gothic" pitchFamily="34" charset="-122"/>
-                <a:cs typeface="Yu Gothic" pitchFamily="34" charset="-120"/>
-              </a:rPr>
-              <a:t>90-105分</a:t>
-            </a:r>
-            <a:endParaRPr lang="en-US" sz="900" dirty="0"/>
-          </a:p>
-        </p:txBody>
-      </p:sp>
-      <p:sp>
-        <p:nvSpPr>
-          <p:cNvPr id="14" name="Text 12"/>
-          <p:cNvSpPr txBox="1"/>
-          <p:nvPr/>
-        </p:nvSpPr>
-        <p:spPr>
-          <a:xfrm>
-            <a:off x="7104888" y="5193792"/>
-            <a:ext cx="1956816" cy="365760"/>
-          </a:xfrm>
-          <a:prstGeom prst="rect">
-            <a:avLst/>
-          </a:prstGeom>
-          <a:noFill/>
-          <a:ln/>
-        </p:spPr>
-        <p:txBody>
-          <a:bodyPr wrap="square" lIns="0" tIns="0" rIns="0" bIns="0" rtlCol="0" anchor="ctr"/>
-          <a:lstStyle/>
-          <a:p>
-            <a:pPr indent="0" marL="0">
-              <a:buNone/>
-            </a:pPr>
-            <a:r>
-              <a:rPr lang="en-US" sz="1100" dirty="0">
-                <a:solidFill>
-                  <a:srgbClr val="23201D"/>
-                </a:solidFill>
-                <a:latin typeface="Yu Gothic" pitchFamily="34" charset="0"/>
-                <a:ea typeface="Yu Gothic" pitchFamily="34" charset="-122"/>
-                <a:cs typeface="Yu Gothic" pitchFamily="34" charset="-120"/>
-              </a:rPr>
-              <a:t>業務への組み込み</a:t>
-            </a:r>
-            <a:endParaRPr lang="en-US" sz="1100" dirty="0"/>
-          </a:p>
-        </p:txBody>
-      </p:sp>
-      <p:sp>
-        <p:nvSpPr>
-          <p:cNvPr id="15" name="Text 13"/>
-          <p:cNvSpPr txBox="1"/>
-          <p:nvPr/>
-        </p:nvSpPr>
-        <p:spPr>
-          <a:xfrm>
-            <a:off x="9153144" y="4956048"/>
-            <a:ext cx="1956816" cy="237744"/>
-          </a:xfrm>
-          <a:prstGeom prst="rect">
-            <a:avLst/>
-          </a:prstGeom>
-          <a:noFill/>
-          <a:ln/>
-        </p:spPr>
-        <p:txBody>
-          <a:bodyPr wrap="square" lIns="0" tIns="0" rIns="0" bIns="0" rtlCol="0" anchor="ctr"/>
-          <a:lstStyle/>
-          <a:p>
-            <a:pPr indent="0" marL="0">
-              <a:buNone/>
-            </a:pPr>
-            <a:r>
-              <a:rPr lang="en-US" sz="900" b="1" dirty="0">
-                <a:solidFill>
-                  <a:srgbClr val="B04A2F"/>
-                </a:solidFill>
-                <a:latin typeface="Yu Gothic" pitchFamily="34" charset="0"/>
-                <a:ea typeface="Yu Gothic" pitchFamily="34" charset="-122"/>
-                <a:cs typeface="Yu Gothic" pitchFamily="34" charset="-120"/>
-              </a:rPr>
-              <a:t>105-120分</a:t>
-            </a:r>
-            <a:endParaRPr lang="en-US" sz="900" dirty="0"/>
-          </a:p>
-        </p:txBody>
-      </p:sp>
-      <p:sp>
-        <p:nvSpPr>
           <p:cNvPr id="16" name="Text 14"/>
           <p:cNvSpPr txBox="1"/>
           <p:nvPr/>
         </p:nvSpPr>
         <p:spPr>
           <a:xfrm>
-            <a:off x="9153144" y="5193792"/>
-            <a:ext cx="1956816" cy="365760"/>
-          </a:xfrm>
-          <a:prstGeom prst="rect">
-            <a:avLst/>
-          </a:prstGeom>
-          <a:noFill/>
-          <a:ln/>
-        </p:spPr>
-        <p:txBody>
-          <a:bodyPr wrap="square" lIns="0" tIns="0" rIns="0" bIns="0" rtlCol="0" anchor="ctr"/>
-          <a:lstStyle/>
-          <a:p>
-            <a:pPr indent="0" marL="0">
-              <a:buNone/>
-            </a:pPr>
-            <a:r>
-              <a:rPr lang="en-US" sz="1100" dirty="0">
-                <a:solidFill>
-                  <a:srgbClr val="23201D"/>
-                </a:solidFill>
-                <a:latin typeface="Yu Gothic" pitchFamily="34" charset="0"/>
-                <a:ea typeface="Yu Gothic" pitchFamily="34" charset="-122"/>
-                <a:cs typeface="Yu Gothic" pitchFamily="34" charset="-120"/>
-              </a:rPr>
-              <a:t>宿題・記録</a:t>
-            </a:r>
-            <a:endParaRPr lang="en-US" sz="1100" dirty="0"/>
-          </a:p>
-        </p:txBody>
-      </p:sp>
-      <p:sp>
-        <p:nvSpPr>
-          <p:cNvPr id="17" name="Text 15"/>
-          <p:cNvSpPr txBox="1"/>
-          <p:nvPr/>
-        </p:nvSpPr>
-        <p:spPr>
-          <a:xfrm>
-            <a:off x="777240" y="6355080"/>
-            <a:ext cx="7424928" cy="274320"/>
-          </a:xfrm>
-          <a:prstGeom prst="rect">
-            <a:avLst/>
-          </a:prstGeom>
-          <a:noFill/>
-          <a:ln/>
-        </p:spPr>
-        <p:txBody>
-          <a:bodyPr wrap="square" lIns="0" tIns="0" rIns="0" bIns="0" rtlCol="0" anchor="ctr"/>
-          <a:lstStyle/>
-          <a:p>
-            <a:pPr indent="0" marL="0">
+            <a:off x="8202168" y="6382512"/>
+            <a:ext cx="3182112" cy="256032"/>
+          </a:xfrm>
+          <a:prstGeom prst="rect">
+            <a:avLst/>
+          </a:prstGeom>
+          <a:noFill/>
+          <a:ln/>
+        </p:spPr>
+        <p:txBody>
+          <a:bodyPr wrap="square" lIns="0" tIns="0" rIns="0" bIns="0" rtlCol="0" anchor="ctr"/>
+          <a:lstStyle/>
+          <a:p>
+            <a:pPr algn="r" indent="0" marL="0">
               <a:buNone/>
             </a:pPr>
             <a:r>
@@ -2300,46 +3952,7 @@
                 <a:ea typeface="Yu Gothic" pitchFamily="34" charset="-122"/>
                 <a:cs typeface="Yu Gothic" pitchFamily="34" charset="-120"/>
               </a:rPr>
-              <a:t>第4回　数字と判断のAI化</a:t>
-            </a:r>
-            <a:endParaRPr lang="en-US" sz="900" dirty="0"/>
-          </a:p>
-        </p:txBody>
-      </p:sp>
-      <p:sp>
-        <p:nvSpPr>
-          <p:cNvPr id="18" name="Text 16"/>
-          <p:cNvSpPr txBox="1"/>
-          <p:nvPr/>
-        </p:nvSpPr>
-        <p:spPr>
-          <a:xfrm>
-            <a:off x="8202168" y="6355080"/>
-            <a:ext cx="3182112" cy="274320"/>
-          </a:xfrm>
-          <a:prstGeom prst="rect">
-            <a:avLst/>
-          </a:prstGeom>
-          <a:noFill/>
-          <a:ln/>
-        </p:spPr>
-        <p:txBody>
-          <a:bodyPr wrap="square" lIns="0" tIns="0" rIns="0" bIns="0" rtlCol="0" anchor="ctr"/>
-          <a:lstStyle/>
-          <a:p>
-            <a:pPr algn="r" indent="0" marL="0">
-              <a:buNone/>
-            </a:pPr>
-            <a:r>
-              <a:rPr lang="en-US" sz="900" dirty="0">
-                <a:solidFill>
-                  <a:srgbClr val="8A8177"/>
-                </a:solidFill>
-                <a:latin typeface="Yu Gothic" pitchFamily="34" charset="0"/>
-                <a:ea typeface="Yu Gothic" pitchFamily="34" charset="-122"/>
-                <a:cs typeface="Yu Gothic" pitchFamily="34" charset="-120"/>
-              </a:rPr>
-              <a:t>今日のゴール</a:t>
+              <a:t>出発点</a:t>
             </a:r>
             <a:endParaRPr lang="en-US" sz="900" dirty="0"/>
           </a:p>
@@ -2385,7 +3998,7 @@
         </p:nvSpPr>
         <p:spPr>
           <a:xfrm>
-            <a:off x="777240" y="640080"/>
+            <a:off x="777240" y="566928"/>
             <a:ext cx="10607040" cy="274320"/>
           </a:xfrm>
           <a:prstGeom prst="rect">
@@ -2410,7 +4023,7 @@
                 <a:ea typeface="Yu Gothic" pitchFamily="34" charset="-122"/>
                 <a:cs typeface="Yu Gothic" pitchFamily="34" charset="-120"/>
               </a:rPr>
-              <a:t>考え方</a:t>
+              <a:t>今日のゴール</a:t>
             </a:r>
             <a:endParaRPr lang="en-US" sz="1100" dirty="0"/>
           </a:p>
@@ -2424,24 +4037,27 @@
         </p:nvSpPr>
         <p:spPr>
           <a:xfrm>
-            <a:off x="777240" y="960120"/>
-            <a:ext cx="10607040" cy="640080"/>
-          </a:xfrm>
-          <a:prstGeom prst="rect">
-            <a:avLst/>
-          </a:prstGeom>
-          <a:noFill/>
-          <a:ln/>
-        </p:spPr>
-        <p:txBody>
-          <a:bodyPr wrap="square" lIns="0" tIns="0" rIns="0" bIns="0" rtlCol="0" anchor="ctr"/>
-          <a:lstStyle/>
-          <a:p>
-            <a:pPr indent="0" marL="0">
-              <a:buNone/>
-            </a:pPr>
-            <a:r>
-              <a:rPr lang="en-US" sz="2700" b="1" dirty="0">
+            <a:off x="777240" y="1143000"/>
+            <a:ext cx="9864547" cy="1645920"/>
+          </a:xfrm>
+          <a:prstGeom prst="rect">
+            <a:avLst/>
+          </a:prstGeom>
+          <a:noFill/>
+          <a:ln/>
+        </p:spPr>
+        <p:txBody>
+          <a:bodyPr wrap="square" lIns="0" tIns="0" rIns="0" bIns="0" rtlCol="0" anchor="ctr"/>
+          <a:lstStyle/>
+          <a:p>
+            <a:pPr indent="0" marL="0">
+              <a:lnSpc>
+                <a:spcPct val="145000"/>
+              </a:lnSpc>
+              <a:buNone/>
+            </a:pPr>
+            <a:r>
+              <a:rPr lang="en-US" sz="2600" b="1" dirty="0">
                 <a:solidFill>
                   <a:srgbClr val="23201D"/>
                 </a:solidFill>
@@ -2449,9 +4065,9 @@
                 <a:ea typeface="Yu Gothic" pitchFamily="34" charset="-122"/>
                 <a:cs typeface="Yu Gothic" pitchFamily="34" charset="-120"/>
               </a:rPr>
-              <a:t>数字を読ませるときの3原則</a:t>
-            </a:r>
-            <a:endParaRPr lang="en-US" sz="2700" dirty="0"/>
+              <a:t>自社の数字をAIに読ませて示唆を3つ引き出し、必ず検算する手順を身につけます。</a:t>
+            </a:r>
+            <a:endParaRPr lang="en-US" sz="2600" dirty="0"/>
           </a:p>
         </p:txBody>
       </p:sp>
@@ -2463,18 +4079,18 @@
         </p:nvSpPr>
         <p:spPr>
           <a:xfrm>
-            <a:off x="777240" y="1783080"/>
-            <a:ext cx="10607040" cy="1167384"/>
+            <a:off x="777240" y="3063240"/>
+            <a:ext cx="10607040" cy="18288"/>
           </a:xfrm>
           <a:prstGeom prst="rect">
             <a:avLst/>
           </a:prstGeom>
           <a:solidFill>
-            <a:srgbClr val="FFFFFF"/>
+            <a:srgbClr val="EDE7DB"/>
           </a:solidFill>
           <a:ln w="12700">
             <a:solidFill>
-              <a:srgbClr val="EDE7DB"/>
+              <a:srgbClr val="333333"/>
             </a:solidFill>
             <a:prstDash val="solid"/>
           </a:ln>
@@ -2482,24 +4098,66 @@
       </p:sp>
       <p:sp>
         <p:nvSpPr>
-          <p:cNvPr id="5" name="Shape 3"/>
+          <p:cNvPr id="5" name="Text 3"/>
+          <p:cNvSpPr txBox="1"/>
+          <p:nvPr/>
+        </p:nvSpPr>
+        <p:spPr>
+          <a:xfrm>
+            <a:off x="777240" y="3291840"/>
+            <a:ext cx="9334195" cy="1005840"/>
+          </a:xfrm>
+          <a:prstGeom prst="rect">
+            <a:avLst/>
+          </a:prstGeom>
+          <a:noFill/>
+          <a:ln/>
+        </p:spPr>
+        <p:txBody>
+          <a:bodyPr wrap="square" lIns="0" tIns="0" rIns="0" bIns="0" rtlCol="0" anchor="ctr"/>
+          <a:lstStyle/>
+          <a:p>
+            <a:pPr indent="0" marL="0">
+              <a:lnSpc>
+                <a:spcPct val="140000"/>
+              </a:lnSpc>
+              <a:buNone/>
+            </a:pPr>
+            <a:r>
+              <a:rPr lang="en-US" sz="1450" dirty="0">
+                <a:solidFill>
+                  <a:srgbClr val="5A534A"/>
+                </a:solidFill>
+                <a:latin typeface="Yu Gothic" pitchFamily="34" charset="0"/>
+                <a:ea typeface="Yu Gothic" pitchFamily="34" charset="-122"/>
+                <a:cs typeface="Yu Gothic" pitchFamily="34" charset="-120"/>
+              </a:rPr>
+              <a:t>今日がいちばん食いつきのよい回で、いちばん事故りやすい回でもあります。検算の手順まで必ずやります。</a:t>
+            </a:r>
+            <a:endParaRPr lang="en-US" sz="1450" dirty="0"/>
+          </a:p>
+        </p:txBody>
+      </p:sp>
+      <p:sp>
+        <p:nvSpPr>
+          <p:cNvPr id="6" name="Shape 4"/>
           <p:cNvSpPr/>
           <p:nvPr/>
         </p:nvSpPr>
         <p:spPr>
           <a:xfrm>
-            <a:off x="1033272" y="2174748"/>
-            <a:ext cx="384048" cy="384048"/>
-          </a:xfrm>
-          <a:prstGeom prst="ellipse">
+            <a:off x="777240" y="4754880"/>
+            <a:ext cx="10607040" cy="822960"/>
+          </a:xfrm>
+          <a:prstGeom prst="rect">
             <a:avLst/>
           </a:prstGeom>
           <a:solidFill>
-            <a:srgbClr val="B04A2F"/>
+            <a:srgbClr val="EDE7DB"/>
           </a:solidFill>
           <a:ln w="12700">
             <a:solidFill>
-              <a:srgbClr val="B04A2F"/>
+              <a:srgbClr val="333333"/>
             </a:solidFill>
             <a:prstDash val="solid"/>
           </a:ln>
@@ -2507,69 +4165,69 @@
       </p:sp>
       <p:sp>
         <p:nvSpPr>
-          <p:cNvPr id="6" name="Text 4"/>
-          <p:cNvSpPr txBox="1"/>
-          <p:nvPr/>
-        </p:nvSpPr>
-        <p:spPr>
-          <a:xfrm>
-            <a:off x="1033272" y="2174748"/>
-            <a:ext cx="384048" cy="384048"/>
-          </a:xfrm>
-          <a:prstGeom prst="rect">
-            <a:avLst/>
-          </a:prstGeom>
-          <a:noFill/>
-          <a:ln/>
-        </p:spPr>
-        <p:txBody>
-          <a:bodyPr wrap="square" lIns="0" tIns="0" rIns="0" bIns="0" rtlCol="0" anchor="ctr"/>
-          <a:lstStyle/>
-          <a:p>
-            <a:pPr algn="ctr" indent="0" marL="0">
-              <a:buNone/>
-            </a:pPr>
-            <a:r>
-              <a:rPr lang="en-US" sz="1400" b="1" dirty="0">
-                <a:solidFill>
-                  <a:srgbClr val="FFFFFF"/>
-                </a:solidFill>
-                <a:latin typeface="Yu Gothic" pitchFamily="34" charset="0"/>
-                <a:ea typeface="Yu Gothic" pitchFamily="34" charset="-122"/>
-                <a:cs typeface="Yu Gothic" pitchFamily="34" charset="-120"/>
-              </a:rPr>
-              <a:t>1</a:t>
-            </a:r>
-            <a:endParaRPr lang="en-US" sz="1400" dirty="0"/>
-          </a:p>
-        </p:txBody>
-      </p:sp>
-      <p:sp>
-        <p:nvSpPr>
           <p:cNvPr id="7" name="Text 5"/>
           <p:cNvSpPr txBox="1"/>
           <p:nvPr/>
         </p:nvSpPr>
         <p:spPr>
           <a:xfrm>
-            <a:off x="1645920" y="1874520"/>
-            <a:ext cx="3394253" cy="984504"/>
-          </a:xfrm>
-          <a:prstGeom prst="rect">
-            <a:avLst/>
-          </a:prstGeom>
-          <a:noFill/>
-          <a:ln/>
-        </p:spPr>
-        <p:txBody>
-          <a:bodyPr wrap="square" lIns="0" tIns="0" rIns="0" bIns="0" rtlCol="0" anchor="ctr"/>
-          <a:lstStyle/>
-          <a:p>
-            <a:pPr indent="0" marL="0">
-              <a:buNone/>
-            </a:pPr>
-            <a:r>
-              <a:rPr lang="en-US" sz="1500" b="1" dirty="0">
+            <a:off x="960120" y="4873752"/>
+            <a:ext cx="1956816" cy="237744"/>
+          </a:xfrm>
+          <a:prstGeom prst="rect">
+            <a:avLst/>
+          </a:prstGeom>
+          <a:noFill/>
+          <a:ln/>
+        </p:spPr>
+        <p:txBody>
+          <a:bodyPr wrap="square" lIns="0" tIns="0" rIns="0" bIns="0" rtlCol="0" anchor="ctr"/>
+          <a:lstStyle/>
+          <a:p>
+            <a:pPr indent="0" marL="0">
+              <a:buNone/>
+            </a:pPr>
+            <a:r>
+              <a:rPr lang="en-US" sz="900" b="1" dirty="0">
+                <a:solidFill>
+                  <a:srgbClr val="B04A2F"/>
+                </a:solidFill>
+                <a:latin typeface="Yu Gothic" pitchFamily="34" charset="0"/>
+                <a:ea typeface="Yu Gothic" pitchFamily="34" charset="-122"/>
+                <a:cs typeface="Yu Gothic" pitchFamily="34" charset="-120"/>
+              </a:rPr>
+              <a:t>0-15分</a:t>
+            </a:r>
+            <a:endParaRPr lang="en-US" sz="900" dirty="0"/>
+          </a:p>
+        </p:txBody>
+      </p:sp>
+      <p:sp>
+        <p:nvSpPr>
+          <p:cNvPr id="8" name="Text 6"/>
+          <p:cNvSpPr txBox="1"/>
+          <p:nvPr/>
+        </p:nvSpPr>
+        <p:spPr>
+          <a:xfrm>
+            <a:off x="960120" y="5111496"/>
+            <a:ext cx="1956816" cy="384048"/>
+          </a:xfrm>
+          <a:prstGeom prst="rect">
+            <a:avLst/>
+          </a:prstGeom>
+          <a:noFill/>
+          <a:ln/>
+        </p:spPr>
+        <p:txBody>
+          <a:bodyPr wrap="square" lIns="0" tIns="0" rIns="0" bIns="0" rtlCol="0" anchor="ctr"/>
+          <a:lstStyle/>
+          <a:p>
+            <a:pPr indent="0" marL="0">
+              <a:buNone/>
+            </a:pPr>
+            <a:r>
+              <a:rPr lang="en-US" sz="1100" dirty="0">
                 <a:solidFill>
                   <a:srgbClr val="23201D"/>
                 </a:solidFill>
@@ -2577,103 +4235,89 @@
                 <a:ea typeface="Yu Gothic" pitchFamily="34" charset="-122"/>
                 <a:cs typeface="Yu Gothic" pitchFamily="34" charset="-120"/>
               </a:rPr>
-              <a:t>計算そのものは信用しない</a:t>
-            </a:r>
-            <a:endParaRPr lang="en-US" sz="1500" dirty="0"/>
-          </a:p>
-        </p:txBody>
-      </p:sp>
-      <p:sp>
-        <p:nvSpPr>
-          <p:cNvPr id="8" name="Text 6"/>
-          <p:cNvSpPr txBox="1"/>
-          <p:nvPr/>
-        </p:nvSpPr>
-        <p:spPr>
-          <a:xfrm>
-            <a:off x="5146243" y="1874520"/>
-            <a:ext cx="5963717" cy="984504"/>
-          </a:xfrm>
-          <a:prstGeom prst="rect">
-            <a:avLst/>
-          </a:prstGeom>
-          <a:noFill/>
-          <a:ln/>
-        </p:spPr>
-        <p:txBody>
-          <a:bodyPr wrap="square" lIns="0" tIns="0" rIns="0" bIns="0" rtlCol="0" anchor="ctr"/>
-          <a:lstStyle/>
-          <a:p>
-            <a:pPr indent="0" marL="0">
-              <a:lnSpc>
-                <a:spcPct val="130000"/>
-              </a:lnSpc>
-              <a:buNone/>
-            </a:pPr>
-            <a:r>
-              <a:rPr lang="en-US" sz="1250" dirty="0">
-                <a:solidFill>
-                  <a:srgbClr val="5A534A"/>
-                </a:solidFill>
-                <a:latin typeface="Yu Gothic" pitchFamily="34" charset="0"/>
-                <a:ea typeface="Yu Gothic" pitchFamily="34" charset="-122"/>
-                <a:cs typeface="Yu Gothic" pitchFamily="34" charset="-120"/>
-              </a:rPr>
-              <a:t>集計は表計算にやらせ、AIには「意味」を語らせます</a:t>
-            </a:r>
-            <a:endParaRPr lang="en-US" sz="1250" dirty="0"/>
-          </a:p>
-        </p:txBody>
-      </p:sp>
-      <p:sp>
-        <p:nvSpPr>
-          <p:cNvPr id="9" name="Shape 7"/>
-          <p:cNvSpPr/>
-          <p:nvPr/>
-        </p:nvSpPr>
-        <p:spPr>
-          <a:xfrm>
-            <a:off x="777240" y="3096768"/>
-            <a:ext cx="10607040" cy="1167384"/>
-          </a:xfrm>
-          <a:prstGeom prst="rect">
-            <a:avLst/>
-          </a:prstGeom>
-          <a:solidFill>
-            <a:srgbClr val="FFFFFF"/>
-          </a:solidFill>
-          <a:ln w="12700">
-            <a:solidFill>
-              <a:srgbClr val="EDE7DB"/>
-            </a:solidFill>
-            <a:prstDash val="solid"/>
-          </a:ln>
-        </p:spPr>
-      </p:sp>
-      <p:sp>
-        <p:nvSpPr>
-          <p:cNvPr id="10" name="Shape 8"/>
-          <p:cNvSpPr/>
-          <p:nvPr/>
-        </p:nvSpPr>
-        <p:spPr>
-          <a:xfrm>
-            <a:off x="1033272" y="3488436"/>
-            <a:ext cx="384048" cy="384048"/>
-          </a:xfrm>
-          <a:prstGeom prst="ellipse">
-            <a:avLst/>
-          </a:prstGeom>
-          <a:solidFill>
-            <a:srgbClr val="B04A2F"/>
-          </a:solidFill>
-          <a:ln w="12700">
-            <a:solidFill>
-              <a:srgbClr val="B04A2F"/>
-            </a:solidFill>
-            <a:prstDash val="solid"/>
-          </a:ln>
-        </p:spPr>
+              <a:t>前回の宿題を実物で</a:t>
+            </a:r>
+            <a:endParaRPr lang="en-US" sz="1100" dirty="0"/>
+          </a:p>
+        </p:txBody>
+      </p:sp>
+      <p:sp>
+        <p:nvSpPr>
+          <p:cNvPr id="9" name="Text 7"/>
+          <p:cNvSpPr txBox="1"/>
+          <p:nvPr/>
+        </p:nvSpPr>
+        <p:spPr>
+          <a:xfrm>
+            <a:off x="3008376" y="4873752"/>
+            <a:ext cx="1956816" cy="237744"/>
+          </a:xfrm>
+          <a:prstGeom prst="rect">
+            <a:avLst/>
+          </a:prstGeom>
+          <a:noFill/>
+          <a:ln/>
+        </p:spPr>
+        <p:txBody>
+          <a:bodyPr wrap="square" lIns="0" tIns="0" rIns="0" bIns="0" rtlCol="0" anchor="ctr"/>
+          <a:lstStyle/>
+          <a:p>
+            <a:pPr indent="0" marL="0">
+              <a:buNone/>
+            </a:pPr>
+            <a:r>
+              <a:rPr lang="en-US" sz="900" b="1" dirty="0">
+                <a:solidFill>
+                  <a:srgbClr val="B04A2F"/>
+                </a:solidFill>
+                <a:latin typeface="Yu Gothic" pitchFamily="34" charset="0"/>
+                <a:ea typeface="Yu Gothic" pitchFamily="34" charset="-122"/>
+                <a:cs typeface="Yu Gothic" pitchFamily="34" charset="-120"/>
+              </a:rPr>
+              <a:t>15-35分</a:t>
+            </a:r>
+            <a:endParaRPr lang="en-US" sz="900" dirty="0"/>
+          </a:p>
+        </p:txBody>
+      </p:sp>
+      <p:sp>
+        <p:nvSpPr>
+          <p:cNvPr id="10" name="Text 8"/>
+          <p:cNvSpPr txBox="1"/>
+          <p:nvPr/>
+        </p:nvSpPr>
+        <p:spPr>
+          <a:xfrm>
+            <a:off x="3008376" y="5111496"/>
+            <a:ext cx="1956816" cy="384048"/>
+          </a:xfrm>
+          <a:prstGeom prst="rect">
+            <a:avLst/>
+          </a:prstGeom>
+          <a:noFill/>
+          <a:ln/>
+        </p:spPr>
+        <p:txBody>
+          <a:bodyPr wrap="square" lIns="0" tIns="0" rIns="0" bIns="0" rtlCol="0" anchor="ctr"/>
+          <a:lstStyle/>
+          <a:p>
+            <a:pPr indent="0" marL="0">
+              <a:buNone/>
+            </a:pPr>
+            <a:r>
+              <a:rPr lang="en-US" sz="1100" dirty="0">
+                <a:solidFill>
+                  <a:srgbClr val="23201D"/>
+                </a:solidFill>
+                <a:latin typeface="Yu Gothic" pitchFamily="34" charset="0"/>
+                <a:ea typeface="Yu Gothic" pitchFamily="34" charset="-122"/>
+                <a:cs typeface="Yu Gothic" pitchFamily="34" charset="-120"/>
+              </a:rPr>
+              <a:t>テーマとデモ</a:t>
+            </a:r>
+            <a:endParaRPr lang="en-US" sz="1100" dirty="0"/>
+          </a:p>
+        </p:txBody>
       </p:sp>
       <p:sp>
         <p:nvSpPr>
@@ -2683,34 +4327,34 @@
         </p:nvSpPr>
         <p:spPr>
           <a:xfrm>
-            <a:off x="1033272" y="3488436"/>
-            <a:ext cx="384048" cy="384048"/>
-          </a:xfrm>
-          <a:prstGeom prst="rect">
-            <a:avLst/>
-          </a:prstGeom>
-          <a:noFill/>
-          <a:ln/>
-        </p:spPr>
-        <p:txBody>
-          <a:bodyPr wrap="square" lIns="0" tIns="0" rIns="0" bIns="0" rtlCol="0" anchor="ctr"/>
-          <a:lstStyle/>
-          <a:p>
-            <a:pPr algn="ctr" indent="0" marL="0">
-              <a:buNone/>
-            </a:pPr>
-            <a:r>
-              <a:rPr lang="en-US" sz="1400" b="1" dirty="0">
-                <a:solidFill>
-                  <a:srgbClr val="FFFFFF"/>
-                </a:solidFill>
-                <a:latin typeface="Yu Gothic" pitchFamily="34" charset="0"/>
-                <a:ea typeface="Yu Gothic" pitchFamily="34" charset="-122"/>
-                <a:cs typeface="Yu Gothic" pitchFamily="34" charset="-120"/>
-              </a:rPr>
-              <a:t>2</a:t>
-            </a:r>
-            <a:endParaRPr lang="en-US" sz="1400" dirty="0"/>
+            <a:off x="5056632" y="4873752"/>
+            <a:ext cx="1956816" cy="237744"/>
+          </a:xfrm>
+          <a:prstGeom prst="rect">
+            <a:avLst/>
+          </a:prstGeom>
+          <a:noFill/>
+          <a:ln/>
+        </p:spPr>
+        <p:txBody>
+          <a:bodyPr wrap="square" lIns="0" tIns="0" rIns="0" bIns="0" rtlCol="0" anchor="ctr"/>
+          <a:lstStyle/>
+          <a:p>
+            <a:pPr indent="0" marL="0">
+              <a:buNone/>
+            </a:pPr>
+            <a:r>
+              <a:rPr lang="en-US" sz="900" b="1" dirty="0">
+                <a:solidFill>
+                  <a:srgbClr val="B04A2F"/>
+                </a:solidFill>
+                <a:latin typeface="Yu Gothic" pitchFamily="34" charset="0"/>
+                <a:ea typeface="Yu Gothic" pitchFamily="34" charset="-122"/>
+                <a:cs typeface="Yu Gothic" pitchFamily="34" charset="-120"/>
+              </a:rPr>
+              <a:t>35-90分</a:t>
+            </a:r>
+            <a:endParaRPr lang="en-US" sz="900" dirty="0"/>
           </a:p>
         </p:txBody>
       </p:sp>
@@ -2722,24 +4366,24 @@
         </p:nvSpPr>
         <p:spPr>
           <a:xfrm>
-            <a:off x="1645920" y="3188208"/>
-            <a:ext cx="3394253" cy="984504"/>
-          </a:xfrm>
-          <a:prstGeom prst="rect">
-            <a:avLst/>
-          </a:prstGeom>
-          <a:noFill/>
-          <a:ln/>
-        </p:spPr>
-        <p:txBody>
-          <a:bodyPr wrap="square" lIns="0" tIns="0" rIns="0" bIns="0" rtlCol="0" anchor="ctr"/>
-          <a:lstStyle/>
-          <a:p>
-            <a:pPr indent="0" marL="0">
-              <a:buNone/>
-            </a:pPr>
-            <a:r>
-              <a:rPr lang="en-US" sz="1500" b="1" dirty="0">
+            <a:off x="5056632" y="5111496"/>
+            <a:ext cx="1956816" cy="384048"/>
+          </a:xfrm>
+          <a:prstGeom prst="rect">
+            <a:avLst/>
+          </a:prstGeom>
+          <a:noFill/>
+          <a:ln/>
+        </p:spPr>
+        <p:txBody>
+          <a:bodyPr wrap="square" lIns="0" tIns="0" rIns="0" bIns="0" rtlCol="0" anchor="ctr"/>
+          <a:lstStyle/>
+          <a:p>
+            <a:pPr indent="0" marL="0">
+              <a:buNone/>
+            </a:pPr>
+            <a:r>
+              <a:rPr lang="en-US" sz="1100" dirty="0">
                 <a:solidFill>
                   <a:srgbClr val="23201D"/>
                 </a:solidFill>
@@ -2747,9 +4391,9 @@
                 <a:ea typeface="Yu Gothic" pitchFamily="34" charset="-122"/>
                 <a:cs typeface="Yu Gothic" pitchFamily="34" charset="-120"/>
               </a:rPr>
-              <a:t>前提を必ず渡す</a:t>
-            </a:r>
-            <a:endParaRPr lang="en-US" sz="1500" dirty="0"/>
+              <a:t>一緒に手を動かす</a:t>
+            </a:r>
+            <a:endParaRPr lang="en-US" sz="1100" dirty="0"/>
           </a:p>
         </p:txBody>
       </p:sp>
@@ -2761,89 +4405,114 @@
         </p:nvSpPr>
         <p:spPr>
           <a:xfrm>
-            <a:off x="5146243" y="3188208"/>
-            <a:ext cx="5963717" cy="984504"/>
-          </a:xfrm>
-          <a:prstGeom prst="rect">
-            <a:avLst/>
-          </a:prstGeom>
-          <a:noFill/>
-          <a:ln/>
-        </p:spPr>
-        <p:txBody>
-          <a:bodyPr wrap="square" lIns="0" tIns="0" rIns="0" bIns="0" rtlCol="0" anchor="ctr"/>
-          <a:lstStyle/>
-          <a:p>
-            <a:pPr indent="0" marL="0">
-              <a:lnSpc>
-                <a:spcPct val="130000"/>
-              </a:lnSpc>
-              <a:buNone/>
-            </a:pPr>
-            <a:r>
-              <a:rPr lang="en-US" sz="1250" dirty="0">
-                <a:solidFill>
-                  <a:srgbClr val="5A534A"/>
-                </a:solidFill>
-                <a:latin typeface="Yu Gothic" pitchFamily="34" charset="0"/>
-                <a:ea typeface="Yu Gothic" pitchFamily="34" charset="-122"/>
-                <a:cs typeface="Yu Gothic" pitchFamily="34" charset="-120"/>
-              </a:rPr>
-              <a:t>期間・単位・季節性・特殊要因。渡さないと平凡な一般論が出ます</a:t>
-            </a:r>
-            <a:endParaRPr lang="en-US" sz="1250" dirty="0"/>
-          </a:p>
-        </p:txBody>
-      </p:sp>
-      <p:sp>
-        <p:nvSpPr>
-          <p:cNvPr id="14" name="Shape 12"/>
-          <p:cNvSpPr/>
-          <p:nvPr/>
-        </p:nvSpPr>
-        <p:spPr>
-          <a:xfrm>
-            <a:off x="777240" y="4410456"/>
-            <a:ext cx="10607040" cy="1167384"/>
-          </a:xfrm>
-          <a:prstGeom prst="rect">
-            <a:avLst/>
-          </a:prstGeom>
-          <a:solidFill>
-            <a:srgbClr val="FFFFFF"/>
-          </a:solidFill>
-          <a:ln w="12700">
-            <a:solidFill>
-              <a:srgbClr val="EDE7DB"/>
-            </a:solidFill>
-            <a:prstDash val="solid"/>
-          </a:ln>
-        </p:spPr>
-      </p:sp>
-      <p:sp>
-        <p:nvSpPr>
-          <p:cNvPr id="15" name="Shape 13"/>
-          <p:cNvSpPr/>
-          <p:nvPr/>
-        </p:nvSpPr>
-        <p:spPr>
-          <a:xfrm>
-            <a:off x="1033272" y="4802124"/>
-            <a:ext cx="384048" cy="384048"/>
-          </a:xfrm>
-          <a:prstGeom prst="ellipse">
-            <a:avLst/>
-          </a:prstGeom>
-          <a:solidFill>
-            <a:srgbClr val="B04A2F"/>
-          </a:solidFill>
-          <a:ln w="12700">
-            <a:solidFill>
-              <a:srgbClr val="B04A2F"/>
-            </a:solidFill>
-            <a:prstDash val="solid"/>
-          </a:ln>
-        </p:spPr>
+            <a:off x="7104888" y="4873752"/>
+            <a:ext cx="1956816" cy="237744"/>
+          </a:xfrm>
+          <a:prstGeom prst="rect">
+            <a:avLst/>
+          </a:prstGeom>
+          <a:noFill/>
+          <a:ln/>
+        </p:spPr>
+        <p:txBody>
+          <a:bodyPr wrap="square" lIns="0" tIns="0" rIns="0" bIns="0" rtlCol="0" anchor="ctr"/>
+          <a:lstStyle/>
+          <a:p>
+            <a:pPr indent="0" marL="0">
+              <a:buNone/>
+            </a:pPr>
+            <a:r>
+              <a:rPr lang="en-US" sz="900" b="1" dirty="0">
+                <a:solidFill>
+                  <a:srgbClr val="B04A2F"/>
+                </a:solidFill>
+                <a:latin typeface="Yu Gothic" pitchFamily="34" charset="0"/>
+                <a:ea typeface="Yu Gothic" pitchFamily="34" charset="-122"/>
+                <a:cs typeface="Yu Gothic" pitchFamily="34" charset="-120"/>
+              </a:rPr>
+              <a:t>90-105分</a:t>
+            </a:r>
+            <a:endParaRPr lang="en-US" sz="900" dirty="0"/>
+          </a:p>
+        </p:txBody>
+      </p:sp>
+      <p:sp>
+        <p:nvSpPr>
+          <p:cNvPr id="14" name="Text 12"/>
+          <p:cNvSpPr txBox="1"/>
+          <p:nvPr/>
+        </p:nvSpPr>
+        <p:spPr>
+          <a:xfrm>
+            <a:off x="7104888" y="5111496"/>
+            <a:ext cx="1956816" cy="384048"/>
+          </a:xfrm>
+          <a:prstGeom prst="rect">
+            <a:avLst/>
+          </a:prstGeom>
+          <a:noFill/>
+          <a:ln/>
+        </p:spPr>
+        <p:txBody>
+          <a:bodyPr wrap="square" lIns="0" tIns="0" rIns="0" bIns="0" rtlCol="0" anchor="ctr"/>
+          <a:lstStyle/>
+          <a:p>
+            <a:pPr indent="0" marL="0">
+              <a:buNone/>
+            </a:pPr>
+            <a:r>
+              <a:rPr lang="en-US" sz="1100" dirty="0">
+                <a:solidFill>
+                  <a:srgbClr val="23201D"/>
+                </a:solidFill>
+                <a:latin typeface="Yu Gothic" pitchFamily="34" charset="0"/>
+                <a:ea typeface="Yu Gothic" pitchFamily="34" charset="-122"/>
+                <a:cs typeface="Yu Gothic" pitchFamily="34" charset="-120"/>
+              </a:rPr>
+              <a:t>業務への組み込み</a:t>
+            </a:r>
+            <a:endParaRPr lang="en-US" sz="1100" dirty="0"/>
+          </a:p>
+        </p:txBody>
+      </p:sp>
+      <p:sp>
+        <p:nvSpPr>
+          <p:cNvPr id="15" name="Text 13"/>
+          <p:cNvSpPr txBox="1"/>
+          <p:nvPr/>
+        </p:nvSpPr>
+        <p:spPr>
+          <a:xfrm>
+            <a:off x="9153144" y="4873752"/>
+            <a:ext cx="1956816" cy="237744"/>
+          </a:xfrm>
+          <a:prstGeom prst="rect">
+            <a:avLst/>
+          </a:prstGeom>
+          <a:noFill/>
+          <a:ln/>
+        </p:spPr>
+        <p:txBody>
+          <a:bodyPr wrap="square" lIns="0" tIns="0" rIns="0" bIns="0" rtlCol="0" anchor="ctr"/>
+          <a:lstStyle/>
+          <a:p>
+            <a:pPr indent="0" marL="0">
+              <a:buNone/>
+            </a:pPr>
+            <a:r>
+              <a:rPr lang="en-US" sz="900" b="1" dirty="0">
+                <a:solidFill>
+                  <a:srgbClr val="B04A2F"/>
+                </a:solidFill>
+                <a:latin typeface="Yu Gothic" pitchFamily="34" charset="0"/>
+                <a:ea typeface="Yu Gothic" pitchFamily="34" charset="-122"/>
+                <a:cs typeface="Yu Gothic" pitchFamily="34" charset="-120"/>
+              </a:rPr>
+              <a:t>105-120分</a:t>
+            </a:r>
+            <a:endParaRPr lang="en-US" sz="900" dirty="0"/>
+          </a:p>
+        </p:txBody>
       </p:sp>
       <p:sp>
         <p:nvSpPr>
@@ -2853,34 +4522,34 @@
         </p:nvSpPr>
         <p:spPr>
           <a:xfrm>
-            <a:off x="1033272" y="4802124"/>
-            <a:ext cx="384048" cy="384048"/>
-          </a:xfrm>
-          <a:prstGeom prst="rect">
-            <a:avLst/>
-          </a:prstGeom>
-          <a:noFill/>
-          <a:ln/>
-        </p:spPr>
-        <p:txBody>
-          <a:bodyPr wrap="square" lIns="0" tIns="0" rIns="0" bIns="0" rtlCol="0" anchor="ctr"/>
-          <a:lstStyle/>
-          <a:p>
-            <a:pPr algn="ctr" indent="0" marL="0">
-              <a:buNone/>
-            </a:pPr>
-            <a:r>
-              <a:rPr lang="en-US" sz="1400" b="1" dirty="0">
-                <a:solidFill>
-                  <a:srgbClr val="FFFFFF"/>
-                </a:solidFill>
-                <a:latin typeface="Yu Gothic" pitchFamily="34" charset="0"/>
-                <a:ea typeface="Yu Gothic" pitchFamily="34" charset="-122"/>
-                <a:cs typeface="Yu Gothic" pitchFamily="34" charset="-120"/>
-              </a:rPr>
-              <a:t>3</a:t>
-            </a:r>
-            <a:endParaRPr lang="en-US" sz="1400" dirty="0"/>
+            <a:off x="9153144" y="5111496"/>
+            <a:ext cx="1956816" cy="384048"/>
+          </a:xfrm>
+          <a:prstGeom prst="rect">
+            <a:avLst/>
+          </a:prstGeom>
+          <a:noFill/>
+          <a:ln/>
+        </p:spPr>
+        <p:txBody>
+          <a:bodyPr wrap="square" lIns="0" tIns="0" rIns="0" bIns="0" rtlCol="0" anchor="ctr"/>
+          <a:lstStyle/>
+          <a:p>
+            <a:pPr indent="0" marL="0">
+              <a:buNone/>
+            </a:pPr>
+            <a:r>
+              <a:rPr lang="en-US" sz="1100" dirty="0">
+                <a:solidFill>
+                  <a:srgbClr val="23201D"/>
+                </a:solidFill>
+                <a:latin typeface="Yu Gothic" pitchFamily="34" charset="0"/>
+                <a:ea typeface="Yu Gothic" pitchFamily="34" charset="-122"/>
+                <a:cs typeface="Yu Gothic" pitchFamily="34" charset="-120"/>
+              </a:rPr>
+              <a:t>宿題・記録</a:t>
+            </a:r>
+            <a:endParaRPr lang="en-US" sz="1100" dirty="0"/>
           </a:p>
         </p:txBody>
       </p:sp>
@@ -2892,34 +4561,34 @@
         </p:nvSpPr>
         <p:spPr>
           <a:xfrm>
-            <a:off x="1645920" y="4501896"/>
-            <a:ext cx="3394253" cy="984504"/>
-          </a:xfrm>
-          <a:prstGeom prst="rect">
-            <a:avLst/>
-          </a:prstGeom>
-          <a:noFill/>
-          <a:ln/>
-        </p:spPr>
-        <p:txBody>
-          <a:bodyPr wrap="square" lIns="0" tIns="0" rIns="0" bIns="0" rtlCol="0" anchor="ctr"/>
-          <a:lstStyle/>
-          <a:p>
-            <a:pPr indent="0" marL="0">
-              <a:buNone/>
-            </a:pPr>
-            <a:r>
-              <a:rPr lang="en-US" sz="1500" b="1" dirty="0">
-                <a:solidFill>
-                  <a:srgbClr val="23201D"/>
-                </a:solidFill>
-                <a:latin typeface="Yu Gothic" pitchFamily="34" charset="0"/>
-                <a:ea typeface="Yu Gothic" pitchFamily="34" charset="-122"/>
-                <a:cs typeface="Yu Gothic" pitchFamily="34" charset="-120"/>
-              </a:rPr>
-              <a:t>「気になる点」より「反論」</a:t>
-            </a:r>
-            <a:endParaRPr lang="en-US" sz="1500" dirty="0"/>
+            <a:off x="777240" y="6382512"/>
+            <a:ext cx="7424928" cy="256032"/>
+          </a:xfrm>
+          <a:prstGeom prst="rect">
+            <a:avLst/>
+          </a:prstGeom>
+          <a:noFill/>
+          <a:ln/>
+        </p:spPr>
+        <p:txBody>
+          <a:bodyPr wrap="square" lIns="0" tIns="0" rIns="0" bIns="0" rtlCol="0" anchor="ctr"/>
+          <a:lstStyle/>
+          <a:p>
+            <a:pPr indent="0" marL="0">
+              <a:buNone/>
+            </a:pPr>
+            <a:r>
+              <a:rPr lang="en-US" sz="900" dirty="0">
+                <a:solidFill>
+                  <a:srgbClr val="8A8177"/>
+                </a:solidFill>
+                <a:latin typeface="Yu Gothic" pitchFamily="34" charset="0"/>
+                <a:ea typeface="Yu Gothic" pitchFamily="34" charset="-122"/>
+                <a:cs typeface="Yu Gothic" pitchFamily="34" charset="-120"/>
+              </a:rPr>
+              <a:t>第4回　数字と判断のAI化</a:t>
+            </a:r>
+            <a:endParaRPr lang="en-US" sz="900" dirty="0"/>
           </a:p>
         </p:txBody>
       </p:sp>
@@ -2931,101 +4600,20 @@
         </p:nvSpPr>
         <p:spPr>
           <a:xfrm>
-            <a:off x="5146243" y="4501896"/>
-            <a:ext cx="5963717" cy="984504"/>
-          </a:xfrm>
-          <a:prstGeom prst="rect">
-            <a:avLst/>
-          </a:prstGeom>
-          <a:noFill/>
-          <a:ln/>
-        </p:spPr>
-        <p:txBody>
-          <a:bodyPr wrap="square" lIns="0" tIns="0" rIns="0" bIns="0" rtlCol="0" anchor="ctr"/>
-          <a:lstStyle/>
-          <a:p>
-            <a:pPr indent="0" marL="0">
-              <a:lnSpc>
-                <a:spcPct val="130000"/>
-              </a:lnSpc>
-              <a:buNone/>
-            </a:pPr>
-            <a:r>
-              <a:rPr lang="en-US" sz="1250" dirty="0">
-                <a:solidFill>
-                  <a:srgbClr val="5A534A"/>
-                </a:solidFill>
-                <a:latin typeface="Yu Gothic" pitchFamily="34" charset="0"/>
-                <a:ea typeface="Yu Gothic" pitchFamily="34" charset="-122"/>
-                <a:cs typeface="Yu Gothic" pitchFamily="34" charset="-120"/>
-              </a:rPr>
-              <a:t>経営者は褒められに来ているのではありません</a:t>
-            </a:r>
-            <a:endParaRPr lang="en-US" sz="1250" dirty="0"/>
-          </a:p>
-        </p:txBody>
-      </p:sp>
-      <p:sp>
-        <p:nvSpPr>
-          <p:cNvPr id="19" name="Text 17"/>
-          <p:cNvSpPr txBox="1"/>
-          <p:nvPr/>
-        </p:nvSpPr>
-        <p:spPr>
-          <a:xfrm>
-            <a:off x="777240" y="5715000"/>
-            <a:ext cx="10607040" cy="457200"/>
-          </a:xfrm>
-          <a:prstGeom prst="rect">
-            <a:avLst/>
-          </a:prstGeom>
-          <a:noFill/>
-          <a:ln/>
-        </p:spPr>
-        <p:txBody>
-          <a:bodyPr wrap="square" lIns="0" tIns="0" rIns="0" bIns="0" rtlCol="0" anchor="ctr"/>
-          <a:lstStyle/>
-          <a:p>
-            <a:pPr indent="0" marL="0">
-              <a:buNone/>
-            </a:pPr>
-            <a:r>
-              <a:rPr lang="en-US" sz="1200" b="1" dirty="0">
-                <a:solidFill>
-                  <a:srgbClr val="B04A2F"/>
-                </a:solidFill>
-                <a:latin typeface="Yu Gothic" pitchFamily="34" charset="0"/>
-                <a:ea typeface="Yu Gothic" pitchFamily="34" charset="-122"/>
-                <a:cs typeface="Yu Gothic" pitchFamily="34" charset="-120"/>
-              </a:rPr>
-              <a:t>この3つを外すと、間違った数字を社外に出す事故が起きます。</a:t>
-            </a:r>
-            <a:endParaRPr lang="en-US" sz="1200" dirty="0"/>
-          </a:p>
-        </p:txBody>
-      </p:sp>
-      <p:sp>
-        <p:nvSpPr>
-          <p:cNvPr id="20" name="Text 18"/>
-          <p:cNvSpPr txBox="1"/>
-          <p:nvPr/>
-        </p:nvSpPr>
-        <p:spPr>
-          <a:xfrm>
-            <a:off x="777240" y="6355080"/>
-            <a:ext cx="7424928" cy="274320"/>
-          </a:xfrm>
-          <a:prstGeom prst="rect">
-            <a:avLst/>
-          </a:prstGeom>
-          <a:noFill/>
-          <a:ln/>
-        </p:spPr>
-        <p:txBody>
-          <a:bodyPr wrap="square" lIns="0" tIns="0" rIns="0" bIns="0" rtlCol="0" anchor="ctr"/>
-          <a:lstStyle/>
-          <a:p>
-            <a:pPr indent="0" marL="0">
+            <a:off x="8202168" y="6382512"/>
+            <a:ext cx="3182112" cy="256032"/>
+          </a:xfrm>
+          <a:prstGeom prst="rect">
+            <a:avLst/>
+          </a:prstGeom>
+          <a:noFill/>
+          <a:ln/>
+        </p:spPr>
+        <p:txBody>
+          <a:bodyPr wrap="square" lIns="0" tIns="0" rIns="0" bIns="0" rtlCol="0" anchor="ctr"/>
+          <a:lstStyle/>
+          <a:p>
+            <a:pPr algn="r" indent="0" marL="0">
               <a:buNone/>
             </a:pPr>
             <a:r>
@@ -3037,46 +4625,7 @@
                 <a:ea typeface="Yu Gothic" pitchFamily="34" charset="-122"/>
                 <a:cs typeface="Yu Gothic" pitchFamily="34" charset="-120"/>
               </a:rPr>
-              <a:t>第4回　数字と判断のAI化</a:t>
-            </a:r>
-            <a:endParaRPr lang="en-US" sz="900" dirty="0"/>
-          </a:p>
-        </p:txBody>
-      </p:sp>
-      <p:sp>
-        <p:nvSpPr>
-          <p:cNvPr id="21" name="Text 19"/>
-          <p:cNvSpPr txBox="1"/>
-          <p:nvPr/>
-        </p:nvSpPr>
-        <p:spPr>
-          <a:xfrm>
-            <a:off x="8202168" y="6355080"/>
-            <a:ext cx="3182112" cy="274320"/>
-          </a:xfrm>
-          <a:prstGeom prst="rect">
-            <a:avLst/>
-          </a:prstGeom>
-          <a:noFill/>
-          <a:ln/>
-        </p:spPr>
-        <p:txBody>
-          <a:bodyPr wrap="square" lIns="0" tIns="0" rIns="0" bIns="0" rtlCol="0" anchor="ctr"/>
-          <a:lstStyle/>
-          <a:p>
-            <a:pPr algn="r" indent="0" marL="0">
-              <a:buNone/>
-            </a:pPr>
-            <a:r>
-              <a:rPr lang="en-US" sz="900" dirty="0">
-                <a:solidFill>
-                  <a:srgbClr val="8A8177"/>
-                </a:solidFill>
-                <a:latin typeface="Yu Gothic" pitchFamily="34" charset="0"/>
-                <a:ea typeface="Yu Gothic" pitchFamily="34" charset="-122"/>
-                <a:cs typeface="Yu Gothic" pitchFamily="34" charset="-120"/>
-              </a:rPr>
-              <a:t>考え方</a:t>
+              <a:t>ゴール</a:t>
             </a:r>
             <a:endParaRPr lang="en-US" sz="900" dirty="0"/>
           </a:p>
@@ -3122,7 +4671,7 @@
         </p:nvSpPr>
         <p:spPr>
           <a:xfrm>
-            <a:off x="777240" y="640080"/>
+            <a:off x="777240" y="566928"/>
             <a:ext cx="10607040" cy="274320"/>
           </a:xfrm>
           <a:prstGeom prst="rect">
@@ -3147,7 +4696,7 @@
                 <a:ea typeface="Yu Gothic" pitchFamily="34" charset="-122"/>
                 <a:cs typeface="Yu Gothic" pitchFamily="34" charset="-120"/>
               </a:rPr>
-              <a:t>実演</a:t>
+              <a:t>考え方</a:t>
             </a:r>
             <a:endParaRPr lang="en-US" sz="1100" dirty="0"/>
           </a:p>
@@ -3161,7 +4710,7 @@
         </p:nvSpPr>
         <p:spPr>
           <a:xfrm>
-            <a:off x="777240" y="960120"/>
+            <a:off x="777240" y="896112"/>
             <a:ext cx="10607040" cy="640080"/>
           </a:xfrm>
           <a:prstGeom prst="rect">
@@ -3178,7 +4727,7 @@
               <a:buNone/>
             </a:pPr>
             <a:r>
-              <a:rPr lang="en-US" sz="2700" b="1" dirty="0">
+              <a:rPr lang="en-US" sz="2600" b="1" dirty="0">
                 <a:solidFill>
                   <a:srgbClr val="23201D"/>
                 </a:solidFill>
@@ -3186,9 +4735,9 @@
                 <a:ea typeface="Yu Gothic" pitchFamily="34" charset="-122"/>
                 <a:cs typeface="Yu Gothic" pitchFamily="34" charset="-120"/>
               </a:rPr>
-              <a:t>実演します</a:t>
-            </a:r>
-            <a:endParaRPr lang="en-US" sz="2700" dirty="0"/>
+              <a:t>数字を読ませるときの3原則</a:t>
+            </a:r>
+            <a:endParaRPr lang="en-US" sz="2600" dirty="0"/>
           </a:p>
         </p:txBody>
       </p:sp>
@@ -3200,18 +4749,18 @@
         </p:nvSpPr>
         <p:spPr>
           <a:xfrm>
-            <a:off x="777240" y="1828800"/>
-            <a:ext cx="4983480" cy="3566160"/>
+            <a:off x="777240" y="1700784"/>
+            <a:ext cx="10607040" cy="1188720"/>
           </a:xfrm>
           <a:prstGeom prst="rect">
             <a:avLst/>
           </a:prstGeom>
           <a:solidFill>
-            <a:srgbClr val="EDE7DB"/>
+            <a:srgbClr val="FFFFFF"/>
           </a:solidFill>
-          <a:ln w="15875">
+          <a:ln w="12700">
             <a:solidFill>
-              <a:srgbClr val="8A8177"/>
+              <a:srgbClr val="EDE7DB"/>
             </a:solidFill>
             <a:prstDash val="solid"/>
           </a:ln>
@@ -3225,455 +4774,8 @@
         </p:nvSpPr>
         <p:spPr>
           <a:xfrm>
-            <a:off x="777240" y="1828800"/>
-            <a:ext cx="4983480" cy="566928"/>
-          </a:xfrm>
-          <a:prstGeom prst="rect">
-            <a:avLst/>
-          </a:prstGeom>
-          <a:solidFill>
-            <a:srgbClr val="8A8177"/>
-          </a:solidFill>
-          <a:ln w="12700">
-            <a:solidFill>
-              <a:srgbClr val="333333"/>
-            </a:solidFill>
-            <a:prstDash val="solid"/>
-          </a:ln>
-        </p:spPr>
-      </p:sp>
-      <p:sp>
-        <p:nvSpPr>
-          <p:cNvPr id="6" name="Text 4"/>
-          <p:cNvSpPr txBox="1"/>
-          <p:nvPr/>
-        </p:nvSpPr>
-        <p:spPr>
-          <a:xfrm>
-            <a:off x="1005840" y="1883664"/>
-            <a:ext cx="4526280" cy="457200"/>
-          </a:xfrm>
-          <a:prstGeom prst="rect">
-            <a:avLst/>
-          </a:prstGeom>
-          <a:noFill/>
-          <a:ln/>
-        </p:spPr>
-        <p:txBody>
-          <a:bodyPr wrap="square" lIns="0" tIns="0" rIns="0" bIns="0" rtlCol="0" anchor="ctr"/>
-          <a:lstStyle/>
-          <a:p>
-            <a:pPr indent="0" marL="0">
-              <a:buNone/>
-            </a:pPr>
-            <a:r>
-              <a:rPr lang="en-US" sz="1400" b="1" dirty="0">
-                <a:solidFill>
-                  <a:srgbClr val="FFFFFF"/>
-                </a:solidFill>
-                <a:latin typeface="Yu Gothic" pitchFamily="34" charset="0"/>
-                <a:ea typeface="Yu Gothic" pitchFamily="34" charset="-122"/>
-                <a:cs typeface="Yu Gothic" pitchFamily="34" charset="-120"/>
-              </a:rPr>
-              <a:t>表を投げて「分析して」</a:t>
-            </a:r>
-            <a:endParaRPr lang="en-US" sz="1400" dirty="0"/>
-          </a:p>
-        </p:txBody>
-      </p:sp>
-      <p:sp>
-        <p:nvSpPr>
-          <p:cNvPr id="7" name="Text 5"/>
-          <p:cNvSpPr txBox="1"/>
-          <p:nvPr/>
-        </p:nvSpPr>
-        <p:spPr>
-          <a:xfrm>
-            <a:off x="1097280" y="2606040"/>
-            <a:ext cx="4343400" cy="548640"/>
-          </a:xfrm>
-          <a:prstGeom prst="rect">
-            <a:avLst/>
-          </a:prstGeom>
-          <a:noFill/>
-          <a:ln/>
-        </p:spPr>
-        <p:txBody>
-          <a:bodyPr wrap="square" lIns="0" tIns="0" rIns="0" bIns="0" rtlCol="0" anchor="ctr"/>
-          <a:lstStyle/>
-          <a:p>
-            <a:pPr indent="0" marL="0">
-              <a:lnSpc>
-                <a:spcPct val="125000"/>
-              </a:lnSpc>
-              <a:buNone/>
-            </a:pPr>
-            <a:r>
-              <a:rPr lang="en-US" sz="1300" dirty="0">
-                <a:solidFill>
-                  <a:srgbClr val="23201D"/>
-                </a:solidFill>
-                <a:latin typeface="Yu Gothic" pitchFamily="34" charset="0"/>
-                <a:ea typeface="Yu Gothic" pitchFamily="34" charset="-122"/>
-                <a:cs typeface="Yu Gothic" pitchFamily="34" charset="-120"/>
-              </a:rPr>
-              <a:t>もっともらしい要約が出てくる</a:t>
-            </a:r>
-            <a:endParaRPr lang="en-US" sz="1300" dirty="0"/>
-          </a:p>
-        </p:txBody>
-      </p:sp>
-      <p:sp>
-        <p:nvSpPr>
-          <p:cNvPr id="8" name="Text 6"/>
-          <p:cNvSpPr txBox="1"/>
-          <p:nvPr/>
-        </p:nvSpPr>
-        <p:spPr>
-          <a:xfrm>
-            <a:off x="1097280" y="3172968"/>
-            <a:ext cx="4343400" cy="548640"/>
-          </a:xfrm>
-          <a:prstGeom prst="rect">
-            <a:avLst/>
-          </a:prstGeom>
-          <a:noFill/>
-          <a:ln/>
-        </p:spPr>
-        <p:txBody>
-          <a:bodyPr wrap="square" lIns="0" tIns="0" rIns="0" bIns="0" rtlCol="0" anchor="ctr"/>
-          <a:lstStyle/>
-          <a:p>
-            <a:pPr indent="0" marL="0">
-              <a:lnSpc>
-                <a:spcPct val="125000"/>
-              </a:lnSpc>
-              <a:buNone/>
-            </a:pPr>
-            <a:r>
-              <a:rPr lang="en-US" sz="1300" dirty="0">
-                <a:solidFill>
-                  <a:srgbClr val="23201D"/>
-                </a:solidFill>
-                <a:latin typeface="Yu Gothic" pitchFamily="34" charset="0"/>
-                <a:ea typeface="Yu Gothic" pitchFamily="34" charset="-122"/>
-                <a:cs typeface="Yu Gothic" pitchFamily="34" charset="-120"/>
-              </a:rPr>
-              <a:t>合計を電卓で確かめると、ずれていることがある</a:t>
-            </a:r>
-            <a:endParaRPr lang="en-US" sz="1300" dirty="0"/>
-          </a:p>
-        </p:txBody>
-      </p:sp>
-      <p:sp>
-        <p:nvSpPr>
-          <p:cNvPr id="9" name="Text 7"/>
-          <p:cNvSpPr txBox="1"/>
-          <p:nvPr/>
-        </p:nvSpPr>
-        <p:spPr>
-          <a:xfrm>
-            <a:off x="1097280" y="3739896"/>
-            <a:ext cx="4343400" cy="548640"/>
-          </a:xfrm>
-          <a:prstGeom prst="rect">
-            <a:avLst/>
-          </a:prstGeom>
-          <a:noFill/>
-          <a:ln/>
-        </p:spPr>
-        <p:txBody>
-          <a:bodyPr wrap="square" lIns="0" tIns="0" rIns="0" bIns="0" rtlCol="0" anchor="ctr"/>
-          <a:lstStyle/>
-          <a:p>
-            <a:pPr indent="0" marL="0">
-              <a:lnSpc>
-                <a:spcPct val="125000"/>
-              </a:lnSpc>
-              <a:buNone/>
-            </a:pPr>
-            <a:r>
-              <a:rPr lang="en-US" sz="1300" dirty="0">
-                <a:solidFill>
-                  <a:srgbClr val="23201D"/>
-                </a:solidFill>
-                <a:latin typeface="Yu Gothic" pitchFamily="34" charset="0"/>
-                <a:ea typeface="Yu Gothic" pitchFamily="34" charset="-122"/>
-                <a:cs typeface="Yu Gothic" pitchFamily="34" charset="-120"/>
-              </a:rPr>
-              <a:t>このまま社外資料に使うと事故になる</a:t>
-            </a:r>
-            <a:endParaRPr lang="en-US" sz="1300" dirty="0"/>
-          </a:p>
-        </p:txBody>
-      </p:sp>
-      <p:sp>
-        <p:nvSpPr>
-          <p:cNvPr id="10" name="Shape 8"/>
-          <p:cNvSpPr/>
-          <p:nvPr/>
-        </p:nvSpPr>
-        <p:spPr>
-          <a:xfrm>
-            <a:off x="6400800" y="1828800"/>
-            <a:ext cx="4983480" cy="3566160"/>
-          </a:xfrm>
-          <a:prstGeom prst="rect">
-            <a:avLst/>
-          </a:prstGeom>
-          <a:solidFill>
-            <a:srgbClr val="FFFFFF"/>
-          </a:solidFill>
-          <a:ln w="15875">
-            <a:solidFill>
-              <a:srgbClr val="3B6B4A"/>
-            </a:solidFill>
-            <a:prstDash val="solid"/>
-          </a:ln>
-        </p:spPr>
-      </p:sp>
-      <p:sp>
-        <p:nvSpPr>
-          <p:cNvPr id="11" name="Shape 9"/>
-          <p:cNvSpPr/>
-          <p:nvPr/>
-        </p:nvSpPr>
-        <p:spPr>
-          <a:xfrm>
-            <a:off x="6400800" y="1828800"/>
-            <a:ext cx="4983480" cy="566928"/>
-          </a:xfrm>
-          <a:prstGeom prst="rect">
-            <a:avLst/>
-          </a:prstGeom>
-          <a:solidFill>
-            <a:srgbClr val="3B6B4A"/>
-          </a:solidFill>
-          <a:ln w="12700">
-            <a:solidFill>
-              <a:srgbClr val="333333"/>
-            </a:solidFill>
-            <a:prstDash val="solid"/>
-          </a:ln>
-        </p:spPr>
-      </p:sp>
-      <p:sp>
-        <p:nvSpPr>
-          <p:cNvPr id="12" name="Text 10"/>
-          <p:cNvSpPr txBox="1"/>
-          <p:nvPr/>
-        </p:nvSpPr>
-        <p:spPr>
-          <a:xfrm>
-            <a:off x="6629400" y="1883664"/>
-            <a:ext cx="4526280" cy="457200"/>
-          </a:xfrm>
-          <a:prstGeom prst="rect">
-            <a:avLst/>
-          </a:prstGeom>
-          <a:noFill/>
-          <a:ln/>
-        </p:spPr>
-        <p:txBody>
-          <a:bodyPr wrap="square" lIns="0" tIns="0" rIns="0" bIns="0" rtlCol="0" anchor="ctr"/>
-          <a:lstStyle/>
-          <a:p>
-            <a:pPr indent="0" marL="0">
-              <a:buNone/>
-            </a:pPr>
-            <a:r>
-              <a:rPr lang="en-US" sz="1400" b="1" dirty="0">
-                <a:solidFill>
-                  <a:srgbClr val="FFFFFF"/>
-                </a:solidFill>
-                <a:latin typeface="Yu Gothic" pitchFamily="34" charset="0"/>
-                <a:ea typeface="Yu Gothic" pitchFamily="34" charset="-122"/>
-                <a:cs typeface="Yu Gothic" pitchFamily="34" charset="-120"/>
-              </a:rPr>
-              <a:t>役割を分ける</a:t>
-            </a:r>
-            <a:endParaRPr lang="en-US" sz="1400" dirty="0"/>
-          </a:p>
-        </p:txBody>
-      </p:sp>
-      <p:sp>
-        <p:nvSpPr>
-          <p:cNvPr id="13" name="Text 11"/>
-          <p:cNvSpPr txBox="1"/>
-          <p:nvPr/>
-        </p:nvSpPr>
-        <p:spPr>
-          <a:xfrm>
-            <a:off x="6720840" y="2606040"/>
-            <a:ext cx="4343400" cy="548640"/>
-          </a:xfrm>
-          <a:prstGeom prst="rect">
-            <a:avLst/>
-          </a:prstGeom>
-          <a:noFill/>
-          <a:ln/>
-        </p:spPr>
-        <p:txBody>
-          <a:bodyPr wrap="square" lIns="0" tIns="0" rIns="0" bIns="0" rtlCol="0" anchor="ctr"/>
-          <a:lstStyle/>
-          <a:p>
-            <a:pPr indent="0" marL="0">
-              <a:lnSpc>
-                <a:spcPct val="125000"/>
-              </a:lnSpc>
-              <a:buNone/>
-            </a:pPr>
-            <a:r>
-              <a:rPr lang="en-US" sz="1300" dirty="0">
-                <a:solidFill>
-                  <a:srgbClr val="23201D"/>
-                </a:solidFill>
-                <a:latin typeface="Yu Gothic" pitchFamily="34" charset="0"/>
-                <a:ea typeface="Yu Gothic" pitchFamily="34" charset="-122"/>
-                <a:cs typeface="Yu Gothic" pitchFamily="34" charset="-120"/>
-              </a:rPr>
-              <a:t>集計・計算 → 表計算ソフト</a:t>
-            </a:r>
-            <a:endParaRPr lang="en-US" sz="1300" dirty="0"/>
-          </a:p>
-        </p:txBody>
-      </p:sp>
-      <p:sp>
-        <p:nvSpPr>
-          <p:cNvPr id="14" name="Text 12"/>
-          <p:cNvSpPr txBox="1"/>
-          <p:nvPr/>
-        </p:nvSpPr>
-        <p:spPr>
-          <a:xfrm>
-            <a:off x="6720840" y="3172968"/>
-            <a:ext cx="4343400" cy="548640"/>
-          </a:xfrm>
-          <a:prstGeom prst="rect">
-            <a:avLst/>
-          </a:prstGeom>
-          <a:noFill/>
-          <a:ln/>
-        </p:spPr>
-        <p:txBody>
-          <a:bodyPr wrap="square" lIns="0" tIns="0" rIns="0" bIns="0" rtlCol="0" anchor="ctr"/>
-          <a:lstStyle/>
-          <a:p>
-            <a:pPr indent="0" marL="0">
-              <a:lnSpc>
-                <a:spcPct val="125000"/>
-              </a:lnSpc>
-              <a:buNone/>
-            </a:pPr>
-            <a:r>
-              <a:rPr lang="en-US" sz="1300" dirty="0">
-                <a:solidFill>
-                  <a:srgbClr val="23201D"/>
-                </a:solidFill>
-                <a:latin typeface="Yu Gothic" pitchFamily="34" charset="0"/>
-                <a:ea typeface="Yu Gothic" pitchFamily="34" charset="-122"/>
-                <a:cs typeface="Yu Gothic" pitchFamily="34" charset="-120"/>
-              </a:rPr>
-              <a:t>なぜこうなったかの仮説 → AI</a:t>
-            </a:r>
-            <a:endParaRPr lang="en-US" sz="1300" dirty="0"/>
-          </a:p>
-        </p:txBody>
-      </p:sp>
-      <p:sp>
-        <p:nvSpPr>
-          <p:cNvPr id="15" name="Text 13"/>
-          <p:cNvSpPr txBox="1"/>
-          <p:nvPr/>
-        </p:nvSpPr>
-        <p:spPr>
-          <a:xfrm>
-            <a:off x="6720840" y="3739896"/>
-            <a:ext cx="4343400" cy="548640"/>
-          </a:xfrm>
-          <a:prstGeom prst="rect">
-            <a:avLst/>
-          </a:prstGeom>
-          <a:noFill/>
-          <a:ln/>
-        </p:spPr>
-        <p:txBody>
-          <a:bodyPr wrap="square" lIns="0" tIns="0" rIns="0" bIns="0" rtlCol="0" anchor="ctr"/>
-          <a:lstStyle/>
-          <a:p>
-            <a:pPr indent="0" marL="0">
-              <a:lnSpc>
-                <a:spcPct val="125000"/>
-              </a:lnSpc>
-              <a:buNone/>
-            </a:pPr>
-            <a:r>
-              <a:rPr lang="en-US" sz="1300" dirty="0">
-                <a:solidFill>
-                  <a:srgbClr val="23201D"/>
-                </a:solidFill>
-                <a:latin typeface="Yu Gothic" pitchFamily="34" charset="0"/>
-                <a:ea typeface="Yu Gothic" pitchFamily="34" charset="-122"/>
-                <a:cs typeface="Yu Gothic" pitchFamily="34" charset="-120"/>
-              </a:rPr>
-              <a:t>確かめるべきデータ → AI</a:t>
-            </a:r>
-            <a:endParaRPr lang="en-US" sz="1300" dirty="0"/>
-          </a:p>
-        </p:txBody>
-      </p:sp>
-      <p:sp>
-        <p:nvSpPr>
-          <p:cNvPr id="16" name="Text 14"/>
-          <p:cNvSpPr txBox="1"/>
-          <p:nvPr/>
-        </p:nvSpPr>
-        <p:spPr>
-          <a:xfrm>
-            <a:off x="6720840" y="4306824"/>
-            <a:ext cx="4343400" cy="548640"/>
-          </a:xfrm>
-          <a:prstGeom prst="rect">
-            <a:avLst/>
-          </a:prstGeom>
-          <a:noFill/>
-          <a:ln/>
-        </p:spPr>
-        <p:txBody>
-          <a:bodyPr wrap="square" lIns="0" tIns="0" rIns="0" bIns="0" rtlCol="0" anchor="ctr"/>
-          <a:lstStyle/>
-          <a:p>
-            <a:pPr indent="0" marL="0">
-              <a:lnSpc>
-                <a:spcPct val="125000"/>
-              </a:lnSpc>
-              <a:buNone/>
-            </a:pPr>
-            <a:r>
-              <a:rPr lang="en-US" sz="1300" dirty="0">
-                <a:solidFill>
-                  <a:srgbClr val="23201D"/>
-                </a:solidFill>
-                <a:latin typeface="Yu Gothic" pitchFamily="34" charset="0"/>
-                <a:ea typeface="Yu Gothic" pitchFamily="34" charset="-122"/>
-                <a:cs typeface="Yu Gothic" pitchFamily="34" charset="-120"/>
-              </a:rPr>
-              <a:t>来月やること → ご自身が決める</a:t>
-            </a:r>
-            <a:endParaRPr lang="en-US" sz="1300" dirty="0"/>
-          </a:p>
-        </p:txBody>
-      </p:sp>
-      <p:sp>
-        <p:nvSpPr>
-          <p:cNvPr id="17" name="Shape 15"/>
-          <p:cNvSpPr/>
-          <p:nvPr/>
-        </p:nvSpPr>
-        <p:spPr>
-          <a:xfrm>
-            <a:off x="5815584" y="3337560"/>
-            <a:ext cx="512064" cy="512064"/>
+            <a:off x="1014984" y="2112264"/>
+            <a:ext cx="365760" cy="365760"/>
           </a:xfrm>
           <a:prstGeom prst="ellipse">
             <a:avLst/>
@@ -3691,40 +4793,461 @@
       </p:sp>
       <p:sp>
         <p:nvSpPr>
+          <p:cNvPr id="6" name="Text 4"/>
+          <p:cNvSpPr txBox="1"/>
+          <p:nvPr/>
+        </p:nvSpPr>
+        <p:spPr>
+          <a:xfrm>
+            <a:off x="1014984" y="2112264"/>
+            <a:ext cx="365760" cy="365760"/>
+          </a:xfrm>
+          <a:prstGeom prst="rect">
+            <a:avLst/>
+          </a:prstGeom>
+          <a:noFill/>
+          <a:ln/>
+        </p:spPr>
+        <p:txBody>
+          <a:bodyPr wrap="square" lIns="0" tIns="0" rIns="0" bIns="0" rtlCol="0" anchor="ctr"/>
+          <a:lstStyle/>
+          <a:p>
+            <a:pPr algn="ctr" indent="0" marL="0">
+              <a:buNone/>
+            </a:pPr>
+            <a:r>
+              <a:rPr lang="en-US" sz="1300" b="1" dirty="0">
+                <a:solidFill>
+                  <a:srgbClr val="FFFFFF"/>
+                </a:solidFill>
+                <a:latin typeface="Yu Gothic" pitchFamily="34" charset="0"/>
+                <a:ea typeface="Yu Gothic" pitchFamily="34" charset="-122"/>
+                <a:cs typeface="Yu Gothic" pitchFamily="34" charset="-120"/>
+              </a:rPr>
+              <a:t>1</a:t>
+            </a:r>
+            <a:endParaRPr lang="en-US" sz="1300" dirty="0"/>
+          </a:p>
+        </p:txBody>
+      </p:sp>
+      <p:sp>
+        <p:nvSpPr>
+          <p:cNvPr id="7" name="Text 5"/>
+          <p:cNvSpPr txBox="1"/>
+          <p:nvPr/>
+        </p:nvSpPr>
+        <p:spPr>
+          <a:xfrm>
+            <a:off x="1600200" y="1773936"/>
+            <a:ext cx="3182112" cy="1042416"/>
+          </a:xfrm>
+          <a:prstGeom prst="rect">
+            <a:avLst/>
+          </a:prstGeom>
+          <a:noFill/>
+          <a:ln/>
+        </p:spPr>
+        <p:txBody>
+          <a:bodyPr wrap="square" lIns="0" tIns="0" rIns="0" bIns="0" rtlCol="0" anchor="ctr"/>
+          <a:lstStyle/>
+          <a:p>
+            <a:pPr indent="0" marL="0">
+              <a:buNone/>
+            </a:pPr>
+            <a:r>
+              <a:rPr lang="en-US" sz="1450" b="1" dirty="0">
+                <a:solidFill>
+                  <a:srgbClr val="23201D"/>
+                </a:solidFill>
+                <a:latin typeface="Yu Gothic" pitchFamily="34" charset="0"/>
+                <a:ea typeface="Yu Gothic" pitchFamily="34" charset="-122"/>
+                <a:cs typeface="Yu Gothic" pitchFamily="34" charset="-120"/>
+              </a:rPr>
+              <a:t>計算そのものは信用しない</a:t>
+            </a:r>
+            <a:endParaRPr lang="en-US" sz="1450" dirty="0"/>
+          </a:p>
+        </p:txBody>
+      </p:sp>
+      <p:sp>
+        <p:nvSpPr>
+          <p:cNvPr id="8" name="Text 6"/>
+          <p:cNvSpPr txBox="1"/>
+          <p:nvPr/>
+        </p:nvSpPr>
+        <p:spPr>
+          <a:xfrm>
+            <a:off x="4888382" y="1773936"/>
+            <a:ext cx="6267298" cy="1042416"/>
+          </a:xfrm>
+          <a:prstGeom prst="rect">
+            <a:avLst/>
+          </a:prstGeom>
+          <a:noFill/>
+          <a:ln/>
+        </p:spPr>
+        <p:txBody>
+          <a:bodyPr wrap="square" lIns="0" tIns="0" rIns="0" bIns="0" rtlCol="0" anchor="ctr"/>
+          <a:lstStyle/>
+          <a:p>
+            <a:pPr indent="0" marL="0">
+              <a:lnSpc>
+                <a:spcPct val="130000"/>
+              </a:lnSpc>
+              <a:buNone/>
+            </a:pPr>
+            <a:r>
+              <a:rPr lang="en-US" sz="1200" dirty="0">
+                <a:solidFill>
+                  <a:srgbClr val="5A534A"/>
+                </a:solidFill>
+                <a:latin typeface="Yu Gothic" pitchFamily="34" charset="0"/>
+                <a:ea typeface="Yu Gothic" pitchFamily="34" charset="-122"/>
+                <a:cs typeface="Yu Gothic" pitchFamily="34" charset="-120"/>
+              </a:rPr>
+              <a:t>集計は表計算にやらせ、AIには「意味」を語らせます</a:t>
+            </a:r>
+            <a:endParaRPr lang="en-US" sz="1200" dirty="0"/>
+          </a:p>
+        </p:txBody>
+      </p:sp>
+      <p:sp>
+        <p:nvSpPr>
+          <p:cNvPr id="9" name="Shape 7"/>
+          <p:cNvSpPr/>
+          <p:nvPr/>
+        </p:nvSpPr>
+        <p:spPr>
+          <a:xfrm>
+            <a:off x="777240" y="3017520"/>
+            <a:ext cx="10607040" cy="1188720"/>
+          </a:xfrm>
+          <a:prstGeom prst="rect">
+            <a:avLst/>
+          </a:prstGeom>
+          <a:solidFill>
+            <a:srgbClr val="FFFFFF"/>
+          </a:solidFill>
+          <a:ln w="12700">
+            <a:solidFill>
+              <a:srgbClr val="EDE7DB"/>
+            </a:solidFill>
+            <a:prstDash val="solid"/>
+          </a:ln>
+        </p:spPr>
+      </p:sp>
+      <p:sp>
+        <p:nvSpPr>
+          <p:cNvPr id="10" name="Shape 8"/>
+          <p:cNvSpPr/>
+          <p:nvPr/>
+        </p:nvSpPr>
+        <p:spPr>
+          <a:xfrm>
+            <a:off x="1014984" y="3429000"/>
+            <a:ext cx="365760" cy="365760"/>
+          </a:xfrm>
+          <a:prstGeom prst="ellipse">
+            <a:avLst/>
+          </a:prstGeom>
+          <a:solidFill>
+            <a:srgbClr val="B04A2F"/>
+          </a:solidFill>
+          <a:ln w="12700">
+            <a:solidFill>
+              <a:srgbClr val="333333"/>
+            </a:solidFill>
+            <a:prstDash val="solid"/>
+          </a:ln>
+        </p:spPr>
+      </p:sp>
+      <p:sp>
+        <p:nvSpPr>
+          <p:cNvPr id="11" name="Text 9"/>
+          <p:cNvSpPr txBox="1"/>
+          <p:nvPr/>
+        </p:nvSpPr>
+        <p:spPr>
+          <a:xfrm>
+            <a:off x="1014984" y="3429000"/>
+            <a:ext cx="365760" cy="365760"/>
+          </a:xfrm>
+          <a:prstGeom prst="rect">
+            <a:avLst/>
+          </a:prstGeom>
+          <a:noFill/>
+          <a:ln/>
+        </p:spPr>
+        <p:txBody>
+          <a:bodyPr wrap="square" lIns="0" tIns="0" rIns="0" bIns="0" rtlCol="0" anchor="ctr"/>
+          <a:lstStyle/>
+          <a:p>
+            <a:pPr algn="ctr" indent="0" marL="0">
+              <a:buNone/>
+            </a:pPr>
+            <a:r>
+              <a:rPr lang="en-US" sz="1300" b="1" dirty="0">
+                <a:solidFill>
+                  <a:srgbClr val="FFFFFF"/>
+                </a:solidFill>
+                <a:latin typeface="Yu Gothic" pitchFamily="34" charset="0"/>
+                <a:ea typeface="Yu Gothic" pitchFamily="34" charset="-122"/>
+                <a:cs typeface="Yu Gothic" pitchFamily="34" charset="-120"/>
+              </a:rPr>
+              <a:t>2</a:t>
+            </a:r>
+            <a:endParaRPr lang="en-US" sz="1300" dirty="0"/>
+          </a:p>
+        </p:txBody>
+      </p:sp>
+      <p:sp>
+        <p:nvSpPr>
+          <p:cNvPr id="12" name="Text 10"/>
+          <p:cNvSpPr txBox="1"/>
+          <p:nvPr/>
+        </p:nvSpPr>
+        <p:spPr>
+          <a:xfrm>
+            <a:off x="1600200" y="3090672"/>
+            <a:ext cx="3182112" cy="1042416"/>
+          </a:xfrm>
+          <a:prstGeom prst="rect">
+            <a:avLst/>
+          </a:prstGeom>
+          <a:noFill/>
+          <a:ln/>
+        </p:spPr>
+        <p:txBody>
+          <a:bodyPr wrap="square" lIns="0" tIns="0" rIns="0" bIns="0" rtlCol="0" anchor="ctr"/>
+          <a:lstStyle/>
+          <a:p>
+            <a:pPr indent="0" marL="0">
+              <a:buNone/>
+            </a:pPr>
+            <a:r>
+              <a:rPr lang="en-US" sz="1450" b="1" dirty="0">
+                <a:solidFill>
+                  <a:srgbClr val="23201D"/>
+                </a:solidFill>
+                <a:latin typeface="Yu Gothic" pitchFamily="34" charset="0"/>
+                <a:ea typeface="Yu Gothic" pitchFamily="34" charset="-122"/>
+                <a:cs typeface="Yu Gothic" pitchFamily="34" charset="-120"/>
+              </a:rPr>
+              <a:t>前提を必ず渡す</a:t>
+            </a:r>
+            <a:endParaRPr lang="en-US" sz="1450" dirty="0"/>
+          </a:p>
+        </p:txBody>
+      </p:sp>
+      <p:sp>
+        <p:nvSpPr>
+          <p:cNvPr id="13" name="Text 11"/>
+          <p:cNvSpPr txBox="1"/>
+          <p:nvPr/>
+        </p:nvSpPr>
+        <p:spPr>
+          <a:xfrm>
+            <a:off x="4888382" y="3090672"/>
+            <a:ext cx="6267298" cy="1042416"/>
+          </a:xfrm>
+          <a:prstGeom prst="rect">
+            <a:avLst/>
+          </a:prstGeom>
+          <a:noFill/>
+          <a:ln/>
+        </p:spPr>
+        <p:txBody>
+          <a:bodyPr wrap="square" lIns="0" tIns="0" rIns="0" bIns="0" rtlCol="0" anchor="ctr"/>
+          <a:lstStyle/>
+          <a:p>
+            <a:pPr indent="0" marL="0">
+              <a:lnSpc>
+                <a:spcPct val="130000"/>
+              </a:lnSpc>
+              <a:buNone/>
+            </a:pPr>
+            <a:r>
+              <a:rPr lang="en-US" sz="1200" dirty="0">
+                <a:solidFill>
+                  <a:srgbClr val="5A534A"/>
+                </a:solidFill>
+                <a:latin typeface="Yu Gothic" pitchFamily="34" charset="0"/>
+                <a:ea typeface="Yu Gothic" pitchFamily="34" charset="-122"/>
+                <a:cs typeface="Yu Gothic" pitchFamily="34" charset="-120"/>
+              </a:rPr>
+              <a:t>期間・単位・季節性・特殊要因。渡さないと平凡な一般論が出ます</a:t>
+            </a:r>
+            <a:endParaRPr lang="en-US" sz="1200" dirty="0"/>
+          </a:p>
+        </p:txBody>
+      </p:sp>
+      <p:sp>
+        <p:nvSpPr>
+          <p:cNvPr id="14" name="Shape 12"/>
+          <p:cNvSpPr/>
+          <p:nvPr/>
+        </p:nvSpPr>
+        <p:spPr>
+          <a:xfrm>
+            <a:off x="777240" y="4334256"/>
+            <a:ext cx="10607040" cy="1188720"/>
+          </a:xfrm>
+          <a:prstGeom prst="rect">
+            <a:avLst/>
+          </a:prstGeom>
+          <a:solidFill>
+            <a:srgbClr val="FFFFFF"/>
+          </a:solidFill>
+          <a:ln w="12700">
+            <a:solidFill>
+              <a:srgbClr val="EDE7DB"/>
+            </a:solidFill>
+            <a:prstDash val="solid"/>
+          </a:ln>
+        </p:spPr>
+      </p:sp>
+      <p:sp>
+        <p:nvSpPr>
+          <p:cNvPr id="15" name="Shape 13"/>
+          <p:cNvSpPr/>
+          <p:nvPr/>
+        </p:nvSpPr>
+        <p:spPr>
+          <a:xfrm>
+            <a:off x="1014984" y="4745736"/>
+            <a:ext cx="365760" cy="365760"/>
+          </a:xfrm>
+          <a:prstGeom prst="ellipse">
+            <a:avLst/>
+          </a:prstGeom>
+          <a:solidFill>
+            <a:srgbClr val="B04A2F"/>
+          </a:solidFill>
+          <a:ln w="12700">
+            <a:solidFill>
+              <a:srgbClr val="333333"/>
+            </a:solidFill>
+            <a:prstDash val="solid"/>
+          </a:ln>
+        </p:spPr>
+      </p:sp>
+      <p:sp>
+        <p:nvSpPr>
+          <p:cNvPr id="16" name="Text 14"/>
+          <p:cNvSpPr txBox="1"/>
+          <p:nvPr/>
+        </p:nvSpPr>
+        <p:spPr>
+          <a:xfrm>
+            <a:off x="1014984" y="4745736"/>
+            <a:ext cx="365760" cy="365760"/>
+          </a:xfrm>
+          <a:prstGeom prst="rect">
+            <a:avLst/>
+          </a:prstGeom>
+          <a:noFill/>
+          <a:ln/>
+        </p:spPr>
+        <p:txBody>
+          <a:bodyPr wrap="square" lIns="0" tIns="0" rIns="0" bIns="0" rtlCol="0" anchor="ctr"/>
+          <a:lstStyle/>
+          <a:p>
+            <a:pPr algn="ctr" indent="0" marL="0">
+              <a:buNone/>
+            </a:pPr>
+            <a:r>
+              <a:rPr lang="en-US" sz="1300" b="1" dirty="0">
+                <a:solidFill>
+                  <a:srgbClr val="FFFFFF"/>
+                </a:solidFill>
+                <a:latin typeface="Yu Gothic" pitchFamily="34" charset="0"/>
+                <a:ea typeface="Yu Gothic" pitchFamily="34" charset="-122"/>
+                <a:cs typeface="Yu Gothic" pitchFamily="34" charset="-120"/>
+              </a:rPr>
+              <a:t>3</a:t>
+            </a:r>
+            <a:endParaRPr lang="en-US" sz="1300" dirty="0"/>
+          </a:p>
+        </p:txBody>
+      </p:sp>
+      <p:sp>
+        <p:nvSpPr>
+          <p:cNvPr id="17" name="Text 15"/>
+          <p:cNvSpPr txBox="1"/>
+          <p:nvPr/>
+        </p:nvSpPr>
+        <p:spPr>
+          <a:xfrm>
+            <a:off x="1600200" y="4407408"/>
+            <a:ext cx="3182112" cy="1042416"/>
+          </a:xfrm>
+          <a:prstGeom prst="rect">
+            <a:avLst/>
+          </a:prstGeom>
+          <a:noFill/>
+          <a:ln/>
+        </p:spPr>
+        <p:txBody>
+          <a:bodyPr wrap="square" lIns="0" tIns="0" rIns="0" bIns="0" rtlCol="0" anchor="ctr"/>
+          <a:lstStyle/>
+          <a:p>
+            <a:pPr indent="0" marL="0">
+              <a:buNone/>
+            </a:pPr>
+            <a:r>
+              <a:rPr lang="en-US" sz="1450" b="1" dirty="0">
+                <a:solidFill>
+                  <a:srgbClr val="23201D"/>
+                </a:solidFill>
+                <a:latin typeface="Yu Gothic" pitchFamily="34" charset="0"/>
+                <a:ea typeface="Yu Gothic" pitchFamily="34" charset="-122"/>
+                <a:cs typeface="Yu Gothic" pitchFamily="34" charset="-120"/>
+              </a:rPr>
+              <a:t>「気になる点」より「反論」</a:t>
+            </a:r>
+            <a:endParaRPr lang="en-US" sz="1450" dirty="0"/>
+          </a:p>
+        </p:txBody>
+      </p:sp>
+      <p:sp>
+        <p:nvSpPr>
           <p:cNvPr id="18" name="Text 16"/>
           <p:cNvSpPr txBox="1"/>
           <p:nvPr/>
         </p:nvSpPr>
         <p:spPr>
           <a:xfrm>
-            <a:off x="5815584" y="3337560"/>
-            <a:ext cx="512064" cy="512064"/>
-          </a:xfrm>
-          <a:prstGeom prst="rect">
-            <a:avLst/>
-          </a:prstGeom>
-          <a:noFill/>
-          <a:ln/>
-        </p:spPr>
-        <p:txBody>
-          <a:bodyPr wrap="square" lIns="0" tIns="0" rIns="0" bIns="0" rtlCol="0" anchor="ctr"/>
-          <a:lstStyle/>
-          <a:p>
-            <a:pPr algn="ctr" indent="0" marL="0">
-              <a:buNone/>
-            </a:pPr>
-            <a:r>
-              <a:rPr lang="en-US" sz="1800" b="1" dirty="0">
-                <a:solidFill>
-                  <a:srgbClr val="FFFFFF"/>
-                </a:solidFill>
-                <a:latin typeface="Yu Gothic" pitchFamily="34" charset="0"/>
-                <a:ea typeface="Yu Gothic" pitchFamily="34" charset="-122"/>
-                <a:cs typeface="Yu Gothic" pitchFamily="34" charset="-120"/>
-              </a:rPr>
-              <a:t>→</a:t>
-            </a:r>
-            <a:endParaRPr lang="en-US" sz="1800" dirty="0"/>
+            <a:off x="4888382" y="4407408"/>
+            <a:ext cx="6267298" cy="1042416"/>
+          </a:xfrm>
+          <a:prstGeom prst="rect">
+            <a:avLst/>
+          </a:prstGeom>
+          <a:noFill/>
+          <a:ln/>
+        </p:spPr>
+        <p:txBody>
+          <a:bodyPr wrap="square" lIns="0" tIns="0" rIns="0" bIns="0" rtlCol="0" anchor="ctr"/>
+          <a:lstStyle/>
+          <a:p>
+            <a:pPr indent="0" marL="0">
+              <a:lnSpc>
+                <a:spcPct val="130000"/>
+              </a:lnSpc>
+              <a:buNone/>
+            </a:pPr>
+            <a:r>
+              <a:rPr lang="en-US" sz="1200" dirty="0">
+                <a:solidFill>
+                  <a:srgbClr val="5A534A"/>
+                </a:solidFill>
+                <a:latin typeface="Yu Gothic" pitchFamily="34" charset="0"/>
+                <a:ea typeface="Yu Gothic" pitchFamily="34" charset="-122"/>
+                <a:cs typeface="Yu Gothic" pitchFamily="34" charset="-120"/>
+              </a:rPr>
+              <a:t>経営者は褒められに来ているのではありません</a:t>
+            </a:r>
+            <a:endParaRPr lang="en-US" sz="1200" dirty="0"/>
           </a:p>
         </p:txBody>
       </p:sp>
@@ -3736,8 +5259,47 @@
         </p:nvSpPr>
         <p:spPr>
           <a:xfrm>
-            <a:off x="777240" y="6355080"/>
-            <a:ext cx="7424928" cy="274320"/>
+            <a:off x="777240" y="5669280"/>
+            <a:ext cx="10607040" cy="411480"/>
+          </a:xfrm>
+          <a:prstGeom prst="rect">
+            <a:avLst/>
+          </a:prstGeom>
+          <a:noFill/>
+          <a:ln/>
+        </p:spPr>
+        <p:txBody>
+          <a:bodyPr wrap="square" lIns="0" tIns="0" rIns="0" bIns="0" rtlCol="0" anchor="ctr"/>
+          <a:lstStyle/>
+          <a:p>
+            <a:pPr indent="0" marL="0">
+              <a:buNone/>
+            </a:pPr>
+            <a:r>
+              <a:rPr lang="en-US" sz="1200" b="1" dirty="0">
+                <a:solidFill>
+                  <a:srgbClr val="B04A2F"/>
+                </a:solidFill>
+                <a:latin typeface="Yu Gothic" pitchFamily="34" charset="0"/>
+                <a:ea typeface="Yu Gothic" pitchFamily="34" charset="-122"/>
+                <a:cs typeface="Yu Gothic" pitchFamily="34" charset="-120"/>
+              </a:rPr>
+              <a:t>この3つを外すと、間違った数字を社外に出す事故が起きます。1対1では講師が唯一の歯止めです。</a:t>
+            </a:r>
+            <a:endParaRPr lang="en-US" sz="1200" dirty="0"/>
+          </a:p>
+        </p:txBody>
+      </p:sp>
+      <p:sp>
+        <p:nvSpPr>
+          <p:cNvPr id="20" name="Text 18"/>
+          <p:cNvSpPr txBox="1"/>
+          <p:nvPr/>
+        </p:nvSpPr>
+        <p:spPr>
+          <a:xfrm>
+            <a:off x="777240" y="6382512"/>
+            <a:ext cx="7424928" cy="256032"/>
           </a:xfrm>
           <a:prstGeom prst="rect">
             <a:avLst/>
@@ -3769,14 +5331,14 @@
       </p:sp>
       <p:sp>
         <p:nvSpPr>
-          <p:cNvPr id="20" name="Text 18"/>
-          <p:cNvSpPr txBox="1"/>
-          <p:nvPr/>
-        </p:nvSpPr>
-        <p:spPr>
-          <a:xfrm>
-            <a:off x="8202168" y="6355080"/>
-            <a:ext cx="3182112" cy="274320"/>
+          <p:cNvPr id="21" name="Text 19"/>
+          <p:cNvSpPr txBox="1"/>
+          <p:nvPr/>
+        </p:nvSpPr>
+        <p:spPr>
+          <a:xfrm>
+            <a:off x="8202168" y="6382512"/>
+            <a:ext cx="3182112" cy="256032"/>
           </a:xfrm>
           <a:prstGeom prst="rect">
             <a:avLst/>
@@ -3800,7 +5362,7 @@
                 <a:ea typeface="Yu Gothic" pitchFamily="34" charset="-122"/>
                 <a:cs typeface="Yu Gothic" pitchFamily="34" charset="-120"/>
               </a:rPr>
-              <a:t>実演</a:t>
+              <a:t>考え方</a:t>
             </a:r>
             <a:endParaRPr lang="en-US" sz="900" dirty="0"/>
           </a:p>
@@ -3846,7 +5408,7 @@
         </p:nvSpPr>
         <p:spPr>
           <a:xfrm>
-            <a:off x="777240" y="640080"/>
+            <a:off x="777240" y="566928"/>
             <a:ext cx="10607040" cy="274320"/>
           </a:xfrm>
           <a:prstGeom prst="rect">
@@ -3871,7 +5433,7 @@
                 <a:ea typeface="Yu Gothic" pitchFamily="34" charset="-122"/>
                 <a:cs typeface="Yu Gothic" pitchFamily="34" charset="-120"/>
               </a:rPr>
-              <a:t>演習</a:t>
+              <a:t>あてはめ</a:t>
             </a:r>
             <a:endParaRPr lang="en-US" sz="1100" dirty="0"/>
           </a:p>
@@ -3885,7 +5447,7 @@
         </p:nvSpPr>
         <p:spPr>
           <a:xfrm>
-            <a:off x="777240" y="960120"/>
+            <a:off x="777240" y="896112"/>
             <a:ext cx="10607040" cy="640080"/>
           </a:xfrm>
           <a:prstGeom prst="rect">
@@ -3902,7 +5464,7 @@
               <a:buNone/>
             </a:pPr>
             <a:r>
-              <a:rPr lang="en-US" sz="2700" b="1" dirty="0">
+              <a:rPr lang="en-US" sz="2600" b="1" dirty="0">
                 <a:solidFill>
                   <a:srgbClr val="23201D"/>
                 </a:solidFill>
@@ -3910,61 +5472,22 @@
                 <a:ea typeface="Yu Gothic" pitchFamily="34" charset="-122"/>
                 <a:cs typeface="Yu Gothic" pitchFamily="34" charset="-120"/>
               </a:rPr>
-              <a:t>今日、一緒にやること</a:t>
-            </a:r>
-            <a:endParaRPr lang="en-US" sz="2700" dirty="0"/>
-          </a:p>
-        </p:txBody>
-      </p:sp>
-      <p:sp>
-        <p:nvSpPr>
-          <p:cNvPr id="4" name="Text 2"/>
-          <p:cNvSpPr txBox="1"/>
-          <p:nvPr/>
-        </p:nvSpPr>
-        <p:spPr>
-          <a:xfrm>
-            <a:off x="777240" y="1627632"/>
-            <a:ext cx="10607040" cy="320040"/>
-          </a:xfrm>
-          <a:prstGeom prst="rect">
-            <a:avLst/>
-          </a:prstGeom>
-          <a:noFill/>
-          <a:ln/>
-        </p:spPr>
-        <p:txBody>
-          <a:bodyPr wrap="square" lIns="0" tIns="0" rIns="0" bIns="0" rtlCol="0" anchor="ctr"/>
-          <a:lstStyle/>
-          <a:p>
-            <a:pPr indent="0" marL="0">
-              <a:buNone/>
-            </a:pPr>
-            <a:r>
-              <a:rPr lang="en-US" sz="1250" b="1" dirty="0">
-                <a:solidFill>
-                  <a:srgbClr val="2F4F6B"/>
-                </a:solidFill>
-                <a:latin typeface="Yu Gothic" pitchFamily="34" charset="0"/>
-                <a:ea typeface="Yu Gothic" pitchFamily="34" charset="-122"/>
-                <a:cs typeface="Yu Gothic" pitchFamily="34" charset="-120"/>
-              </a:rPr>
-              <a:t>55分。操作するのはご自身です。</a:t>
-            </a:r>
-            <a:endParaRPr lang="en-US" sz="1250" dirty="0"/>
-          </a:p>
-        </p:txBody>
-      </p:sp>
-      <p:sp>
-        <p:nvSpPr>
-          <p:cNvPr id="5" name="Shape 3"/>
+              <a:t>月次レポートは、この5項目で足ります</a:t>
+            </a:r>
+            <a:endParaRPr lang="en-US" sz="2600" dirty="0"/>
+          </a:p>
+        </p:txBody>
+      </p:sp>
+      <p:sp>
+        <p:nvSpPr>
+          <p:cNvPr id="4" name="Shape 2"/>
           <p:cNvSpPr/>
           <p:nvPr/>
         </p:nvSpPr>
         <p:spPr>
           <a:xfrm>
-            <a:off x="777240" y="2240280"/>
-            <a:ext cx="3383280" cy="2697480"/>
+            <a:off x="777240" y="1691640"/>
+            <a:ext cx="10607040" cy="3401568"/>
           </a:xfrm>
           <a:prstGeom prst="rect">
             <a:avLst/>
@@ -3972,9 +5495,9 @@
           <a:solidFill>
             <a:srgbClr val="FFFFFF"/>
           </a:solidFill>
-          <a:ln w="12700">
+          <a:ln w="15875">
             <a:solidFill>
-              <a:srgbClr val="EDE7DB"/>
+              <a:srgbClr val="2F4F6B"/>
             </a:solidFill>
             <a:prstDash val="solid"/>
           </a:ln>
@@ -3982,16 +5505,16 @@
       </p:sp>
       <p:sp>
         <p:nvSpPr>
-          <p:cNvPr id="6" name="Shape 4"/>
+          <p:cNvPr id="5" name="Shape 3"/>
           <p:cNvSpPr/>
           <p:nvPr/>
         </p:nvSpPr>
         <p:spPr>
           <a:xfrm>
-            <a:off x="1051560" y="2487168"/>
-            <a:ext cx="438912" cy="438912"/>
-          </a:xfrm>
-          <a:prstGeom prst="ellipse">
+            <a:off x="777240" y="1691640"/>
+            <a:ext cx="10607040" cy="457200"/>
+          </a:xfrm>
+          <a:prstGeom prst="rect">
             <a:avLst/>
           </a:prstGeom>
           <a:solidFill>
@@ -3999,7 +5522,7 @@
           </a:solidFill>
           <a:ln w="12700">
             <a:solidFill>
-              <a:srgbClr val="2F4F6B"/>
+              <a:srgbClr val="333333"/>
             </a:solidFill>
             <a:prstDash val="solid"/>
           </a:ln>
@@ -4007,40 +5530,82 @@
       </p:sp>
       <p:sp>
         <p:nvSpPr>
+          <p:cNvPr id="6" name="Text 4"/>
+          <p:cNvSpPr txBox="1"/>
+          <p:nvPr/>
+        </p:nvSpPr>
+        <p:spPr>
+          <a:xfrm>
+            <a:off x="1051560" y="1709928"/>
+            <a:ext cx="10058400" cy="420624"/>
+          </a:xfrm>
+          <a:prstGeom prst="rect">
+            <a:avLst/>
+          </a:prstGeom>
+          <a:noFill/>
+          <a:ln/>
+        </p:spPr>
+        <p:txBody>
+          <a:bodyPr wrap="square" lIns="0" tIns="0" rIns="0" bIns="0" rtlCol="0" anchor="ctr"/>
+          <a:lstStyle/>
+          <a:p>
+            <a:pPr indent="0" marL="0">
+              <a:buNone/>
+            </a:pPr>
+            <a:r>
+              <a:rPr lang="en-US" sz="1200" b="1" dirty="0">
+                <a:solidFill>
+                  <a:srgbClr val="FFFFFF"/>
+                </a:solidFill>
+                <a:latin typeface="Yu Gothic" pitchFamily="34" charset="0"/>
+                <a:ea typeface="Yu Gothic" pitchFamily="34" charset="-122"/>
+                <a:cs typeface="Yu Gothic" pitchFamily="34" charset="-120"/>
+              </a:rPr>
+              <a:t>月次レポート雛形（毎月これを埋めるだけ）</a:t>
+            </a:r>
+            <a:endParaRPr lang="en-US" sz="1200" dirty="0"/>
+          </a:p>
+        </p:txBody>
+      </p:sp>
+      <p:sp>
+        <p:nvSpPr>
           <p:cNvPr id="7" name="Text 5"/>
           <p:cNvSpPr txBox="1"/>
           <p:nvPr/>
         </p:nvSpPr>
         <p:spPr>
           <a:xfrm>
-            <a:off x="1051560" y="2487168"/>
-            <a:ext cx="438912" cy="438912"/>
-          </a:xfrm>
-          <a:prstGeom prst="rect">
-            <a:avLst/>
-          </a:prstGeom>
-          <a:noFill/>
-          <a:ln/>
-        </p:spPr>
-        <p:txBody>
-          <a:bodyPr wrap="square" lIns="0" tIns="0" rIns="0" bIns="0" rtlCol="0" anchor="ctr"/>
-          <a:lstStyle/>
-          <a:p>
-            <a:pPr algn="ctr" indent="0" marL="0">
-              <a:buNone/>
-            </a:pPr>
-            <a:r>
-              <a:rPr lang="en-US" sz="1400" b="1" dirty="0">
-                <a:solidFill>
-                  <a:srgbClr val="FFFFFF"/>
-                </a:solidFill>
-                <a:latin typeface="Yu Gothic" pitchFamily="34" charset="0"/>
-                <a:ea typeface="Yu Gothic" pitchFamily="34" charset="-122"/>
-                <a:cs typeface="Yu Gothic" pitchFamily="34" charset="-120"/>
-              </a:rPr>
-              <a:t>1</a:t>
-            </a:r>
-            <a:endParaRPr lang="en-US" sz="1400" dirty="0"/>
+            <a:off x="1097280" y="2331720"/>
+            <a:ext cx="2057400" cy="530352"/>
+          </a:xfrm>
+          <a:prstGeom prst="rect">
+            <a:avLst/>
+          </a:prstGeom>
+          <a:noFill/>
+          <a:ln/>
+        </p:spPr>
+        <p:txBody>
+          <a:bodyPr wrap="square" lIns="0" tIns="0" rIns="0" bIns="0" rtlCol="0" anchor="ctr"/>
+          <a:lstStyle/>
+          <a:p>
+            <a:pPr indent="0" marL="0">
+              <a:lnSpc>
+                <a:spcPct val="110000"/>
+              </a:lnSpc>
+              <a:buNone/>
+            </a:pPr>
+            <a:r>
+              <a:rPr lang="en-US" sz="1100" b="1" dirty="0">
+                <a:solidFill>
+                  <a:srgbClr val="2F4F6B"/>
+                </a:solidFill>
+                <a:latin typeface="Yu Gothic" pitchFamily="34" charset="0"/>
+                <a:ea typeface="Yu Gothic" pitchFamily="34" charset="-122"/>
+                <a:cs typeface="Yu Gothic" pitchFamily="34" charset="-120"/>
+              </a:rPr>
+              <a:t>1. 今月の数字</a:t>
+            </a:r>
+            <a:endParaRPr lang="en-US" sz="1100" dirty="0"/>
           </a:p>
         </p:txBody>
       </p:sp>
@@ -4052,8 +5617,8 @@
         </p:nvSpPr>
         <p:spPr>
           <a:xfrm>
-            <a:off x="1051560" y="3035808"/>
-            <a:ext cx="2834640" cy="777240"/>
+            <a:off x="3291840" y="2331720"/>
+            <a:ext cx="7772400" cy="530352"/>
           </a:xfrm>
           <a:prstGeom prst="rect">
             <a:avLst/>
@@ -4067,22 +5632,22 @@
           <a:p>
             <a:pPr indent="0" marL="0">
               <a:lnSpc>
-                <a:spcPct val="125000"/>
+                <a:spcPct val="115000"/>
               </a:lnSpc>
               <a:buNone/>
             </a:pPr>
             <a:r>
-              <a:rPr lang="en-US" sz="1500" b="1" dirty="0">
+              <a:rPr lang="en-US" sz="1150" dirty="0">
                 <a:solidFill>
                   <a:srgbClr val="23201D"/>
                 </a:solidFill>
-                <a:latin typeface="Yu Gothic" pitchFamily="34" charset="0"/>
-                <a:ea typeface="Yu Gothic" pitchFamily="34" charset="-122"/>
-                <a:cs typeface="Yu Gothic" pitchFamily="34" charset="-120"/>
-              </a:rPr>
-              <a:t>実データを読ませる</a:t>
-            </a:r>
-            <a:endParaRPr lang="en-US" sz="1500" dirty="0"/>
+                <a:latin typeface="Consolas" pitchFamily="34" charset="0"/>
+                <a:ea typeface="Consolas" pitchFamily="34" charset="-122"/>
+                <a:cs typeface="Consolas" pitchFamily="34" charset="-120"/>
+              </a:rPr>
+              <a:t>表計算から転記。AIには計算させない</a:t>
+            </a:r>
+            <a:endParaRPr lang="en-US" sz="1150" dirty="0"/>
           </a:p>
         </p:txBody>
       </p:sp>
@@ -4094,8 +5659,8 @@
         </p:nvSpPr>
         <p:spPr>
           <a:xfrm>
-            <a:off x="1051560" y="3822192"/>
-            <a:ext cx="2834640" cy="960120"/>
+            <a:off x="1097280" y="2862072"/>
+            <a:ext cx="2057400" cy="530352"/>
           </a:xfrm>
           <a:prstGeom prst="rect">
             <a:avLst/>
@@ -4109,12 +5674,348 @@
           <a:p>
             <a:pPr indent="0" marL="0">
               <a:lnSpc>
-                <a:spcPct val="130000"/>
+                <a:spcPct val="110000"/>
               </a:lnSpc>
               <a:buNone/>
             </a:pPr>
             <a:r>
-              <a:rPr lang="en-US" sz="1200" dirty="0">
+              <a:rPr lang="en-US" sz="1100" b="1" dirty="0">
+                <a:solidFill>
+                  <a:srgbClr val="2F4F6B"/>
+                </a:solidFill>
+                <a:latin typeface="Yu Gothic" pitchFamily="34" charset="0"/>
+                <a:ea typeface="Yu Gothic" pitchFamily="34" charset="-122"/>
+                <a:cs typeface="Yu Gothic" pitchFamily="34" charset="-120"/>
+              </a:rPr>
+              <a:t>2. 前月・前年同月との差</a:t>
+            </a:r>
+            <a:endParaRPr lang="en-US" sz="1100" dirty="0"/>
+          </a:p>
+        </p:txBody>
+      </p:sp>
+      <p:sp>
+        <p:nvSpPr>
+          <p:cNvPr id="10" name="Text 8"/>
+          <p:cNvSpPr txBox="1"/>
+          <p:nvPr/>
+        </p:nvSpPr>
+        <p:spPr>
+          <a:xfrm>
+            <a:off x="3291840" y="2862072"/>
+            <a:ext cx="7772400" cy="530352"/>
+          </a:xfrm>
+          <a:prstGeom prst="rect">
+            <a:avLst/>
+          </a:prstGeom>
+          <a:noFill/>
+          <a:ln/>
+        </p:spPr>
+        <p:txBody>
+          <a:bodyPr wrap="square" lIns="0" tIns="0" rIns="0" bIns="0" rtlCol="0" anchor="ctr"/>
+          <a:lstStyle/>
+          <a:p>
+            <a:pPr indent="0" marL="0">
+              <a:lnSpc>
+                <a:spcPct val="115000"/>
+              </a:lnSpc>
+              <a:buNone/>
+            </a:pPr>
+            <a:r>
+              <a:rPr lang="en-US" sz="1150" dirty="0">
+                <a:solidFill>
+                  <a:srgbClr val="23201D"/>
+                </a:solidFill>
+                <a:latin typeface="Consolas" pitchFamily="34" charset="0"/>
+                <a:ea typeface="Consolas" pitchFamily="34" charset="-122"/>
+                <a:cs typeface="Consolas" pitchFamily="34" charset="-120"/>
+              </a:rPr>
+              <a:t>同上。ここまでは人と表計算の仕事</a:t>
+            </a:r>
+            <a:endParaRPr lang="en-US" sz="1150" dirty="0"/>
+          </a:p>
+        </p:txBody>
+      </p:sp>
+      <p:sp>
+        <p:nvSpPr>
+          <p:cNvPr id="11" name="Text 9"/>
+          <p:cNvSpPr txBox="1"/>
+          <p:nvPr/>
+        </p:nvSpPr>
+        <p:spPr>
+          <a:xfrm>
+            <a:off x="1097280" y="3392424"/>
+            <a:ext cx="2057400" cy="530352"/>
+          </a:xfrm>
+          <a:prstGeom prst="rect">
+            <a:avLst/>
+          </a:prstGeom>
+          <a:noFill/>
+          <a:ln/>
+        </p:spPr>
+        <p:txBody>
+          <a:bodyPr wrap="square" lIns="0" tIns="0" rIns="0" bIns="0" rtlCol="0" anchor="ctr"/>
+          <a:lstStyle/>
+          <a:p>
+            <a:pPr indent="0" marL="0">
+              <a:lnSpc>
+                <a:spcPct val="110000"/>
+              </a:lnSpc>
+              <a:buNone/>
+            </a:pPr>
+            <a:r>
+              <a:rPr lang="en-US" sz="1100" b="1" dirty="0">
+                <a:solidFill>
+                  <a:srgbClr val="2F4F6B"/>
+                </a:solidFill>
+                <a:latin typeface="Yu Gothic" pitchFamily="34" charset="0"/>
+                <a:ea typeface="Yu Gothic" pitchFamily="34" charset="-122"/>
+                <a:cs typeface="Yu Gothic" pitchFamily="34" charset="-120"/>
+              </a:rPr>
+              <a:t>3. 差が生まれた理由の仮説 3つ</a:t>
+            </a:r>
+            <a:endParaRPr lang="en-US" sz="1100" dirty="0"/>
+          </a:p>
+        </p:txBody>
+      </p:sp>
+      <p:sp>
+        <p:nvSpPr>
+          <p:cNvPr id="12" name="Text 10"/>
+          <p:cNvSpPr txBox="1"/>
+          <p:nvPr/>
+        </p:nvSpPr>
+        <p:spPr>
+          <a:xfrm>
+            <a:off x="3291840" y="3392424"/>
+            <a:ext cx="7772400" cy="530352"/>
+          </a:xfrm>
+          <a:prstGeom prst="rect">
+            <a:avLst/>
+          </a:prstGeom>
+          <a:noFill/>
+          <a:ln/>
+        </p:spPr>
+        <p:txBody>
+          <a:bodyPr wrap="square" lIns="0" tIns="0" rIns="0" bIns="0" rtlCol="0" anchor="ctr"/>
+          <a:lstStyle/>
+          <a:p>
+            <a:pPr indent="0" marL="0">
+              <a:lnSpc>
+                <a:spcPct val="115000"/>
+              </a:lnSpc>
+              <a:buNone/>
+            </a:pPr>
+            <a:r>
+              <a:rPr lang="en-US" sz="1150" dirty="0">
+                <a:solidFill>
+                  <a:srgbClr val="23201D"/>
+                </a:solidFill>
+                <a:latin typeface="Consolas" pitchFamily="34" charset="0"/>
+                <a:ea typeface="Consolas" pitchFamily="34" charset="-122"/>
+                <a:cs typeface="Consolas" pitchFamily="34" charset="-120"/>
+              </a:rPr>
+              <a:t>← AIの出番はここから</a:t>
+            </a:r>
+            <a:endParaRPr lang="en-US" sz="1150" dirty="0"/>
+          </a:p>
+        </p:txBody>
+      </p:sp>
+      <p:sp>
+        <p:nvSpPr>
+          <p:cNvPr id="13" name="Text 11"/>
+          <p:cNvSpPr txBox="1"/>
+          <p:nvPr/>
+        </p:nvSpPr>
+        <p:spPr>
+          <a:xfrm>
+            <a:off x="1097280" y="3922776"/>
+            <a:ext cx="2057400" cy="530352"/>
+          </a:xfrm>
+          <a:prstGeom prst="rect">
+            <a:avLst/>
+          </a:prstGeom>
+          <a:noFill/>
+          <a:ln/>
+        </p:spPr>
+        <p:txBody>
+          <a:bodyPr wrap="square" lIns="0" tIns="0" rIns="0" bIns="0" rtlCol="0" anchor="ctr"/>
+          <a:lstStyle/>
+          <a:p>
+            <a:pPr indent="0" marL="0">
+              <a:lnSpc>
+                <a:spcPct val="110000"/>
+              </a:lnSpc>
+              <a:buNone/>
+            </a:pPr>
+            <a:r>
+              <a:rPr lang="en-US" sz="1100" b="1" dirty="0">
+                <a:solidFill>
+                  <a:srgbClr val="2F4F6B"/>
+                </a:solidFill>
+                <a:latin typeface="Yu Gothic" pitchFamily="34" charset="0"/>
+                <a:ea typeface="Yu Gothic" pitchFamily="34" charset="-122"/>
+                <a:cs typeface="Yu Gothic" pitchFamily="34" charset="-120"/>
+              </a:rPr>
+              <a:t>4. 仮説を確かめるために見るデータ</a:t>
+            </a:r>
+            <a:endParaRPr lang="en-US" sz="1100" dirty="0"/>
+          </a:p>
+        </p:txBody>
+      </p:sp>
+      <p:sp>
+        <p:nvSpPr>
+          <p:cNvPr id="14" name="Text 12"/>
+          <p:cNvSpPr txBox="1"/>
+          <p:nvPr/>
+        </p:nvSpPr>
+        <p:spPr>
+          <a:xfrm>
+            <a:off x="3291840" y="3922776"/>
+            <a:ext cx="7772400" cy="530352"/>
+          </a:xfrm>
+          <a:prstGeom prst="rect">
+            <a:avLst/>
+          </a:prstGeom>
+          <a:noFill/>
+          <a:ln/>
+        </p:spPr>
+        <p:txBody>
+          <a:bodyPr wrap="square" lIns="0" tIns="0" rIns="0" bIns="0" rtlCol="0" anchor="ctr"/>
+          <a:lstStyle/>
+          <a:p>
+            <a:pPr indent="0" marL="0">
+              <a:lnSpc>
+                <a:spcPct val="115000"/>
+              </a:lnSpc>
+              <a:buNone/>
+            </a:pPr>
+            <a:r>
+              <a:rPr lang="en-US" sz="1150" dirty="0">
+                <a:solidFill>
+                  <a:srgbClr val="23201D"/>
+                </a:solidFill>
+                <a:latin typeface="Consolas" pitchFamily="34" charset="0"/>
+                <a:ea typeface="Consolas" pitchFamily="34" charset="-122"/>
+                <a:cs typeface="Consolas" pitchFamily="34" charset="-120"/>
+              </a:rPr>
+              <a:t>← AI</a:t>
+            </a:r>
+            <a:endParaRPr lang="en-US" sz="1150" dirty="0"/>
+          </a:p>
+        </p:txBody>
+      </p:sp>
+      <p:sp>
+        <p:nvSpPr>
+          <p:cNvPr id="15" name="Text 13"/>
+          <p:cNvSpPr txBox="1"/>
+          <p:nvPr/>
+        </p:nvSpPr>
+        <p:spPr>
+          <a:xfrm>
+            <a:off x="1097280" y="4453128"/>
+            <a:ext cx="2057400" cy="530352"/>
+          </a:xfrm>
+          <a:prstGeom prst="rect">
+            <a:avLst/>
+          </a:prstGeom>
+          <a:noFill/>
+          <a:ln/>
+        </p:spPr>
+        <p:txBody>
+          <a:bodyPr wrap="square" lIns="0" tIns="0" rIns="0" bIns="0" rtlCol="0" anchor="ctr"/>
+          <a:lstStyle/>
+          <a:p>
+            <a:pPr indent="0" marL="0">
+              <a:lnSpc>
+                <a:spcPct val="110000"/>
+              </a:lnSpc>
+              <a:buNone/>
+            </a:pPr>
+            <a:r>
+              <a:rPr lang="en-US" sz="1100" b="1" dirty="0">
+                <a:solidFill>
+                  <a:srgbClr val="2F4F6B"/>
+                </a:solidFill>
+                <a:latin typeface="Yu Gothic" pitchFamily="34" charset="0"/>
+                <a:ea typeface="Yu Gothic" pitchFamily="34" charset="-122"/>
+                <a:cs typeface="Yu Gothic" pitchFamily="34" charset="-120"/>
+              </a:rPr>
+              <a:t>5. 来月やること 1つ</a:t>
+            </a:r>
+            <a:endParaRPr lang="en-US" sz="1100" dirty="0"/>
+          </a:p>
+        </p:txBody>
+      </p:sp>
+      <p:sp>
+        <p:nvSpPr>
+          <p:cNvPr id="16" name="Text 14"/>
+          <p:cNvSpPr txBox="1"/>
+          <p:nvPr/>
+        </p:nvSpPr>
+        <p:spPr>
+          <a:xfrm>
+            <a:off x="3291840" y="4453128"/>
+            <a:ext cx="7772400" cy="530352"/>
+          </a:xfrm>
+          <a:prstGeom prst="rect">
+            <a:avLst/>
+          </a:prstGeom>
+          <a:noFill/>
+          <a:ln/>
+        </p:spPr>
+        <p:txBody>
+          <a:bodyPr wrap="square" lIns="0" tIns="0" rIns="0" bIns="0" rtlCol="0" anchor="ctr"/>
+          <a:lstStyle/>
+          <a:p>
+            <a:pPr indent="0" marL="0">
+              <a:lnSpc>
+                <a:spcPct val="115000"/>
+              </a:lnSpc>
+              <a:buNone/>
+            </a:pPr>
+            <a:r>
+              <a:rPr lang="en-US" sz="1150" dirty="0">
+                <a:solidFill>
+                  <a:srgbClr val="23201D"/>
+                </a:solidFill>
+                <a:latin typeface="Consolas" pitchFamily="34" charset="0"/>
+                <a:ea typeface="Consolas" pitchFamily="34" charset="-122"/>
+                <a:cs typeface="Consolas" pitchFamily="34" charset="-120"/>
+              </a:rPr>
+              <a:t>← 人が決める。ここは渡さない</a:t>
+            </a:r>
+            <a:endParaRPr lang="en-US" sz="1150" dirty="0"/>
+          </a:p>
+        </p:txBody>
+      </p:sp>
+      <p:sp>
+        <p:nvSpPr>
+          <p:cNvPr id="17" name="Text 15"/>
+          <p:cNvSpPr txBox="1"/>
+          <p:nvPr/>
+        </p:nvSpPr>
+        <p:spPr>
+          <a:xfrm>
+            <a:off x="777240" y="5239512"/>
+            <a:ext cx="10607040" cy="548640"/>
+          </a:xfrm>
+          <a:prstGeom prst="rect">
+            <a:avLst/>
+          </a:prstGeom>
+          <a:noFill/>
+          <a:ln/>
+        </p:spPr>
+        <p:txBody>
+          <a:bodyPr wrap="square" lIns="0" tIns="0" rIns="0" bIns="0" rtlCol="0" anchor="ctr"/>
+          <a:lstStyle/>
+          <a:p>
+            <a:pPr indent="0" marL="0">
+              <a:lnSpc>
+                <a:spcPct val="135000"/>
+              </a:lnSpc>
+              <a:buNone/>
+            </a:pPr>
+            <a:r>
+              <a:rPr lang="en-US" sz="1250" dirty="0">
                 <a:solidFill>
                   <a:srgbClr val="5A534A"/>
                 </a:solidFill>
@@ -4122,271 +6023,9 @@
                 <a:ea typeface="Yu Gothic" pitchFamily="34" charset="-122"/>
                 <a:cs typeface="Yu Gothic" pitchFamily="34" charset="-120"/>
               </a:rPr>
-              <a:t>個人情報や給与の列は、その場で落とし方をお伝えします</a:t>
-            </a:r>
-            <a:endParaRPr lang="en-US" sz="1200" dirty="0"/>
-          </a:p>
-        </p:txBody>
-      </p:sp>
-      <p:sp>
-        <p:nvSpPr>
-          <p:cNvPr id="10" name="Shape 8"/>
-          <p:cNvSpPr/>
-          <p:nvPr/>
-        </p:nvSpPr>
-        <p:spPr>
-          <a:xfrm>
-            <a:off x="4389120" y="2240280"/>
-            <a:ext cx="3383280" cy="2697480"/>
-          </a:xfrm>
-          <a:prstGeom prst="rect">
-            <a:avLst/>
-          </a:prstGeom>
-          <a:solidFill>
-            <a:srgbClr val="FFFFFF"/>
-          </a:solidFill>
-          <a:ln w="12700">
-            <a:solidFill>
-              <a:srgbClr val="EDE7DB"/>
-            </a:solidFill>
-            <a:prstDash val="solid"/>
-          </a:ln>
-        </p:spPr>
-      </p:sp>
-      <p:sp>
-        <p:nvSpPr>
-          <p:cNvPr id="11" name="Shape 9"/>
-          <p:cNvSpPr/>
-          <p:nvPr/>
-        </p:nvSpPr>
-        <p:spPr>
-          <a:xfrm>
-            <a:off x="4663440" y="2487168"/>
-            <a:ext cx="438912" cy="438912"/>
-          </a:xfrm>
-          <a:prstGeom prst="ellipse">
-            <a:avLst/>
-          </a:prstGeom>
-          <a:solidFill>
-            <a:srgbClr val="2F4F6B"/>
-          </a:solidFill>
-          <a:ln w="12700">
-            <a:solidFill>
-              <a:srgbClr val="2F4F6B"/>
-            </a:solidFill>
-            <a:prstDash val="solid"/>
-          </a:ln>
-        </p:spPr>
-      </p:sp>
-      <p:sp>
-        <p:nvSpPr>
-          <p:cNvPr id="12" name="Text 10"/>
-          <p:cNvSpPr txBox="1"/>
-          <p:nvPr/>
-        </p:nvSpPr>
-        <p:spPr>
-          <a:xfrm>
-            <a:off x="4663440" y="2487168"/>
-            <a:ext cx="438912" cy="438912"/>
-          </a:xfrm>
-          <a:prstGeom prst="rect">
-            <a:avLst/>
-          </a:prstGeom>
-          <a:noFill/>
-          <a:ln/>
-        </p:spPr>
-        <p:txBody>
-          <a:bodyPr wrap="square" lIns="0" tIns="0" rIns="0" bIns="0" rtlCol="0" anchor="ctr"/>
-          <a:lstStyle/>
-          <a:p>
-            <a:pPr algn="ctr" indent="0" marL="0">
-              <a:buNone/>
-            </a:pPr>
-            <a:r>
-              <a:rPr lang="en-US" sz="1400" b="1" dirty="0">
-                <a:solidFill>
-                  <a:srgbClr val="FFFFFF"/>
-                </a:solidFill>
-                <a:latin typeface="Yu Gothic" pitchFamily="34" charset="0"/>
-                <a:ea typeface="Yu Gothic" pitchFamily="34" charset="-122"/>
-                <a:cs typeface="Yu Gothic" pitchFamily="34" charset="-120"/>
-              </a:rPr>
-              <a:t>2</a:t>
-            </a:r>
-            <a:endParaRPr lang="en-US" sz="1400" dirty="0"/>
-          </a:p>
-        </p:txBody>
-      </p:sp>
-      <p:sp>
-        <p:nvSpPr>
-          <p:cNvPr id="13" name="Text 11"/>
-          <p:cNvSpPr txBox="1"/>
-          <p:nvPr/>
-        </p:nvSpPr>
-        <p:spPr>
-          <a:xfrm>
-            <a:off x="4663440" y="3035808"/>
-            <a:ext cx="2834640" cy="777240"/>
-          </a:xfrm>
-          <a:prstGeom prst="rect">
-            <a:avLst/>
-          </a:prstGeom>
-          <a:noFill/>
-          <a:ln/>
-        </p:spPr>
-        <p:txBody>
-          <a:bodyPr wrap="square" lIns="0" tIns="0" rIns="0" bIns="0" rtlCol="0" anchor="ctr"/>
-          <a:lstStyle/>
-          <a:p>
-            <a:pPr indent="0" marL="0">
-              <a:lnSpc>
-                <a:spcPct val="125000"/>
-              </a:lnSpc>
-              <a:buNone/>
-            </a:pPr>
-            <a:r>
-              <a:rPr lang="en-US" sz="1500" b="1" dirty="0">
-                <a:solidFill>
-                  <a:srgbClr val="23201D"/>
-                </a:solidFill>
-                <a:latin typeface="Yu Gothic" pitchFamily="34" charset="0"/>
-                <a:ea typeface="Yu Gothic" pitchFamily="34" charset="-122"/>
-                <a:cs typeface="Yu Gothic" pitchFamily="34" charset="-120"/>
-              </a:rPr>
-              <a:t>示唆を3つ引き出して、検算する</a:t>
-            </a:r>
-            <a:endParaRPr lang="en-US" sz="1500" dirty="0"/>
-          </a:p>
-        </p:txBody>
-      </p:sp>
-      <p:sp>
-        <p:nvSpPr>
-          <p:cNvPr id="14" name="Text 12"/>
-          <p:cNvSpPr txBox="1"/>
-          <p:nvPr/>
-        </p:nvSpPr>
-        <p:spPr>
-          <a:xfrm>
-            <a:off x="4663440" y="3822192"/>
-            <a:ext cx="2834640" cy="960120"/>
-          </a:xfrm>
-          <a:prstGeom prst="rect">
-            <a:avLst/>
-          </a:prstGeom>
-          <a:noFill/>
-          <a:ln/>
-        </p:spPr>
-        <p:txBody>
-          <a:bodyPr wrap="square" lIns="0" tIns="0" rIns="0" bIns="0" rtlCol="0" anchor="ctr"/>
-          <a:lstStyle/>
-          <a:p>
-            <a:pPr indent="0" marL="0">
-              <a:lnSpc>
-                <a:spcPct val="130000"/>
-              </a:lnSpc>
-              <a:buNone/>
-            </a:pPr>
-            <a:r>
-              <a:rPr lang="en-US" sz="1200" dirty="0">
-                <a:solidFill>
-                  <a:srgbClr val="5A534A"/>
-                </a:solidFill>
-                <a:latin typeface="Yu Gothic" pitchFamily="34" charset="0"/>
-                <a:ea typeface="Yu Gothic" pitchFamily="34" charset="-122"/>
-                <a:cs typeface="Yu Gothic" pitchFamily="34" charset="-120"/>
-              </a:rPr>
-              <a:t>合計を突き合わせるところまでを手順にします</a:t>
-            </a:r>
-            <a:endParaRPr lang="en-US" sz="1200" dirty="0"/>
-          </a:p>
-        </p:txBody>
-      </p:sp>
-      <p:sp>
-        <p:nvSpPr>
-          <p:cNvPr id="15" name="Shape 13"/>
-          <p:cNvSpPr/>
-          <p:nvPr/>
-        </p:nvSpPr>
-        <p:spPr>
-          <a:xfrm>
-            <a:off x="8001000" y="2240280"/>
-            <a:ext cx="3383280" cy="2697480"/>
-          </a:xfrm>
-          <a:prstGeom prst="rect">
-            <a:avLst/>
-          </a:prstGeom>
-          <a:solidFill>
-            <a:srgbClr val="FFFFFF"/>
-          </a:solidFill>
-          <a:ln w="12700">
-            <a:solidFill>
-              <a:srgbClr val="EDE7DB"/>
-            </a:solidFill>
-            <a:prstDash val="solid"/>
-          </a:ln>
-        </p:spPr>
-      </p:sp>
-      <p:sp>
-        <p:nvSpPr>
-          <p:cNvPr id="16" name="Shape 14"/>
-          <p:cNvSpPr/>
-          <p:nvPr/>
-        </p:nvSpPr>
-        <p:spPr>
-          <a:xfrm>
-            <a:off x="8275320" y="2487168"/>
-            <a:ext cx="438912" cy="438912"/>
-          </a:xfrm>
-          <a:prstGeom prst="ellipse">
-            <a:avLst/>
-          </a:prstGeom>
-          <a:solidFill>
-            <a:srgbClr val="2F4F6B"/>
-          </a:solidFill>
-          <a:ln w="12700">
-            <a:solidFill>
-              <a:srgbClr val="2F4F6B"/>
-            </a:solidFill>
-            <a:prstDash val="solid"/>
-          </a:ln>
-        </p:spPr>
-      </p:sp>
-      <p:sp>
-        <p:nvSpPr>
-          <p:cNvPr id="17" name="Text 15"/>
-          <p:cNvSpPr txBox="1"/>
-          <p:nvPr/>
-        </p:nvSpPr>
-        <p:spPr>
-          <a:xfrm>
-            <a:off x="8275320" y="2487168"/>
-            <a:ext cx="438912" cy="438912"/>
-          </a:xfrm>
-          <a:prstGeom prst="rect">
-            <a:avLst/>
-          </a:prstGeom>
-          <a:noFill/>
-          <a:ln/>
-        </p:spPr>
-        <p:txBody>
-          <a:bodyPr wrap="square" lIns="0" tIns="0" rIns="0" bIns="0" rtlCol="0" anchor="ctr"/>
-          <a:lstStyle/>
-          <a:p>
-            <a:pPr algn="ctr" indent="0" marL="0">
-              <a:buNone/>
-            </a:pPr>
-            <a:r>
-              <a:rPr lang="en-US" sz="1400" b="1" dirty="0">
-                <a:solidFill>
-                  <a:srgbClr val="FFFFFF"/>
-                </a:solidFill>
-                <a:latin typeface="Yu Gothic" pitchFamily="34" charset="0"/>
-                <a:ea typeface="Yu Gothic" pitchFamily="34" charset="-122"/>
-                <a:cs typeface="Yu Gothic" pitchFamily="34" charset="-120"/>
-              </a:rPr>
-              <a:t>3</a:t>
-            </a:r>
-            <a:endParaRPr lang="en-US" sz="1400" dirty="0"/>
+              <a:t>1と2をAIにやらせないことが、この雛形の要です。AIは意味を語る係、表計算は数える係、と役割を分けます。</a:t>
+            </a:r>
+            <a:endParaRPr lang="en-US" sz="1250" dirty="0"/>
           </a:p>
         </p:txBody>
       </p:sp>
@@ -4398,37 +6037,34 @@
         </p:nvSpPr>
         <p:spPr>
           <a:xfrm>
-            <a:off x="8275320" y="3035808"/>
-            <a:ext cx="2834640" cy="777240"/>
-          </a:xfrm>
-          <a:prstGeom prst="rect">
-            <a:avLst/>
-          </a:prstGeom>
-          <a:noFill/>
-          <a:ln/>
-        </p:spPr>
-        <p:txBody>
-          <a:bodyPr wrap="square" lIns="0" tIns="0" rIns="0" bIns="0" rtlCol="0" anchor="ctr"/>
-          <a:lstStyle/>
-          <a:p>
-            <a:pPr indent="0" marL="0">
-              <a:lnSpc>
-                <a:spcPct val="125000"/>
-              </a:lnSpc>
-              <a:buNone/>
-            </a:pPr>
-            <a:r>
-              <a:rPr lang="en-US" sz="1500" b="1" dirty="0">
-                <a:solidFill>
-                  <a:srgbClr val="23201D"/>
-                </a:solidFill>
-                <a:latin typeface="Yu Gothic" pitchFamily="34" charset="0"/>
-                <a:ea typeface="Yu Gothic" pitchFamily="34" charset="-122"/>
-                <a:cs typeface="Yu Gothic" pitchFamily="34" charset="-120"/>
-              </a:rPr>
-              <a:t>月次レポートの雛形にする</a:t>
-            </a:r>
-            <a:endParaRPr lang="en-US" sz="1500" dirty="0"/>
+            <a:off x="777240" y="6382512"/>
+            <a:ext cx="7424928" cy="256032"/>
+          </a:xfrm>
+          <a:prstGeom prst="rect">
+            <a:avLst/>
+          </a:prstGeom>
+          <a:noFill/>
+          <a:ln/>
+        </p:spPr>
+        <p:txBody>
+          <a:bodyPr wrap="square" lIns="0" tIns="0" rIns="0" bIns="0" rtlCol="0" anchor="ctr"/>
+          <a:lstStyle/>
+          <a:p>
+            <a:pPr indent="0" marL="0">
+              <a:buNone/>
+            </a:pPr>
+            <a:r>
+              <a:rPr lang="en-US" sz="900" dirty="0">
+                <a:solidFill>
+                  <a:srgbClr val="8A8177"/>
+                </a:solidFill>
+                <a:latin typeface="Yu Gothic" pitchFamily="34" charset="0"/>
+                <a:ea typeface="Yu Gothic" pitchFamily="34" charset="-122"/>
+                <a:cs typeface="Yu Gothic" pitchFamily="34" charset="-120"/>
+              </a:rPr>
+              <a:t>第4回　数字と判断のAI化</a:t>
+            </a:r>
+            <a:endParaRPr lang="en-US" sz="900" dirty="0"/>
           </a:p>
         </p:txBody>
       </p:sp>
@@ -4440,62 +6076,20 @@
         </p:nvSpPr>
         <p:spPr>
           <a:xfrm>
-            <a:off x="8275320" y="3822192"/>
-            <a:ext cx="2834640" cy="960120"/>
-          </a:xfrm>
-          <a:prstGeom prst="rect">
-            <a:avLst/>
-          </a:prstGeom>
-          <a:noFill/>
-          <a:ln/>
-        </p:spPr>
-        <p:txBody>
-          <a:bodyPr wrap="square" lIns="0" tIns="0" rIns="0" bIns="0" rtlCol="0" anchor="ctr"/>
-          <a:lstStyle/>
-          <a:p>
-            <a:pPr indent="0" marL="0">
-              <a:lnSpc>
-                <a:spcPct val="130000"/>
-              </a:lnSpc>
-              <a:buNone/>
-            </a:pPr>
-            <a:r>
-              <a:rPr lang="en-US" sz="1200" dirty="0">
-                <a:solidFill>
-                  <a:srgbClr val="5A534A"/>
-                </a:solidFill>
-                <a:latin typeface="Yu Gothic" pitchFamily="34" charset="0"/>
-                <a:ea typeface="Yu Gothic" pitchFamily="34" charset="-122"/>
-                <a:cs typeface="Yu Gothic" pitchFamily="34" charset="-120"/>
-              </a:rPr>
-              <a:t>来月から、同じ形で回せるようにします</a:t>
-            </a:r>
-            <a:endParaRPr lang="en-US" sz="1200" dirty="0"/>
-          </a:p>
-        </p:txBody>
-      </p:sp>
-      <p:sp>
-        <p:nvSpPr>
-          <p:cNvPr id="20" name="Text 18"/>
-          <p:cNvSpPr txBox="1"/>
-          <p:nvPr/>
-        </p:nvSpPr>
-        <p:spPr>
-          <a:xfrm>
-            <a:off x="777240" y="6355080"/>
-            <a:ext cx="7424928" cy="274320"/>
-          </a:xfrm>
-          <a:prstGeom prst="rect">
-            <a:avLst/>
-          </a:prstGeom>
-          <a:noFill/>
-          <a:ln/>
-        </p:spPr>
-        <p:txBody>
-          <a:bodyPr wrap="square" lIns="0" tIns="0" rIns="0" bIns="0" rtlCol="0" anchor="ctr"/>
-          <a:lstStyle/>
-          <a:p>
-            <a:pPr indent="0" marL="0">
+            <a:off x="8202168" y="6382512"/>
+            <a:ext cx="3182112" cy="256032"/>
+          </a:xfrm>
+          <a:prstGeom prst="rect">
+            <a:avLst/>
+          </a:prstGeom>
+          <a:noFill/>
+          <a:ln/>
+        </p:spPr>
+        <p:txBody>
+          <a:bodyPr wrap="square" lIns="0" tIns="0" rIns="0" bIns="0" rtlCol="0" anchor="ctr"/>
+          <a:lstStyle/>
+          <a:p>
+            <a:pPr algn="r" indent="0" marL="0">
               <a:buNone/>
             </a:pPr>
             <a:r>
@@ -4507,46 +6101,7 @@
                 <a:ea typeface="Yu Gothic" pitchFamily="34" charset="-122"/>
                 <a:cs typeface="Yu Gothic" pitchFamily="34" charset="-120"/>
               </a:rPr>
-              <a:t>第4回　数字と判断のAI化</a:t>
-            </a:r>
-            <a:endParaRPr lang="en-US" sz="900" dirty="0"/>
-          </a:p>
-        </p:txBody>
-      </p:sp>
-      <p:sp>
-        <p:nvSpPr>
-          <p:cNvPr id="21" name="Text 19"/>
-          <p:cNvSpPr txBox="1"/>
-          <p:nvPr/>
-        </p:nvSpPr>
-        <p:spPr>
-          <a:xfrm>
-            <a:off x="8202168" y="6355080"/>
-            <a:ext cx="3182112" cy="274320"/>
-          </a:xfrm>
-          <a:prstGeom prst="rect">
-            <a:avLst/>
-          </a:prstGeom>
-          <a:noFill/>
-          <a:ln/>
-        </p:spPr>
-        <p:txBody>
-          <a:bodyPr wrap="square" lIns="0" tIns="0" rIns="0" bIns="0" rtlCol="0" anchor="ctr"/>
-          <a:lstStyle/>
-          <a:p>
-            <a:pPr algn="r" indent="0" marL="0">
-              <a:buNone/>
-            </a:pPr>
-            <a:r>
-              <a:rPr lang="en-US" sz="900" dirty="0">
-                <a:solidFill>
-                  <a:srgbClr val="8A8177"/>
-                </a:solidFill>
-                <a:latin typeface="Yu Gothic" pitchFamily="34" charset="0"/>
-                <a:ea typeface="Yu Gothic" pitchFamily="34" charset="-122"/>
-                <a:cs typeface="Yu Gothic" pitchFamily="34" charset="-120"/>
-              </a:rPr>
-              <a:t>演習</a:t>
+              <a:t>あてはめ</a:t>
             </a:r>
             <a:endParaRPr lang="en-US" sz="900" dirty="0"/>
           </a:p>
@@ -4592,7 +6147,7 @@
         </p:nvSpPr>
         <p:spPr>
           <a:xfrm>
-            <a:off x="777240" y="822960"/>
+            <a:off x="777240" y="566928"/>
             <a:ext cx="10607040" cy="274320"/>
           </a:xfrm>
           <a:prstGeom prst="rect">
@@ -4611,13 +6166,13 @@
             <a:r>
               <a:rPr lang="en-US" sz="1100" b="1" spc="250" kern="0" dirty="0">
                 <a:solidFill>
-                  <a:srgbClr val="B04A2F"/>
-                </a:solidFill>
-                <a:latin typeface="Yu Gothic" pitchFamily="34" charset="0"/>
-                <a:ea typeface="Yu Gothic" pitchFamily="34" charset="-122"/>
-                <a:cs typeface="Yu Gothic" pitchFamily="34" charset="-120"/>
-              </a:rPr>
-              <a:t>ここだけは</a:t>
+                  <a:srgbClr val="8A8177"/>
+                </a:solidFill>
+                <a:latin typeface="Yu Gothic" pitchFamily="34" charset="0"/>
+                <a:ea typeface="Yu Gothic" pitchFamily="34" charset="-122"/>
+                <a:cs typeface="Yu Gothic" pitchFamily="34" charset="-120"/>
+              </a:rPr>
+              <a:t>実演 ①</a:t>
             </a:r>
             <a:endParaRPr lang="en-US" sz="1100" dirty="0"/>
           </a:p>
@@ -4631,24 +6186,24 @@
         </p:nvSpPr>
         <p:spPr>
           <a:xfrm>
-            <a:off x="777240" y="1188720"/>
-            <a:ext cx="9546336" cy="822960"/>
-          </a:xfrm>
-          <a:prstGeom prst="rect">
-            <a:avLst/>
-          </a:prstGeom>
-          <a:noFill/>
-          <a:ln/>
-        </p:spPr>
-        <p:txBody>
-          <a:bodyPr wrap="square" lIns="0" tIns="0" rIns="0" bIns="0" rtlCol="0" anchor="ctr"/>
-          <a:lstStyle/>
-          <a:p>
-            <a:pPr indent="0" marL="0">
-              <a:buNone/>
-            </a:pPr>
-            <a:r>
-              <a:rPr lang="en-US" sz="3000" b="1" dirty="0">
+            <a:off x="777240" y="896112"/>
+            <a:ext cx="10607040" cy="640080"/>
+          </a:xfrm>
+          <a:prstGeom prst="rect">
+            <a:avLst/>
+          </a:prstGeom>
+          <a:noFill/>
+          <a:ln/>
+        </p:spPr>
+        <p:txBody>
+          <a:bodyPr wrap="square" lIns="0" tIns="0" rIns="0" bIns="0" rtlCol="0" anchor="ctr"/>
+          <a:lstStyle/>
+          <a:p>
+            <a:pPr indent="0" marL="0">
+              <a:buNone/>
+            </a:pPr>
+            <a:r>
+              <a:rPr lang="en-US" sz="2600" b="1" dirty="0">
                 <a:solidFill>
                   <a:srgbClr val="23201D"/>
                 </a:solidFill>
@@ -4656,9 +6211,9 @@
                 <a:ea typeface="Yu Gothic" pitchFamily="34" charset="-122"/>
                 <a:cs typeface="Yu Gothic" pitchFamily="34" charset="-120"/>
               </a:rPr>
-              <a:t>最初の3か月は当たりません</a:t>
-            </a:r>
-            <a:endParaRPr lang="en-US" sz="3000" dirty="0"/>
+              <a:t>表を投げて「分析して」</a:t>
+            </a:r>
+            <a:endParaRPr lang="en-US" sz="2600" dirty="0"/>
           </a:p>
         </p:txBody>
       </p:sp>
@@ -4670,14 +6225,352 @@
         </p:nvSpPr>
         <p:spPr>
           <a:xfrm>
-            <a:off x="777240" y="2331720"/>
-            <a:ext cx="64008" cy="2011680"/>
+            <a:off x="777240" y="1691640"/>
+            <a:ext cx="4879238" cy="1371600"/>
           </a:xfrm>
           <a:prstGeom prst="rect">
             <a:avLst/>
           </a:prstGeom>
           <a:solidFill>
-            <a:srgbClr val="B04A2F"/>
+            <a:srgbClr val="EDE7DB"/>
+          </a:solidFill>
+          <a:ln w="15875">
+            <a:solidFill>
+              <a:srgbClr val="8A8177"/>
+            </a:solidFill>
+            <a:prstDash val="solid"/>
+          </a:ln>
+        </p:spPr>
+      </p:sp>
+      <p:sp>
+        <p:nvSpPr>
+          <p:cNvPr id="5" name="Text 3"/>
+          <p:cNvSpPr txBox="1"/>
+          <p:nvPr/>
+        </p:nvSpPr>
+        <p:spPr>
+          <a:xfrm>
+            <a:off x="1005840" y="1783080"/>
+            <a:ext cx="1828800" cy="274320"/>
+          </a:xfrm>
+          <a:prstGeom prst="rect">
+            <a:avLst/>
+          </a:prstGeom>
+          <a:noFill/>
+          <a:ln/>
+        </p:spPr>
+        <p:txBody>
+          <a:bodyPr wrap="square" lIns="0" tIns="0" rIns="0" bIns="0" rtlCol="0" anchor="ctr"/>
+          <a:lstStyle/>
+          <a:p>
+            <a:pPr indent="0" marL="0">
+              <a:buNone/>
+            </a:pPr>
+            <a:r>
+              <a:rPr lang="en-US" sz="1000" b="1" spc="200" kern="0" dirty="0">
+                <a:solidFill>
+                  <a:srgbClr val="8A8177"/>
+                </a:solidFill>
+                <a:latin typeface="Yu Gothic" pitchFamily="34" charset="0"/>
+                <a:ea typeface="Yu Gothic" pitchFamily="34" charset="-122"/>
+                <a:cs typeface="Yu Gothic" pitchFamily="34" charset="-120"/>
+              </a:rPr>
+              <a:t>入力</a:t>
+            </a:r>
+            <a:endParaRPr lang="en-US" sz="1000" dirty="0"/>
+          </a:p>
+        </p:txBody>
+      </p:sp>
+      <p:sp>
+        <p:nvSpPr>
+          <p:cNvPr id="6" name="Text 4"/>
+          <p:cNvSpPr txBox="1"/>
+          <p:nvPr/>
+        </p:nvSpPr>
+        <p:spPr>
+          <a:xfrm>
+            <a:off x="1005840" y="2084832"/>
+            <a:ext cx="4422038" cy="868680"/>
+          </a:xfrm>
+          <a:prstGeom prst="rect">
+            <a:avLst/>
+          </a:prstGeom>
+          <a:noFill/>
+          <a:ln/>
+        </p:spPr>
+        <p:txBody>
+          <a:bodyPr wrap="square" lIns="0" tIns="0" rIns="0" bIns="0" rtlCol="0" anchor="ctr"/>
+          <a:lstStyle/>
+          <a:p>
+            <a:pPr indent="0" marL="0">
+              <a:lnSpc>
+                <a:spcPct val="125000"/>
+              </a:lnSpc>
+              <a:buNone/>
+            </a:pPr>
+            <a:r>
+              <a:rPr lang="en-US" sz="1200" dirty="0">
+                <a:solidFill>
+                  <a:srgbClr val="23201D"/>
+                </a:solidFill>
+                <a:latin typeface="Consolas" pitchFamily="34" charset="0"/>
+                <a:ea typeface="Consolas" pitchFamily="34" charset="-122"/>
+                <a:cs typeface="Consolas" pitchFamily="34" charset="-120"/>
+              </a:rPr>
+              <a:t>売上表を添付 →「この数字を分析して」</a:t>
+            </a:r>
+            <a:endParaRPr lang="en-US" sz="1200" dirty="0"/>
+          </a:p>
+        </p:txBody>
+      </p:sp>
+      <p:sp>
+        <p:nvSpPr>
+          <p:cNvPr id="7" name="Shape 5"/>
+          <p:cNvSpPr/>
+          <p:nvPr/>
+        </p:nvSpPr>
+        <p:spPr>
+          <a:xfrm>
+            <a:off x="6080760" y="1691640"/>
+            <a:ext cx="5303520" cy="3017520"/>
+          </a:xfrm>
+          <a:prstGeom prst="rect">
+            <a:avLst/>
+          </a:prstGeom>
+          <a:solidFill>
+            <a:srgbClr val="FFFFFF"/>
+          </a:solidFill>
+          <a:ln w="12700">
+            <a:solidFill>
+              <a:srgbClr val="EDE7DB"/>
+            </a:solidFill>
+            <a:prstDash val="solid"/>
+          </a:ln>
+        </p:spPr>
+      </p:sp>
+      <p:sp>
+        <p:nvSpPr>
+          <p:cNvPr id="8" name="Text 6"/>
+          <p:cNvSpPr txBox="1"/>
+          <p:nvPr/>
+        </p:nvSpPr>
+        <p:spPr>
+          <a:xfrm>
+            <a:off x="6309360" y="1783080"/>
+            <a:ext cx="2743200" cy="274320"/>
+          </a:xfrm>
+          <a:prstGeom prst="rect">
+            <a:avLst/>
+          </a:prstGeom>
+          <a:noFill/>
+          <a:ln/>
+        </p:spPr>
+        <p:txBody>
+          <a:bodyPr wrap="square" lIns="0" tIns="0" rIns="0" bIns="0" rtlCol="0" anchor="ctr"/>
+          <a:lstStyle/>
+          <a:p>
+            <a:pPr indent="0" marL="0">
+              <a:buNone/>
+            </a:pPr>
+            <a:r>
+              <a:rPr lang="en-US" sz="1000" b="1" spc="200" kern="0" dirty="0">
+                <a:solidFill>
+                  <a:srgbClr val="8A8177"/>
+                </a:solidFill>
+                <a:latin typeface="Yu Gothic" pitchFamily="34" charset="0"/>
+                <a:ea typeface="Yu Gothic" pitchFamily="34" charset="-122"/>
+                <a:cs typeface="Yu Gothic" pitchFamily="34" charset="-120"/>
+              </a:rPr>
+              <a:t>出てくるもの</a:t>
+            </a:r>
+            <a:endParaRPr lang="en-US" sz="1000" dirty="0"/>
+          </a:p>
+        </p:txBody>
+      </p:sp>
+      <p:sp>
+        <p:nvSpPr>
+          <p:cNvPr id="9" name="Text 7"/>
+          <p:cNvSpPr txBox="1"/>
+          <p:nvPr/>
+        </p:nvSpPr>
+        <p:spPr>
+          <a:xfrm>
+            <a:off x="6309360" y="2148840"/>
+            <a:ext cx="4846320" cy="566928"/>
+          </a:xfrm>
+          <a:prstGeom prst="rect">
+            <a:avLst/>
+          </a:prstGeom>
+          <a:noFill/>
+          <a:ln/>
+        </p:spPr>
+        <p:txBody>
+          <a:bodyPr wrap="square" lIns="0" tIns="0" rIns="0" bIns="0" rtlCol="0" anchor="ctr"/>
+          <a:lstStyle/>
+          <a:p>
+            <a:pPr indent="0" marL="0">
+              <a:lnSpc>
+                <a:spcPct val="125000"/>
+              </a:lnSpc>
+              <a:buNone/>
+            </a:pPr>
+            <a:r>
+              <a:rPr lang="en-US" sz="1250" dirty="0">
+                <a:solidFill>
+                  <a:srgbClr val="23201D"/>
+                </a:solidFill>
+                <a:latin typeface="Yu Gothic" pitchFamily="34" charset="0"/>
+                <a:ea typeface="Yu Gothic" pitchFamily="34" charset="-122"/>
+                <a:cs typeface="Yu Gothic" pitchFamily="34" charset="-120"/>
+              </a:rPr>
+              <a:t>・もっともらしい要約が出てくる</a:t>
+            </a:r>
+            <a:endParaRPr lang="en-US" sz="1250" dirty="0"/>
+          </a:p>
+        </p:txBody>
+      </p:sp>
+      <p:sp>
+        <p:nvSpPr>
+          <p:cNvPr id="10" name="Text 8"/>
+          <p:cNvSpPr txBox="1"/>
+          <p:nvPr/>
+        </p:nvSpPr>
+        <p:spPr>
+          <a:xfrm>
+            <a:off x="6309360" y="2752344"/>
+            <a:ext cx="4846320" cy="566928"/>
+          </a:xfrm>
+          <a:prstGeom prst="rect">
+            <a:avLst/>
+          </a:prstGeom>
+          <a:noFill/>
+          <a:ln/>
+        </p:spPr>
+        <p:txBody>
+          <a:bodyPr wrap="square" lIns="0" tIns="0" rIns="0" bIns="0" rtlCol="0" anchor="ctr"/>
+          <a:lstStyle/>
+          <a:p>
+            <a:pPr indent="0" marL="0">
+              <a:lnSpc>
+                <a:spcPct val="125000"/>
+              </a:lnSpc>
+              <a:buNone/>
+            </a:pPr>
+            <a:r>
+              <a:rPr lang="en-US" sz="1250" dirty="0">
+                <a:solidFill>
+                  <a:srgbClr val="23201D"/>
+                </a:solidFill>
+                <a:latin typeface="Yu Gothic" pitchFamily="34" charset="0"/>
+                <a:ea typeface="Yu Gothic" pitchFamily="34" charset="-122"/>
+                <a:cs typeface="Yu Gothic" pitchFamily="34" charset="-120"/>
+              </a:rPr>
+              <a:t>・合計を電卓で確かめると、ずれていることがある</a:t>
+            </a:r>
+            <a:endParaRPr lang="en-US" sz="1250" dirty="0"/>
+          </a:p>
+        </p:txBody>
+      </p:sp>
+      <p:sp>
+        <p:nvSpPr>
+          <p:cNvPr id="11" name="Text 9"/>
+          <p:cNvSpPr txBox="1"/>
+          <p:nvPr/>
+        </p:nvSpPr>
+        <p:spPr>
+          <a:xfrm>
+            <a:off x="6309360" y="3355848"/>
+            <a:ext cx="4846320" cy="566928"/>
+          </a:xfrm>
+          <a:prstGeom prst="rect">
+            <a:avLst/>
+          </a:prstGeom>
+          <a:noFill/>
+          <a:ln/>
+        </p:spPr>
+        <p:txBody>
+          <a:bodyPr wrap="square" lIns="0" tIns="0" rIns="0" bIns="0" rtlCol="0" anchor="ctr"/>
+          <a:lstStyle/>
+          <a:p>
+            <a:pPr indent="0" marL="0">
+              <a:lnSpc>
+                <a:spcPct val="125000"/>
+              </a:lnSpc>
+              <a:buNone/>
+            </a:pPr>
+            <a:r>
+              <a:rPr lang="en-US" sz="1250" dirty="0">
+                <a:solidFill>
+                  <a:srgbClr val="23201D"/>
+                </a:solidFill>
+                <a:latin typeface="Yu Gothic" pitchFamily="34" charset="0"/>
+                <a:ea typeface="Yu Gothic" pitchFamily="34" charset="-122"/>
+                <a:cs typeface="Yu Gothic" pitchFamily="34" charset="-120"/>
+              </a:rPr>
+              <a:t>・示唆は「季節要因が考えられます」程度</a:t>
+            </a:r>
+            <a:endParaRPr lang="en-US" sz="1250" dirty="0"/>
+          </a:p>
+        </p:txBody>
+      </p:sp>
+      <p:sp>
+        <p:nvSpPr>
+          <p:cNvPr id="12" name="Text 10"/>
+          <p:cNvSpPr txBox="1"/>
+          <p:nvPr/>
+        </p:nvSpPr>
+        <p:spPr>
+          <a:xfrm>
+            <a:off x="6309360" y="3959352"/>
+            <a:ext cx="4846320" cy="566928"/>
+          </a:xfrm>
+          <a:prstGeom prst="rect">
+            <a:avLst/>
+          </a:prstGeom>
+          <a:noFill/>
+          <a:ln/>
+        </p:spPr>
+        <p:txBody>
+          <a:bodyPr wrap="square" lIns="0" tIns="0" rIns="0" bIns="0" rtlCol="0" anchor="ctr"/>
+          <a:lstStyle/>
+          <a:p>
+            <a:pPr indent="0" marL="0">
+              <a:lnSpc>
+                <a:spcPct val="125000"/>
+              </a:lnSpc>
+              <a:buNone/>
+            </a:pPr>
+            <a:r>
+              <a:rPr lang="en-US" sz="1250" dirty="0">
+                <a:solidFill>
+                  <a:srgbClr val="23201D"/>
+                </a:solidFill>
+                <a:latin typeface="Yu Gothic" pitchFamily="34" charset="0"/>
+                <a:ea typeface="Yu Gothic" pitchFamily="34" charset="-122"/>
+                <a:cs typeface="Yu Gothic" pitchFamily="34" charset="-120"/>
+              </a:rPr>
+              <a:t>・このまま社外資料に使うと事故になる</a:t>
+            </a:r>
+            <a:endParaRPr lang="en-US" sz="1250" dirty="0"/>
+          </a:p>
+        </p:txBody>
+      </p:sp>
+      <p:sp>
+        <p:nvSpPr>
+          <p:cNvPr id="13" name="Shape 11"/>
+          <p:cNvSpPr/>
+          <p:nvPr/>
+        </p:nvSpPr>
+        <p:spPr>
+          <a:xfrm>
+            <a:off x="777240" y="3291840"/>
+            <a:ext cx="4879238" cy="1417320"/>
+          </a:xfrm>
+          <a:prstGeom prst="rect">
+            <a:avLst/>
+          </a:prstGeom>
+          <a:solidFill>
+            <a:srgbClr val="E4DFD5"/>
           </a:solidFill>
           <a:ln w="12700">
             <a:solidFill>
@@ -4689,14 +6582,14 @@
       </p:sp>
       <p:sp>
         <p:nvSpPr>
-          <p:cNvPr id="5" name="Text 3"/>
-          <p:cNvSpPr txBox="1"/>
-          <p:nvPr/>
-        </p:nvSpPr>
-        <p:spPr>
-          <a:xfrm>
-            <a:off x="1188720" y="2331720"/>
-            <a:ext cx="9966960" cy="2011680"/>
+          <p:cNvPr id="14" name="Text 12"/>
+          <p:cNvSpPr txBox="1"/>
+          <p:nvPr/>
+        </p:nvSpPr>
+        <p:spPr>
+          <a:xfrm>
+            <a:off x="1005840" y="3383280"/>
+            <a:ext cx="4422038" cy="1234440"/>
           </a:xfrm>
           <a:prstGeom prst="rect">
             <a:avLst/>
@@ -4710,12 +6603,12 @@
           <a:p>
             <a:pPr indent="0" marL="0">
               <a:lnSpc>
-                <a:spcPct val="160000"/>
+                <a:spcPct val="135000"/>
               </a:lnSpc>
               <a:buNone/>
             </a:pPr>
             <a:r>
-              <a:rPr lang="en-US" sz="1700" dirty="0">
+              <a:rPr lang="en-US" sz="1250" dirty="0">
                 <a:solidFill>
                   <a:srgbClr val="3F3933"/>
                 </a:solidFill>
@@ -4723,22 +6616,86 @@
                 <a:ea typeface="Yu Gothic" pitchFamily="34" charset="-122"/>
                 <a:cs typeface="Yu Gothic" pitchFamily="34" charset="-120"/>
               </a:rPr>
-              <a:t>ある会社では、最初の3か月の示唆はほとんど的外れでした。前提情報を書き足していった結果、4か月目から使える示唆が出るようになりました。すぐに効くものではありません。</a:t>
-            </a:r>
-            <a:endParaRPr lang="en-US" sz="1700" dirty="0"/>
-          </a:p>
-        </p:txBody>
-      </p:sp>
-      <p:sp>
-        <p:nvSpPr>
-          <p:cNvPr id="6" name="Text 4"/>
-          <p:cNvSpPr txBox="1"/>
-          <p:nvPr/>
-        </p:nvSpPr>
-        <p:spPr>
-          <a:xfrm>
-            <a:off x="777240" y="6355080"/>
-            <a:ext cx="7424928" cy="274320"/>
+              <a:t>AIは計算が得意ではありません。桁の多い集計は、それらしい数字を書いてしまうことがあります。</a:t>
+            </a:r>
+            <a:endParaRPr lang="en-US" sz="1250" dirty="0"/>
+          </a:p>
+        </p:txBody>
+      </p:sp>
+      <p:sp>
+        <p:nvSpPr>
+          <p:cNvPr id="15" name="Shape 13"/>
+          <p:cNvSpPr/>
+          <p:nvPr/>
+        </p:nvSpPr>
+        <p:spPr>
+          <a:xfrm>
+            <a:off x="777240" y="4983480"/>
+            <a:ext cx="10607040" cy="685800"/>
+          </a:xfrm>
+          <a:prstGeom prst="rect">
+            <a:avLst/>
+          </a:prstGeom>
+          <a:solidFill>
+            <a:srgbClr val="8A8177"/>
+          </a:solidFill>
+          <a:ln w="12700">
+            <a:solidFill>
+              <a:srgbClr val="333333"/>
+            </a:solidFill>
+            <a:prstDash val="solid"/>
+          </a:ln>
+        </p:spPr>
+      </p:sp>
+      <p:sp>
+        <p:nvSpPr>
+          <p:cNvPr id="16" name="Text 14"/>
+          <p:cNvSpPr txBox="1"/>
+          <p:nvPr/>
+        </p:nvSpPr>
+        <p:spPr>
+          <a:xfrm>
+            <a:off x="1097280" y="4983480"/>
+            <a:ext cx="9966960" cy="685800"/>
+          </a:xfrm>
+          <a:prstGeom prst="rect">
+            <a:avLst/>
+          </a:prstGeom>
+          <a:noFill/>
+          <a:ln/>
+        </p:spPr>
+        <p:txBody>
+          <a:bodyPr wrap="square" lIns="0" tIns="0" rIns="0" bIns="0" rtlCol="0" anchor="ctr"/>
+          <a:lstStyle/>
+          <a:p>
+            <a:pPr indent="0" marL="0">
+              <a:buNone/>
+            </a:pPr>
+            <a:r>
+              <a:rPr lang="en-US" sz="1450" b="1" dirty="0">
+                <a:solidFill>
+                  <a:srgbClr val="FFFFFF"/>
+                </a:solidFill>
+                <a:latin typeface="Yu Gothic" pitchFamily="34" charset="0"/>
+                <a:ea typeface="Yu Gothic" pitchFamily="34" charset="-122"/>
+                <a:cs typeface="Yu Gothic" pitchFamily="34" charset="-120"/>
+              </a:rPr>
+              <a:t>AIの出した数字は、そのままでは社外に出せません</a:t>
+            </a:r>
+            <a:endParaRPr lang="en-US" sz="1450" dirty="0"/>
+          </a:p>
+        </p:txBody>
+      </p:sp>
+      <p:sp>
+        <p:nvSpPr>
+          <p:cNvPr id="17" name="Text 15"/>
+          <p:cNvSpPr txBox="1"/>
+          <p:nvPr/>
+        </p:nvSpPr>
+        <p:spPr>
+          <a:xfrm>
+            <a:off x="777240" y="6382512"/>
+            <a:ext cx="7424928" cy="256032"/>
           </a:xfrm>
           <a:prstGeom prst="rect">
             <a:avLst/>
@@ -4770,14 +6727,14 @@
       </p:sp>
       <p:sp>
         <p:nvSpPr>
-          <p:cNvPr id="7" name="Text 5"/>
-          <p:cNvSpPr txBox="1"/>
-          <p:nvPr/>
-        </p:nvSpPr>
-        <p:spPr>
-          <a:xfrm>
-            <a:off x="8202168" y="6355080"/>
-            <a:ext cx="3182112" cy="274320"/>
+          <p:cNvPr id="18" name="Text 16"/>
+          <p:cNvSpPr txBox="1"/>
+          <p:nvPr/>
+        </p:nvSpPr>
+        <p:spPr>
+          <a:xfrm>
+            <a:off x="8202168" y="6382512"/>
+            <a:ext cx="3182112" cy="256032"/>
           </a:xfrm>
           <a:prstGeom prst="rect">
             <a:avLst/>
@@ -4801,7 +6758,7 @@
                 <a:ea typeface="Yu Gothic" pitchFamily="34" charset="-122"/>
                 <a:cs typeface="Yu Gothic" pitchFamily="34" charset="-120"/>
               </a:rPr>
-              <a:t>ここだけは</a:t>
+              <a:t>実演 ①</a:t>
             </a:r>
             <a:endParaRPr lang="en-US" sz="900" dirty="0"/>
           </a:p>
@@ -4821,7 +6778,7 @@
     <p:bg>
       <p:bgPr>
         <a:solidFill>
-          <a:srgbClr val="23201D"/>
+          <a:srgbClr val="F6F2EA"/>
         </a:solidFill>
       </p:bgPr>
     </p:bg>
@@ -4847,34 +6804,34 @@
         </p:nvSpPr>
         <p:spPr>
           <a:xfrm>
-            <a:off x="777240" y="1371600"/>
-            <a:ext cx="10607040" cy="365760"/>
-          </a:xfrm>
-          <a:prstGeom prst="rect">
-            <a:avLst/>
-          </a:prstGeom>
-          <a:noFill/>
-          <a:ln/>
-        </p:spPr>
-        <p:txBody>
-          <a:bodyPr wrap="square" lIns="0" tIns="0" rIns="0" bIns="0" rtlCol="0" anchor="ctr"/>
-          <a:lstStyle/>
-          <a:p>
-            <a:pPr indent="0" marL="0">
-              <a:buNone/>
-            </a:pPr>
-            <a:r>
-              <a:rPr lang="en-US" sz="1200" b="1" spc="300" kern="0" dirty="0">
-                <a:solidFill>
-                  <a:srgbClr val="B04A2F"/>
-                </a:solidFill>
-                <a:latin typeface="Yu Gothic" pitchFamily="34" charset="0"/>
-                <a:ea typeface="Yu Gothic" pitchFamily="34" charset="-122"/>
-                <a:cs typeface="Yu Gothic" pitchFamily="34" charset="-120"/>
-              </a:rPr>
-              <a:t>今日の宿題</a:t>
-            </a:r>
-            <a:endParaRPr lang="en-US" sz="1200" dirty="0"/>
+            <a:off x="777240" y="566928"/>
+            <a:ext cx="10607040" cy="274320"/>
+          </a:xfrm>
+          <a:prstGeom prst="rect">
+            <a:avLst/>
+          </a:prstGeom>
+          <a:noFill/>
+          <a:ln/>
+        </p:spPr>
+        <p:txBody>
+          <a:bodyPr wrap="square" lIns="0" tIns="0" rIns="0" bIns="0" rtlCol="0" anchor="ctr"/>
+          <a:lstStyle/>
+          <a:p>
+            <a:pPr indent="0" marL="0">
+              <a:buNone/>
+            </a:pPr>
+            <a:r>
+              <a:rPr lang="en-US" sz="1100" b="1" spc="250" kern="0" dirty="0">
+                <a:solidFill>
+                  <a:srgbClr val="3B6B4A"/>
+                </a:solidFill>
+                <a:latin typeface="Yu Gothic" pitchFamily="34" charset="0"/>
+                <a:ea typeface="Yu Gothic" pitchFamily="34" charset="-122"/>
+                <a:cs typeface="Yu Gothic" pitchFamily="34" charset="-120"/>
+              </a:rPr>
+              <a:t>実演 ②</a:t>
+            </a:r>
+            <a:endParaRPr lang="en-US" sz="1100" dirty="0"/>
           </a:p>
         </p:txBody>
       </p:sp>
@@ -4886,7 +6843,7 @@
         </p:nvSpPr>
         <p:spPr>
           <a:xfrm>
-            <a:off x="777240" y="1783080"/>
+            <a:off x="777240" y="896112"/>
             <a:ext cx="10607040" cy="640080"/>
           </a:xfrm>
           <a:prstGeom prst="rect">
@@ -4903,17 +6860,17 @@
               <a:buNone/>
             </a:pPr>
             <a:r>
-              <a:rPr lang="en-US" sz="3200" b="1" dirty="0">
-                <a:solidFill>
-                  <a:srgbClr val="FFFFFF"/>
-                </a:solidFill>
-                <a:latin typeface="Yu Gothic" pitchFamily="34" charset="0"/>
-                <a:ea typeface="Yu Gothic" pitchFamily="34" charset="-122"/>
-                <a:cs typeface="Yu Gothic" pitchFamily="34" charset="-120"/>
-              </a:rPr>
-              <a:t>ひとつだけ</a:t>
-            </a:r>
-            <a:endParaRPr lang="en-US" sz="3200" dirty="0"/>
+              <a:rPr lang="en-US" sz="2600" b="1" dirty="0">
+                <a:solidFill>
+                  <a:srgbClr val="23201D"/>
+                </a:solidFill>
+                <a:latin typeface="Yu Gothic" pitchFamily="34" charset="0"/>
+                <a:ea typeface="Yu Gothic" pitchFamily="34" charset="-122"/>
+                <a:cs typeface="Yu Gothic" pitchFamily="34" charset="-120"/>
+              </a:rPr>
+              <a:t>役割を分けて渡す</a:t>
+            </a:r>
+            <a:endParaRPr lang="en-US" sz="2600" dirty="0"/>
           </a:p>
         </p:txBody>
       </p:sp>
@@ -4925,18 +6882,124 @@
         </p:nvSpPr>
         <p:spPr>
           <a:xfrm>
-            <a:off x="777240" y="2743200"/>
-            <a:ext cx="10607040" cy="1463040"/>
+            <a:off x="777240" y="1691640"/>
+            <a:ext cx="4879238" cy="1371600"/>
           </a:xfrm>
           <a:prstGeom prst="rect">
             <a:avLst/>
           </a:prstGeom>
           <a:solidFill>
-            <a:srgbClr val="2E2A26"/>
+            <a:srgbClr val="FFFFFF"/>
+          </a:solidFill>
+          <a:ln w="15875">
+            <a:solidFill>
+              <a:srgbClr val="3B6B4A"/>
+            </a:solidFill>
+            <a:prstDash val="solid"/>
+          </a:ln>
+        </p:spPr>
+      </p:sp>
+      <p:sp>
+        <p:nvSpPr>
+          <p:cNvPr id="5" name="Text 3"/>
+          <p:cNvSpPr txBox="1"/>
+          <p:nvPr/>
+        </p:nvSpPr>
+        <p:spPr>
+          <a:xfrm>
+            <a:off x="1005840" y="1783080"/>
+            <a:ext cx="1828800" cy="274320"/>
+          </a:xfrm>
+          <a:prstGeom prst="rect">
+            <a:avLst/>
+          </a:prstGeom>
+          <a:noFill/>
+          <a:ln/>
+        </p:spPr>
+        <p:txBody>
+          <a:bodyPr wrap="square" lIns="0" tIns="0" rIns="0" bIns="0" rtlCol="0" anchor="ctr"/>
+          <a:lstStyle/>
+          <a:p>
+            <a:pPr indent="0" marL="0">
+              <a:buNone/>
+            </a:pPr>
+            <a:r>
+              <a:rPr lang="en-US" sz="1000" b="1" spc="200" kern="0" dirty="0">
+                <a:solidFill>
+                  <a:srgbClr val="3B6B4A"/>
+                </a:solidFill>
+                <a:latin typeface="Yu Gothic" pitchFamily="34" charset="0"/>
+                <a:ea typeface="Yu Gothic" pitchFamily="34" charset="-122"/>
+                <a:cs typeface="Yu Gothic" pitchFamily="34" charset="-120"/>
+              </a:rPr>
+              <a:t>入力</a:t>
+            </a:r>
+            <a:endParaRPr lang="en-US" sz="1000" dirty="0"/>
+          </a:p>
+        </p:txBody>
+      </p:sp>
+      <p:sp>
+        <p:nvSpPr>
+          <p:cNvPr id="6" name="Text 4"/>
+          <p:cNvSpPr txBox="1"/>
+          <p:nvPr/>
+        </p:nvSpPr>
+        <p:spPr>
+          <a:xfrm>
+            <a:off x="1005840" y="2084832"/>
+            <a:ext cx="4422038" cy="868680"/>
+          </a:xfrm>
+          <a:prstGeom prst="rect">
+            <a:avLst/>
+          </a:prstGeom>
+          <a:noFill/>
+          <a:ln/>
+        </p:spPr>
+        <p:txBody>
+          <a:bodyPr wrap="square" lIns="0" tIns="0" rIns="0" bIns="0" rtlCol="0" anchor="ctr"/>
+          <a:lstStyle/>
+          <a:p>
+            <a:pPr indent="0" marL="0">
+              <a:lnSpc>
+                <a:spcPct val="125000"/>
+              </a:lnSpc>
+              <a:buNone/>
+            </a:pPr>
+            <a:r>
+              <a:rPr lang="en-US" sz="1200" dirty="0">
+                <a:solidFill>
+                  <a:srgbClr val="23201D"/>
+                </a:solidFill>
+                <a:latin typeface="Consolas" pitchFamily="34" charset="0"/>
+                <a:ea typeface="Consolas" pitchFamily="34" charset="-122"/>
+                <a:cs typeface="Consolas" pitchFamily="34" charset="-120"/>
+              </a:rPr>
+              <a:t>集計済みの数字＋前提（季節性・特殊要因）→「反論を3つ」</a:t>
+            </a:r>
+            <a:endParaRPr lang="en-US" sz="1200" dirty="0"/>
+          </a:p>
+        </p:txBody>
+      </p:sp>
+      <p:sp>
+        <p:nvSpPr>
+          <p:cNvPr id="7" name="Shape 5"/>
+          <p:cNvSpPr/>
+          <p:nvPr/>
+        </p:nvSpPr>
+        <p:spPr>
+          <a:xfrm>
+            <a:off x="6080760" y="1691640"/>
+            <a:ext cx="5303520" cy="3017520"/>
+          </a:xfrm>
+          <a:prstGeom prst="rect">
+            <a:avLst/>
+          </a:prstGeom>
+          <a:solidFill>
+            <a:srgbClr val="FFFFFF"/>
           </a:solidFill>
           <a:ln w="12700">
             <a:solidFill>
-              <a:srgbClr val="B04A2F"/>
+              <a:srgbClr val="EDE7DB"/>
             </a:solidFill>
             <a:prstDash val="solid"/>
           </a:ln>
@@ -4944,14 +7007,604 @@
       </p:sp>
       <p:sp>
         <p:nvSpPr>
+          <p:cNvPr id="8" name="Text 6"/>
+          <p:cNvSpPr txBox="1"/>
+          <p:nvPr/>
+        </p:nvSpPr>
+        <p:spPr>
+          <a:xfrm>
+            <a:off x="6309360" y="1783080"/>
+            <a:ext cx="2743200" cy="274320"/>
+          </a:xfrm>
+          <a:prstGeom prst="rect">
+            <a:avLst/>
+          </a:prstGeom>
+          <a:noFill/>
+          <a:ln/>
+        </p:spPr>
+        <p:txBody>
+          <a:bodyPr wrap="square" lIns="0" tIns="0" rIns="0" bIns="0" rtlCol="0" anchor="ctr"/>
+          <a:lstStyle/>
+          <a:p>
+            <a:pPr indent="0" marL="0">
+              <a:buNone/>
+            </a:pPr>
+            <a:r>
+              <a:rPr lang="en-US" sz="1000" b="1" spc="200" kern="0" dirty="0">
+                <a:solidFill>
+                  <a:srgbClr val="8A8177"/>
+                </a:solidFill>
+                <a:latin typeface="Yu Gothic" pitchFamily="34" charset="0"/>
+                <a:ea typeface="Yu Gothic" pitchFamily="34" charset="-122"/>
+                <a:cs typeface="Yu Gothic" pitchFamily="34" charset="-120"/>
+              </a:rPr>
+              <a:t>出てくるもの</a:t>
+            </a:r>
+            <a:endParaRPr lang="en-US" sz="1000" dirty="0"/>
+          </a:p>
+        </p:txBody>
+      </p:sp>
+      <p:sp>
+        <p:nvSpPr>
+          <p:cNvPr id="9" name="Text 7"/>
+          <p:cNvSpPr txBox="1"/>
+          <p:nvPr/>
+        </p:nvSpPr>
+        <p:spPr>
+          <a:xfrm>
+            <a:off x="6309360" y="2148840"/>
+            <a:ext cx="4846320" cy="566928"/>
+          </a:xfrm>
+          <a:prstGeom prst="rect">
+            <a:avLst/>
+          </a:prstGeom>
+          <a:noFill/>
+          <a:ln/>
+        </p:spPr>
+        <p:txBody>
+          <a:bodyPr wrap="square" lIns="0" tIns="0" rIns="0" bIns="0" rtlCol="0" anchor="ctr"/>
+          <a:lstStyle/>
+          <a:p>
+            <a:pPr indent="0" marL="0">
+              <a:lnSpc>
+                <a:spcPct val="125000"/>
+              </a:lnSpc>
+              <a:buNone/>
+            </a:pPr>
+            <a:r>
+              <a:rPr lang="en-US" sz="1250" dirty="0">
+                <a:solidFill>
+                  <a:srgbClr val="23201D"/>
+                </a:solidFill>
+                <a:latin typeface="Yu Gothic" pitchFamily="34" charset="0"/>
+                <a:ea typeface="Yu Gothic" pitchFamily="34" charset="-122"/>
+                <a:cs typeface="Yu Gothic" pitchFamily="34" charset="-120"/>
+              </a:rPr>
+              <a:t>・前提を踏まえた仮説が出る</a:t>
+            </a:r>
+            <a:endParaRPr lang="en-US" sz="1250" dirty="0"/>
+          </a:p>
+        </p:txBody>
+      </p:sp>
+      <p:sp>
+        <p:nvSpPr>
+          <p:cNvPr id="10" name="Text 8"/>
+          <p:cNvSpPr txBox="1"/>
+          <p:nvPr/>
+        </p:nvSpPr>
+        <p:spPr>
+          <a:xfrm>
+            <a:off x="6309360" y="2752344"/>
+            <a:ext cx="4846320" cy="566928"/>
+          </a:xfrm>
+          <a:prstGeom prst="rect">
+            <a:avLst/>
+          </a:prstGeom>
+          <a:noFill/>
+          <a:ln/>
+        </p:spPr>
+        <p:txBody>
+          <a:bodyPr wrap="square" lIns="0" tIns="0" rIns="0" bIns="0" rtlCol="0" anchor="ctr"/>
+          <a:lstStyle/>
+          <a:p>
+            <a:pPr indent="0" marL="0">
+              <a:lnSpc>
+                <a:spcPct val="125000"/>
+              </a:lnSpc>
+              <a:buNone/>
+            </a:pPr>
+            <a:r>
+              <a:rPr lang="en-US" sz="1250" dirty="0">
+                <a:solidFill>
+                  <a:srgbClr val="23201D"/>
+                </a:solidFill>
+                <a:latin typeface="Yu Gothic" pitchFamily="34" charset="0"/>
+                <a:ea typeface="Yu Gothic" pitchFamily="34" charset="-122"/>
+                <a:cs typeface="Yu Gothic" pitchFamily="34" charset="-120"/>
+              </a:rPr>
+              <a:t>・見るべきデータまで指定してくる</a:t>
+            </a:r>
+            <a:endParaRPr lang="en-US" sz="1250" dirty="0"/>
+          </a:p>
+        </p:txBody>
+      </p:sp>
+      <p:sp>
+        <p:nvSpPr>
+          <p:cNvPr id="11" name="Text 9"/>
+          <p:cNvSpPr txBox="1"/>
+          <p:nvPr/>
+        </p:nvSpPr>
+        <p:spPr>
+          <a:xfrm>
+            <a:off x="6309360" y="3355848"/>
+            <a:ext cx="4846320" cy="566928"/>
+          </a:xfrm>
+          <a:prstGeom prst="rect">
+            <a:avLst/>
+          </a:prstGeom>
+          <a:noFill/>
+          <a:ln/>
+        </p:spPr>
+        <p:txBody>
+          <a:bodyPr wrap="square" lIns="0" tIns="0" rIns="0" bIns="0" rtlCol="0" anchor="ctr"/>
+          <a:lstStyle/>
+          <a:p>
+            <a:pPr indent="0" marL="0">
+              <a:lnSpc>
+                <a:spcPct val="125000"/>
+              </a:lnSpc>
+              <a:buNone/>
+            </a:pPr>
+            <a:r>
+              <a:rPr lang="en-US" sz="1250" dirty="0">
+                <a:solidFill>
+                  <a:srgbClr val="23201D"/>
+                </a:solidFill>
+                <a:latin typeface="Yu Gothic" pitchFamily="34" charset="0"/>
+                <a:ea typeface="Yu Gothic" pitchFamily="34" charset="-122"/>
+                <a:cs typeface="Yu Gothic" pitchFamily="34" charset="-120"/>
+              </a:rPr>
+              <a:t>・数字は自分で集計しているので間違いがない</a:t>
+            </a:r>
+            <a:endParaRPr lang="en-US" sz="1250" dirty="0"/>
+          </a:p>
+        </p:txBody>
+      </p:sp>
+      <p:sp>
+        <p:nvSpPr>
+          <p:cNvPr id="12" name="Text 10"/>
+          <p:cNvSpPr txBox="1"/>
+          <p:nvPr/>
+        </p:nvSpPr>
+        <p:spPr>
+          <a:xfrm>
+            <a:off x="6309360" y="3959352"/>
+            <a:ext cx="4846320" cy="566928"/>
+          </a:xfrm>
+          <a:prstGeom prst="rect">
+            <a:avLst/>
+          </a:prstGeom>
+          <a:noFill/>
+          <a:ln/>
+        </p:spPr>
+        <p:txBody>
+          <a:bodyPr wrap="square" lIns="0" tIns="0" rIns="0" bIns="0" rtlCol="0" anchor="ctr"/>
+          <a:lstStyle/>
+          <a:p>
+            <a:pPr indent="0" marL="0">
+              <a:lnSpc>
+                <a:spcPct val="125000"/>
+              </a:lnSpc>
+              <a:buNone/>
+            </a:pPr>
+            <a:r>
+              <a:rPr lang="en-US" sz="1250" dirty="0">
+                <a:solidFill>
+                  <a:srgbClr val="23201D"/>
+                </a:solidFill>
+                <a:latin typeface="Yu Gothic" pitchFamily="34" charset="0"/>
+                <a:ea typeface="Yu Gothic" pitchFamily="34" charset="-122"/>
+                <a:cs typeface="Yu Gothic" pitchFamily="34" charset="-120"/>
+              </a:rPr>
+              <a:t>・反論の形なので、思い込みが崩れる</a:t>
+            </a:r>
+            <a:endParaRPr lang="en-US" sz="1250" dirty="0"/>
+          </a:p>
+        </p:txBody>
+      </p:sp>
+      <p:sp>
+        <p:nvSpPr>
+          <p:cNvPr id="13" name="Shape 11"/>
+          <p:cNvSpPr/>
+          <p:nvPr/>
+        </p:nvSpPr>
+        <p:spPr>
+          <a:xfrm>
+            <a:off x="777240" y="3291840"/>
+            <a:ext cx="4879238" cy="1417320"/>
+          </a:xfrm>
+          <a:prstGeom prst="rect">
+            <a:avLst/>
+          </a:prstGeom>
+          <a:solidFill>
+            <a:srgbClr val="E7F0E9"/>
+          </a:solidFill>
+          <a:ln w="12700">
+            <a:solidFill>
+              <a:srgbClr val="333333"/>
+            </a:solidFill>
+            <a:prstDash val="solid"/>
+          </a:ln>
+        </p:spPr>
+      </p:sp>
+      <p:sp>
+        <p:nvSpPr>
+          <p:cNvPr id="14" name="Text 12"/>
+          <p:cNvSpPr txBox="1"/>
+          <p:nvPr/>
+        </p:nvSpPr>
+        <p:spPr>
+          <a:xfrm>
+            <a:off x="1005840" y="3383280"/>
+            <a:ext cx="4422038" cy="1234440"/>
+          </a:xfrm>
+          <a:prstGeom prst="rect">
+            <a:avLst/>
+          </a:prstGeom>
+          <a:noFill/>
+          <a:ln/>
+        </p:spPr>
+        <p:txBody>
+          <a:bodyPr wrap="square" lIns="0" tIns="0" rIns="0" bIns="0" rtlCol="0" anchor="ctr"/>
+          <a:lstStyle/>
+          <a:p>
+            <a:pPr indent="0" marL="0">
+              <a:lnSpc>
+                <a:spcPct val="135000"/>
+              </a:lnSpc>
+              <a:buNone/>
+            </a:pPr>
+            <a:r>
+              <a:rPr lang="en-US" sz="1250" dirty="0">
+                <a:solidFill>
+                  <a:srgbClr val="3F3933"/>
+                </a:solidFill>
+                <a:latin typeface="Yu Gothic" pitchFamily="34" charset="0"/>
+                <a:ea typeface="Yu Gothic" pitchFamily="34" charset="-122"/>
+                <a:cs typeface="Yu Gothic" pitchFamily="34" charset="-120"/>
+              </a:rPr>
+              <a:t>「気になる点を3つ」ではなく「反論を3つ」。言い方をこう変えるだけで、出てくる中身が変わります。</a:t>
+            </a:r>
+            <a:endParaRPr lang="en-US" sz="1250" dirty="0"/>
+          </a:p>
+        </p:txBody>
+      </p:sp>
+      <p:sp>
+        <p:nvSpPr>
+          <p:cNvPr id="15" name="Shape 13"/>
+          <p:cNvSpPr/>
+          <p:nvPr/>
+        </p:nvSpPr>
+        <p:spPr>
+          <a:xfrm>
+            <a:off x="777240" y="4983480"/>
+            <a:ext cx="10607040" cy="685800"/>
+          </a:xfrm>
+          <a:prstGeom prst="rect">
+            <a:avLst/>
+          </a:prstGeom>
+          <a:solidFill>
+            <a:srgbClr val="3B6B4A"/>
+          </a:solidFill>
+          <a:ln w="12700">
+            <a:solidFill>
+              <a:srgbClr val="333333"/>
+            </a:solidFill>
+            <a:prstDash val="solid"/>
+          </a:ln>
+        </p:spPr>
+      </p:sp>
+      <p:sp>
+        <p:nvSpPr>
+          <p:cNvPr id="16" name="Text 14"/>
+          <p:cNvSpPr txBox="1"/>
+          <p:nvPr/>
+        </p:nvSpPr>
+        <p:spPr>
+          <a:xfrm>
+            <a:off x="1097280" y="4983480"/>
+            <a:ext cx="9966960" cy="685800"/>
+          </a:xfrm>
+          <a:prstGeom prst="rect">
+            <a:avLst/>
+          </a:prstGeom>
+          <a:noFill/>
+          <a:ln/>
+        </p:spPr>
+        <p:txBody>
+          <a:bodyPr wrap="square" lIns="0" tIns="0" rIns="0" bIns="0" rtlCol="0" anchor="ctr"/>
+          <a:lstStyle/>
+          <a:p>
+            <a:pPr indent="0" marL="0">
+              <a:buNone/>
+            </a:pPr>
+            <a:r>
+              <a:rPr lang="en-US" sz="1450" b="1" dirty="0">
+                <a:solidFill>
+                  <a:srgbClr val="FFFFFF"/>
+                </a:solidFill>
+                <a:latin typeface="Yu Gothic" pitchFamily="34" charset="0"/>
+                <a:ea typeface="Yu Gothic" pitchFamily="34" charset="-122"/>
+                <a:cs typeface="Yu Gothic" pitchFamily="34" charset="-120"/>
+              </a:rPr>
+              <a:t>数えるのは表計算、意味を語るのがAI</a:t>
+            </a:r>
+            <a:endParaRPr lang="en-US" sz="1450" dirty="0"/>
+          </a:p>
+        </p:txBody>
+      </p:sp>
+      <p:sp>
+        <p:nvSpPr>
+          <p:cNvPr id="17" name="Text 15"/>
+          <p:cNvSpPr txBox="1"/>
+          <p:nvPr/>
+        </p:nvSpPr>
+        <p:spPr>
+          <a:xfrm>
+            <a:off x="777240" y="6382512"/>
+            <a:ext cx="7424928" cy="256032"/>
+          </a:xfrm>
+          <a:prstGeom prst="rect">
+            <a:avLst/>
+          </a:prstGeom>
+          <a:noFill/>
+          <a:ln/>
+        </p:spPr>
+        <p:txBody>
+          <a:bodyPr wrap="square" lIns="0" tIns="0" rIns="0" bIns="0" rtlCol="0" anchor="ctr"/>
+          <a:lstStyle/>
+          <a:p>
+            <a:pPr indent="0" marL="0">
+              <a:buNone/>
+            </a:pPr>
+            <a:r>
+              <a:rPr lang="en-US" sz="900" dirty="0">
+                <a:solidFill>
+                  <a:srgbClr val="8A8177"/>
+                </a:solidFill>
+                <a:latin typeface="Yu Gothic" pitchFamily="34" charset="0"/>
+                <a:ea typeface="Yu Gothic" pitchFamily="34" charset="-122"/>
+                <a:cs typeface="Yu Gothic" pitchFamily="34" charset="-120"/>
+              </a:rPr>
+              <a:t>第4回　数字と判断のAI化</a:t>
+            </a:r>
+            <a:endParaRPr lang="en-US" sz="900" dirty="0"/>
+          </a:p>
+        </p:txBody>
+      </p:sp>
+      <p:sp>
+        <p:nvSpPr>
+          <p:cNvPr id="18" name="Text 16"/>
+          <p:cNvSpPr txBox="1"/>
+          <p:nvPr/>
+        </p:nvSpPr>
+        <p:spPr>
+          <a:xfrm>
+            <a:off x="8202168" y="6382512"/>
+            <a:ext cx="3182112" cy="256032"/>
+          </a:xfrm>
+          <a:prstGeom prst="rect">
+            <a:avLst/>
+          </a:prstGeom>
+          <a:noFill/>
+          <a:ln/>
+        </p:spPr>
+        <p:txBody>
+          <a:bodyPr wrap="square" lIns="0" tIns="0" rIns="0" bIns="0" rtlCol="0" anchor="ctr"/>
+          <a:lstStyle/>
+          <a:p>
+            <a:pPr algn="r" indent="0" marL="0">
+              <a:buNone/>
+            </a:pPr>
+            <a:r>
+              <a:rPr lang="en-US" sz="900" dirty="0">
+                <a:solidFill>
+                  <a:srgbClr val="8A8177"/>
+                </a:solidFill>
+                <a:latin typeface="Yu Gothic" pitchFamily="34" charset="0"/>
+                <a:ea typeface="Yu Gothic" pitchFamily="34" charset="-122"/>
+                <a:cs typeface="Yu Gothic" pitchFamily="34" charset="-120"/>
+              </a:rPr>
+              <a:t>実演 ②</a:t>
+            </a:r>
+            <a:endParaRPr lang="en-US" sz="900" dirty="0"/>
+          </a:p>
+        </p:txBody>
+      </p:sp>
+    </p:spTree>
+  </p:cSld>
+  <p:clrMapOvr>
+    <a:masterClrMapping/>
+  </p:clrMapOvr>
+</p:sld>
+</file>
+
+<file path=ppt/slides/slide8.xml><?xml version="1.0" encoding="utf-8"?>
+<p:sld xmlns:a="http://schemas.openxmlformats.org/drawingml/2006/main" xmlns:r="http://schemas.openxmlformats.org/officeDocument/2006/relationships" xmlns:p="http://schemas.openxmlformats.org/presentationml/2006/main">
+  <p:cSld name="Slide 8">
+    <p:bg>
+      <p:bgPr>
+        <a:solidFill>
+          <a:srgbClr val="F6F2EA"/>
+        </a:solidFill>
+      </p:bgPr>
+    </p:bg>
+    <p:spTree>
+      <p:nvGrpSpPr>
+        <p:cNvPr id="1" name=""/>
+        <p:cNvGrpSpPr/>
+        <p:nvPr/>
+      </p:nvGrpSpPr>
+      <p:grpSpPr>
+        <a:xfrm>
+          <a:off x="0" y="0"/>
+          <a:ext cx="0" cy="0"/>
+          <a:chOff x="0" y="0"/>
+          <a:chExt cx="0" cy="0"/>
+        </a:xfrm>
+      </p:grpSpPr>
+      <p:sp>
+        <p:nvSpPr>
+          <p:cNvPr id="2" name="Text 0"/>
+          <p:cNvSpPr txBox="1"/>
+          <p:nvPr/>
+        </p:nvSpPr>
+        <p:spPr>
+          <a:xfrm>
+            <a:off x="777240" y="566928"/>
+            <a:ext cx="10607040" cy="274320"/>
+          </a:xfrm>
+          <a:prstGeom prst="rect">
+            <a:avLst/>
+          </a:prstGeom>
+          <a:noFill/>
+          <a:ln/>
+        </p:spPr>
+        <p:txBody>
+          <a:bodyPr wrap="square" lIns="0" tIns="0" rIns="0" bIns="0" rtlCol="0" anchor="ctr"/>
+          <a:lstStyle/>
+          <a:p>
+            <a:pPr indent="0" marL="0">
+              <a:buNone/>
+            </a:pPr>
+            <a:r>
+              <a:rPr lang="en-US" sz="1100" b="1" spc="250" kern="0" dirty="0">
+                <a:solidFill>
+                  <a:srgbClr val="B04A2F"/>
+                </a:solidFill>
+                <a:latin typeface="Yu Gothic" pitchFamily="34" charset="0"/>
+                <a:ea typeface="Yu Gothic" pitchFamily="34" charset="-122"/>
+                <a:cs typeface="Yu Gothic" pitchFamily="34" charset="-120"/>
+              </a:rPr>
+              <a:t>つまずきやすいところ</a:t>
+            </a:r>
+            <a:endParaRPr lang="en-US" sz="1100" dirty="0"/>
+          </a:p>
+        </p:txBody>
+      </p:sp>
+      <p:sp>
+        <p:nvSpPr>
+          <p:cNvPr id="3" name="Text 1"/>
+          <p:cNvSpPr txBox="1"/>
+          <p:nvPr/>
+        </p:nvSpPr>
+        <p:spPr>
+          <a:xfrm>
+            <a:off x="777240" y="896112"/>
+            <a:ext cx="10607040" cy="640080"/>
+          </a:xfrm>
+          <a:prstGeom prst="rect">
+            <a:avLst/>
+          </a:prstGeom>
+          <a:noFill/>
+          <a:ln/>
+        </p:spPr>
+        <p:txBody>
+          <a:bodyPr wrap="square" lIns="0" tIns="0" rIns="0" bIns="0" rtlCol="0" anchor="ctr"/>
+          <a:lstStyle/>
+          <a:p>
+            <a:pPr indent="0" marL="0">
+              <a:buNone/>
+            </a:pPr>
+            <a:r>
+              <a:rPr lang="en-US" sz="2600" b="1" dirty="0">
+                <a:solidFill>
+                  <a:srgbClr val="23201D"/>
+                </a:solidFill>
+                <a:latin typeface="Yu Gothic" pitchFamily="34" charset="0"/>
+                <a:ea typeface="Yu Gothic" pitchFamily="34" charset="-122"/>
+                <a:cs typeface="Yu Gothic" pitchFamily="34" charset="-120"/>
+              </a:rPr>
+              <a:t>この回で、よく起きること</a:t>
+            </a:r>
+            <a:endParaRPr lang="en-US" sz="2600" dirty="0"/>
+          </a:p>
+        </p:txBody>
+      </p:sp>
+      <p:sp>
+        <p:nvSpPr>
+          <p:cNvPr id="4" name="Shape 2"/>
+          <p:cNvSpPr/>
+          <p:nvPr/>
+        </p:nvSpPr>
+        <p:spPr>
+          <a:xfrm>
+            <a:off x="777240" y="1737360"/>
+            <a:ext cx="10607040" cy="1078992"/>
+          </a:xfrm>
+          <a:prstGeom prst="rect">
+            <a:avLst/>
+          </a:prstGeom>
+          <a:solidFill>
+            <a:srgbClr val="FFFFFF"/>
+          </a:solidFill>
+          <a:ln w="12700">
+            <a:solidFill>
+              <a:srgbClr val="EDE7DB"/>
+            </a:solidFill>
+            <a:prstDash val="solid"/>
+          </a:ln>
+        </p:spPr>
+      </p:sp>
+      <p:sp>
+        <p:nvSpPr>
           <p:cNvPr id="5" name="Text 3"/>
           <p:cNvSpPr txBox="1"/>
           <p:nvPr/>
         </p:nvSpPr>
         <p:spPr>
           <a:xfrm>
-            <a:off x="1234440" y="2880360"/>
-            <a:ext cx="9692640" cy="1188720"/>
+            <a:off x="1051560" y="1856232"/>
+            <a:ext cx="1463040" cy="256032"/>
+          </a:xfrm>
+          <a:prstGeom prst="rect">
+            <a:avLst/>
+          </a:prstGeom>
+          <a:noFill/>
+          <a:ln/>
+        </p:spPr>
+        <p:txBody>
+          <a:bodyPr wrap="square" lIns="0" tIns="0" rIns="0" bIns="0" rtlCol="0" anchor="ctr"/>
+          <a:lstStyle/>
+          <a:p>
+            <a:pPr indent="0" marL="0">
+              <a:buNone/>
+            </a:pPr>
+            <a:r>
+              <a:rPr lang="en-US" sz="900" b="1" spc="150" kern="0" dirty="0">
+                <a:solidFill>
+                  <a:srgbClr val="8A8177"/>
+                </a:solidFill>
+                <a:latin typeface="Yu Gothic" pitchFamily="34" charset="0"/>
+                <a:ea typeface="Yu Gothic" pitchFamily="34" charset="-122"/>
+                <a:cs typeface="Yu Gothic" pitchFamily="34" charset="-120"/>
+              </a:rPr>
+              <a:t>こうなったら</a:t>
+            </a:r>
+            <a:endParaRPr lang="en-US" sz="900" dirty="0"/>
+          </a:p>
+        </p:txBody>
+      </p:sp>
+      <p:sp>
+        <p:nvSpPr>
+          <p:cNvPr id="6" name="Text 4"/>
+          <p:cNvSpPr txBox="1"/>
+          <p:nvPr/>
+        </p:nvSpPr>
+        <p:spPr>
+          <a:xfrm>
+            <a:off x="1051560" y="2121408"/>
+            <a:ext cx="4454957" cy="566928"/>
           </a:xfrm>
           <a:prstGeom prst="rect">
             <a:avLst/>
@@ -4965,12 +7618,858 @@
           <a:p>
             <a:pPr indent="0" marL="0">
               <a:lnSpc>
-                <a:spcPct val="140000"/>
+                <a:spcPct val="120000"/>
               </a:lnSpc>
               <a:buNone/>
             </a:pPr>
             <a:r>
-              <a:rPr lang="en-US" sz="1900" b="1" dirty="0">
+              <a:rPr lang="en-US" sz="1350" b="1" dirty="0">
+                <a:solidFill>
+                  <a:srgbClr val="23201D"/>
+                </a:solidFill>
+                <a:latin typeface="Yu Gothic" pitchFamily="34" charset="0"/>
+                <a:ea typeface="Yu Gothic" pitchFamily="34" charset="-122"/>
+                <a:cs typeface="Yu Gothic" pitchFamily="34" charset="-120"/>
+              </a:rPr>
+              <a:t>データが紙・手書きしかない</a:t>
+            </a:r>
+            <a:endParaRPr lang="en-US" sz="1350" dirty="0"/>
+          </a:p>
+        </p:txBody>
+      </p:sp>
+      <p:sp>
+        <p:nvSpPr>
+          <p:cNvPr id="7" name="Shape 5"/>
+          <p:cNvSpPr/>
+          <p:nvPr/>
+        </p:nvSpPr>
+        <p:spPr>
+          <a:xfrm>
+            <a:off x="5762549" y="1847088"/>
+            <a:ext cx="18288" cy="859536"/>
+          </a:xfrm>
+          <a:prstGeom prst="rect">
+            <a:avLst/>
+          </a:prstGeom>
+          <a:solidFill>
+            <a:srgbClr val="EDE7DB"/>
+          </a:solidFill>
+          <a:ln w="12700">
+            <a:solidFill>
+              <a:srgbClr val="333333"/>
+            </a:solidFill>
+            <a:prstDash val="solid"/>
+          </a:ln>
+        </p:spPr>
+      </p:sp>
+      <p:sp>
+        <p:nvSpPr>
+          <p:cNvPr id="8" name="Text 6"/>
+          <p:cNvSpPr txBox="1"/>
+          <p:nvPr/>
+        </p:nvSpPr>
+        <p:spPr>
+          <a:xfrm>
+            <a:off x="6080760" y="1856232"/>
+            <a:ext cx="1463040" cy="256032"/>
+          </a:xfrm>
+          <a:prstGeom prst="rect">
+            <a:avLst/>
+          </a:prstGeom>
+          <a:noFill/>
+          <a:ln/>
+        </p:spPr>
+        <p:txBody>
+          <a:bodyPr wrap="square" lIns="0" tIns="0" rIns="0" bIns="0" rtlCol="0" anchor="ctr"/>
+          <a:lstStyle/>
+          <a:p>
+            <a:pPr indent="0" marL="0">
+              <a:buNone/>
+            </a:pPr>
+            <a:r>
+              <a:rPr lang="en-US" sz="900" b="1" spc="150" kern="0" dirty="0">
+                <a:solidFill>
+                  <a:srgbClr val="B04A2F"/>
+                </a:solidFill>
+                <a:latin typeface="Yu Gothic" pitchFamily="34" charset="0"/>
+                <a:ea typeface="Yu Gothic" pitchFamily="34" charset="-122"/>
+                <a:cs typeface="Yu Gothic" pitchFamily="34" charset="-120"/>
+              </a:rPr>
+              <a:t>こうする</a:t>
+            </a:r>
+            <a:endParaRPr lang="en-US" sz="900" dirty="0"/>
+          </a:p>
+        </p:txBody>
+      </p:sp>
+      <p:sp>
+        <p:nvSpPr>
+          <p:cNvPr id="9" name="Text 7"/>
+          <p:cNvSpPr txBox="1"/>
+          <p:nvPr/>
+        </p:nvSpPr>
+        <p:spPr>
+          <a:xfrm>
+            <a:off x="6080760" y="2121408"/>
+            <a:ext cx="5091379" cy="566928"/>
+          </a:xfrm>
+          <a:prstGeom prst="rect">
+            <a:avLst/>
+          </a:prstGeom>
+          <a:noFill/>
+          <a:ln/>
+        </p:spPr>
+        <p:txBody>
+          <a:bodyPr wrap="square" lIns="0" tIns="0" rIns="0" bIns="0" rtlCol="0" anchor="ctr"/>
+          <a:lstStyle/>
+          <a:p>
+            <a:pPr indent="0" marL="0">
+              <a:lnSpc>
+                <a:spcPct val="125000"/>
+              </a:lnSpc>
+              <a:buNone/>
+            </a:pPr>
+            <a:r>
+              <a:rPr lang="en-US" sz="1250" dirty="0">
+                <a:solidFill>
+                  <a:srgbClr val="3F3933"/>
+                </a:solidFill>
+                <a:latin typeface="Yu Gothic" pitchFamily="34" charset="0"/>
+                <a:ea typeface="Yu Gothic" pitchFamily="34" charset="-122"/>
+                <a:cs typeface="Yu Gothic" pitchFamily="34" charset="-120"/>
+              </a:rPr>
+              <a:t>写真からの読み取りを試します。精度が出なければ第8回の課題として持ち越します。この回で無理をしません</a:t>
+            </a:r>
+            <a:endParaRPr lang="en-US" sz="1250" dirty="0"/>
+          </a:p>
+        </p:txBody>
+      </p:sp>
+      <p:sp>
+        <p:nvSpPr>
+          <p:cNvPr id="10" name="Shape 8"/>
+          <p:cNvSpPr/>
+          <p:nvPr/>
+        </p:nvSpPr>
+        <p:spPr>
+          <a:xfrm>
+            <a:off x="777240" y="2944368"/>
+            <a:ext cx="10607040" cy="1078992"/>
+          </a:xfrm>
+          <a:prstGeom prst="rect">
+            <a:avLst/>
+          </a:prstGeom>
+          <a:solidFill>
+            <a:srgbClr val="FFFFFF"/>
+          </a:solidFill>
+          <a:ln w="12700">
+            <a:solidFill>
+              <a:srgbClr val="EDE7DB"/>
+            </a:solidFill>
+            <a:prstDash val="solid"/>
+          </a:ln>
+        </p:spPr>
+      </p:sp>
+      <p:sp>
+        <p:nvSpPr>
+          <p:cNvPr id="11" name="Text 9"/>
+          <p:cNvSpPr txBox="1"/>
+          <p:nvPr/>
+        </p:nvSpPr>
+        <p:spPr>
+          <a:xfrm>
+            <a:off x="1051560" y="3063240"/>
+            <a:ext cx="1463040" cy="256032"/>
+          </a:xfrm>
+          <a:prstGeom prst="rect">
+            <a:avLst/>
+          </a:prstGeom>
+          <a:noFill/>
+          <a:ln/>
+        </p:spPr>
+        <p:txBody>
+          <a:bodyPr wrap="square" lIns="0" tIns="0" rIns="0" bIns="0" rtlCol="0" anchor="ctr"/>
+          <a:lstStyle/>
+          <a:p>
+            <a:pPr indent="0" marL="0">
+              <a:buNone/>
+            </a:pPr>
+            <a:r>
+              <a:rPr lang="en-US" sz="900" b="1" spc="150" kern="0" dirty="0">
+                <a:solidFill>
+                  <a:srgbClr val="8A8177"/>
+                </a:solidFill>
+                <a:latin typeface="Yu Gothic" pitchFamily="34" charset="0"/>
+                <a:ea typeface="Yu Gothic" pitchFamily="34" charset="-122"/>
+                <a:cs typeface="Yu Gothic" pitchFamily="34" charset="-120"/>
+              </a:rPr>
+              <a:t>こうなったら</a:t>
+            </a:r>
+            <a:endParaRPr lang="en-US" sz="900" dirty="0"/>
+          </a:p>
+        </p:txBody>
+      </p:sp>
+      <p:sp>
+        <p:nvSpPr>
+          <p:cNvPr id="12" name="Text 10"/>
+          <p:cNvSpPr txBox="1"/>
+          <p:nvPr/>
+        </p:nvSpPr>
+        <p:spPr>
+          <a:xfrm>
+            <a:off x="1051560" y="3328416"/>
+            <a:ext cx="4454957" cy="566928"/>
+          </a:xfrm>
+          <a:prstGeom prst="rect">
+            <a:avLst/>
+          </a:prstGeom>
+          <a:noFill/>
+          <a:ln/>
+        </p:spPr>
+        <p:txBody>
+          <a:bodyPr wrap="square" lIns="0" tIns="0" rIns="0" bIns="0" rtlCol="0" anchor="ctr"/>
+          <a:lstStyle/>
+          <a:p>
+            <a:pPr indent="0" marL="0">
+              <a:lnSpc>
+                <a:spcPct val="120000"/>
+              </a:lnSpc>
+              <a:buNone/>
+            </a:pPr>
+            <a:r>
+              <a:rPr lang="en-US" sz="1350" b="1" dirty="0">
+                <a:solidFill>
+                  <a:srgbClr val="23201D"/>
+                </a:solidFill>
+                <a:latin typeface="Yu Gothic" pitchFamily="34" charset="0"/>
+                <a:ea typeface="Yu Gothic" pitchFamily="34" charset="-122"/>
+                <a:cs typeface="Yu Gothic" pitchFamily="34" charset="-120"/>
+              </a:rPr>
+              <a:t>個人情報や給与が含まれている</a:t>
+            </a:r>
+            <a:endParaRPr lang="en-US" sz="1350" dirty="0"/>
+          </a:p>
+        </p:txBody>
+      </p:sp>
+      <p:sp>
+        <p:nvSpPr>
+          <p:cNvPr id="13" name="Shape 11"/>
+          <p:cNvSpPr/>
+          <p:nvPr/>
+        </p:nvSpPr>
+        <p:spPr>
+          <a:xfrm>
+            <a:off x="5762549" y="3054096"/>
+            <a:ext cx="18288" cy="859536"/>
+          </a:xfrm>
+          <a:prstGeom prst="rect">
+            <a:avLst/>
+          </a:prstGeom>
+          <a:solidFill>
+            <a:srgbClr val="EDE7DB"/>
+          </a:solidFill>
+          <a:ln w="12700">
+            <a:solidFill>
+              <a:srgbClr val="333333"/>
+            </a:solidFill>
+            <a:prstDash val="solid"/>
+          </a:ln>
+        </p:spPr>
+      </p:sp>
+      <p:sp>
+        <p:nvSpPr>
+          <p:cNvPr id="14" name="Text 12"/>
+          <p:cNvSpPr txBox="1"/>
+          <p:nvPr/>
+        </p:nvSpPr>
+        <p:spPr>
+          <a:xfrm>
+            <a:off x="6080760" y="3063240"/>
+            <a:ext cx="1463040" cy="256032"/>
+          </a:xfrm>
+          <a:prstGeom prst="rect">
+            <a:avLst/>
+          </a:prstGeom>
+          <a:noFill/>
+          <a:ln/>
+        </p:spPr>
+        <p:txBody>
+          <a:bodyPr wrap="square" lIns="0" tIns="0" rIns="0" bIns="0" rtlCol="0" anchor="ctr"/>
+          <a:lstStyle/>
+          <a:p>
+            <a:pPr indent="0" marL="0">
+              <a:buNone/>
+            </a:pPr>
+            <a:r>
+              <a:rPr lang="en-US" sz="900" b="1" spc="150" kern="0" dirty="0">
+                <a:solidFill>
+                  <a:srgbClr val="B04A2F"/>
+                </a:solidFill>
+                <a:latin typeface="Yu Gothic" pitchFamily="34" charset="0"/>
+                <a:ea typeface="Yu Gothic" pitchFamily="34" charset="-122"/>
+                <a:cs typeface="Yu Gothic" pitchFamily="34" charset="-120"/>
+              </a:rPr>
+              <a:t>こうする</a:t>
+            </a:r>
+            <a:endParaRPr lang="en-US" sz="900" dirty="0"/>
+          </a:p>
+        </p:txBody>
+      </p:sp>
+      <p:sp>
+        <p:nvSpPr>
+          <p:cNvPr id="15" name="Text 13"/>
+          <p:cNvSpPr txBox="1"/>
+          <p:nvPr/>
+        </p:nvSpPr>
+        <p:spPr>
+          <a:xfrm>
+            <a:off x="6080760" y="3328416"/>
+            <a:ext cx="5091379" cy="566928"/>
+          </a:xfrm>
+          <a:prstGeom prst="rect">
+            <a:avLst/>
+          </a:prstGeom>
+          <a:noFill/>
+          <a:ln/>
+        </p:spPr>
+        <p:txBody>
+          <a:bodyPr wrap="square" lIns="0" tIns="0" rIns="0" bIns="0" rtlCol="0" anchor="ctr"/>
+          <a:lstStyle/>
+          <a:p>
+            <a:pPr indent="0" marL="0">
+              <a:lnSpc>
+                <a:spcPct val="125000"/>
+              </a:lnSpc>
+              <a:buNone/>
+            </a:pPr>
+            <a:r>
+              <a:rPr lang="en-US" sz="1250" dirty="0">
+                <a:solidFill>
+                  <a:srgbClr val="3F3933"/>
+                </a:solidFill>
+                <a:latin typeface="Yu Gothic" pitchFamily="34" charset="0"/>
+                <a:ea typeface="Yu Gothic" pitchFamily="34" charset="-122"/>
+                <a:cs typeface="Yu Gothic" pitchFamily="34" charset="-120"/>
+              </a:rPr>
+              <a:t>列を削るか、IDに置き換える手順をその場で一緒にやります。この作業自体が第5回のルールづくりの下地になります</a:t>
+            </a:r>
+            <a:endParaRPr lang="en-US" sz="1250" dirty="0"/>
+          </a:p>
+        </p:txBody>
+      </p:sp>
+      <p:sp>
+        <p:nvSpPr>
+          <p:cNvPr id="16" name="Shape 14"/>
+          <p:cNvSpPr/>
+          <p:nvPr/>
+        </p:nvSpPr>
+        <p:spPr>
+          <a:xfrm>
+            <a:off x="777240" y="4151376"/>
+            <a:ext cx="10607040" cy="1078992"/>
+          </a:xfrm>
+          <a:prstGeom prst="rect">
+            <a:avLst/>
+          </a:prstGeom>
+          <a:solidFill>
+            <a:srgbClr val="FFFFFF"/>
+          </a:solidFill>
+          <a:ln w="12700">
+            <a:solidFill>
+              <a:srgbClr val="EDE7DB"/>
+            </a:solidFill>
+            <a:prstDash val="solid"/>
+          </a:ln>
+        </p:spPr>
+      </p:sp>
+      <p:sp>
+        <p:nvSpPr>
+          <p:cNvPr id="17" name="Text 15"/>
+          <p:cNvSpPr txBox="1"/>
+          <p:nvPr/>
+        </p:nvSpPr>
+        <p:spPr>
+          <a:xfrm>
+            <a:off x="1051560" y="4270248"/>
+            <a:ext cx="1463040" cy="256032"/>
+          </a:xfrm>
+          <a:prstGeom prst="rect">
+            <a:avLst/>
+          </a:prstGeom>
+          <a:noFill/>
+          <a:ln/>
+        </p:spPr>
+        <p:txBody>
+          <a:bodyPr wrap="square" lIns="0" tIns="0" rIns="0" bIns="0" rtlCol="0" anchor="ctr"/>
+          <a:lstStyle/>
+          <a:p>
+            <a:pPr indent="0" marL="0">
+              <a:buNone/>
+            </a:pPr>
+            <a:r>
+              <a:rPr lang="en-US" sz="900" b="1" spc="150" kern="0" dirty="0">
+                <a:solidFill>
+                  <a:srgbClr val="8A8177"/>
+                </a:solidFill>
+                <a:latin typeface="Yu Gothic" pitchFamily="34" charset="0"/>
+                <a:ea typeface="Yu Gothic" pitchFamily="34" charset="-122"/>
+                <a:cs typeface="Yu Gothic" pitchFamily="34" charset="-120"/>
+              </a:rPr>
+              <a:t>こうなったら</a:t>
+            </a:r>
+            <a:endParaRPr lang="en-US" sz="900" dirty="0"/>
+          </a:p>
+        </p:txBody>
+      </p:sp>
+      <p:sp>
+        <p:nvSpPr>
+          <p:cNvPr id="18" name="Text 16"/>
+          <p:cNvSpPr txBox="1"/>
+          <p:nvPr/>
+        </p:nvSpPr>
+        <p:spPr>
+          <a:xfrm>
+            <a:off x="1051560" y="4535424"/>
+            <a:ext cx="4454957" cy="566928"/>
+          </a:xfrm>
+          <a:prstGeom prst="rect">
+            <a:avLst/>
+          </a:prstGeom>
+          <a:noFill/>
+          <a:ln/>
+        </p:spPr>
+        <p:txBody>
+          <a:bodyPr wrap="square" lIns="0" tIns="0" rIns="0" bIns="0" rtlCol="0" anchor="ctr"/>
+          <a:lstStyle/>
+          <a:p>
+            <a:pPr indent="0" marL="0">
+              <a:lnSpc>
+                <a:spcPct val="120000"/>
+              </a:lnSpc>
+              <a:buNone/>
+            </a:pPr>
+            <a:r>
+              <a:rPr lang="en-US" sz="1350" b="1" dirty="0">
+                <a:solidFill>
+                  <a:srgbClr val="23201D"/>
+                </a:solidFill>
+                <a:latin typeface="Yu Gothic" pitchFamily="34" charset="0"/>
+                <a:ea typeface="Yu Gothic" pitchFamily="34" charset="-122"/>
+                <a:cs typeface="Yu Gothic" pitchFamily="34" charset="-120"/>
+              </a:rPr>
+              <a:t>出てきた示唆が当たり前すぎる</a:t>
+            </a:r>
+            <a:endParaRPr lang="en-US" sz="1350" dirty="0"/>
+          </a:p>
+        </p:txBody>
+      </p:sp>
+      <p:sp>
+        <p:nvSpPr>
+          <p:cNvPr id="19" name="Shape 17"/>
+          <p:cNvSpPr/>
+          <p:nvPr/>
+        </p:nvSpPr>
+        <p:spPr>
+          <a:xfrm>
+            <a:off x="5762549" y="4261104"/>
+            <a:ext cx="18288" cy="859536"/>
+          </a:xfrm>
+          <a:prstGeom prst="rect">
+            <a:avLst/>
+          </a:prstGeom>
+          <a:solidFill>
+            <a:srgbClr val="EDE7DB"/>
+          </a:solidFill>
+          <a:ln w="12700">
+            <a:solidFill>
+              <a:srgbClr val="333333"/>
+            </a:solidFill>
+            <a:prstDash val="solid"/>
+          </a:ln>
+        </p:spPr>
+      </p:sp>
+      <p:sp>
+        <p:nvSpPr>
+          <p:cNvPr id="20" name="Text 18"/>
+          <p:cNvSpPr txBox="1"/>
+          <p:nvPr/>
+        </p:nvSpPr>
+        <p:spPr>
+          <a:xfrm>
+            <a:off x="6080760" y="4270248"/>
+            <a:ext cx="1463040" cy="256032"/>
+          </a:xfrm>
+          <a:prstGeom prst="rect">
+            <a:avLst/>
+          </a:prstGeom>
+          <a:noFill/>
+          <a:ln/>
+        </p:spPr>
+        <p:txBody>
+          <a:bodyPr wrap="square" lIns="0" tIns="0" rIns="0" bIns="0" rtlCol="0" anchor="ctr"/>
+          <a:lstStyle/>
+          <a:p>
+            <a:pPr indent="0" marL="0">
+              <a:buNone/>
+            </a:pPr>
+            <a:r>
+              <a:rPr lang="en-US" sz="900" b="1" spc="150" kern="0" dirty="0">
+                <a:solidFill>
+                  <a:srgbClr val="B04A2F"/>
+                </a:solidFill>
+                <a:latin typeface="Yu Gothic" pitchFamily="34" charset="0"/>
+                <a:ea typeface="Yu Gothic" pitchFamily="34" charset="-122"/>
+                <a:cs typeface="Yu Gothic" pitchFamily="34" charset="-120"/>
+              </a:rPr>
+              <a:t>こうする</a:t>
+            </a:r>
+            <a:endParaRPr lang="en-US" sz="900" dirty="0"/>
+          </a:p>
+        </p:txBody>
+      </p:sp>
+      <p:sp>
+        <p:nvSpPr>
+          <p:cNvPr id="21" name="Text 19"/>
+          <p:cNvSpPr txBox="1"/>
+          <p:nvPr/>
+        </p:nvSpPr>
+        <p:spPr>
+          <a:xfrm>
+            <a:off x="6080760" y="4535424"/>
+            <a:ext cx="5091379" cy="566928"/>
+          </a:xfrm>
+          <a:prstGeom prst="rect">
+            <a:avLst/>
+          </a:prstGeom>
+          <a:noFill/>
+          <a:ln/>
+        </p:spPr>
+        <p:txBody>
+          <a:bodyPr wrap="square" lIns="0" tIns="0" rIns="0" bIns="0" rtlCol="0" anchor="ctr"/>
+          <a:lstStyle/>
+          <a:p>
+            <a:pPr indent="0" marL="0">
+              <a:lnSpc>
+                <a:spcPct val="125000"/>
+              </a:lnSpc>
+              <a:buNone/>
+            </a:pPr>
+            <a:r>
+              <a:rPr lang="en-US" sz="1250" dirty="0">
+                <a:solidFill>
+                  <a:srgbClr val="3F3933"/>
+                </a:solidFill>
+                <a:latin typeface="Yu Gothic" pitchFamily="34" charset="0"/>
+                <a:ea typeface="Yu Gothic" pitchFamily="34" charset="-122"/>
+                <a:cs typeface="Yu Gothic" pitchFamily="34" charset="-120"/>
+              </a:rPr>
+              <a:t>前提情報が足りていません。業界の常識と自社の特殊事情を足すと、劇的に変わります</a:t>
+            </a:r>
+            <a:endParaRPr lang="en-US" sz="1250" dirty="0"/>
+          </a:p>
+        </p:txBody>
+      </p:sp>
+      <p:sp>
+        <p:nvSpPr>
+          <p:cNvPr id="22" name="Text 20"/>
+          <p:cNvSpPr txBox="1"/>
+          <p:nvPr/>
+        </p:nvSpPr>
+        <p:spPr>
+          <a:xfrm>
+            <a:off x="777240" y="6382512"/>
+            <a:ext cx="7424928" cy="256032"/>
+          </a:xfrm>
+          <a:prstGeom prst="rect">
+            <a:avLst/>
+          </a:prstGeom>
+          <a:noFill/>
+          <a:ln/>
+        </p:spPr>
+        <p:txBody>
+          <a:bodyPr wrap="square" lIns="0" tIns="0" rIns="0" bIns="0" rtlCol="0" anchor="ctr"/>
+          <a:lstStyle/>
+          <a:p>
+            <a:pPr indent="0" marL="0">
+              <a:buNone/>
+            </a:pPr>
+            <a:r>
+              <a:rPr lang="en-US" sz="900" dirty="0">
+                <a:solidFill>
+                  <a:srgbClr val="8A8177"/>
+                </a:solidFill>
+                <a:latin typeface="Yu Gothic" pitchFamily="34" charset="0"/>
+                <a:ea typeface="Yu Gothic" pitchFamily="34" charset="-122"/>
+                <a:cs typeface="Yu Gothic" pitchFamily="34" charset="-120"/>
+              </a:rPr>
+              <a:t>第4回　数字と判断のAI化</a:t>
+            </a:r>
+            <a:endParaRPr lang="en-US" sz="900" dirty="0"/>
+          </a:p>
+        </p:txBody>
+      </p:sp>
+      <p:sp>
+        <p:nvSpPr>
+          <p:cNvPr id="23" name="Text 21"/>
+          <p:cNvSpPr txBox="1"/>
+          <p:nvPr/>
+        </p:nvSpPr>
+        <p:spPr>
+          <a:xfrm>
+            <a:off x="8202168" y="6382512"/>
+            <a:ext cx="3182112" cy="256032"/>
+          </a:xfrm>
+          <a:prstGeom prst="rect">
+            <a:avLst/>
+          </a:prstGeom>
+          <a:noFill/>
+          <a:ln/>
+        </p:spPr>
+        <p:txBody>
+          <a:bodyPr wrap="square" lIns="0" tIns="0" rIns="0" bIns="0" rtlCol="0" anchor="ctr"/>
+          <a:lstStyle/>
+          <a:p>
+            <a:pPr algn="r" indent="0" marL="0">
+              <a:buNone/>
+            </a:pPr>
+            <a:r>
+              <a:rPr lang="en-US" sz="900" dirty="0">
+                <a:solidFill>
+                  <a:srgbClr val="8A8177"/>
+                </a:solidFill>
+                <a:latin typeface="Yu Gothic" pitchFamily="34" charset="0"/>
+                <a:ea typeface="Yu Gothic" pitchFamily="34" charset="-122"/>
+                <a:cs typeface="Yu Gothic" pitchFamily="34" charset="-120"/>
+              </a:rPr>
+              <a:t>つまずき</a:t>
+            </a:r>
+            <a:endParaRPr lang="en-US" sz="900" dirty="0"/>
+          </a:p>
+        </p:txBody>
+      </p:sp>
+    </p:spTree>
+  </p:cSld>
+  <p:clrMapOvr>
+    <a:masterClrMapping/>
+  </p:clrMapOvr>
+</p:sld>
+</file>
+
+<file path=ppt/slides/slide9.xml><?xml version="1.0" encoding="utf-8"?>
+<p:sld xmlns:a="http://schemas.openxmlformats.org/drawingml/2006/main" xmlns:r="http://schemas.openxmlformats.org/officeDocument/2006/relationships" xmlns:p="http://schemas.openxmlformats.org/presentationml/2006/main">
+  <p:cSld name="Slide 9">
+    <p:bg>
+      <p:bgPr>
+        <a:solidFill>
+          <a:srgbClr val="F6F2EA"/>
+        </a:solidFill>
+      </p:bgPr>
+    </p:bg>
+    <p:spTree>
+      <p:nvGrpSpPr>
+        <p:cNvPr id="1" name=""/>
+        <p:cNvGrpSpPr/>
+        <p:nvPr/>
+      </p:nvGrpSpPr>
+      <p:grpSpPr>
+        <a:xfrm>
+          <a:off x="0" y="0"/>
+          <a:ext cx="0" cy="0"/>
+          <a:chOff x="0" y="0"/>
+          <a:chExt cx="0" cy="0"/>
+        </a:xfrm>
+      </p:grpSpPr>
+      <p:sp>
+        <p:nvSpPr>
+          <p:cNvPr id="2" name="Text 0"/>
+          <p:cNvSpPr txBox="1"/>
+          <p:nvPr/>
+        </p:nvSpPr>
+        <p:spPr>
+          <a:xfrm>
+            <a:off x="777240" y="566928"/>
+            <a:ext cx="10607040" cy="274320"/>
+          </a:xfrm>
+          <a:prstGeom prst="rect">
+            <a:avLst/>
+          </a:prstGeom>
+          <a:noFill/>
+          <a:ln/>
+        </p:spPr>
+        <p:txBody>
+          <a:bodyPr wrap="square" lIns="0" tIns="0" rIns="0" bIns="0" rtlCol="0" anchor="ctr"/>
+          <a:lstStyle/>
+          <a:p>
+            <a:pPr indent="0" marL="0">
+              <a:buNone/>
+            </a:pPr>
+            <a:r>
+              <a:rPr lang="en-US" sz="1100" b="1" spc="250" kern="0" dirty="0">
+                <a:solidFill>
+                  <a:srgbClr val="2F4F6B"/>
+                </a:solidFill>
+                <a:latin typeface="Yu Gothic" pitchFamily="34" charset="0"/>
+                <a:ea typeface="Yu Gothic" pitchFamily="34" charset="-122"/>
+                <a:cs typeface="Yu Gothic" pitchFamily="34" charset="-120"/>
+              </a:rPr>
+              <a:t>演習</a:t>
+            </a:r>
+            <a:endParaRPr lang="en-US" sz="1100" dirty="0"/>
+          </a:p>
+        </p:txBody>
+      </p:sp>
+      <p:sp>
+        <p:nvSpPr>
+          <p:cNvPr id="3" name="Text 1"/>
+          <p:cNvSpPr txBox="1"/>
+          <p:nvPr/>
+        </p:nvSpPr>
+        <p:spPr>
+          <a:xfrm>
+            <a:off x="777240" y="896112"/>
+            <a:ext cx="10607040" cy="640080"/>
+          </a:xfrm>
+          <a:prstGeom prst="rect">
+            <a:avLst/>
+          </a:prstGeom>
+          <a:noFill/>
+          <a:ln/>
+        </p:spPr>
+        <p:txBody>
+          <a:bodyPr wrap="square" lIns="0" tIns="0" rIns="0" bIns="0" rtlCol="0" anchor="ctr"/>
+          <a:lstStyle/>
+          <a:p>
+            <a:pPr indent="0" marL="0">
+              <a:buNone/>
+            </a:pPr>
+            <a:r>
+              <a:rPr lang="en-US" sz="2600" b="1" dirty="0">
+                <a:solidFill>
+                  <a:srgbClr val="23201D"/>
+                </a:solidFill>
+                <a:latin typeface="Yu Gothic" pitchFamily="34" charset="0"/>
+                <a:ea typeface="Yu Gothic" pitchFamily="34" charset="-122"/>
+                <a:cs typeface="Yu Gothic" pitchFamily="34" charset="-120"/>
+              </a:rPr>
+              <a:t>今日、一緒にやること</a:t>
+            </a:r>
+            <a:endParaRPr lang="en-US" sz="2600" dirty="0"/>
+          </a:p>
+        </p:txBody>
+      </p:sp>
+      <p:sp>
+        <p:nvSpPr>
+          <p:cNvPr id="4" name="Text 2"/>
+          <p:cNvSpPr txBox="1"/>
+          <p:nvPr/>
+        </p:nvSpPr>
+        <p:spPr>
+          <a:xfrm>
+            <a:off x="777240" y="1572768"/>
+            <a:ext cx="10607040" cy="320040"/>
+          </a:xfrm>
+          <a:prstGeom prst="rect">
+            <a:avLst/>
+          </a:prstGeom>
+          <a:noFill/>
+          <a:ln/>
+        </p:spPr>
+        <p:txBody>
+          <a:bodyPr wrap="square" lIns="0" tIns="0" rIns="0" bIns="0" rtlCol="0" anchor="ctr"/>
+          <a:lstStyle/>
+          <a:p>
+            <a:pPr indent="0" marL="0">
+              <a:buNone/>
+            </a:pPr>
+            <a:r>
+              <a:rPr lang="en-US" sz="1250" b="1" dirty="0">
+                <a:solidFill>
+                  <a:srgbClr val="2F4F6B"/>
+                </a:solidFill>
+                <a:latin typeface="Yu Gothic" pitchFamily="34" charset="0"/>
+                <a:ea typeface="Yu Gothic" pitchFamily="34" charset="-122"/>
+                <a:cs typeface="Yu Gothic" pitchFamily="34" charset="-120"/>
+              </a:rPr>
+              <a:t>55分。操作するのはご自身です。</a:t>
+            </a:r>
+            <a:endParaRPr lang="en-US" sz="1250" dirty="0"/>
+          </a:p>
+        </p:txBody>
+      </p:sp>
+      <p:sp>
+        <p:nvSpPr>
+          <p:cNvPr id="5" name="Shape 3"/>
+          <p:cNvSpPr/>
+          <p:nvPr/>
+        </p:nvSpPr>
+        <p:spPr>
+          <a:xfrm>
+            <a:off x="777240" y="2148840"/>
+            <a:ext cx="3383280" cy="2880360"/>
+          </a:xfrm>
+          <a:prstGeom prst="rect">
+            <a:avLst/>
+          </a:prstGeom>
+          <a:solidFill>
+            <a:srgbClr val="FFFFFF"/>
+          </a:solidFill>
+          <a:ln w="12700">
+            <a:solidFill>
+              <a:srgbClr val="EDE7DB"/>
+            </a:solidFill>
+            <a:prstDash val="solid"/>
+          </a:ln>
+        </p:spPr>
+      </p:sp>
+      <p:sp>
+        <p:nvSpPr>
+          <p:cNvPr id="6" name="Shape 4"/>
+          <p:cNvSpPr/>
+          <p:nvPr/>
+        </p:nvSpPr>
+        <p:spPr>
+          <a:xfrm>
+            <a:off x="1051560" y="2395728"/>
+            <a:ext cx="438912" cy="438912"/>
+          </a:xfrm>
+          <a:prstGeom prst="ellipse">
+            <a:avLst/>
+          </a:prstGeom>
+          <a:solidFill>
+            <a:srgbClr val="2F4F6B"/>
+          </a:solidFill>
+          <a:ln w="12700">
+            <a:solidFill>
+              <a:srgbClr val="333333"/>
+            </a:solidFill>
+            <a:prstDash val="solid"/>
+          </a:ln>
+        </p:spPr>
+      </p:sp>
+      <p:sp>
+        <p:nvSpPr>
+          <p:cNvPr id="7" name="Text 5"/>
+          <p:cNvSpPr txBox="1"/>
+          <p:nvPr/>
+        </p:nvSpPr>
+        <p:spPr>
+          <a:xfrm>
+            <a:off x="1051560" y="2395728"/>
+            <a:ext cx="438912" cy="438912"/>
+          </a:xfrm>
+          <a:prstGeom prst="rect">
+            <a:avLst/>
+          </a:prstGeom>
+          <a:noFill/>
+          <a:ln/>
+        </p:spPr>
+        <p:txBody>
+          <a:bodyPr wrap="square" lIns="0" tIns="0" rIns="0" bIns="0" rtlCol="0" anchor="ctr"/>
+          <a:lstStyle/>
+          <a:p>
+            <a:pPr algn="ctr" indent="0" marL="0">
+              <a:buNone/>
+            </a:pPr>
+            <a:r>
+              <a:rPr lang="en-US" sz="1300" b="1" dirty="0">
                 <a:solidFill>
                   <a:srgbClr val="FFFFFF"/>
                 </a:solidFill>
@@ -4978,22 +8477,22 @@
                 <a:ea typeface="Yu Gothic" pitchFamily="34" charset="-122"/>
                 <a:cs typeface="Yu Gothic" pitchFamily="34" charset="-120"/>
               </a:rPr>
-              <a:t>月次レポートの雛形を、今月の数字で1回そのまま回してみる。</a:t>
-            </a:r>
-            <a:endParaRPr lang="en-US" sz="1900" dirty="0"/>
-          </a:p>
-        </p:txBody>
-      </p:sp>
-      <p:sp>
-        <p:nvSpPr>
-          <p:cNvPr id="6" name="Text 4"/>
-          <p:cNvSpPr txBox="1"/>
-          <p:nvPr/>
-        </p:nvSpPr>
-        <p:spPr>
-          <a:xfrm>
-            <a:off x="777240" y="4572000"/>
-            <a:ext cx="10607040" cy="822960"/>
+              <a:t>1</a:t>
+            </a:r>
+            <a:endParaRPr lang="en-US" sz="1300" dirty="0"/>
+          </a:p>
+        </p:txBody>
+      </p:sp>
+      <p:sp>
+        <p:nvSpPr>
+          <p:cNvPr id="8" name="Text 6"/>
+          <p:cNvSpPr txBox="1"/>
+          <p:nvPr/>
+        </p:nvSpPr>
+        <p:spPr>
+          <a:xfrm>
+            <a:off x="1051560" y="2944368"/>
+            <a:ext cx="2834640" cy="731520"/>
           </a:xfrm>
           <a:prstGeom prst="rect">
             <a:avLst/>
@@ -5007,40 +8506,324 @@
           <a:p>
             <a:pPr indent="0" marL="0">
               <a:lnSpc>
-                <a:spcPct val="145000"/>
+                <a:spcPct val="125000"/>
               </a:lnSpc>
               <a:buNone/>
             </a:pPr>
             <a:r>
-              <a:rPr lang="en-US" sz="1300" dirty="0">
-                <a:solidFill>
-                  <a:srgbClr val="B9B0A4"/>
-                </a:solidFill>
-                <a:latin typeface="Yu Gothic" pitchFamily="34" charset="0"/>
-                <a:ea typeface="Yu Gothic" pitchFamily="34" charset="-122"/>
-                <a:cs typeface="Yu Gothic" pitchFamily="34" charset="-120"/>
-              </a:rPr>
-              <a:t>15分で終わる大きさにしてあります。できなかった回があっても構いません。</a:t>
+              <a:rPr lang="en-US" sz="1450" b="1" dirty="0">
+                <a:solidFill>
+                  <a:srgbClr val="23201D"/>
+                </a:solidFill>
+                <a:latin typeface="Yu Gothic" pitchFamily="34" charset="0"/>
+                <a:ea typeface="Yu Gothic" pitchFamily="34" charset="-122"/>
+                <a:cs typeface="Yu Gothic" pitchFamily="34" charset="-120"/>
+              </a:rPr>
+              <a:t>実データを読ませる</a:t>
+            </a:r>
+            <a:endParaRPr lang="en-US" sz="1450" dirty="0"/>
+          </a:p>
+        </p:txBody>
+      </p:sp>
+      <p:sp>
+        <p:nvSpPr>
+          <p:cNvPr id="9" name="Text 7"/>
+          <p:cNvSpPr txBox="1"/>
+          <p:nvPr/>
+        </p:nvSpPr>
+        <p:spPr>
+          <a:xfrm>
+            <a:off x="1051560" y="3703320"/>
+            <a:ext cx="2834640" cy="1188720"/>
+          </a:xfrm>
+          <a:prstGeom prst="rect">
+            <a:avLst/>
+          </a:prstGeom>
+          <a:noFill/>
+          <a:ln/>
+        </p:spPr>
+        <p:txBody>
+          <a:bodyPr wrap="square" lIns="0" tIns="0" rIns="0" bIns="0" rtlCol="0" anchor="ctr"/>
+          <a:lstStyle/>
+          <a:p>
+            <a:pPr indent="0" marL="0">
+              <a:lnSpc>
+                <a:spcPct val="130000"/>
+              </a:lnSpc>
+              <a:buNone/>
+            </a:pPr>
+            <a:r>
+              <a:rPr lang="en-US" sz="1150" dirty="0">
+                <a:solidFill>
+                  <a:srgbClr val="5A534A"/>
+                </a:solidFill>
+                <a:latin typeface="Yu Gothic" pitchFamily="34" charset="0"/>
+                <a:ea typeface="Yu Gothic" pitchFamily="34" charset="-122"/>
+                <a:cs typeface="Yu Gothic" pitchFamily="34" charset="-120"/>
+              </a:rPr>
+              <a:t>個人情報の列は先に落とします。落とし方をその場でお伝えします</a:t>
+            </a:r>
+            <a:endParaRPr lang="en-US" sz="1150" dirty="0"/>
+          </a:p>
+        </p:txBody>
+      </p:sp>
+      <p:sp>
+        <p:nvSpPr>
+          <p:cNvPr id="10" name="Shape 8"/>
+          <p:cNvSpPr/>
+          <p:nvPr/>
+        </p:nvSpPr>
+        <p:spPr>
+          <a:xfrm>
+            <a:off x="4389120" y="2148840"/>
+            <a:ext cx="3383280" cy="2880360"/>
+          </a:xfrm>
+          <a:prstGeom prst="rect">
+            <a:avLst/>
+          </a:prstGeom>
+          <a:solidFill>
+            <a:srgbClr val="FFFFFF"/>
+          </a:solidFill>
+          <a:ln w="12700">
+            <a:solidFill>
+              <a:srgbClr val="EDE7DB"/>
+            </a:solidFill>
+            <a:prstDash val="solid"/>
+          </a:ln>
+        </p:spPr>
+      </p:sp>
+      <p:sp>
+        <p:nvSpPr>
+          <p:cNvPr id="11" name="Shape 9"/>
+          <p:cNvSpPr/>
+          <p:nvPr/>
+        </p:nvSpPr>
+        <p:spPr>
+          <a:xfrm>
+            <a:off x="4663440" y="2395728"/>
+            <a:ext cx="438912" cy="438912"/>
+          </a:xfrm>
+          <a:prstGeom prst="ellipse">
+            <a:avLst/>
+          </a:prstGeom>
+          <a:solidFill>
+            <a:srgbClr val="2F4F6B"/>
+          </a:solidFill>
+          <a:ln w="12700">
+            <a:solidFill>
+              <a:srgbClr val="333333"/>
+            </a:solidFill>
+            <a:prstDash val="solid"/>
+          </a:ln>
+        </p:spPr>
+      </p:sp>
+      <p:sp>
+        <p:nvSpPr>
+          <p:cNvPr id="12" name="Text 10"/>
+          <p:cNvSpPr txBox="1"/>
+          <p:nvPr/>
+        </p:nvSpPr>
+        <p:spPr>
+          <a:xfrm>
+            <a:off x="4663440" y="2395728"/>
+            <a:ext cx="438912" cy="438912"/>
+          </a:xfrm>
+          <a:prstGeom prst="rect">
+            <a:avLst/>
+          </a:prstGeom>
+          <a:noFill/>
+          <a:ln/>
+        </p:spPr>
+        <p:txBody>
+          <a:bodyPr wrap="square" lIns="0" tIns="0" rIns="0" bIns="0" rtlCol="0" anchor="ctr"/>
+          <a:lstStyle/>
+          <a:p>
+            <a:pPr algn="ctr" indent="0" marL="0">
+              <a:buNone/>
+            </a:pPr>
+            <a:r>
+              <a:rPr lang="en-US" sz="1300" b="1" dirty="0">
+                <a:solidFill>
+                  <a:srgbClr val="FFFFFF"/>
+                </a:solidFill>
+                <a:latin typeface="Yu Gothic" pitchFamily="34" charset="0"/>
+                <a:ea typeface="Yu Gothic" pitchFamily="34" charset="-122"/>
+                <a:cs typeface="Yu Gothic" pitchFamily="34" charset="-120"/>
+              </a:rPr>
+              <a:t>2</a:t>
             </a:r>
             <a:endParaRPr lang="en-US" sz="1300" dirty="0"/>
           </a:p>
+        </p:txBody>
+      </p:sp>
+      <p:sp>
+        <p:nvSpPr>
+          <p:cNvPr id="13" name="Text 11"/>
+          <p:cNvSpPr txBox="1"/>
+          <p:nvPr/>
+        </p:nvSpPr>
+        <p:spPr>
+          <a:xfrm>
+            <a:off x="4663440" y="2944368"/>
+            <a:ext cx="2834640" cy="731520"/>
+          </a:xfrm>
+          <a:prstGeom prst="rect">
+            <a:avLst/>
+          </a:prstGeom>
+          <a:noFill/>
+          <a:ln/>
+        </p:spPr>
+        <p:txBody>
+          <a:bodyPr wrap="square" lIns="0" tIns="0" rIns="0" bIns="0" rtlCol="0" anchor="ctr"/>
+          <a:lstStyle/>
           <a:p>
             <a:pPr indent="0" marL="0">
               <a:lnSpc>
-                <a:spcPct val="145000"/>
+                <a:spcPct val="125000"/>
               </a:lnSpc>
               <a:buNone/>
             </a:pPr>
             <a:r>
-              <a:rPr lang="en-US" sz="1300" dirty="0">
-                <a:solidFill>
-                  <a:srgbClr val="B9B0A4"/>
-                </a:solidFill>
-                <a:latin typeface="Yu Gothic" pitchFamily="34" charset="0"/>
-                <a:ea typeface="Yu Gothic" pitchFamily="34" charset="-122"/>
-                <a:cs typeface="Yu Gothic" pitchFamily="34" charset="-120"/>
-              </a:rPr>
-              <a:t>2回続いたら、宿題の出し方を見直します。</a:t>
+              <a:rPr lang="en-US" sz="1450" b="1" dirty="0">
+                <a:solidFill>
+                  <a:srgbClr val="23201D"/>
+                </a:solidFill>
+                <a:latin typeface="Yu Gothic" pitchFamily="34" charset="0"/>
+                <a:ea typeface="Yu Gothic" pitchFamily="34" charset="-122"/>
+                <a:cs typeface="Yu Gothic" pitchFamily="34" charset="-120"/>
+              </a:rPr>
+              <a:t>示唆を3つ引き出して、検算する</a:t>
+            </a:r>
+            <a:endParaRPr lang="en-US" sz="1450" dirty="0"/>
+          </a:p>
+        </p:txBody>
+      </p:sp>
+      <p:sp>
+        <p:nvSpPr>
+          <p:cNvPr id="14" name="Text 12"/>
+          <p:cNvSpPr txBox="1"/>
+          <p:nvPr/>
+        </p:nvSpPr>
+        <p:spPr>
+          <a:xfrm>
+            <a:off x="4663440" y="3703320"/>
+            <a:ext cx="2834640" cy="1188720"/>
+          </a:xfrm>
+          <a:prstGeom prst="rect">
+            <a:avLst/>
+          </a:prstGeom>
+          <a:noFill/>
+          <a:ln/>
+        </p:spPr>
+        <p:txBody>
+          <a:bodyPr wrap="square" lIns="0" tIns="0" rIns="0" bIns="0" rtlCol="0" anchor="ctr"/>
+          <a:lstStyle/>
+          <a:p>
+            <a:pPr indent="0" marL="0">
+              <a:lnSpc>
+                <a:spcPct val="130000"/>
+              </a:lnSpc>
+              <a:buNone/>
+            </a:pPr>
+            <a:r>
+              <a:rPr lang="en-US" sz="1150" dirty="0">
+                <a:solidFill>
+                  <a:srgbClr val="5A534A"/>
+                </a:solidFill>
+                <a:latin typeface="Yu Gothic" pitchFamily="34" charset="0"/>
+                <a:ea typeface="Yu Gothic" pitchFamily="34" charset="-122"/>
+                <a:cs typeface="Yu Gothic" pitchFamily="34" charset="-120"/>
+              </a:rPr>
+              <a:t>合計を突き合わせるところまでを手順にします</a:t>
+            </a:r>
+            <a:endParaRPr lang="en-US" sz="1150" dirty="0"/>
+          </a:p>
+        </p:txBody>
+      </p:sp>
+      <p:sp>
+        <p:nvSpPr>
+          <p:cNvPr id="15" name="Shape 13"/>
+          <p:cNvSpPr/>
+          <p:nvPr/>
+        </p:nvSpPr>
+        <p:spPr>
+          <a:xfrm>
+            <a:off x="8001000" y="2148840"/>
+            <a:ext cx="3383280" cy="2880360"/>
+          </a:xfrm>
+          <a:prstGeom prst="rect">
+            <a:avLst/>
+          </a:prstGeom>
+          <a:solidFill>
+            <a:srgbClr val="FFFFFF"/>
+          </a:solidFill>
+          <a:ln w="12700">
+            <a:solidFill>
+              <a:srgbClr val="EDE7DB"/>
+            </a:solidFill>
+            <a:prstDash val="solid"/>
+          </a:ln>
+        </p:spPr>
+      </p:sp>
+      <p:sp>
+        <p:nvSpPr>
+          <p:cNvPr id="16" name="Shape 14"/>
+          <p:cNvSpPr/>
+          <p:nvPr/>
+        </p:nvSpPr>
+        <p:spPr>
+          <a:xfrm>
+            <a:off x="8275320" y="2395728"/>
+            <a:ext cx="438912" cy="438912"/>
+          </a:xfrm>
+          <a:prstGeom prst="ellipse">
+            <a:avLst/>
+          </a:prstGeom>
+          <a:solidFill>
+            <a:srgbClr val="2F4F6B"/>
+          </a:solidFill>
+          <a:ln w="12700">
+            <a:solidFill>
+              <a:srgbClr val="333333"/>
+            </a:solidFill>
+            <a:prstDash val="solid"/>
+          </a:ln>
+        </p:spPr>
+      </p:sp>
+      <p:sp>
+        <p:nvSpPr>
+          <p:cNvPr id="17" name="Text 15"/>
+          <p:cNvSpPr txBox="1"/>
+          <p:nvPr/>
+        </p:nvSpPr>
+        <p:spPr>
+          <a:xfrm>
+            <a:off x="8275320" y="2395728"/>
+            <a:ext cx="438912" cy="438912"/>
+          </a:xfrm>
+          <a:prstGeom prst="rect">
+            <a:avLst/>
+          </a:prstGeom>
+          <a:noFill/>
+          <a:ln/>
+        </p:spPr>
+        <p:txBody>
+          <a:bodyPr wrap="square" lIns="0" tIns="0" rIns="0" bIns="0" rtlCol="0" anchor="ctr"/>
+          <a:lstStyle/>
+          <a:p>
+            <a:pPr algn="ctr" indent="0" marL="0">
+              <a:buNone/>
+            </a:pPr>
+            <a:r>
+              <a:rPr lang="en-US" sz="1300" b="1" dirty="0">
+                <a:solidFill>
+                  <a:srgbClr val="FFFFFF"/>
+                </a:solidFill>
+                <a:latin typeface="Yu Gothic" pitchFamily="34" charset="0"/>
+                <a:ea typeface="Yu Gothic" pitchFamily="34" charset="-122"/>
+                <a:cs typeface="Yu Gothic" pitchFamily="34" charset="-120"/>
+              </a:rPr>
+              <a:t>3</a:t>
             </a:r>
             <a:endParaRPr lang="en-US" sz="1300" dirty="0"/>
           </a:p>
@@ -5048,14 +8831,98 @@
       </p:sp>
       <p:sp>
         <p:nvSpPr>
-          <p:cNvPr id="7" name="Text 5"/>
-          <p:cNvSpPr txBox="1"/>
-          <p:nvPr/>
-        </p:nvSpPr>
-        <p:spPr>
-          <a:xfrm>
-            <a:off x="777240" y="6355080"/>
-            <a:ext cx="10607040" cy="274320"/>
+          <p:cNvPr id="18" name="Text 16"/>
+          <p:cNvSpPr txBox="1"/>
+          <p:nvPr/>
+        </p:nvSpPr>
+        <p:spPr>
+          <a:xfrm>
+            <a:off x="8275320" y="2944368"/>
+            <a:ext cx="2834640" cy="731520"/>
+          </a:xfrm>
+          <a:prstGeom prst="rect">
+            <a:avLst/>
+          </a:prstGeom>
+          <a:noFill/>
+          <a:ln/>
+        </p:spPr>
+        <p:txBody>
+          <a:bodyPr wrap="square" lIns="0" tIns="0" rIns="0" bIns="0" rtlCol="0" anchor="ctr"/>
+          <a:lstStyle/>
+          <a:p>
+            <a:pPr indent="0" marL="0">
+              <a:lnSpc>
+                <a:spcPct val="125000"/>
+              </a:lnSpc>
+              <a:buNone/>
+            </a:pPr>
+            <a:r>
+              <a:rPr lang="en-US" sz="1450" b="1" dirty="0">
+                <a:solidFill>
+                  <a:srgbClr val="23201D"/>
+                </a:solidFill>
+                <a:latin typeface="Yu Gothic" pitchFamily="34" charset="0"/>
+                <a:ea typeface="Yu Gothic" pitchFamily="34" charset="-122"/>
+                <a:cs typeface="Yu Gothic" pitchFamily="34" charset="-120"/>
+              </a:rPr>
+              <a:t>月次レポートの雛形にする</a:t>
+            </a:r>
+            <a:endParaRPr lang="en-US" sz="1450" dirty="0"/>
+          </a:p>
+        </p:txBody>
+      </p:sp>
+      <p:sp>
+        <p:nvSpPr>
+          <p:cNvPr id="19" name="Text 17"/>
+          <p:cNvSpPr txBox="1"/>
+          <p:nvPr/>
+        </p:nvSpPr>
+        <p:spPr>
+          <a:xfrm>
+            <a:off x="8275320" y="3703320"/>
+            <a:ext cx="2834640" cy="1188720"/>
+          </a:xfrm>
+          <a:prstGeom prst="rect">
+            <a:avLst/>
+          </a:prstGeom>
+          <a:noFill/>
+          <a:ln/>
+        </p:spPr>
+        <p:txBody>
+          <a:bodyPr wrap="square" lIns="0" tIns="0" rIns="0" bIns="0" rtlCol="0" anchor="ctr"/>
+          <a:lstStyle/>
+          <a:p>
+            <a:pPr indent="0" marL="0">
+              <a:lnSpc>
+                <a:spcPct val="130000"/>
+              </a:lnSpc>
+              <a:buNone/>
+            </a:pPr>
+            <a:r>
+              <a:rPr lang="en-US" sz="1150" dirty="0">
+                <a:solidFill>
+                  <a:srgbClr val="5A534A"/>
+                </a:solidFill>
+                <a:latin typeface="Yu Gothic" pitchFamily="34" charset="0"/>
+                <a:ea typeface="Yu Gothic" pitchFamily="34" charset="-122"/>
+                <a:cs typeface="Yu Gothic" pitchFamily="34" charset="-120"/>
+              </a:rPr>
+              <a:t>来月から同じ形で回せるようにします</a:t>
+            </a:r>
+            <a:endParaRPr lang="en-US" sz="1150" dirty="0"/>
+          </a:p>
+        </p:txBody>
+      </p:sp>
+      <p:sp>
+        <p:nvSpPr>
+          <p:cNvPr id="20" name="Text 18"/>
+          <p:cNvSpPr txBox="1"/>
+          <p:nvPr/>
+        </p:nvSpPr>
+        <p:spPr>
+          <a:xfrm>
+            <a:off x="777240" y="6382512"/>
+            <a:ext cx="7424928" cy="256032"/>
           </a:xfrm>
           <a:prstGeom prst="rect">
             <a:avLst/>
@@ -5073,13 +8940,52 @@
             <a:r>
               <a:rPr lang="en-US" sz="900" dirty="0">
                 <a:solidFill>
-                  <a:srgbClr val="6E6558"/>
+                  <a:srgbClr val="8A8177"/>
                 </a:solidFill>
                 <a:latin typeface="Yu Gothic" pitchFamily="34" charset="0"/>
                 <a:ea typeface="Yu Gothic" pitchFamily="34" charset="-122"/>
                 <a:cs typeface="Yu Gothic" pitchFamily="34" charset="-120"/>
               </a:rPr>
               <a:t>第4回　数字と判断のAI化</a:t>
+            </a:r>
+            <a:endParaRPr lang="en-US" sz="900" dirty="0"/>
+          </a:p>
+        </p:txBody>
+      </p:sp>
+      <p:sp>
+        <p:nvSpPr>
+          <p:cNvPr id="21" name="Text 19"/>
+          <p:cNvSpPr txBox="1"/>
+          <p:nvPr/>
+        </p:nvSpPr>
+        <p:spPr>
+          <a:xfrm>
+            <a:off x="8202168" y="6382512"/>
+            <a:ext cx="3182112" cy="256032"/>
+          </a:xfrm>
+          <a:prstGeom prst="rect">
+            <a:avLst/>
+          </a:prstGeom>
+          <a:noFill/>
+          <a:ln/>
+        </p:spPr>
+        <p:txBody>
+          <a:bodyPr wrap="square" lIns="0" tIns="0" rIns="0" bIns="0" rtlCol="0" anchor="ctr"/>
+          <a:lstStyle/>
+          <a:p>
+            <a:pPr algn="r" indent="0" marL="0">
+              <a:buNone/>
+            </a:pPr>
+            <a:r>
+              <a:rPr lang="en-US" sz="900" dirty="0">
+                <a:solidFill>
+                  <a:srgbClr val="8A8177"/>
+                </a:solidFill>
+                <a:latin typeface="Yu Gothic" pitchFamily="34" charset="0"/>
+                <a:ea typeface="Yu Gothic" pitchFamily="34" charset="-122"/>
+                <a:cs typeface="Yu Gothic" pitchFamily="34" charset="-120"/>
+              </a:rPr>
+              <a:t>演習</a:t>
             </a:r>
             <a:endParaRPr lang="en-US" sz="900" dirty="0"/>
           </a:p>

--- a/slides/pptx/第04回_数字と判断のAI化.pptx
+++ b/slides/pptx/第04回_数字と判断のAI化.pptx
@@ -17,9 +17,12 @@
     <p:sldId id="265" r:id="rId11"/>
     <p:sldId id="266" r:id="rId12"/>
     <p:sldId id="267" r:id="rId13"/>
+    <p:sldId id="268" r:id="rId14"/>
+    <p:sldId id="269" r:id="rId15"/>
+    <p:sldId id="270" r:id="rId16"/>
   </p:sldIdLst>
   <p:notesMasterIdLst>
-    <p:notesMasterId r:id="rId14"/>
+    <p:notesMasterId r:id="rId17"/>
   </p:notesMasterIdLst>
   <p:sldSz cx="12192000" cy="6858000"/>
   <p:notesSz cx="6858000" cy="12192000"/>
@@ -601,7 +604,7 @@
           <a:p>
             <a:r>
               <a:rPr lang="en-US" dirty="0"/>
-              <a:t>「毎月いつ」を決めないと、翌月には忘れられている。締め日から逆算して日付を決め、その場でカレンダーに入れてもらう。</a:t>
+              <a:t>検算をこの回の合言葉にする。以後、数字が出るたびに『検算しましたか』と聞けるようになる。</a:t>
             </a:r>
             <a:endParaRPr lang="en-US" dirty="0"/>
           </a:p>
@@ -689,7 +692,7 @@
           <a:p>
             <a:r>
               <a:rPr lang="en-US" dirty="0"/>
-              <a:t>この事例は期待値管理そのもの。毎案件で必ず出す。ここを言わずに進めると、2か月目に「効かないですね」と言われる。</a:t>
+              <a:t>検算を必ずやらせる。ここを飛ばすと事故る。時間が足りなければ雛形化を次回冒頭に持ち越してでも、検算はやる。</a:t>
             </a:r>
             <a:endParaRPr lang="en-US" dirty="0"/>
           </a:p>
@@ -777,7 +780,7 @@
           <a:p>
             <a:r>
               <a:rPr lang="en-US" dirty="0"/>
-              <a:t>回してみて足りない前提が見つかったら、それを書き足すところまでが宿題。次回冒頭で、書き足した前提を見せてもらう。</a:t>
+              <a:t>「毎月いつ」を決めないと、翌月には忘れられている。締め日から逆算して日付を決め、その場でカレンダーに入れてもらう。</a:t>
             </a:r>
             <a:endParaRPr lang="en-US" dirty="0"/>
           </a:p>
@@ -801,6 +804,270 @@
             <a:fld id="{F7021451-1387-4CA6-816F-3879F97B5CBC}" type="slidenum">
               <a:rPr lang="en-US"/>
               <a:t>12</a:t>
+            </a:fld>
+            <a:endParaRPr lang="en-US"/>
+          </a:p>
+        </p:txBody>
+      </p:sp>
+    </p:spTree>
+    <p:extLst>
+      <p:ext uri="{BB962C8B-B14F-4D97-AF65-F5344CB8AC3E}">
+        <p14:creationId xmlns:p14="http://schemas.microsoft.com/office/powerpoint/2010/main" val="1024086991"/>
+      </p:ext>
+    </p:extLst>
+  </p:cSld>
+  <p:clrMapOvr>
+    <a:masterClrMapping/>
+  </p:clrMapOvr>
+</p:notes>
+</file>
+
+<file path=ppt/notesSlides/notesSlide13.xml><?xml version="1.0" encoding="utf-8"?>
+<p:notes xmlns:a="http://schemas.openxmlformats.org/drawingml/2006/main" xmlns:r="http://schemas.openxmlformats.org/officeDocument/2006/relationships" xmlns:p="http://schemas.openxmlformats.org/presentationml/2006/main">
+  <p:cSld>
+    <p:spTree>
+      <p:nvGrpSpPr>
+        <p:cNvPr id="1" name=""/>
+        <p:cNvGrpSpPr/>
+        <p:nvPr/>
+      </p:nvGrpSpPr>
+      <p:grpSpPr>
+        <a:xfrm>
+          <a:off x="0" y="0"/>
+          <a:ext cx="0" cy="0"/>
+          <a:chOff x="0" y="0"/>
+          <a:chExt cx="0" cy="0"/>
+        </a:xfrm>
+      </p:grpSpPr>
+      <p:sp>
+        <p:nvSpPr>
+          <p:cNvPr id="2" name="Slide Image Placeholder 1"/>
+          <p:cNvSpPr>
+            <a:spLocks noGrp="1" noRot="1" noChangeAspect="1"/>
+          </p:cNvSpPr>
+          <p:nvPr>
+            <p:ph type="sldImg"/>
+          </p:nvPr>
+        </p:nvSpPr>
+        <p:spPr/>
+      </p:sp>
+      <p:sp>
+        <p:nvSpPr>
+          <p:cNvPr id="3" name="Notes Placeholder 2"/>
+          <p:cNvSpPr>
+            <a:spLocks noGrp="1"/>
+          </p:cNvSpPr>
+          <p:nvPr>
+            <p:ph type="body" idx="1"/>
+          </p:nvPr>
+        </p:nvSpPr>
+        <p:spPr/>
+        <p:txBody>
+          <a:bodyPr/>
+          <a:lstStyle/>
+          <a:p>
+            <a:r>
+              <a:rPr lang="en-US" dirty="0"/>
+              <a:t>この事例は期待値管理そのもの。毎案件で必ず出す。ここを言わずに進めると、2か月目に「効かないですね」と言われる。</a:t>
+            </a:r>
+            <a:endParaRPr lang="en-US" dirty="0"/>
+          </a:p>
+        </p:txBody>
+      </p:sp>
+      <p:sp>
+        <p:nvSpPr>
+          <p:cNvPr id="4" name="Slide Number Placeholder 3"/>
+          <p:cNvSpPr>
+            <a:spLocks noGrp="1"/>
+          </p:cNvSpPr>
+          <p:nvPr>
+            <p:ph type="sldNum" sz="quarter" idx="10"/>
+          </p:nvPr>
+        </p:nvSpPr>
+        <p:spPr/>
+        <p:txBody>
+          <a:bodyPr/>
+          <a:lstStyle/>
+          <a:p>
+            <a:fld id="{F7021451-1387-4CA6-816F-3879F97B5CBC}" type="slidenum">
+              <a:rPr lang="en-US"/>
+              <a:t>13</a:t>
+            </a:fld>
+            <a:endParaRPr lang="en-US"/>
+          </a:p>
+        </p:txBody>
+      </p:sp>
+    </p:spTree>
+    <p:extLst>
+      <p:ext uri="{BB962C8B-B14F-4D97-AF65-F5344CB8AC3E}">
+        <p14:creationId xmlns:p14="http://schemas.microsoft.com/office/powerpoint/2010/main" val="1024086991"/>
+      </p:ext>
+    </p:extLst>
+  </p:cSld>
+  <p:clrMapOvr>
+    <a:masterClrMapping/>
+  </p:clrMapOvr>
+</p:notes>
+</file>
+
+<file path=ppt/notesSlides/notesSlide14.xml><?xml version="1.0" encoding="utf-8"?>
+<p:notes xmlns:a="http://schemas.openxmlformats.org/drawingml/2006/main" xmlns:r="http://schemas.openxmlformats.org/officeDocument/2006/relationships" xmlns:p="http://schemas.openxmlformats.org/presentationml/2006/main">
+  <p:cSld>
+    <p:spTree>
+      <p:nvGrpSpPr>
+        <p:cNvPr id="1" name=""/>
+        <p:cNvGrpSpPr/>
+        <p:nvPr/>
+      </p:nvGrpSpPr>
+      <p:grpSpPr>
+        <a:xfrm>
+          <a:off x="0" y="0"/>
+          <a:ext cx="0" cy="0"/>
+          <a:chOff x="0" y="0"/>
+          <a:chExt cx="0" cy="0"/>
+        </a:xfrm>
+      </p:grpSpPr>
+      <p:sp>
+        <p:nvSpPr>
+          <p:cNvPr id="2" name="Slide Image Placeholder 1"/>
+          <p:cNvSpPr>
+            <a:spLocks noGrp="1" noRot="1" noChangeAspect="1"/>
+          </p:cNvSpPr>
+          <p:nvPr>
+            <p:ph type="sldImg"/>
+          </p:nvPr>
+        </p:nvSpPr>
+        <p:spPr/>
+      </p:sp>
+      <p:sp>
+        <p:nvSpPr>
+          <p:cNvPr id="3" name="Notes Placeholder 2"/>
+          <p:cNvSpPr>
+            <a:spLocks noGrp="1"/>
+          </p:cNvSpPr>
+          <p:nvPr>
+            <p:ph type="body" idx="1"/>
+          </p:nvPr>
+        </p:nvSpPr>
+        <p:spPr/>
+        <p:txBody>
+          <a:bodyPr/>
+          <a:lstStyle/>
+          <a:p>
+            <a:r>
+              <a:rPr lang="en-US" dirty="0"/>
+              <a:t>次回の資料3〜5本は、事前に用意されていないと演習が止まる。3日前のリマインドで、具体的なファイル名を挙げて依頼する。</a:t>
+            </a:r>
+            <a:endParaRPr lang="en-US" dirty="0"/>
+          </a:p>
+        </p:txBody>
+      </p:sp>
+      <p:sp>
+        <p:nvSpPr>
+          <p:cNvPr id="4" name="Slide Number Placeholder 3"/>
+          <p:cNvSpPr>
+            <a:spLocks noGrp="1"/>
+          </p:cNvSpPr>
+          <p:nvPr>
+            <p:ph type="sldNum" sz="quarter" idx="10"/>
+          </p:nvPr>
+        </p:nvSpPr>
+        <p:spPr/>
+        <p:txBody>
+          <a:bodyPr/>
+          <a:lstStyle/>
+          <a:p>
+            <a:fld id="{F7021451-1387-4CA6-816F-3879F97B5CBC}" type="slidenum">
+              <a:rPr lang="en-US"/>
+              <a:t>14</a:t>
+            </a:fld>
+            <a:endParaRPr lang="en-US"/>
+          </a:p>
+        </p:txBody>
+      </p:sp>
+    </p:spTree>
+    <p:extLst>
+      <p:ext uri="{BB962C8B-B14F-4D97-AF65-F5344CB8AC3E}">
+        <p14:creationId xmlns:p14="http://schemas.microsoft.com/office/powerpoint/2010/main" val="1024086991"/>
+      </p:ext>
+    </p:extLst>
+  </p:cSld>
+  <p:clrMapOvr>
+    <a:masterClrMapping/>
+  </p:clrMapOvr>
+</p:notes>
+</file>
+
+<file path=ppt/notesSlides/notesSlide15.xml><?xml version="1.0" encoding="utf-8"?>
+<p:notes xmlns:a="http://schemas.openxmlformats.org/drawingml/2006/main" xmlns:r="http://schemas.openxmlformats.org/officeDocument/2006/relationships" xmlns:p="http://schemas.openxmlformats.org/presentationml/2006/main">
+  <p:cSld>
+    <p:spTree>
+      <p:nvGrpSpPr>
+        <p:cNvPr id="1" name=""/>
+        <p:cNvGrpSpPr/>
+        <p:nvPr/>
+      </p:nvGrpSpPr>
+      <p:grpSpPr>
+        <a:xfrm>
+          <a:off x="0" y="0"/>
+          <a:ext cx="0" cy="0"/>
+          <a:chOff x="0" y="0"/>
+          <a:chExt cx="0" cy="0"/>
+        </a:xfrm>
+      </p:grpSpPr>
+      <p:sp>
+        <p:nvSpPr>
+          <p:cNvPr id="2" name="Slide Image Placeholder 1"/>
+          <p:cNvSpPr>
+            <a:spLocks noGrp="1" noRot="1" noChangeAspect="1"/>
+          </p:cNvSpPr>
+          <p:nvPr>
+            <p:ph type="sldImg"/>
+          </p:nvPr>
+        </p:nvSpPr>
+        <p:spPr/>
+      </p:sp>
+      <p:sp>
+        <p:nvSpPr>
+          <p:cNvPr id="3" name="Notes Placeholder 2"/>
+          <p:cNvSpPr>
+            <a:spLocks noGrp="1"/>
+          </p:cNvSpPr>
+          <p:nvPr>
+            <p:ph type="body" idx="1"/>
+          </p:nvPr>
+        </p:nvSpPr>
+        <p:spPr/>
+        <p:txBody>
+          <a:bodyPr/>
+          <a:lstStyle/>
+          <a:p>
+            <a:r>
+              <a:rPr lang="en-US" dirty="0"/>
+              <a:t>回してみて足りない前提が見つかったら、それを書き足すところまでが宿題。次回冒頭で、書き足した前提を見せてもらう。</a:t>
+            </a:r>
+            <a:endParaRPr lang="en-US" dirty="0"/>
+          </a:p>
+        </p:txBody>
+      </p:sp>
+      <p:sp>
+        <p:nvSpPr>
+          <p:cNvPr id="4" name="Slide Number Placeholder 3"/>
+          <p:cNvSpPr>
+            <a:spLocks noGrp="1"/>
+          </p:cNvSpPr>
+          <p:nvPr>
+            <p:ph type="sldNum" sz="quarter" idx="10"/>
+          </p:nvPr>
+        </p:nvSpPr>
+        <p:spPr/>
+        <p:txBody>
+          <a:bodyPr/>
+          <a:lstStyle/>
+          <a:p>
+            <a:fld id="{F7021451-1387-4CA6-816F-3879F97B5CBC}" type="slidenum">
+              <a:rPr lang="en-US"/>
+              <a:t>15</a:t>
             </a:fld>
             <a:endParaRPr lang="en-US"/>
           </a:p>
@@ -1481,7 +1748,7 @@
           <a:p>
             <a:r>
               <a:rPr lang="en-US" dirty="0"/>
-              <a:t>検算を必ずやらせる。ここを飛ばすと事故る。時間が足りなければ雛形化を次回冒頭に持ち越してでも、検算はやる。</a:t>
+              <a:t>1つ目は鋭い質問。ごまかさず、変わるのは集計ではなく解釈の速さだと答える。2つ目は期待値管理そのもの。3か月という数字を必ず出す。</a:t>
             </a:r>
             <a:endParaRPr lang="en-US" dirty="0"/>
           </a:p>
@@ -2175,13 +2442,13 @@
             <a:r>
               <a:rPr lang="en-US" sz="1100" b="1" spc="250" kern="0" dirty="0">
                 <a:solidFill>
-                  <a:srgbClr val="3B6B4A"/>
-                </a:solidFill>
-                <a:latin typeface="Yu Gothic" pitchFamily="34" charset="0"/>
-                <a:ea typeface="Yu Gothic" pitchFamily="34" charset="-122"/>
-                <a:cs typeface="Yu Gothic" pitchFamily="34" charset="-120"/>
-              </a:rPr>
-              <a:t>業務への組み込み</a:t>
+                  <a:srgbClr val="8A8177"/>
+                </a:solidFill>
+                <a:latin typeface="Yu Gothic" pitchFamily="34" charset="0"/>
+                <a:ea typeface="Yu Gothic" pitchFamily="34" charset="-122"/>
+                <a:cs typeface="Yu Gothic" pitchFamily="34" charset="-120"/>
+              </a:rPr>
+              <a:t>用語</a:t>
             </a:r>
             <a:endParaRPr lang="en-US" sz="1100" dirty="0"/>
           </a:p>
@@ -2220,7 +2487,7 @@
                 <a:ea typeface="Yu Gothic" pitchFamily="34" charset="-122"/>
                 <a:cs typeface="Yu Gothic" pitchFamily="34" charset="-120"/>
               </a:rPr>
-              <a:t>帰る前に決めること</a:t>
+              <a:t>今日出てきた言葉</a:t>
             </a:r>
             <a:endParaRPr lang="en-US" sz="2600" dirty="0"/>
           </a:p>
@@ -2228,53 +2495,14 @@
       </p:sp>
       <p:sp>
         <p:nvSpPr>
-          <p:cNvPr id="4" name="Text 2"/>
-          <p:cNvSpPr txBox="1"/>
-          <p:nvPr/>
-        </p:nvSpPr>
-        <p:spPr>
-          <a:xfrm>
-            <a:off x="777240" y="1572768"/>
-            <a:ext cx="10607040" cy="320040"/>
-          </a:xfrm>
-          <a:prstGeom prst="rect">
-            <a:avLst/>
-          </a:prstGeom>
-          <a:noFill/>
-          <a:ln/>
-        </p:spPr>
-        <p:txBody>
-          <a:bodyPr wrap="square" lIns="0" tIns="0" rIns="0" bIns="0" rtlCol="0" anchor="ctr"/>
-          <a:lstStyle/>
-          <a:p>
-            <a:pPr indent="0" marL="0">
-              <a:buNone/>
-            </a:pPr>
-            <a:r>
-              <a:rPr lang="en-US" sz="1250" b="1" dirty="0">
-                <a:solidFill>
-                  <a:srgbClr val="3B6B4A"/>
-                </a:solidFill>
-                <a:latin typeface="Yu Gothic" pitchFamily="34" charset="0"/>
-                <a:ea typeface="Yu Gothic" pitchFamily="34" charset="-122"/>
-                <a:cs typeface="Yu Gothic" pitchFamily="34" charset="-120"/>
-              </a:rPr>
-              <a:t>ここを決めないと、持ち帰っても使われません。紙に書きます。</a:t>
-            </a:r>
-            <a:endParaRPr lang="en-US" sz="1250" dirty="0"/>
-          </a:p>
-        </p:txBody>
-      </p:sp>
-      <p:sp>
-        <p:nvSpPr>
-          <p:cNvPr id="5" name="Shape 3"/>
+          <p:cNvPr id="4" name="Shape 2"/>
           <p:cNvSpPr/>
           <p:nvPr/>
         </p:nvSpPr>
         <p:spPr>
           <a:xfrm>
-            <a:off x="777240" y="2103120"/>
-            <a:ext cx="10607040" cy="914400"/>
+            <a:off x="777240" y="1828800"/>
+            <a:ext cx="10607040" cy="1078992"/>
           </a:xfrm>
           <a:prstGeom prst="rect">
             <a:avLst/>
@@ -2292,20 +2520,59 @@
       </p:sp>
       <p:sp>
         <p:nvSpPr>
+          <p:cNvPr id="5" name="Text 3"/>
+          <p:cNvSpPr txBox="1"/>
+          <p:nvPr/>
+        </p:nvSpPr>
+        <p:spPr>
+          <a:xfrm>
+            <a:off x="1097280" y="1920240"/>
+            <a:ext cx="2969971" cy="896112"/>
+          </a:xfrm>
+          <a:prstGeom prst="rect">
+            <a:avLst/>
+          </a:prstGeom>
+          <a:noFill/>
+          <a:ln/>
+        </p:spPr>
+        <p:txBody>
+          <a:bodyPr wrap="square" lIns="0" tIns="0" rIns="0" bIns="0" rtlCol="0" anchor="ctr"/>
+          <a:lstStyle/>
+          <a:p>
+            <a:pPr indent="0" marL="0">
+              <a:buNone/>
+            </a:pPr>
+            <a:r>
+              <a:rPr lang="en-US" sz="1500" b="1" dirty="0">
+                <a:solidFill>
+                  <a:srgbClr val="23201D"/>
+                </a:solidFill>
+                <a:latin typeface="Yu Gothic" pitchFamily="34" charset="0"/>
+                <a:ea typeface="Yu Gothic" pitchFamily="34" charset="-122"/>
+                <a:cs typeface="Yu Gothic" pitchFamily="34" charset="-120"/>
+              </a:rPr>
+              <a:t>検算</a:t>
+            </a:r>
+            <a:endParaRPr lang="en-US" sz="1500" dirty="0"/>
+          </a:p>
+        </p:txBody>
+      </p:sp>
+      <p:sp>
+        <p:nvSpPr>
           <p:cNvPr id="6" name="Shape 4"/>
           <p:cNvSpPr/>
           <p:nvPr/>
         </p:nvSpPr>
         <p:spPr>
           <a:xfrm>
-            <a:off x="777240" y="2103120"/>
-            <a:ext cx="54864" cy="914400"/>
+            <a:off x="4065422" y="1956816"/>
+            <a:ext cx="18288" cy="822960"/>
           </a:xfrm>
           <a:prstGeom prst="rect">
             <a:avLst/>
           </a:prstGeom>
           <a:solidFill>
-            <a:srgbClr val="3B6B4A"/>
+            <a:srgbClr val="EDE7DB"/>
           </a:solidFill>
           <a:ln w="12700">
             <a:solidFill>
@@ -2323,47 +2590,8 @@
         </p:nvSpPr>
         <p:spPr>
           <a:xfrm>
-            <a:off x="1143000" y="2176272"/>
-            <a:ext cx="2757830" cy="768096"/>
-          </a:xfrm>
-          <a:prstGeom prst="rect">
-            <a:avLst/>
-          </a:prstGeom>
-          <a:noFill/>
-          <a:ln/>
-        </p:spPr>
-        <p:txBody>
-          <a:bodyPr wrap="square" lIns="0" tIns="0" rIns="0" bIns="0" rtlCol="0" anchor="ctr"/>
-          <a:lstStyle/>
-          <a:p>
-            <a:pPr indent="0" marL="0">
-              <a:buNone/>
-            </a:pPr>
-            <a:r>
-              <a:rPr lang="en-US" sz="1400" b="1" dirty="0">
-                <a:solidFill>
-                  <a:srgbClr val="3B6B4A"/>
-                </a:solidFill>
-                <a:latin typeface="Yu Gothic" pitchFamily="34" charset="0"/>
-                <a:ea typeface="Yu Gothic" pitchFamily="34" charset="-122"/>
-                <a:cs typeface="Yu Gothic" pitchFamily="34" charset="-120"/>
-              </a:rPr>
-              <a:t>毎月いつ回すか</a:t>
-            </a:r>
-            <a:endParaRPr lang="en-US" sz="1400" dirty="0"/>
-          </a:p>
-        </p:txBody>
-      </p:sp>
-      <p:sp>
-        <p:nvSpPr>
-          <p:cNvPr id="8" name="Text 6"/>
-          <p:cNvSpPr txBox="1"/>
-          <p:nvPr/>
-        </p:nvSpPr>
-        <p:spPr>
-          <a:xfrm>
-            <a:off x="4006901" y="2176272"/>
-            <a:ext cx="7011619" cy="768096"/>
+            <a:off x="4383634" y="1920240"/>
+            <a:ext cx="6682435" cy="896112"/>
           </a:xfrm>
           <a:prstGeom prst="rect">
             <a:avLst/>
@@ -2384,13 +2612,13 @@
             <a:r>
               <a:rPr lang="en-US" sz="1250" dirty="0">
                 <a:solidFill>
-                  <a:srgbClr val="3F3933"/>
-                </a:solidFill>
-                <a:latin typeface="Yu Gothic" pitchFamily="34" charset="0"/>
-                <a:ea typeface="Yu Gothic" pitchFamily="34" charset="-122"/>
-                <a:cs typeface="Yu Gothic" pitchFamily="34" charset="-120"/>
-              </a:rPr>
-              <a:t>締め日の翌◯日、と決めてカレンダーに入れます</a:t>
+                  <a:srgbClr val="5A534A"/>
+                </a:solidFill>
+                <a:latin typeface="Yu Gothic" pitchFamily="34" charset="0"/>
+                <a:ea typeface="Yu Gothic" pitchFamily="34" charset="-122"/>
+                <a:cs typeface="Yu Gothic" pitchFamily="34" charset="-120"/>
+              </a:rPr>
+              <a:t>AIが出した集計を、表計算や電卓で突き合わせること。毎回やります</a:t>
             </a:r>
             <a:endParaRPr lang="en-US" sz="1250" dirty="0"/>
           </a:p>
@@ -2398,14 +2626,14 @@
       </p:sp>
       <p:sp>
         <p:nvSpPr>
-          <p:cNvPr id="9" name="Shape 7"/>
+          <p:cNvPr id="8" name="Shape 6"/>
           <p:cNvSpPr/>
           <p:nvPr/>
         </p:nvSpPr>
         <p:spPr>
           <a:xfrm>
-            <a:off x="777240" y="3154680"/>
-            <a:ext cx="10607040" cy="914400"/>
+            <a:off x="777240" y="3063240"/>
+            <a:ext cx="10607040" cy="1078992"/>
           </a:xfrm>
           <a:prstGeom prst="rect">
             <a:avLst/>
@@ -2423,20 +2651,59 @@
       </p:sp>
       <p:sp>
         <p:nvSpPr>
+          <p:cNvPr id="9" name="Text 7"/>
+          <p:cNvSpPr txBox="1"/>
+          <p:nvPr/>
+        </p:nvSpPr>
+        <p:spPr>
+          <a:xfrm>
+            <a:off x="1097280" y="3154680"/>
+            <a:ext cx="2969971" cy="896112"/>
+          </a:xfrm>
+          <a:prstGeom prst="rect">
+            <a:avLst/>
+          </a:prstGeom>
+          <a:noFill/>
+          <a:ln/>
+        </p:spPr>
+        <p:txBody>
+          <a:bodyPr wrap="square" lIns="0" tIns="0" rIns="0" bIns="0" rtlCol="0" anchor="ctr"/>
+          <a:lstStyle/>
+          <a:p>
+            <a:pPr indent="0" marL="0">
+              <a:buNone/>
+            </a:pPr>
+            <a:r>
+              <a:rPr lang="en-US" sz="1500" b="1" dirty="0">
+                <a:solidFill>
+                  <a:srgbClr val="23201D"/>
+                </a:solidFill>
+                <a:latin typeface="Yu Gothic" pitchFamily="34" charset="0"/>
+                <a:ea typeface="Yu Gothic" pitchFamily="34" charset="-122"/>
+                <a:cs typeface="Yu Gothic" pitchFamily="34" charset="-120"/>
+              </a:rPr>
+              <a:t>前提</a:t>
+            </a:r>
+            <a:endParaRPr lang="en-US" sz="1500" dirty="0"/>
+          </a:p>
+        </p:txBody>
+      </p:sp>
+      <p:sp>
+        <p:nvSpPr>
           <p:cNvPr id="10" name="Shape 8"/>
           <p:cNvSpPr/>
           <p:nvPr/>
         </p:nvSpPr>
         <p:spPr>
           <a:xfrm>
-            <a:off x="777240" y="3154680"/>
-            <a:ext cx="54864" cy="914400"/>
+            <a:off x="4065422" y="3191256"/>
+            <a:ext cx="18288" cy="822960"/>
           </a:xfrm>
           <a:prstGeom prst="rect">
             <a:avLst/>
           </a:prstGeom>
           <a:solidFill>
-            <a:srgbClr val="3B6B4A"/>
+            <a:srgbClr val="EDE7DB"/>
           </a:solidFill>
           <a:ln w="12700">
             <a:solidFill>
@@ -2454,47 +2721,8 @@
         </p:nvSpPr>
         <p:spPr>
           <a:xfrm>
-            <a:off x="1143000" y="3227832"/>
-            <a:ext cx="2757830" cy="768096"/>
-          </a:xfrm>
-          <a:prstGeom prst="rect">
-            <a:avLst/>
-          </a:prstGeom>
-          <a:noFill/>
-          <a:ln/>
-        </p:spPr>
-        <p:txBody>
-          <a:bodyPr wrap="square" lIns="0" tIns="0" rIns="0" bIns="0" rtlCol="0" anchor="ctr"/>
-          <a:lstStyle/>
-          <a:p>
-            <a:pPr indent="0" marL="0">
-              <a:buNone/>
-            </a:pPr>
-            <a:r>
-              <a:rPr lang="en-US" sz="1400" b="1" dirty="0">
-                <a:solidFill>
-                  <a:srgbClr val="3B6B4A"/>
-                </a:solidFill>
-                <a:latin typeface="Yu Gothic" pitchFamily="34" charset="0"/>
-                <a:ea typeface="Yu Gothic" pitchFamily="34" charset="-122"/>
-                <a:cs typeface="Yu Gothic" pitchFamily="34" charset="-120"/>
-              </a:rPr>
-              <a:t>誰が回すか</a:t>
-            </a:r>
-            <a:endParaRPr lang="en-US" sz="1400" dirty="0"/>
-          </a:p>
-        </p:txBody>
-      </p:sp>
-      <p:sp>
-        <p:nvSpPr>
-          <p:cNvPr id="12" name="Text 10"/>
-          <p:cNvSpPr txBox="1"/>
-          <p:nvPr/>
-        </p:nvSpPr>
-        <p:spPr>
-          <a:xfrm>
-            <a:off x="4006901" y="3227832"/>
-            <a:ext cx="7011619" cy="768096"/>
+            <a:off x="4383634" y="3154680"/>
+            <a:ext cx="6682435" cy="896112"/>
           </a:xfrm>
           <a:prstGeom prst="rect">
             <a:avLst/>
@@ -2515,13 +2743,13 @@
             <a:r>
               <a:rPr lang="en-US" sz="1250" dirty="0">
                 <a:solidFill>
-                  <a:srgbClr val="3F3933"/>
-                </a:solidFill>
-                <a:latin typeface="Yu Gothic" pitchFamily="34" charset="0"/>
-                <a:ea typeface="Yu Gothic" pitchFamily="34" charset="-122"/>
-                <a:cs typeface="Yu Gothic" pitchFamily="34" charset="-120"/>
-              </a:rPr>
-              <a:t>当面は社長。第11回で担当を移します</a:t>
+                  <a:srgbClr val="5A534A"/>
+                </a:solidFill>
+                <a:latin typeface="Yu Gothic" pitchFamily="34" charset="0"/>
+                <a:ea typeface="Yu Gothic" pitchFamily="34" charset="-122"/>
+                <a:cs typeface="Yu Gothic" pitchFamily="34" charset="-120"/>
+              </a:rPr>
+              <a:t>期間・単位・季節性・特殊要因。これを渡さないと一般論しか出ません</a:t>
             </a:r>
             <a:endParaRPr lang="en-US" sz="1250" dirty="0"/>
           </a:p>
@@ -2529,14 +2757,14 @@
       </p:sp>
       <p:sp>
         <p:nvSpPr>
-          <p:cNvPr id="13" name="Shape 11"/>
+          <p:cNvPr id="12" name="Shape 10"/>
           <p:cNvSpPr/>
           <p:nvPr/>
         </p:nvSpPr>
         <p:spPr>
           <a:xfrm>
-            <a:off x="777240" y="4206240"/>
-            <a:ext cx="10607040" cy="914400"/>
+            <a:off x="777240" y="4297680"/>
+            <a:ext cx="10607040" cy="1078992"/>
           </a:xfrm>
           <a:prstGeom prst="rect">
             <a:avLst/>
@@ -2554,20 +2782,59 @@
       </p:sp>
       <p:sp>
         <p:nvSpPr>
+          <p:cNvPr id="13" name="Text 11"/>
+          <p:cNvSpPr txBox="1"/>
+          <p:nvPr/>
+        </p:nvSpPr>
+        <p:spPr>
+          <a:xfrm>
+            <a:off x="1097280" y="4389120"/>
+            <a:ext cx="2969971" cy="896112"/>
+          </a:xfrm>
+          <a:prstGeom prst="rect">
+            <a:avLst/>
+          </a:prstGeom>
+          <a:noFill/>
+          <a:ln/>
+        </p:spPr>
+        <p:txBody>
+          <a:bodyPr wrap="square" lIns="0" tIns="0" rIns="0" bIns="0" rtlCol="0" anchor="ctr"/>
+          <a:lstStyle/>
+          <a:p>
+            <a:pPr indent="0" marL="0">
+              <a:buNone/>
+            </a:pPr>
+            <a:r>
+              <a:rPr lang="en-US" sz="1500" b="1" dirty="0">
+                <a:solidFill>
+                  <a:srgbClr val="23201D"/>
+                </a:solidFill>
+                <a:latin typeface="Yu Gothic" pitchFamily="34" charset="0"/>
+                <a:ea typeface="Yu Gothic" pitchFamily="34" charset="-122"/>
+                <a:cs typeface="Yu Gothic" pitchFamily="34" charset="-120"/>
+              </a:rPr>
+              <a:t>反論を3つ</a:t>
+            </a:r>
+            <a:endParaRPr lang="en-US" sz="1500" dirty="0"/>
+          </a:p>
+        </p:txBody>
+      </p:sp>
+      <p:sp>
+        <p:nvSpPr>
           <p:cNvPr id="14" name="Shape 12"/>
           <p:cNvSpPr/>
           <p:nvPr/>
         </p:nvSpPr>
         <p:spPr>
           <a:xfrm>
-            <a:off x="777240" y="4206240"/>
-            <a:ext cx="54864" cy="914400"/>
+            <a:off x="4065422" y="4425696"/>
+            <a:ext cx="18288" cy="822960"/>
           </a:xfrm>
           <a:prstGeom prst="rect">
             <a:avLst/>
           </a:prstGeom>
           <a:solidFill>
-            <a:srgbClr val="3B6B4A"/>
+            <a:srgbClr val="EDE7DB"/>
           </a:solidFill>
           <a:ln w="12700">
             <a:solidFill>
@@ -2585,47 +2852,8 @@
         </p:nvSpPr>
         <p:spPr>
           <a:xfrm>
-            <a:off x="1143000" y="4279392"/>
-            <a:ext cx="2757830" cy="768096"/>
-          </a:xfrm>
-          <a:prstGeom prst="rect">
-            <a:avLst/>
-          </a:prstGeom>
-          <a:noFill/>
-          <a:ln/>
-        </p:spPr>
-        <p:txBody>
-          <a:bodyPr wrap="square" lIns="0" tIns="0" rIns="0" bIns="0" rtlCol="0" anchor="ctr"/>
-          <a:lstStyle/>
-          <a:p>
-            <a:pPr indent="0" marL="0">
-              <a:buNone/>
-            </a:pPr>
-            <a:r>
-              <a:rPr lang="en-US" sz="1400" b="1" dirty="0">
-                <a:solidFill>
-                  <a:srgbClr val="3B6B4A"/>
-                </a:solidFill>
-                <a:latin typeface="Yu Gothic" pitchFamily="34" charset="0"/>
-                <a:ea typeface="Yu Gothic" pitchFamily="34" charset="-122"/>
-                <a:cs typeface="Yu Gothic" pitchFamily="34" charset="-120"/>
-              </a:rPr>
-              <a:t>どこまで社内に出すか</a:t>
-            </a:r>
-            <a:endParaRPr lang="en-US" sz="1400" dirty="0"/>
-          </a:p>
-        </p:txBody>
-      </p:sp>
-      <p:sp>
-        <p:nvSpPr>
-          <p:cNvPr id="16" name="Text 14"/>
-          <p:cNvSpPr txBox="1"/>
-          <p:nvPr/>
-        </p:nvSpPr>
-        <p:spPr>
-          <a:xfrm>
-            <a:off x="4006901" y="4279392"/>
-            <a:ext cx="7011619" cy="768096"/>
+            <a:off x="4383634" y="4389120"/>
+            <a:ext cx="6682435" cy="896112"/>
           </a:xfrm>
           <a:prstGeom prst="rect">
             <a:avLst/>
@@ -2646,15 +2874,54 @@
             <a:r>
               <a:rPr lang="en-US" sz="1250" dirty="0">
                 <a:solidFill>
-                  <a:srgbClr val="3F3933"/>
-                </a:solidFill>
-                <a:latin typeface="Yu Gothic" pitchFamily="34" charset="0"/>
-                <a:ea typeface="Yu Gothic" pitchFamily="34" charset="-122"/>
-                <a:cs typeface="Yu Gothic" pitchFamily="34" charset="-120"/>
-              </a:rPr>
-              <a:t>仮説はあくまで仮説。そのまま数字として配らないことを決めておきます</a:t>
+                  <a:srgbClr val="5A534A"/>
+                </a:solidFill>
+                <a:latin typeface="Yu Gothic" pitchFamily="34" charset="0"/>
+                <a:ea typeface="Yu Gothic" pitchFamily="34" charset="-122"/>
+                <a:cs typeface="Yu Gothic" pitchFamily="34" charset="-120"/>
+              </a:rPr>
+              <a:t>『気になる点』ではなくこう頼みます。経営者は褒められに来ているのではありません</a:t>
             </a:r>
             <a:endParaRPr lang="en-US" sz="1250" dirty="0"/>
+          </a:p>
+        </p:txBody>
+      </p:sp>
+      <p:sp>
+        <p:nvSpPr>
+          <p:cNvPr id="16" name="Text 14"/>
+          <p:cNvSpPr txBox="1"/>
+          <p:nvPr/>
+        </p:nvSpPr>
+        <p:spPr>
+          <a:xfrm>
+            <a:off x="777240" y="5623560"/>
+            <a:ext cx="10607040" cy="411480"/>
+          </a:xfrm>
+          <a:prstGeom prst="rect">
+            <a:avLst/>
+          </a:prstGeom>
+          <a:noFill/>
+          <a:ln/>
+        </p:spPr>
+        <p:txBody>
+          <a:bodyPr wrap="square" lIns="0" tIns="0" rIns="0" bIns="0" rtlCol="0" anchor="ctr"/>
+          <a:lstStyle/>
+          <a:p>
+            <a:pPr indent="0" marL="0">
+              <a:buNone/>
+            </a:pPr>
+            <a:r>
+              <a:rPr lang="en-US" sz="1150" dirty="0">
+                <a:solidFill>
+                  <a:srgbClr val="8A8177"/>
+                </a:solidFill>
+                <a:latin typeface="Yu Gothic" pitchFamily="34" charset="0"/>
+                <a:ea typeface="Yu Gothic" pitchFamily="34" charset="-122"/>
+                <a:cs typeface="Yu Gothic" pitchFamily="34" charset="-120"/>
+              </a:rPr>
+              <a:t>配布した用語辞典にも同じものが載っています。覚える必要はありません。</a:t>
+            </a:r>
+            <a:endParaRPr lang="en-US" sz="1150" dirty="0"/>
           </a:p>
         </p:txBody>
       </p:sp>
@@ -2730,7 +2997,7 @@
                 <a:ea typeface="Yu Gothic" pitchFamily="34" charset="-122"/>
                 <a:cs typeface="Yu Gothic" pitchFamily="34" charset="-120"/>
               </a:rPr>
-              <a:t>組み込み</a:t>
+              <a:t>用語</a:t>
             </a:r>
             <a:endParaRPr lang="en-US" sz="900" dirty="0"/>
           </a:p>
@@ -2795,13 +3062,13 @@
             <a:r>
               <a:rPr lang="en-US" sz="1100" b="1" spc="250" kern="0" dirty="0">
                 <a:solidFill>
-                  <a:srgbClr val="B04A2F"/>
-                </a:solidFill>
-                <a:latin typeface="Yu Gothic" pitchFamily="34" charset="0"/>
-                <a:ea typeface="Yu Gothic" pitchFamily="34" charset="-122"/>
-                <a:cs typeface="Yu Gothic" pitchFamily="34" charset="-120"/>
-              </a:rPr>
-              <a:t>ここだけは</a:t>
+                  <a:srgbClr val="2F4F6B"/>
+                </a:solidFill>
+                <a:latin typeface="Yu Gothic" pitchFamily="34" charset="0"/>
+                <a:ea typeface="Yu Gothic" pitchFamily="34" charset="-122"/>
+                <a:cs typeface="Yu Gothic" pitchFamily="34" charset="-120"/>
+              </a:rPr>
+              <a:t>演習</a:t>
             </a:r>
             <a:endParaRPr lang="en-US" sz="1100" dirty="0"/>
           </a:p>
@@ -2815,7 +3082,7 @@
         </p:nvSpPr>
         <p:spPr>
           <a:xfrm>
-            <a:off x="777240" y="1097280"/>
+            <a:off x="777240" y="896112"/>
             <a:ext cx="10607040" cy="640080"/>
           </a:xfrm>
           <a:prstGeom prst="rect">
@@ -2840,7 +3107,7 @@
                 <a:ea typeface="Yu Gothic" pitchFamily="34" charset="-122"/>
                 <a:cs typeface="Yu Gothic" pitchFamily="34" charset="-120"/>
               </a:rPr>
-              <a:t>最初の3か月は、示唆が当たりません</a:t>
+              <a:t>今日、一緒にやること</a:t>
             </a:r>
             <a:endParaRPr lang="en-US" sz="2600" dirty="0"/>
           </a:p>
@@ -2848,20 +3115,84 @@
       </p:sp>
       <p:sp>
         <p:nvSpPr>
-          <p:cNvPr id="4" name="Shape 2"/>
+          <p:cNvPr id="4" name="Text 2"/>
+          <p:cNvSpPr txBox="1"/>
+          <p:nvPr/>
+        </p:nvSpPr>
+        <p:spPr>
+          <a:xfrm>
+            <a:off x="777240" y="1572768"/>
+            <a:ext cx="10607040" cy="320040"/>
+          </a:xfrm>
+          <a:prstGeom prst="rect">
+            <a:avLst/>
+          </a:prstGeom>
+          <a:noFill/>
+          <a:ln/>
+        </p:spPr>
+        <p:txBody>
+          <a:bodyPr wrap="square" lIns="0" tIns="0" rIns="0" bIns="0" rtlCol="0" anchor="ctr"/>
+          <a:lstStyle/>
+          <a:p>
+            <a:pPr indent="0" marL="0">
+              <a:buNone/>
+            </a:pPr>
+            <a:r>
+              <a:rPr lang="en-US" sz="1250" b="1" dirty="0">
+                <a:solidFill>
+                  <a:srgbClr val="2F4F6B"/>
+                </a:solidFill>
+                <a:latin typeface="Yu Gothic" pitchFamily="34" charset="0"/>
+                <a:ea typeface="Yu Gothic" pitchFamily="34" charset="-122"/>
+                <a:cs typeface="Yu Gothic" pitchFamily="34" charset="-120"/>
+              </a:rPr>
+              <a:t>55分。操作するのはご自身です。</a:t>
+            </a:r>
+            <a:endParaRPr lang="en-US" sz="1250" dirty="0"/>
+          </a:p>
+        </p:txBody>
+      </p:sp>
+      <p:sp>
+        <p:nvSpPr>
+          <p:cNvPr id="5" name="Shape 3"/>
           <p:cNvSpPr/>
           <p:nvPr/>
         </p:nvSpPr>
         <p:spPr>
           <a:xfrm>
             <a:off x="777240" y="2148840"/>
-            <a:ext cx="64008" cy="2194560"/>
+            <a:ext cx="3383280" cy="2880360"/>
           </a:xfrm>
           <a:prstGeom prst="rect">
             <a:avLst/>
           </a:prstGeom>
           <a:solidFill>
-            <a:srgbClr val="B04A2F"/>
+            <a:srgbClr val="FFFFFF"/>
+          </a:solidFill>
+          <a:ln w="12700">
+            <a:solidFill>
+              <a:srgbClr val="EDE7DB"/>
+            </a:solidFill>
+            <a:prstDash val="solid"/>
+          </a:ln>
+        </p:spPr>
+      </p:sp>
+      <p:sp>
+        <p:nvSpPr>
+          <p:cNvPr id="6" name="Shape 4"/>
+          <p:cNvSpPr/>
+          <p:nvPr/>
+        </p:nvSpPr>
+        <p:spPr>
+          <a:xfrm>
+            <a:off x="1051560" y="2395728"/>
+            <a:ext cx="438912" cy="438912"/>
+          </a:xfrm>
+          <a:prstGeom prst="ellipse">
+            <a:avLst/>
+          </a:prstGeom>
+          <a:solidFill>
+            <a:srgbClr val="2F4F6B"/>
           </a:solidFill>
           <a:ln w="12700">
             <a:solidFill>
@@ -2873,14 +3204,53 @@
       </p:sp>
       <p:sp>
         <p:nvSpPr>
-          <p:cNvPr id="5" name="Text 3"/>
-          <p:cNvSpPr txBox="1"/>
-          <p:nvPr/>
-        </p:nvSpPr>
-        <p:spPr>
-          <a:xfrm>
-            <a:off x="1188720" y="2148840"/>
-            <a:ext cx="9966960" cy="2194560"/>
+          <p:cNvPr id="7" name="Text 5"/>
+          <p:cNvSpPr txBox="1"/>
+          <p:nvPr/>
+        </p:nvSpPr>
+        <p:spPr>
+          <a:xfrm>
+            <a:off x="1051560" y="2395728"/>
+            <a:ext cx="438912" cy="438912"/>
+          </a:xfrm>
+          <a:prstGeom prst="rect">
+            <a:avLst/>
+          </a:prstGeom>
+          <a:noFill/>
+          <a:ln/>
+        </p:spPr>
+        <p:txBody>
+          <a:bodyPr wrap="square" lIns="0" tIns="0" rIns="0" bIns="0" rtlCol="0" anchor="ctr"/>
+          <a:lstStyle/>
+          <a:p>
+            <a:pPr algn="ctr" indent="0" marL="0">
+              <a:buNone/>
+            </a:pPr>
+            <a:r>
+              <a:rPr lang="en-US" sz="1300" b="1" dirty="0">
+                <a:solidFill>
+                  <a:srgbClr val="FFFFFF"/>
+                </a:solidFill>
+                <a:latin typeface="Yu Gothic" pitchFamily="34" charset="0"/>
+                <a:ea typeface="Yu Gothic" pitchFamily="34" charset="-122"/>
+                <a:cs typeface="Yu Gothic" pitchFamily="34" charset="-120"/>
+              </a:rPr>
+              <a:t>1</a:t>
+            </a:r>
+            <a:endParaRPr lang="en-US" sz="1300" dirty="0"/>
+          </a:p>
+        </p:txBody>
+      </p:sp>
+      <p:sp>
+        <p:nvSpPr>
+          <p:cNvPr id="8" name="Text 6"/>
+          <p:cNvSpPr txBox="1"/>
+          <p:nvPr/>
+        </p:nvSpPr>
+        <p:spPr>
+          <a:xfrm>
+            <a:off x="1051560" y="2944368"/>
+            <a:ext cx="2834640" cy="731520"/>
           </a:xfrm>
           <a:prstGeom prst="rect">
             <a:avLst/>
@@ -2894,41 +3264,108 @@
           <a:p>
             <a:pPr indent="0" marL="0">
               <a:lnSpc>
-                <a:spcPct val="160000"/>
+                <a:spcPct val="125000"/>
               </a:lnSpc>
               <a:buNone/>
             </a:pPr>
             <a:r>
-              <a:rPr lang="en-US" sz="1650" dirty="0">
-                <a:solidFill>
-                  <a:srgbClr val="3F3933"/>
-                </a:solidFill>
-                <a:latin typeface="Yu Gothic" pitchFamily="34" charset="0"/>
-                <a:ea typeface="Yu Gothic" pitchFamily="34" charset="-122"/>
-                <a:cs typeface="Yu Gothic" pitchFamily="34" charset="-120"/>
-              </a:rPr>
-              <a:t>前提情報が足りていないためです。これは失敗ではなく、通る道です。使いながら前提を書き足していくと、3〜4か月目から実務で使える示唆が出るようになります。ここを先に伝えておかないと、2か月目でやめてしまいます。</a:t>
-            </a:r>
-            <a:endParaRPr lang="en-US" sz="1650" dirty="0"/>
-          </a:p>
-        </p:txBody>
-      </p:sp>
-      <p:sp>
-        <p:nvSpPr>
-          <p:cNvPr id="6" name="Shape 4"/>
+              <a:rPr lang="en-US" sz="1450" b="1" dirty="0">
+                <a:solidFill>
+                  <a:srgbClr val="23201D"/>
+                </a:solidFill>
+                <a:latin typeface="Yu Gothic" pitchFamily="34" charset="0"/>
+                <a:ea typeface="Yu Gothic" pitchFamily="34" charset="-122"/>
+                <a:cs typeface="Yu Gothic" pitchFamily="34" charset="-120"/>
+              </a:rPr>
+              <a:t>実データを読ませる</a:t>
+            </a:r>
+            <a:endParaRPr lang="en-US" sz="1450" dirty="0"/>
+          </a:p>
+        </p:txBody>
+      </p:sp>
+      <p:sp>
+        <p:nvSpPr>
+          <p:cNvPr id="9" name="Text 7"/>
+          <p:cNvSpPr txBox="1"/>
+          <p:nvPr/>
+        </p:nvSpPr>
+        <p:spPr>
+          <a:xfrm>
+            <a:off x="1051560" y="3703320"/>
+            <a:ext cx="2834640" cy="1188720"/>
+          </a:xfrm>
+          <a:prstGeom prst="rect">
+            <a:avLst/>
+          </a:prstGeom>
+          <a:noFill/>
+          <a:ln/>
+        </p:spPr>
+        <p:txBody>
+          <a:bodyPr wrap="square" lIns="0" tIns="0" rIns="0" bIns="0" rtlCol="0" anchor="ctr"/>
+          <a:lstStyle/>
+          <a:p>
+            <a:pPr indent="0" marL="0">
+              <a:lnSpc>
+                <a:spcPct val="130000"/>
+              </a:lnSpc>
+              <a:buNone/>
+            </a:pPr>
+            <a:r>
+              <a:rPr lang="en-US" sz="1150" dirty="0">
+                <a:solidFill>
+                  <a:srgbClr val="5A534A"/>
+                </a:solidFill>
+                <a:latin typeface="Yu Gothic" pitchFamily="34" charset="0"/>
+                <a:ea typeface="Yu Gothic" pitchFamily="34" charset="-122"/>
+                <a:cs typeface="Yu Gothic" pitchFamily="34" charset="-120"/>
+              </a:rPr>
+              <a:t>個人情報の列は先に落とします。落とし方をその場でお伝えします</a:t>
+            </a:r>
+            <a:endParaRPr lang="en-US" sz="1150" dirty="0"/>
+          </a:p>
+        </p:txBody>
+      </p:sp>
+      <p:sp>
+        <p:nvSpPr>
+          <p:cNvPr id="10" name="Shape 8"/>
           <p:cNvSpPr/>
           <p:nvPr/>
         </p:nvSpPr>
         <p:spPr>
           <a:xfrm>
-            <a:off x="777240" y="4709160"/>
-            <a:ext cx="10607040" cy="960120"/>
+            <a:off x="4389120" y="2148840"/>
+            <a:ext cx="3383280" cy="2880360"/>
           </a:xfrm>
           <a:prstGeom prst="rect">
             <a:avLst/>
           </a:prstGeom>
           <a:solidFill>
-            <a:srgbClr val="EDE7DB"/>
+            <a:srgbClr val="FFFFFF"/>
+          </a:solidFill>
+          <a:ln w="12700">
+            <a:solidFill>
+              <a:srgbClr val="EDE7DB"/>
+            </a:solidFill>
+            <a:prstDash val="solid"/>
+          </a:ln>
+        </p:spPr>
+      </p:sp>
+      <p:sp>
+        <p:nvSpPr>
+          <p:cNvPr id="11" name="Shape 9"/>
+          <p:cNvSpPr/>
+          <p:nvPr/>
+        </p:nvSpPr>
+        <p:spPr>
+          <a:xfrm>
+            <a:off x="4663440" y="2395728"/>
+            <a:ext cx="438912" cy="438912"/>
+          </a:xfrm>
+          <a:prstGeom prst="ellipse">
+            <a:avLst/>
+          </a:prstGeom>
+          <a:solidFill>
+            <a:srgbClr val="2F4F6B"/>
           </a:solidFill>
           <a:ln w="12700">
             <a:solidFill>
@@ -2940,53 +3377,95 @@
       </p:sp>
       <p:sp>
         <p:nvSpPr>
-          <p:cNvPr id="7" name="Text 5"/>
-          <p:cNvSpPr txBox="1"/>
-          <p:nvPr/>
-        </p:nvSpPr>
-        <p:spPr>
-          <a:xfrm>
-            <a:off x="1051560" y="4800600"/>
-            <a:ext cx="1463040" cy="256032"/>
-          </a:xfrm>
-          <a:prstGeom prst="rect">
-            <a:avLst/>
-          </a:prstGeom>
-          <a:noFill/>
-          <a:ln/>
-        </p:spPr>
-        <p:txBody>
-          <a:bodyPr wrap="square" lIns="0" tIns="0" rIns="0" bIns="0" rtlCol="0" anchor="ctr"/>
-          <a:lstStyle/>
-          <a:p>
-            <a:pPr indent="0" marL="0">
-              <a:buNone/>
-            </a:pPr>
-            <a:r>
-              <a:rPr lang="en-US" sz="900" b="1" spc="150" kern="0" dirty="0">
-                <a:solidFill>
-                  <a:srgbClr val="B04A2F"/>
-                </a:solidFill>
-                <a:latin typeface="Yu Gothic" pitchFamily="34" charset="0"/>
-                <a:ea typeface="Yu Gothic" pitchFamily="34" charset="-122"/>
-                <a:cs typeface="Yu Gothic" pitchFamily="34" charset="-120"/>
-              </a:rPr>
-              <a:t>他社では</a:t>
-            </a:r>
-            <a:endParaRPr lang="en-US" sz="900" dirty="0"/>
-          </a:p>
-        </p:txBody>
-      </p:sp>
-      <p:sp>
-        <p:nvSpPr>
-          <p:cNvPr id="8" name="Text 6"/>
-          <p:cNvSpPr txBox="1"/>
-          <p:nvPr/>
-        </p:nvSpPr>
-        <p:spPr>
-          <a:xfrm>
-            <a:off x="1051560" y="5029200"/>
-            <a:ext cx="10058400" cy="566928"/>
+          <p:cNvPr id="12" name="Text 10"/>
+          <p:cNvSpPr txBox="1"/>
+          <p:nvPr/>
+        </p:nvSpPr>
+        <p:spPr>
+          <a:xfrm>
+            <a:off x="4663440" y="2395728"/>
+            <a:ext cx="438912" cy="438912"/>
+          </a:xfrm>
+          <a:prstGeom prst="rect">
+            <a:avLst/>
+          </a:prstGeom>
+          <a:noFill/>
+          <a:ln/>
+        </p:spPr>
+        <p:txBody>
+          <a:bodyPr wrap="square" lIns="0" tIns="0" rIns="0" bIns="0" rtlCol="0" anchor="ctr"/>
+          <a:lstStyle/>
+          <a:p>
+            <a:pPr algn="ctr" indent="0" marL="0">
+              <a:buNone/>
+            </a:pPr>
+            <a:r>
+              <a:rPr lang="en-US" sz="1300" b="1" dirty="0">
+                <a:solidFill>
+                  <a:srgbClr val="FFFFFF"/>
+                </a:solidFill>
+                <a:latin typeface="Yu Gothic" pitchFamily="34" charset="0"/>
+                <a:ea typeface="Yu Gothic" pitchFamily="34" charset="-122"/>
+                <a:cs typeface="Yu Gothic" pitchFamily="34" charset="-120"/>
+              </a:rPr>
+              <a:t>2</a:t>
+            </a:r>
+            <a:endParaRPr lang="en-US" sz="1300" dirty="0"/>
+          </a:p>
+        </p:txBody>
+      </p:sp>
+      <p:sp>
+        <p:nvSpPr>
+          <p:cNvPr id="13" name="Text 11"/>
+          <p:cNvSpPr txBox="1"/>
+          <p:nvPr/>
+        </p:nvSpPr>
+        <p:spPr>
+          <a:xfrm>
+            <a:off x="4663440" y="2944368"/>
+            <a:ext cx="2834640" cy="731520"/>
+          </a:xfrm>
+          <a:prstGeom prst="rect">
+            <a:avLst/>
+          </a:prstGeom>
+          <a:noFill/>
+          <a:ln/>
+        </p:spPr>
+        <p:txBody>
+          <a:bodyPr wrap="square" lIns="0" tIns="0" rIns="0" bIns="0" rtlCol="0" anchor="ctr"/>
+          <a:lstStyle/>
+          <a:p>
+            <a:pPr indent="0" marL="0">
+              <a:lnSpc>
+                <a:spcPct val="125000"/>
+              </a:lnSpc>
+              <a:buNone/>
+            </a:pPr>
+            <a:r>
+              <a:rPr lang="en-US" sz="1450" b="1" dirty="0">
+                <a:solidFill>
+                  <a:srgbClr val="23201D"/>
+                </a:solidFill>
+                <a:latin typeface="Yu Gothic" pitchFamily="34" charset="0"/>
+                <a:ea typeface="Yu Gothic" pitchFamily="34" charset="-122"/>
+                <a:cs typeface="Yu Gothic" pitchFamily="34" charset="-120"/>
+              </a:rPr>
+              <a:t>示唆を3つ引き出して、検算する</a:t>
+            </a:r>
+            <a:endParaRPr lang="en-US" sz="1450" dirty="0"/>
+          </a:p>
+        </p:txBody>
+      </p:sp>
+      <p:sp>
+        <p:nvSpPr>
+          <p:cNvPr id="14" name="Text 12"/>
+          <p:cNvSpPr txBox="1"/>
+          <p:nvPr/>
+        </p:nvSpPr>
+        <p:spPr>
+          <a:xfrm>
+            <a:off x="4663440" y="3703320"/>
+            <a:ext cx="2834640" cy="1188720"/>
           </a:xfrm>
           <a:prstGeom prst="rect">
             <a:avLst/>
@@ -3005,23 +3484,196 @@
               <a:buNone/>
             </a:pPr>
             <a:r>
-              <a:rPr lang="en-US" sz="1250" dirty="0">
-                <a:solidFill>
-                  <a:srgbClr val="3F3933"/>
-                </a:solidFill>
-                <a:latin typeface="Yu Gothic" pitchFamily="34" charset="0"/>
-                <a:ea typeface="Yu Gothic" pitchFamily="34" charset="-122"/>
-                <a:cs typeface="Yu Gothic" pitchFamily="34" charset="-120"/>
-              </a:rPr>
-              <a:t>毎月の売上会議の資料づくりに2日かけていた会社が、雛形化で半日にしました。ただし最初の3か月の示唆はほとんど的外れで、前提を書き足し続けた結果、4か月目から使えるようになりました。</a:t>
-            </a:r>
-            <a:endParaRPr lang="en-US" sz="1250" dirty="0"/>
-          </a:p>
-        </p:txBody>
-      </p:sp>
-      <p:sp>
-        <p:nvSpPr>
-          <p:cNvPr id="9" name="Text 7"/>
+              <a:rPr lang="en-US" sz="1150" dirty="0">
+                <a:solidFill>
+                  <a:srgbClr val="5A534A"/>
+                </a:solidFill>
+                <a:latin typeface="Yu Gothic" pitchFamily="34" charset="0"/>
+                <a:ea typeface="Yu Gothic" pitchFamily="34" charset="-122"/>
+                <a:cs typeface="Yu Gothic" pitchFamily="34" charset="-120"/>
+              </a:rPr>
+              <a:t>合計を突き合わせるところまでを手順にします</a:t>
+            </a:r>
+            <a:endParaRPr lang="en-US" sz="1150" dirty="0"/>
+          </a:p>
+        </p:txBody>
+      </p:sp>
+      <p:sp>
+        <p:nvSpPr>
+          <p:cNvPr id="15" name="Shape 13"/>
+          <p:cNvSpPr/>
+          <p:nvPr/>
+        </p:nvSpPr>
+        <p:spPr>
+          <a:xfrm>
+            <a:off x="8001000" y="2148840"/>
+            <a:ext cx="3383280" cy="2880360"/>
+          </a:xfrm>
+          <a:prstGeom prst="rect">
+            <a:avLst/>
+          </a:prstGeom>
+          <a:solidFill>
+            <a:srgbClr val="FFFFFF"/>
+          </a:solidFill>
+          <a:ln w="12700">
+            <a:solidFill>
+              <a:srgbClr val="EDE7DB"/>
+            </a:solidFill>
+            <a:prstDash val="solid"/>
+          </a:ln>
+        </p:spPr>
+      </p:sp>
+      <p:sp>
+        <p:nvSpPr>
+          <p:cNvPr id="16" name="Shape 14"/>
+          <p:cNvSpPr/>
+          <p:nvPr/>
+        </p:nvSpPr>
+        <p:spPr>
+          <a:xfrm>
+            <a:off x="8275320" y="2395728"/>
+            <a:ext cx="438912" cy="438912"/>
+          </a:xfrm>
+          <a:prstGeom prst="ellipse">
+            <a:avLst/>
+          </a:prstGeom>
+          <a:solidFill>
+            <a:srgbClr val="2F4F6B"/>
+          </a:solidFill>
+          <a:ln w="12700">
+            <a:solidFill>
+              <a:srgbClr val="333333"/>
+            </a:solidFill>
+            <a:prstDash val="solid"/>
+          </a:ln>
+        </p:spPr>
+      </p:sp>
+      <p:sp>
+        <p:nvSpPr>
+          <p:cNvPr id="17" name="Text 15"/>
+          <p:cNvSpPr txBox="1"/>
+          <p:nvPr/>
+        </p:nvSpPr>
+        <p:spPr>
+          <a:xfrm>
+            <a:off x="8275320" y="2395728"/>
+            <a:ext cx="438912" cy="438912"/>
+          </a:xfrm>
+          <a:prstGeom prst="rect">
+            <a:avLst/>
+          </a:prstGeom>
+          <a:noFill/>
+          <a:ln/>
+        </p:spPr>
+        <p:txBody>
+          <a:bodyPr wrap="square" lIns="0" tIns="0" rIns="0" bIns="0" rtlCol="0" anchor="ctr"/>
+          <a:lstStyle/>
+          <a:p>
+            <a:pPr algn="ctr" indent="0" marL="0">
+              <a:buNone/>
+            </a:pPr>
+            <a:r>
+              <a:rPr lang="en-US" sz="1300" b="1" dirty="0">
+                <a:solidFill>
+                  <a:srgbClr val="FFFFFF"/>
+                </a:solidFill>
+                <a:latin typeface="Yu Gothic" pitchFamily="34" charset="0"/>
+                <a:ea typeface="Yu Gothic" pitchFamily="34" charset="-122"/>
+                <a:cs typeface="Yu Gothic" pitchFamily="34" charset="-120"/>
+              </a:rPr>
+              <a:t>3</a:t>
+            </a:r>
+            <a:endParaRPr lang="en-US" sz="1300" dirty="0"/>
+          </a:p>
+        </p:txBody>
+      </p:sp>
+      <p:sp>
+        <p:nvSpPr>
+          <p:cNvPr id="18" name="Text 16"/>
+          <p:cNvSpPr txBox="1"/>
+          <p:nvPr/>
+        </p:nvSpPr>
+        <p:spPr>
+          <a:xfrm>
+            <a:off x="8275320" y="2944368"/>
+            <a:ext cx="2834640" cy="731520"/>
+          </a:xfrm>
+          <a:prstGeom prst="rect">
+            <a:avLst/>
+          </a:prstGeom>
+          <a:noFill/>
+          <a:ln/>
+        </p:spPr>
+        <p:txBody>
+          <a:bodyPr wrap="square" lIns="0" tIns="0" rIns="0" bIns="0" rtlCol="0" anchor="ctr"/>
+          <a:lstStyle/>
+          <a:p>
+            <a:pPr indent="0" marL="0">
+              <a:lnSpc>
+                <a:spcPct val="125000"/>
+              </a:lnSpc>
+              <a:buNone/>
+            </a:pPr>
+            <a:r>
+              <a:rPr lang="en-US" sz="1450" b="1" dirty="0">
+                <a:solidFill>
+                  <a:srgbClr val="23201D"/>
+                </a:solidFill>
+                <a:latin typeface="Yu Gothic" pitchFamily="34" charset="0"/>
+                <a:ea typeface="Yu Gothic" pitchFamily="34" charset="-122"/>
+                <a:cs typeface="Yu Gothic" pitchFamily="34" charset="-120"/>
+              </a:rPr>
+              <a:t>月次レポートの雛形にする</a:t>
+            </a:r>
+            <a:endParaRPr lang="en-US" sz="1450" dirty="0"/>
+          </a:p>
+        </p:txBody>
+      </p:sp>
+      <p:sp>
+        <p:nvSpPr>
+          <p:cNvPr id="19" name="Text 17"/>
+          <p:cNvSpPr txBox="1"/>
+          <p:nvPr/>
+        </p:nvSpPr>
+        <p:spPr>
+          <a:xfrm>
+            <a:off x="8275320" y="3703320"/>
+            <a:ext cx="2834640" cy="1188720"/>
+          </a:xfrm>
+          <a:prstGeom prst="rect">
+            <a:avLst/>
+          </a:prstGeom>
+          <a:noFill/>
+          <a:ln/>
+        </p:spPr>
+        <p:txBody>
+          <a:bodyPr wrap="square" lIns="0" tIns="0" rIns="0" bIns="0" rtlCol="0" anchor="ctr"/>
+          <a:lstStyle/>
+          <a:p>
+            <a:pPr indent="0" marL="0">
+              <a:lnSpc>
+                <a:spcPct val="130000"/>
+              </a:lnSpc>
+              <a:buNone/>
+            </a:pPr>
+            <a:r>
+              <a:rPr lang="en-US" sz="1150" dirty="0">
+                <a:solidFill>
+                  <a:srgbClr val="5A534A"/>
+                </a:solidFill>
+                <a:latin typeface="Yu Gothic" pitchFamily="34" charset="0"/>
+                <a:ea typeface="Yu Gothic" pitchFamily="34" charset="-122"/>
+                <a:cs typeface="Yu Gothic" pitchFamily="34" charset="-120"/>
+              </a:rPr>
+              <a:t>来月から同じ形で回せるようにします</a:t>
+            </a:r>
+            <a:endParaRPr lang="en-US" sz="1150" dirty="0"/>
+          </a:p>
+        </p:txBody>
+      </p:sp>
+      <p:sp>
+        <p:nvSpPr>
+          <p:cNvPr id="20" name="Text 18"/>
           <p:cNvSpPr txBox="1"/>
           <p:nvPr/>
         </p:nvSpPr>
@@ -3060,7 +3712,7 @@
       </p:sp>
       <p:sp>
         <p:nvSpPr>
-          <p:cNvPr id="10" name="Text 8"/>
+          <p:cNvPr id="21" name="Text 19"/>
           <p:cNvSpPr txBox="1"/>
           <p:nvPr/>
         </p:nvSpPr>
@@ -3091,7 +3743,7 @@
                 <a:ea typeface="Yu Gothic" pitchFamily="34" charset="-122"/>
                 <a:cs typeface="Yu Gothic" pitchFamily="34" charset="-120"/>
               </a:rPr>
-              <a:t>ここだけは</a:t>
+              <a:t>演習</a:t>
             </a:r>
             <a:endParaRPr lang="en-US" sz="900" dirty="0"/>
           </a:p>
@@ -3108,6 +3760,1490 @@
 <file path=ppt/slides/slide12.xml><?xml version="1.0" encoding="utf-8"?>
 <p:sld xmlns:a="http://schemas.openxmlformats.org/drawingml/2006/main" xmlns:r="http://schemas.openxmlformats.org/officeDocument/2006/relationships" xmlns:p="http://schemas.openxmlformats.org/presentationml/2006/main">
   <p:cSld name="Slide 12">
+    <p:bg>
+      <p:bgPr>
+        <a:solidFill>
+          <a:srgbClr val="F6F2EA"/>
+        </a:solidFill>
+      </p:bgPr>
+    </p:bg>
+    <p:spTree>
+      <p:nvGrpSpPr>
+        <p:cNvPr id="1" name=""/>
+        <p:cNvGrpSpPr/>
+        <p:nvPr/>
+      </p:nvGrpSpPr>
+      <p:grpSpPr>
+        <a:xfrm>
+          <a:off x="0" y="0"/>
+          <a:ext cx="0" cy="0"/>
+          <a:chOff x="0" y="0"/>
+          <a:chExt cx="0" cy="0"/>
+        </a:xfrm>
+      </p:grpSpPr>
+      <p:sp>
+        <p:nvSpPr>
+          <p:cNvPr id="2" name="Text 0"/>
+          <p:cNvSpPr txBox="1"/>
+          <p:nvPr/>
+        </p:nvSpPr>
+        <p:spPr>
+          <a:xfrm>
+            <a:off x="777240" y="566928"/>
+            <a:ext cx="10607040" cy="274320"/>
+          </a:xfrm>
+          <a:prstGeom prst="rect">
+            <a:avLst/>
+          </a:prstGeom>
+          <a:noFill/>
+          <a:ln/>
+        </p:spPr>
+        <p:txBody>
+          <a:bodyPr wrap="square" lIns="0" tIns="0" rIns="0" bIns="0" rtlCol="0" anchor="ctr"/>
+          <a:lstStyle/>
+          <a:p>
+            <a:pPr indent="0" marL="0">
+              <a:buNone/>
+            </a:pPr>
+            <a:r>
+              <a:rPr lang="en-US" sz="1100" b="1" spc="250" kern="0" dirty="0">
+                <a:solidFill>
+                  <a:srgbClr val="3B6B4A"/>
+                </a:solidFill>
+                <a:latin typeface="Yu Gothic" pitchFamily="34" charset="0"/>
+                <a:ea typeface="Yu Gothic" pitchFamily="34" charset="-122"/>
+                <a:cs typeface="Yu Gothic" pitchFamily="34" charset="-120"/>
+              </a:rPr>
+              <a:t>業務への組み込み</a:t>
+            </a:r>
+            <a:endParaRPr lang="en-US" sz="1100" dirty="0"/>
+          </a:p>
+        </p:txBody>
+      </p:sp>
+      <p:sp>
+        <p:nvSpPr>
+          <p:cNvPr id="3" name="Text 1"/>
+          <p:cNvSpPr txBox="1"/>
+          <p:nvPr/>
+        </p:nvSpPr>
+        <p:spPr>
+          <a:xfrm>
+            <a:off x="777240" y="896112"/>
+            <a:ext cx="10607040" cy="640080"/>
+          </a:xfrm>
+          <a:prstGeom prst="rect">
+            <a:avLst/>
+          </a:prstGeom>
+          <a:noFill/>
+          <a:ln/>
+        </p:spPr>
+        <p:txBody>
+          <a:bodyPr wrap="square" lIns="0" tIns="0" rIns="0" bIns="0" rtlCol="0" anchor="ctr"/>
+          <a:lstStyle/>
+          <a:p>
+            <a:pPr indent="0" marL="0">
+              <a:buNone/>
+            </a:pPr>
+            <a:r>
+              <a:rPr lang="en-US" sz="2600" b="1" dirty="0">
+                <a:solidFill>
+                  <a:srgbClr val="23201D"/>
+                </a:solidFill>
+                <a:latin typeface="Yu Gothic" pitchFamily="34" charset="0"/>
+                <a:ea typeface="Yu Gothic" pitchFamily="34" charset="-122"/>
+                <a:cs typeface="Yu Gothic" pitchFamily="34" charset="-120"/>
+              </a:rPr>
+              <a:t>帰る前に決めること</a:t>
+            </a:r>
+            <a:endParaRPr lang="en-US" sz="2600" dirty="0"/>
+          </a:p>
+        </p:txBody>
+      </p:sp>
+      <p:sp>
+        <p:nvSpPr>
+          <p:cNvPr id="4" name="Text 2"/>
+          <p:cNvSpPr txBox="1"/>
+          <p:nvPr/>
+        </p:nvSpPr>
+        <p:spPr>
+          <a:xfrm>
+            <a:off x="777240" y="1572768"/>
+            <a:ext cx="10607040" cy="320040"/>
+          </a:xfrm>
+          <a:prstGeom prst="rect">
+            <a:avLst/>
+          </a:prstGeom>
+          <a:noFill/>
+          <a:ln/>
+        </p:spPr>
+        <p:txBody>
+          <a:bodyPr wrap="square" lIns="0" tIns="0" rIns="0" bIns="0" rtlCol="0" anchor="ctr"/>
+          <a:lstStyle/>
+          <a:p>
+            <a:pPr indent="0" marL="0">
+              <a:buNone/>
+            </a:pPr>
+            <a:r>
+              <a:rPr lang="en-US" sz="1250" b="1" dirty="0">
+                <a:solidFill>
+                  <a:srgbClr val="3B6B4A"/>
+                </a:solidFill>
+                <a:latin typeface="Yu Gothic" pitchFamily="34" charset="0"/>
+                <a:ea typeface="Yu Gothic" pitchFamily="34" charset="-122"/>
+                <a:cs typeface="Yu Gothic" pitchFamily="34" charset="-120"/>
+              </a:rPr>
+              <a:t>ここを決めないと、持ち帰っても使われません。紙に書きます。</a:t>
+            </a:r>
+            <a:endParaRPr lang="en-US" sz="1250" dirty="0"/>
+          </a:p>
+        </p:txBody>
+      </p:sp>
+      <p:sp>
+        <p:nvSpPr>
+          <p:cNvPr id="5" name="Shape 3"/>
+          <p:cNvSpPr/>
+          <p:nvPr/>
+        </p:nvSpPr>
+        <p:spPr>
+          <a:xfrm>
+            <a:off x="777240" y="2103120"/>
+            <a:ext cx="10607040" cy="914400"/>
+          </a:xfrm>
+          <a:prstGeom prst="rect">
+            <a:avLst/>
+          </a:prstGeom>
+          <a:solidFill>
+            <a:srgbClr val="FFFFFF"/>
+          </a:solidFill>
+          <a:ln w="12700">
+            <a:solidFill>
+              <a:srgbClr val="EDE7DB"/>
+            </a:solidFill>
+            <a:prstDash val="solid"/>
+          </a:ln>
+        </p:spPr>
+      </p:sp>
+      <p:sp>
+        <p:nvSpPr>
+          <p:cNvPr id="6" name="Shape 4"/>
+          <p:cNvSpPr/>
+          <p:nvPr/>
+        </p:nvSpPr>
+        <p:spPr>
+          <a:xfrm>
+            <a:off x="777240" y="2103120"/>
+            <a:ext cx="54864" cy="914400"/>
+          </a:xfrm>
+          <a:prstGeom prst="rect">
+            <a:avLst/>
+          </a:prstGeom>
+          <a:solidFill>
+            <a:srgbClr val="3B6B4A"/>
+          </a:solidFill>
+          <a:ln w="12700">
+            <a:solidFill>
+              <a:srgbClr val="333333"/>
+            </a:solidFill>
+            <a:prstDash val="solid"/>
+          </a:ln>
+        </p:spPr>
+      </p:sp>
+      <p:sp>
+        <p:nvSpPr>
+          <p:cNvPr id="7" name="Text 5"/>
+          <p:cNvSpPr txBox="1"/>
+          <p:nvPr/>
+        </p:nvSpPr>
+        <p:spPr>
+          <a:xfrm>
+            <a:off x="1143000" y="2176272"/>
+            <a:ext cx="2757830" cy="768096"/>
+          </a:xfrm>
+          <a:prstGeom prst="rect">
+            <a:avLst/>
+          </a:prstGeom>
+          <a:noFill/>
+          <a:ln/>
+        </p:spPr>
+        <p:txBody>
+          <a:bodyPr wrap="square" lIns="0" tIns="0" rIns="0" bIns="0" rtlCol="0" anchor="ctr"/>
+          <a:lstStyle/>
+          <a:p>
+            <a:pPr indent="0" marL="0">
+              <a:buNone/>
+            </a:pPr>
+            <a:r>
+              <a:rPr lang="en-US" sz="1400" b="1" dirty="0">
+                <a:solidFill>
+                  <a:srgbClr val="3B6B4A"/>
+                </a:solidFill>
+                <a:latin typeface="Yu Gothic" pitchFamily="34" charset="0"/>
+                <a:ea typeface="Yu Gothic" pitchFamily="34" charset="-122"/>
+                <a:cs typeface="Yu Gothic" pitchFamily="34" charset="-120"/>
+              </a:rPr>
+              <a:t>毎月いつ回すか</a:t>
+            </a:r>
+            <a:endParaRPr lang="en-US" sz="1400" dirty="0"/>
+          </a:p>
+        </p:txBody>
+      </p:sp>
+      <p:sp>
+        <p:nvSpPr>
+          <p:cNvPr id="8" name="Text 6"/>
+          <p:cNvSpPr txBox="1"/>
+          <p:nvPr/>
+        </p:nvSpPr>
+        <p:spPr>
+          <a:xfrm>
+            <a:off x="4006901" y="2176272"/>
+            <a:ext cx="7011619" cy="768096"/>
+          </a:xfrm>
+          <a:prstGeom prst="rect">
+            <a:avLst/>
+          </a:prstGeom>
+          <a:noFill/>
+          <a:ln/>
+        </p:spPr>
+        <p:txBody>
+          <a:bodyPr wrap="square" lIns="0" tIns="0" rIns="0" bIns="0" rtlCol="0" anchor="ctr"/>
+          <a:lstStyle/>
+          <a:p>
+            <a:pPr indent="0" marL="0">
+              <a:lnSpc>
+                <a:spcPct val="130000"/>
+              </a:lnSpc>
+              <a:buNone/>
+            </a:pPr>
+            <a:r>
+              <a:rPr lang="en-US" sz="1250" dirty="0">
+                <a:solidFill>
+                  <a:srgbClr val="3F3933"/>
+                </a:solidFill>
+                <a:latin typeface="Yu Gothic" pitchFamily="34" charset="0"/>
+                <a:ea typeface="Yu Gothic" pitchFamily="34" charset="-122"/>
+                <a:cs typeface="Yu Gothic" pitchFamily="34" charset="-120"/>
+              </a:rPr>
+              <a:t>締め日の翌◯日、と決めてカレンダーに入れます</a:t>
+            </a:r>
+            <a:endParaRPr lang="en-US" sz="1250" dirty="0"/>
+          </a:p>
+        </p:txBody>
+      </p:sp>
+      <p:sp>
+        <p:nvSpPr>
+          <p:cNvPr id="9" name="Shape 7"/>
+          <p:cNvSpPr/>
+          <p:nvPr/>
+        </p:nvSpPr>
+        <p:spPr>
+          <a:xfrm>
+            <a:off x="777240" y="3154680"/>
+            <a:ext cx="10607040" cy="914400"/>
+          </a:xfrm>
+          <a:prstGeom prst="rect">
+            <a:avLst/>
+          </a:prstGeom>
+          <a:solidFill>
+            <a:srgbClr val="FFFFFF"/>
+          </a:solidFill>
+          <a:ln w="12700">
+            <a:solidFill>
+              <a:srgbClr val="EDE7DB"/>
+            </a:solidFill>
+            <a:prstDash val="solid"/>
+          </a:ln>
+        </p:spPr>
+      </p:sp>
+      <p:sp>
+        <p:nvSpPr>
+          <p:cNvPr id="10" name="Shape 8"/>
+          <p:cNvSpPr/>
+          <p:nvPr/>
+        </p:nvSpPr>
+        <p:spPr>
+          <a:xfrm>
+            <a:off x="777240" y="3154680"/>
+            <a:ext cx="54864" cy="914400"/>
+          </a:xfrm>
+          <a:prstGeom prst="rect">
+            <a:avLst/>
+          </a:prstGeom>
+          <a:solidFill>
+            <a:srgbClr val="3B6B4A"/>
+          </a:solidFill>
+          <a:ln w="12700">
+            <a:solidFill>
+              <a:srgbClr val="333333"/>
+            </a:solidFill>
+            <a:prstDash val="solid"/>
+          </a:ln>
+        </p:spPr>
+      </p:sp>
+      <p:sp>
+        <p:nvSpPr>
+          <p:cNvPr id="11" name="Text 9"/>
+          <p:cNvSpPr txBox="1"/>
+          <p:nvPr/>
+        </p:nvSpPr>
+        <p:spPr>
+          <a:xfrm>
+            <a:off x="1143000" y="3227832"/>
+            <a:ext cx="2757830" cy="768096"/>
+          </a:xfrm>
+          <a:prstGeom prst="rect">
+            <a:avLst/>
+          </a:prstGeom>
+          <a:noFill/>
+          <a:ln/>
+        </p:spPr>
+        <p:txBody>
+          <a:bodyPr wrap="square" lIns="0" tIns="0" rIns="0" bIns="0" rtlCol="0" anchor="ctr"/>
+          <a:lstStyle/>
+          <a:p>
+            <a:pPr indent="0" marL="0">
+              <a:buNone/>
+            </a:pPr>
+            <a:r>
+              <a:rPr lang="en-US" sz="1400" b="1" dirty="0">
+                <a:solidFill>
+                  <a:srgbClr val="3B6B4A"/>
+                </a:solidFill>
+                <a:latin typeface="Yu Gothic" pitchFamily="34" charset="0"/>
+                <a:ea typeface="Yu Gothic" pitchFamily="34" charset="-122"/>
+                <a:cs typeface="Yu Gothic" pitchFamily="34" charset="-120"/>
+              </a:rPr>
+              <a:t>誰が回すか</a:t>
+            </a:r>
+            <a:endParaRPr lang="en-US" sz="1400" dirty="0"/>
+          </a:p>
+        </p:txBody>
+      </p:sp>
+      <p:sp>
+        <p:nvSpPr>
+          <p:cNvPr id="12" name="Text 10"/>
+          <p:cNvSpPr txBox="1"/>
+          <p:nvPr/>
+        </p:nvSpPr>
+        <p:spPr>
+          <a:xfrm>
+            <a:off x="4006901" y="3227832"/>
+            <a:ext cx="7011619" cy="768096"/>
+          </a:xfrm>
+          <a:prstGeom prst="rect">
+            <a:avLst/>
+          </a:prstGeom>
+          <a:noFill/>
+          <a:ln/>
+        </p:spPr>
+        <p:txBody>
+          <a:bodyPr wrap="square" lIns="0" tIns="0" rIns="0" bIns="0" rtlCol="0" anchor="ctr"/>
+          <a:lstStyle/>
+          <a:p>
+            <a:pPr indent="0" marL="0">
+              <a:lnSpc>
+                <a:spcPct val="130000"/>
+              </a:lnSpc>
+              <a:buNone/>
+            </a:pPr>
+            <a:r>
+              <a:rPr lang="en-US" sz="1250" dirty="0">
+                <a:solidFill>
+                  <a:srgbClr val="3F3933"/>
+                </a:solidFill>
+                <a:latin typeface="Yu Gothic" pitchFamily="34" charset="0"/>
+                <a:ea typeface="Yu Gothic" pitchFamily="34" charset="-122"/>
+                <a:cs typeface="Yu Gothic" pitchFamily="34" charset="-120"/>
+              </a:rPr>
+              <a:t>当面は社長。第11回で担当を移します</a:t>
+            </a:r>
+            <a:endParaRPr lang="en-US" sz="1250" dirty="0"/>
+          </a:p>
+        </p:txBody>
+      </p:sp>
+      <p:sp>
+        <p:nvSpPr>
+          <p:cNvPr id="13" name="Shape 11"/>
+          <p:cNvSpPr/>
+          <p:nvPr/>
+        </p:nvSpPr>
+        <p:spPr>
+          <a:xfrm>
+            <a:off x="777240" y="4206240"/>
+            <a:ext cx="10607040" cy="914400"/>
+          </a:xfrm>
+          <a:prstGeom prst="rect">
+            <a:avLst/>
+          </a:prstGeom>
+          <a:solidFill>
+            <a:srgbClr val="FFFFFF"/>
+          </a:solidFill>
+          <a:ln w="12700">
+            <a:solidFill>
+              <a:srgbClr val="EDE7DB"/>
+            </a:solidFill>
+            <a:prstDash val="solid"/>
+          </a:ln>
+        </p:spPr>
+      </p:sp>
+      <p:sp>
+        <p:nvSpPr>
+          <p:cNvPr id="14" name="Shape 12"/>
+          <p:cNvSpPr/>
+          <p:nvPr/>
+        </p:nvSpPr>
+        <p:spPr>
+          <a:xfrm>
+            <a:off x="777240" y="4206240"/>
+            <a:ext cx="54864" cy="914400"/>
+          </a:xfrm>
+          <a:prstGeom prst="rect">
+            <a:avLst/>
+          </a:prstGeom>
+          <a:solidFill>
+            <a:srgbClr val="3B6B4A"/>
+          </a:solidFill>
+          <a:ln w="12700">
+            <a:solidFill>
+              <a:srgbClr val="333333"/>
+            </a:solidFill>
+            <a:prstDash val="solid"/>
+          </a:ln>
+        </p:spPr>
+      </p:sp>
+      <p:sp>
+        <p:nvSpPr>
+          <p:cNvPr id="15" name="Text 13"/>
+          <p:cNvSpPr txBox="1"/>
+          <p:nvPr/>
+        </p:nvSpPr>
+        <p:spPr>
+          <a:xfrm>
+            <a:off x="1143000" y="4279392"/>
+            <a:ext cx="2757830" cy="768096"/>
+          </a:xfrm>
+          <a:prstGeom prst="rect">
+            <a:avLst/>
+          </a:prstGeom>
+          <a:noFill/>
+          <a:ln/>
+        </p:spPr>
+        <p:txBody>
+          <a:bodyPr wrap="square" lIns="0" tIns="0" rIns="0" bIns="0" rtlCol="0" anchor="ctr"/>
+          <a:lstStyle/>
+          <a:p>
+            <a:pPr indent="0" marL="0">
+              <a:buNone/>
+            </a:pPr>
+            <a:r>
+              <a:rPr lang="en-US" sz="1400" b="1" dirty="0">
+                <a:solidFill>
+                  <a:srgbClr val="3B6B4A"/>
+                </a:solidFill>
+                <a:latin typeface="Yu Gothic" pitchFamily="34" charset="0"/>
+                <a:ea typeface="Yu Gothic" pitchFamily="34" charset="-122"/>
+                <a:cs typeface="Yu Gothic" pitchFamily="34" charset="-120"/>
+              </a:rPr>
+              <a:t>どこまで社内に出すか</a:t>
+            </a:r>
+            <a:endParaRPr lang="en-US" sz="1400" dirty="0"/>
+          </a:p>
+        </p:txBody>
+      </p:sp>
+      <p:sp>
+        <p:nvSpPr>
+          <p:cNvPr id="16" name="Text 14"/>
+          <p:cNvSpPr txBox="1"/>
+          <p:nvPr/>
+        </p:nvSpPr>
+        <p:spPr>
+          <a:xfrm>
+            <a:off x="4006901" y="4279392"/>
+            <a:ext cx="7011619" cy="768096"/>
+          </a:xfrm>
+          <a:prstGeom prst="rect">
+            <a:avLst/>
+          </a:prstGeom>
+          <a:noFill/>
+          <a:ln/>
+        </p:spPr>
+        <p:txBody>
+          <a:bodyPr wrap="square" lIns="0" tIns="0" rIns="0" bIns="0" rtlCol="0" anchor="ctr"/>
+          <a:lstStyle/>
+          <a:p>
+            <a:pPr indent="0" marL="0">
+              <a:lnSpc>
+                <a:spcPct val="130000"/>
+              </a:lnSpc>
+              <a:buNone/>
+            </a:pPr>
+            <a:r>
+              <a:rPr lang="en-US" sz="1250" dirty="0">
+                <a:solidFill>
+                  <a:srgbClr val="3F3933"/>
+                </a:solidFill>
+                <a:latin typeface="Yu Gothic" pitchFamily="34" charset="0"/>
+                <a:ea typeface="Yu Gothic" pitchFamily="34" charset="-122"/>
+                <a:cs typeface="Yu Gothic" pitchFamily="34" charset="-120"/>
+              </a:rPr>
+              <a:t>仮説はあくまで仮説。そのまま数字として配らないことを決めておきます</a:t>
+            </a:r>
+            <a:endParaRPr lang="en-US" sz="1250" dirty="0"/>
+          </a:p>
+        </p:txBody>
+      </p:sp>
+      <p:sp>
+        <p:nvSpPr>
+          <p:cNvPr id="17" name="Text 15"/>
+          <p:cNvSpPr txBox="1"/>
+          <p:nvPr/>
+        </p:nvSpPr>
+        <p:spPr>
+          <a:xfrm>
+            <a:off x="777240" y="6382512"/>
+            <a:ext cx="7424928" cy="256032"/>
+          </a:xfrm>
+          <a:prstGeom prst="rect">
+            <a:avLst/>
+          </a:prstGeom>
+          <a:noFill/>
+          <a:ln/>
+        </p:spPr>
+        <p:txBody>
+          <a:bodyPr wrap="square" lIns="0" tIns="0" rIns="0" bIns="0" rtlCol="0" anchor="ctr"/>
+          <a:lstStyle/>
+          <a:p>
+            <a:pPr indent="0" marL="0">
+              <a:buNone/>
+            </a:pPr>
+            <a:r>
+              <a:rPr lang="en-US" sz="900" dirty="0">
+                <a:solidFill>
+                  <a:srgbClr val="8A8177"/>
+                </a:solidFill>
+                <a:latin typeface="Yu Gothic" pitchFamily="34" charset="0"/>
+                <a:ea typeface="Yu Gothic" pitchFamily="34" charset="-122"/>
+                <a:cs typeface="Yu Gothic" pitchFamily="34" charset="-120"/>
+              </a:rPr>
+              <a:t>第4回　数字と判断のAI化</a:t>
+            </a:r>
+            <a:endParaRPr lang="en-US" sz="900" dirty="0"/>
+          </a:p>
+        </p:txBody>
+      </p:sp>
+      <p:sp>
+        <p:nvSpPr>
+          <p:cNvPr id="18" name="Text 16"/>
+          <p:cNvSpPr txBox="1"/>
+          <p:nvPr/>
+        </p:nvSpPr>
+        <p:spPr>
+          <a:xfrm>
+            <a:off x="8202168" y="6382512"/>
+            <a:ext cx="3182112" cy="256032"/>
+          </a:xfrm>
+          <a:prstGeom prst="rect">
+            <a:avLst/>
+          </a:prstGeom>
+          <a:noFill/>
+          <a:ln/>
+        </p:spPr>
+        <p:txBody>
+          <a:bodyPr wrap="square" lIns="0" tIns="0" rIns="0" bIns="0" rtlCol="0" anchor="ctr"/>
+          <a:lstStyle/>
+          <a:p>
+            <a:pPr algn="r" indent="0" marL="0">
+              <a:buNone/>
+            </a:pPr>
+            <a:r>
+              <a:rPr lang="en-US" sz="900" dirty="0">
+                <a:solidFill>
+                  <a:srgbClr val="8A8177"/>
+                </a:solidFill>
+                <a:latin typeface="Yu Gothic" pitchFamily="34" charset="0"/>
+                <a:ea typeface="Yu Gothic" pitchFamily="34" charset="-122"/>
+                <a:cs typeface="Yu Gothic" pitchFamily="34" charset="-120"/>
+              </a:rPr>
+              <a:t>組み込み</a:t>
+            </a:r>
+            <a:endParaRPr lang="en-US" sz="900" dirty="0"/>
+          </a:p>
+        </p:txBody>
+      </p:sp>
+    </p:spTree>
+  </p:cSld>
+  <p:clrMapOvr>
+    <a:masterClrMapping/>
+  </p:clrMapOvr>
+</p:sld>
+</file>
+
+<file path=ppt/slides/slide13.xml><?xml version="1.0" encoding="utf-8"?>
+<p:sld xmlns:a="http://schemas.openxmlformats.org/drawingml/2006/main" xmlns:r="http://schemas.openxmlformats.org/officeDocument/2006/relationships" xmlns:p="http://schemas.openxmlformats.org/presentationml/2006/main">
+  <p:cSld name="Slide 13">
+    <p:bg>
+      <p:bgPr>
+        <a:solidFill>
+          <a:srgbClr val="F6F2EA"/>
+        </a:solidFill>
+      </p:bgPr>
+    </p:bg>
+    <p:spTree>
+      <p:nvGrpSpPr>
+        <p:cNvPr id="1" name=""/>
+        <p:cNvGrpSpPr/>
+        <p:nvPr/>
+      </p:nvGrpSpPr>
+      <p:grpSpPr>
+        <a:xfrm>
+          <a:off x="0" y="0"/>
+          <a:ext cx="0" cy="0"/>
+          <a:chOff x="0" y="0"/>
+          <a:chExt cx="0" cy="0"/>
+        </a:xfrm>
+      </p:grpSpPr>
+      <p:sp>
+        <p:nvSpPr>
+          <p:cNvPr id="2" name="Text 0"/>
+          <p:cNvSpPr txBox="1"/>
+          <p:nvPr/>
+        </p:nvSpPr>
+        <p:spPr>
+          <a:xfrm>
+            <a:off x="777240" y="566928"/>
+            <a:ext cx="10607040" cy="274320"/>
+          </a:xfrm>
+          <a:prstGeom prst="rect">
+            <a:avLst/>
+          </a:prstGeom>
+          <a:noFill/>
+          <a:ln/>
+        </p:spPr>
+        <p:txBody>
+          <a:bodyPr wrap="square" lIns="0" tIns="0" rIns="0" bIns="0" rtlCol="0" anchor="ctr"/>
+          <a:lstStyle/>
+          <a:p>
+            <a:pPr indent="0" marL="0">
+              <a:buNone/>
+            </a:pPr>
+            <a:r>
+              <a:rPr lang="en-US" sz="1100" b="1" spc="250" kern="0" dirty="0">
+                <a:solidFill>
+                  <a:srgbClr val="B04A2F"/>
+                </a:solidFill>
+                <a:latin typeface="Yu Gothic" pitchFamily="34" charset="0"/>
+                <a:ea typeface="Yu Gothic" pitchFamily="34" charset="-122"/>
+                <a:cs typeface="Yu Gothic" pitchFamily="34" charset="-120"/>
+              </a:rPr>
+              <a:t>ここだけは</a:t>
+            </a:r>
+            <a:endParaRPr lang="en-US" sz="1100" dirty="0"/>
+          </a:p>
+        </p:txBody>
+      </p:sp>
+      <p:sp>
+        <p:nvSpPr>
+          <p:cNvPr id="3" name="Text 1"/>
+          <p:cNvSpPr txBox="1"/>
+          <p:nvPr/>
+        </p:nvSpPr>
+        <p:spPr>
+          <a:xfrm>
+            <a:off x="777240" y="1097280"/>
+            <a:ext cx="10607040" cy="640080"/>
+          </a:xfrm>
+          <a:prstGeom prst="rect">
+            <a:avLst/>
+          </a:prstGeom>
+          <a:noFill/>
+          <a:ln/>
+        </p:spPr>
+        <p:txBody>
+          <a:bodyPr wrap="square" lIns="0" tIns="0" rIns="0" bIns="0" rtlCol="0" anchor="ctr"/>
+          <a:lstStyle/>
+          <a:p>
+            <a:pPr indent="0" marL="0">
+              <a:buNone/>
+            </a:pPr>
+            <a:r>
+              <a:rPr lang="en-US" sz="2600" b="1" dirty="0">
+                <a:solidFill>
+                  <a:srgbClr val="23201D"/>
+                </a:solidFill>
+                <a:latin typeface="Yu Gothic" pitchFamily="34" charset="0"/>
+                <a:ea typeface="Yu Gothic" pitchFamily="34" charset="-122"/>
+                <a:cs typeface="Yu Gothic" pitchFamily="34" charset="-120"/>
+              </a:rPr>
+              <a:t>最初の3か月は、示唆が当たりません</a:t>
+            </a:r>
+            <a:endParaRPr lang="en-US" sz="2600" dirty="0"/>
+          </a:p>
+        </p:txBody>
+      </p:sp>
+      <p:sp>
+        <p:nvSpPr>
+          <p:cNvPr id="4" name="Shape 2"/>
+          <p:cNvSpPr/>
+          <p:nvPr/>
+        </p:nvSpPr>
+        <p:spPr>
+          <a:xfrm>
+            <a:off x="777240" y="2148840"/>
+            <a:ext cx="64008" cy="2194560"/>
+          </a:xfrm>
+          <a:prstGeom prst="rect">
+            <a:avLst/>
+          </a:prstGeom>
+          <a:solidFill>
+            <a:srgbClr val="B04A2F"/>
+          </a:solidFill>
+          <a:ln w="12700">
+            <a:solidFill>
+              <a:srgbClr val="333333"/>
+            </a:solidFill>
+            <a:prstDash val="solid"/>
+          </a:ln>
+        </p:spPr>
+      </p:sp>
+      <p:sp>
+        <p:nvSpPr>
+          <p:cNvPr id="5" name="Text 3"/>
+          <p:cNvSpPr txBox="1"/>
+          <p:nvPr/>
+        </p:nvSpPr>
+        <p:spPr>
+          <a:xfrm>
+            <a:off x="1188720" y="2148840"/>
+            <a:ext cx="9966960" cy="2194560"/>
+          </a:xfrm>
+          <a:prstGeom prst="rect">
+            <a:avLst/>
+          </a:prstGeom>
+          <a:noFill/>
+          <a:ln/>
+        </p:spPr>
+        <p:txBody>
+          <a:bodyPr wrap="square" lIns="0" tIns="0" rIns="0" bIns="0" rtlCol="0" anchor="ctr"/>
+          <a:lstStyle/>
+          <a:p>
+            <a:pPr indent="0" marL="0">
+              <a:lnSpc>
+                <a:spcPct val="160000"/>
+              </a:lnSpc>
+              <a:buNone/>
+            </a:pPr>
+            <a:r>
+              <a:rPr lang="en-US" sz="1650" dirty="0">
+                <a:solidFill>
+                  <a:srgbClr val="3F3933"/>
+                </a:solidFill>
+                <a:latin typeface="Yu Gothic" pitchFamily="34" charset="0"/>
+                <a:ea typeface="Yu Gothic" pitchFamily="34" charset="-122"/>
+                <a:cs typeface="Yu Gothic" pitchFamily="34" charset="-120"/>
+              </a:rPr>
+              <a:t>前提情報が足りていないためです。これは失敗ではなく、通る道です。使いながら前提を書き足していくと、3〜4か月目から実務で使える示唆が出るようになります。ここを先に伝えておかないと、2か月目でやめてしまいます。</a:t>
+            </a:r>
+            <a:endParaRPr lang="en-US" sz="1650" dirty="0"/>
+          </a:p>
+        </p:txBody>
+      </p:sp>
+      <p:sp>
+        <p:nvSpPr>
+          <p:cNvPr id="6" name="Shape 4"/>
+          <p:cNvSpPr/>
+          <p:nvPr/>
+        </p:nvSpPr>
+        <p:spPr>
+          <a:xfrm>
+            <a:off x="777240" y="4709160"/>
+            <a:ext cx="10607040" cy="960120"/>
+          </a:xfrm>
+          <a:prstGeom prst="rect">
+            <a:avLst/>
+          </a:prstGeom>
+          <a:solidFill>
+            <a:srgbClr val="EDE7DB"/>
+          </a:solidFill>
+          <a:ln w="12700">
+            <a:solidFill>
+              <a:srgbClr val="333333"/>
+            </a:solidFill>
+            <a:prstDash val="solid"/>
+          </a:ln>
+        </p:spPr>
+      </p:sp>
+      <p:sp>
+        <p:nvSpPr>
+          <p:cNvPr id="7" name="Text 5"/>
+          <p:cNvSpPr txBox="1"/>
+          <p:nvPr/>
+        </p:nvSpPr>
+        <p:spPr>
+          <a:xfrm>
+            <a:off x="1051560" y="4800600"/>
+            <a:ext cx="1463040" cy="256032"/>
+          </a:xfrm>
+          <a:prstGeom prst="rect">
+            <a:avLst/>
+          </a:prstGeom>
+          <a:noFill/>
+          <a:ln/>
+        </p:spPr>
+        <p:txBody>
+          <a:bodyPr wrap="square" lIns="0" tIns="0" rIns="0" bIns="0" rtlCol="0" anchor="ctr"/>
+          <a:lstStyle/>
+          <a:p>
+            <a:pPr indent="0" marL="0">
+              <a:buNone/>
+            </a:pPr>
+            <a:r>
+              <a:rPr lang="en-US" sz="900" b="1" spc="150" kern="0" dirty="0">
+                <a:solidFill>
+                  <a:srgbClr val="B04A2F"/>
+                </a:solidFill>
+                <a:latin typeface="Yu Gothic" pitchFamily="34" charset="0"/>
+                <a:ea typeface="Yu Gothic" pitchFamily="34" charset="-122"/>
+                <a:cs typeface="Yu Gothic" pitchFamily="34" charset="-120"/>
+              </a:rPr>
+              <a:t>他社では</a:t>
+            </a:r>
+            <a:endParaRPr lang="en-US" sz="900" dirty="0"/>
+          </a:p>
+        </p:txBody>
+      </p:sp>
+      <p:sp>
+        <p:nvSpPr>
+          <p:cNvPr id="8" name="Text 6"/>
+          <p:cNvSpPr txBox="1"/>
+          <p:nvPr/>
+        </p:nvSpPr>
+        <p:spPr>
+          <a:xfrm>
+            <a:off x="1051560" y="5029200"/>
+            <a:ext cx="10058400" cy="566928"/>
+          </a:xfrm>
+          <a:prstGeom prst="rect">
+            <a:avLst/>
+          </a:prstGeom>
+          <a:noFill/>
+          <a:ln/>
+        </p:spPr>
+        <p:txBody>
+          <a:bodyPr wrap="square" lIns="0" tIns="0" rIns="0" bIns="0" rtlCol="0" anchor="ctr"/>
+          <a:lstStyle/>
+          <a:p>
+            <a:pPr indent="0" marL="0">
+              <a:lnSpc>
+                <a:spcPct val="130000"/>
+              </a:lnSpc>
+              <a:buNone/>
+            </a:pPr>
+            <a:r>
+              <a:rPr lang="en-US" sz="1250" dirty="0">
+                <a:solidFill>
+                  <a:srgbClr val="3F3933"/>
+                </a:solidFill>
+                <a:latin typeface="Yu Gothic" pitchFamily="34" charset="0"/>
+                <a:ea typeface="Yu Gothic" pitchFamily="34" charset="-122"/>
+                <a:cs typeface="Yu Gothic" pitchFamily="34" charset="-120"/>
+              </a:rPr>
+              <a:t>毎月の売上会議の資料づくりに2日かけていた会社が、雛形化で半日にしました。ただし最初の3か月の示唆はほとんど的外れで、前提を書き足し続けた結果、4か月目から使えるようになりました。</a:t>
+            </a:r>
+            <a:endParaRPr lang="en-US" sz="1250" dirty="0"/>
+          </a:p>
+        </p:txBody>
+      </p:sp>
+      <p:sp>
+        <p:nvSpPr>
+          <p:cNvPr id="9" name="Text 7"/>
+          <p:cNvSpPr txBox="1"/>
+          <p:nvPr/>
+        </p:nvSpPr>
+        <p:spPr>
+          <a:xfrm>
+            <a:off x="777240" y="6382512"/>
+            <a:ext cx="7424928" cy="256032"/>
+          </a:xfrm>
+          <a:prstGeom prst="rect">
+            <a:avLst/>
+          </a:prstGeom>
+          <a:noFill/>
+          <a:ln/>
+        </p:spPr>
+        <p:txBody>
+          <a:bodyPr wrap="square" lIns="0" tIns="0" rIns="0" bIns="0" rtlCol="0" anchor="ctr"/>
+          <a:lstStyle/>
+          <a:p>
+            <a:pPr indent="0" marL="0">
+              <a:buNone/>
+            </a:pPr>
+            <a:r>
+              <a:rPr lang="en-US" sz="900" dirty="0">
+                <a:solidFill>
+                  <a:srgbClr val="8A8177"/>
+                </a:solidFill>
+                <a:latin typeface="Yu Gothic" pitchFamily="34" charset="0"/>
+                <a:ea typeface="Yu Gothic" pitchFamily="34" charset="-122"/>
+                <a:cs typeface="Yu Gothic" pitchFamily="34" charset="-120"/>
+              </a:rPr>
+              <a:t>第4回　数字と判断のAI化</a:t>
+            </a:r>
+            <a:endParaRPr lang="en-US" sz="900" dirty="0"/>
+          </a:p>
+        </p:txBody>
+      </p:sp>
+      <p:sp>
+        <p:nvSpPr>
+          <p:cNvPr id="10" name="Text 8"/>
+          <p:cNvSpPr txBox="1"/>
+          <p:nvPr/>
+        </p:nvSpPr>
+        <p:spPr>
+          <a:xfrm>
+            <a:off x="8202168" y="6382512"/>
+            <a:ext cx="3182112" cy="256032"/>
+          </a:xfrm>
+          <a:prstGeom prst="rect">
+            <a:avLst/>
+          </a:prstGeom>
+          <a:noFill/>
+          <a:ln/>
+        </p:spPr>
+        <p:txBody>
+          <a:bodyPr wrap="square" lIns="0" tIns="0" rIns="0" bIns="0" rtlCol="0" anchor="ctr"/>
+          <a:lstStyle/>
+          <a:p>
+            <a:pPr algn="r" indent="0" marL="0">
+              <a:buNone/>
+            </a:pPr>
+            <a:r>
+              <a:rPr lang="en-US" sz="900" dirty="0">
+                <a:solidFill>
+                  <a:srgbClr val="8A8177"/>
+                </a:solidFill>
+                <a:latin typeface="Yu Gothic" pitchFamily="34" charset="0"/>
+                <a:ea typeface="Yu Gothic" pitchFamily="34" charset="-122"/>
+                <a:cs typeface="Yu Gothic" pitchFamily="34" charset="-120"/>
+              </a:rPr>
+              <a:t>ここだけは</a:t>
+            </a:r>
+            <a:endParaRPr lang="en-US" sz="900" dirty="0"/>
+          </a:p>
+        </p:txBody>
+      </p:sp>
+    </p:spTree>
+  </p:cSld>
+  <p:clrMapOvr>
+    <a:masterClrMapping/>
+  </p:clrMapOvr>
+</p:sld>
+</file>
+
+<file path=ppt/slides/slide14.xml><?xml version="1.0" encoding="utf-8"?>
+<p:sld xmlns:a="http://schemas.openxmlformats.org/drawingml/2006/main" xmlns:r="http://schemas.openxmlformats.org/officeDocument/2006/relationships" xmlns:p="http://schemas.openxmlformats.org/presentationml/2006/main">
+  <p:cSld name="Slide 14">
+    <p:bg>
+      <p:bgPr>
+        <a:solidFill>
+          <a:srgbClr val="F6F2EA"/>
+        </a:solidFill>
+      </p:bgPr>
+    </p:bg>
+    <p:spTree>
+      <p:nvGrpSpPr>
+        <p:cNvPr id="1" name=""/>
+        <p:cNvGrpSpPr/>
+        <p:nvPr/>
+      </p:nvGrpSpPr>
+      <p:grpSpPr>
+        <a:xfrm>
+          <a:off x="0" y="0"/>
+          <a:ext cx="0" cy="0"/>
+          <a:chOff x="0" y="0"/>
+          <a:chExt cx="0" cy="0"/>
+        </a:xfrm>
+      </p:grpSpPr>
+      <p:sp>
+        <p:nvSpPr>
+          <p:cNvPr id="2" name="Text 0"/>
+          <p:cNvSpPr txBox="1"/>
+          <p:nvPr/>
+        </p:nvSpPr>
+        <p:spPr>
+          <a:xfrm>
+            <a:off x="777240" y="566928"/>
+            <a:ext cx="10607040" cy="274320"/>
+          </a:xfrm>
+          <a:prstGeom prst="rect">
+            <a:avLst/>
+          </a:prstGeom>
+          <a:noFill/>
+          <a:ln/>
+        </p:spPr>
+        <p:txBody>
+          <a:bodyPr wrap="square" lIns="0" tIns="0" rIns="0" bIns="0" rtlCol="0" anchor="ctr"/>
+          <a:lstStyle/>
+          <a:p>
+            <a:pPr indent="0" marL="0">
+              <a:buNone/>
+            </a:pPr>
+            <a:r>
+              <a:rPr lang="en-US" sz="1100" b="1" spc="250" kern="0" dirty="0">
+                <a:solidFill>
+                  <a:srgbClr val="3B6B4A"/>
+                </a:solidFill>
+                <a:latin typeface="Yu Gothic" pitchFamily="34" charset="0"/>
+                <a:ea typeface="Yu Gothic" pitchFamily="34" charset="-122"/>
+                <a:cs typeface="Yu Gothic" pitchFamily="34" charset="-120"/>
+              </a:rPr>
+              <a:t>次回まで</a:t>
+            </a:r>
+            <a:endParaRPr lang="en-US" sz="1100" dirty="0"/>
+          </a:p>
+        </p:txBody>
+      </p:sp>
+      <p:sp>
+        <p:nvSpPr>
+          <p:cNvPr id="3" name="Text 1"/>
+          <p:cNvSpPr txBox="1"/>
+          <p:nvPr/>
+        </p:nvSpPr>
+        <p:spPr>
+          <a:xfrm>
+            <a:off x="777240" y="896112"/>
+            <a:ext cx="10607040" cy="640080"/>
+          </a:xfrm>
+          <a:prstGeom prst="rect">
+            <a:avLst/>
+          </a:prstGeom>
+          <a:noFill/>
+          <a:ln/>
+        </p:spPr>
+        <p:txBody>
+          <a:bodyPr wrap="square" lIns="0" tIns="0" rIns="0" bIns="0" rtlCol="0" anchor="ctr"/>
+          <a:lstStyle/>
+          <a:p>
+            <a:pPr indent="0" marL="0">
+              <a:buNone/>
+            </a:pPr>
+            <a:r>
+              <a:rPr lang="en-US" sz="2600" b="1" dirty="0">
+                <a:solidFill>
+                  <a:srgbClr val="23201D"/>
+                </a:solidFill>
+                <a:latin typeface="Yu Gothic" pitchFamily="34" charset="0"/>
+                <a:ea typeface="Yu Gothic" pitchFamily="34" charset="-122"/>
+                <a:cs typeface="Yu Gothic" pitchFamily="34" charset="-120"/>
+              </a:rPr>
+              <a:t>次回は「自社専用AIをつくる」</a:t>
+            </a:r>
+            <a:endParaRPr lang="en-US" sz="2600" dirty="0"/>
+          </a:p>
+        </p:txBody>
+      </p:sp>
+      <p:sp>
+        <p:nvSpPr>
+          <p:cNvPr id="4" name="Text 2"/>
+          <p:cNvSpPr txBox="1"/>
+          <p:nvPr/>
+        </p:nvSpPr>
+        <p:spPr>
+          <a:xfrm>
+            <a:off x="777240" y="1572768"/>
+            <a:ext cx="9546336" cy="457200"/>
+          </a:xfrm>
+          <a:prstGeom prst="rect">
+            <a:avLst/>
+          </a:prstGeom>
+          <a:noFill/>
+          <a:ln/>
+        </p:spPr>
+        <p:txBody>
+          <a:bodyPr wrap="square" lIns="0" tIns="0" rIns="0" bIns="0" rtlCol="0" anchor="ctr"/>
+          <a:lstStyle/>
+          <a:p>
+            <a:pPr indent="0" marL="0">
+              <a:buNone/>
+            </a:pPr>
+            <a:r>
+              <a:rPr lang="en-US" sz="1400" b="1" dirty="0">
+                <a:solidFill>
+                  <a:srgbClr val="3B6B4A"/>
+                </a:solidFill>
+                <a:latin typeface="Yu Gothic" pitchFamily="34" charset="0"/>
+                <a:ea typeface="Yu Gothic" pitchFamily="34" charset="-122"/>
+                <a:cs typeface="Yu Gothic" pitchFamily="34" charset="-120"/>
+              </a:rPr>
+              <a:t>次回は、ここまでの成果物を1つのツールに束ねます。社員が触れる形にします。</a:t>
+            </a:r>
+            <a:endParaRPr lang="en-US" sz="1400" dirty="0"/>
+          </a:p>
+        </p:txBody>
+      </p:sp>
+      <p:sp>
+        <p:nvSpPr>
+          <p:cNvPr id="5" name="Shape 3"/>
+          <p:cNvSpPr/>
+          <p:nvPr/>
+        </p:nvSpPr>
+        <p:spPr>
+          <a:xfrm>
+            <a:off x="777240" y="2240280"/>
+            <a:ext cx="4985309" cy="2286000"/>
+          </a:xfrm>
+          <a:prstGeom prst="rect">
+            <a:avLst/>
+          </a:prstGeom>
+          <a:solidFill>
+            <a:srgbClr val="FFFFFF"/>
+          </a:solidFill>
+          <a:ln w="12700">
+            <a:solidFill>
+              <a:srgbClr val="EDE7DB"/>
+            </a:solidFill>
+            <a:prstDash val="solid"/>
+          </a:ln>
+        </p:spPr>
+      </p:sp>
+      <p:sp>
+        <p:nvSpPr>
+          <p:cNvPr id="6" name="Text 4"/>
+          <p:cNvSpPr txBox="1"/>
+          <p:nvPr/>
+        </p:nvSpPr>
+        <p:spPr>
+          <a:xfrm>
+            <a:off x="1051560" y="2377440"/>
+            <a:ext cx="4242816" cy="274320"/>
+          </a:xfrm>
+          <a:prstGeom prst="rect">
+            <a:avLst/>
+          </a:prstGeom>
+          <a:noFill/>
+          <a:ln/>
+        </p:spPr>
+        <p:txBody>
+          <a:bodyPr wrap="square" lIns="0" tIns="0" rIns="0" bIns="0" rtlCol="0" anchor="ctr"/>
+          <a:lstStyle/>
+          <a:p>
+            <a:pPr indent="0" marL="0">
+              <a:buNone/>
+            </a:pPr>
+            <a:r>
+              <a:rPr lang="en-US" sz="1000" b="1" spc="150" kern="0" dirty="0">
+                <a:solidFill>
+                  <a:srgbClr val="B04A2F"/>
+                </a:solidFill>
+                <a:latin typeface="Yu Gothic" pitchFamily="34" charset="0"/>
+                <a:ea typeface="Yu Gothic" pitchFamily="34" charset="-122"/>
+                <a:cs typeface="Yu Gothic" pitchFamily="34" charset="-120"/>
+              </a:rPr>
+              <a:t>次回までにやること</a:t>
+            </a:r>
+            <a:endParaRPr lang="en-US" sz="1000" dirty="0"/>
+          </a:p>
+        </p:txBody>
+      </p:sp>
+      <p:sp>
+        <p:nvSpPr>
+          <p:cNvPr id="7" name="Text 5"/>
+          <p:cNvSpPr txBox="1"/>
+          <p:nvPr/>
+        </p:nvSpPr>
+        <p:spPr>
+          <a:xfrm>
+            <a:off x="1051560" y="2743200"/>
+            <a:ext cx="4436669" cy="1554480"/>
+          </a:xfrm>
+          <a:prstGeom prst="rect">
+            <a:avLst/>
+          </a:prstGeom>
+          <a:noFill/>
+          <a:ln/>
+        </p:spPr>
+        <p:txBody>
+          <a:bodyPr wrap="square" lIns="0" tIns="0" rIns="0" bIns="0" rtlCol="0" anchor="ctr"/>
+          <a:lstStyle/>
+          <a:p>
+            <a:pPr indent="0" marL="0">
+              <a:lnSpc>
+                <a:spcPct val="140000"/>
+              </a:lnSpc>
+              <a:buNone/>
+            </a:pPr>
+            <a:r>
+              <a:rPr lang="en-US" sz="1400" dirty="0">
+                <a:solidFill>
+                  <a:srgbClr val="23201D"/>
+                </a:solidFill>
+                <a:latin typeface="Yu Gothic" pitchFamily="34" charset="0"/>
+                <a:ea typeface="Yu Gothic" pitchFamily="34" charset="-122"/>
+                <a:cs typeface="Yu Gothic" pitchFamily="34" charset="-120"/>
+              </a:rPr>
+              <a:t>月次レポートの雛形を、今月の数字で1回そのまま回してみる</a:t>
+            </a:r>
+            <a:endParaRPr lang="en-US" sz="1400" dirty="0"/>
+          </a:p>
+        </p:txBody>
+      </p:sp>
+      <p:sp>
+        <p:nvSpPr>
+          <p:cNvPr id="8" name="Shape 6"/>
+          <p:cNvSpPr/>
+          <p:nvPr/>
+        </p:nvSpPr>
+        <p:spPr>
+          <a:xfrm>
+            <a:off x="6398971" y="2240280"/>
+            <a:ext cx="4985309" cy="2286000"/>
+          </a:xfrm>
+          <a:prstGeom prst="rect">
+            <a:avLst/>
+          </a:prstGeom>
+          <a:solidFill>
+            <a:srgbClr val="FFFFFF"/>
+          </a:solidFill>
+          <a:ln w="12700">
+            <a:solidFill>
+              <a:srgbClr val="EDE7DB"/>
+            </a:solidFill>
+            <a:prstDash val="solid"/>
+          </a:ln>
+        </p:spPr>
+      </p:sp>
+      <p:sp>
+        <p:nvSpPr>
+          <p:cNvPr id="9" name="Text 7"/>
+          <p:cNvSpPr txBox="1"/>
+          <p:nvPr/>
+        </p:nvSpPr>
+        <p:spPr>
+          <a:xfrm>
+            <a:off x="6673291" y="2377440"/>
+            <a:ext cx="4242816" cy="274320"/>
+          </a:xfrm>
+          <a:prstGeom prst="rect">
+            <a:avLst/>
+          </a:prstGeom>
+          <a:noFill/>
+          <a:ln/>
+        </p:spPr>
+        <p:txBody>
+          <a:bodyPr wrap="square" lIns="0" tIns="0" rIns="0" bIns="0" rtlCol="0" anchor="ctr"/>
+          <a:lstStyle/>
+          <a:p>
+            <a:pPr indent="0" marL="0">
+              <a:buNone/>
+            </a:pPr>
+            <a:r>
+              <a:rPr lang="en-US" sz="1000" b="1" spc="150" kern="0" dirty="0">
+                <a:solidFill>
+                  <a:srgbClr val="3B6B4A"/>
+                </a:solidFill>
+                <a:latin typeface="Yu Gothic" pitchFamily="34" charset="0"/>
+                <a:ea typeface="Yu Gothic" pitchFamily="34" charset="-122"/>
+                <a:cs typeface="Yu Gothic" pitchFamily="34" charset="-120"/>
+              </a:rPr>
+              <a:t>次回の持ち物</a:t>
+            </a:r>
+            <a:endParaRPr lang="en-US" sz="1000" dirty="0"/>
+          </a:p>
+        </p:txBody>
+      </p:sp>
+      <p:sp>
+        <p:nvSpPr>
+          <p:cNvPr id="10" name="Text 8"/>
+          <p:cNvSpPr txBox="1"/>
+          <p:nvPr/>
+        </p:nvSpPr>
+        <p:spPr>
+          <a:xfrm>
+            <a:off x="6673291" y="2743200"/>
+            <a:ext cx="4436669" cy="694944"/>
+          </a:xfrm>
+          <a:prstGeom prst="rect">
+            <a:avLst/>
+          </a:prstGeom>
+          <a:noFill/>
+          <a:ln/>
+        </p:spPr>
+        <p:txBody>
+          <a:bodyPr wrap="square" lIns="0" tIns="0" rIns="0" bIns="0" rtlCol="0" anchor="ctr"/>
+          <a:lstStyle/>
+          <a:p>
+            <a:pPr indent="0" marL="0">
+              <a:lnSpc>
+                <a:spcPct val="130000"/>
+              </a:lnSpc>
+              <a:buNone/>
+            </a:pPr>
+            <a:r>
+              <a:rPr lang="en-US" sz="1250" dirty="0">
+                <a:solidFill>
+                  <a:srgbClr val="23201D"/>
+                </a:solidFill>
+                <a:latin typeface="Yu Gothic" pitchFamily="34" charset="0"/>
+                <a:ea typeface="Yu Gothic" pitchFamily="34" charset="-122"/>
+                <a:cs typeface="Yu Gothic" pitchFamily="34" charset="-120"/>
+              </a:rPr>
+              <a:t>・専用AIに載せる自社資料 3〜5本（就業規則・価格表・FAQ など）</a:t>
+            </a:r>
+            <a:endParaRPr lang="en-US" sz="1250" dirty="0"/>
+          </a:p>
+        </p:txBody>
+      </p:sp>
+      <p:sp>
+        <p:nvSpPr>
+          <p:cNvPr id="11" name="Shape 9"/>
+          <p:cNvSpPr/>
+          <p:nvPr/>
+        </p:nvSpPr>
+        <p:spPr>
+          <a:xfrm>
+            <a:off x="777240" y="4800600"/>
+            <a:ext cx="10607040" cy="777240"/>
+          </a:xfrm>
+          <a:prstGeom prst="rect">
+            <a:avLst/>
+          </a:prstGeom>
+          <a:solidFill>
+            <a:srgbClr val="EDE7DB"/>
+          </a:solidFill>
+          <a:ln w="12700">
+            <a:solidFill>
+              <a:srgbClr val="333333"/>
+            </a:solidFill>
+            <a:prstDash val="solid"/>
+          </a:ln>
+        </p:spPr>
+      </p:sp>
+      <p:sp>
+        <p:nvSpPr>
+          <p:cNvPr id="12" name="Text 10"/>
+          <p:cNvSpPr txBox="1"/>
+          <p:nvPr/>
+        </p:nvSpPr>
+        <p:spPr>
+          <a:xfrm>
+            <a:off x="1097280" y="4800600"/>
+            <a:ext cx="9966960" cy="777240"/>
+          </a:xfrm>
+          <a:prstGeom prst="rect">
+            <a:avLst/>
+          </a:prstGeom>
+          <a:noFill/>
+          <a:ln/>
+        </p:spPr>
+        <p:txBody>
+          <a:bodyPr wrap="square" lIns="0" tIns="0" rIns="0" bIns="0" rtlCol="0" anchor="ctr"/>
+          <a:lstStyle/>
+          <a:p>
+            <a:pPr indent="0" marL="0">
+              <a:buNone/>
+            </a:pPr>
+            <a:r>
+              <a:rPr lang="en-US" sz="1250" dirty="0">
+                <a:solidFill>
+                  <a:srgbClr val="5A534A"/>
+                </a:solidFill>
+                <a:latin typeface="Yu Gothic" pitchFamily="34" charset="0"/>
+                <a:ea typeface="Yu Gothic" pitchFamily="34" charset="-122"/>
+                <a:cs typeface="Yu Gothic" pitchFamily="34" charset="-120"/>
+              </a:rPr>
+              <a:t>この内容は、次回の3日前にあらためてお送りします。</a:t>
+            </a:r>
+            <a:endParaRPr lang="en-US" sz="1250" dirty="0"/>
+          </a:p>
+        </p:txBody>
+      </p:sp>
+      <p:sp>
+        <p:nvSpPr>
+          <p:cNvPr id="13" name="Text 11"/>
+          <p:cNvSpPr txBox="1"/>
+          <p:nvPr/>
+        </p:nvSpPr>
+        <p:spPr>
+          <a:xfrm>
+            <a:off x="777240" y="6382512"/>
+            <a:ext cx="7424928" cy="256032"/>
+          </a:xfrm>
+          <a:prstGeom prst="rect">
+            <a:avLst/>
+          </a:prstGeom>
+          <a:noFill/>
+          <a:ln/>
+        </p:spPr>
+        <p:txBody>
+          <a:bodyPr wrap="square" lIns="0" tIns="0" rIns="0" bIns="0" rtlCol="0" anchor="ctr"/>
+          <a:lstStyle/>
+          <a:p>
+            <a:pPr indent="0" marL="0">
+              <a:buNone/>
+            </a:pPr>
+            <a:r>
+              <a:rPr lang="en-US" sz="900" dirty="0">
+                <a:solidFill>
+                  <a:srgbClr val="8A8177"/>
+                </a:solidFill>
+                <a:latin typeface="Yu Gothic" pitchFamily="34" charset="0"/>
+                <a:ea typeface="Yu Gothic" pitchFamily="34" charset="-122"/>
+                <a:cs typeface="Yu Gothic" pitchFamily="34" charset="-120"/>
+              </a:rPr>
+              <a:t>第4回　数字と判断のAI化</a:t>
+            </a:r>
+            <a:endParaRPr lang="en-US" sz="900" dirty="0"/>
+          </a:p>
+        </p:txBody>
+      </p:sp>
+      <p:sp>
+        <p:nvSpPr>
+          <p:cNvPr id="14" name="Text 12"/>
+          <p:cNvSpPr txBox="1"/>
+          <p:nvPr/>
+        </p:nvSpPr>
+        <p:spPr>
+          <a:xfrm>
+            <a:off x="8202168" y="6382512"/>
+            <a:ext cx="3182112" cy="256032"/>
+          </a:xfrm>
+          <a:prstGeom prst="rect">
+            <a:avLst/>
+          </a:prstGeom>
+          <a:noFill/>
+          <a:ln/>
+        </p:spPr>
+        <p:txBody>
+          <a:bodyPr wrap="square" lIns="0" tIns="0" rIns="0" bIns="0" rtlCol="0" anchor="ctr"/>
+          <a:lstStyle/>
+          <a:p>
+            <a:pPr algn="r" indent="0" marL="0">
+              <a:buNone/>
+            </a:pPr>
+            <a:r>
+              <a:rPr lang="en-US" sz="900" dirty="0">
+                <a:solidFill>
+                  <a:srgbClr val="8A8177"/>
+                </a:solidFill>
+                <a:latin typeface="Yu Gothic" pitchFamily="34" charset="0"/>
+                <a:ea typeface="Yu Gothic" pitchFamily="34" charset="-122"/>
+                <a:cs typeface="Yu Gothic" pitchFamily="34" charset="-120"/>
+              </a:rPr>
+              <a:t>次回まで</a:t>
+            </a:r>
+            <a:endParaRPr lang="en-US" sz="900" dirty="0"/>
+          </a:p>
+        </p:txBody>
+      </p:sp>
+    </p:spTree>
+  </p:cSld>
+  <p:clrMapOvr>
+    <a:masterClrMapping/>
+  </p:clrMapOvr>
+</p:sld>
+</file>
+
+<file path=ppt/slides/slide15.xml><?xml version="1.0" encoding="utf-8"?>
+<p:sld xmlns:a="http://schemas.openxmlformats.org/drawingml/2006/main" xmlns:r="http://schemas.openxmlformats.org/officeDocument/2006/relationships" xmlns:p="http://schemas.openxmlformats.org/presentationml/2006/main">
+  <p:cSld name="Slide 15">
     <p:bg>
       <p:bgPr>
         <a:solidFill>
@@ -8304,13 +10440,13 @@
             <a:r>
               <a:rPr lang="en-US" sz="1100" b="1" spc="250" kern="0" dirty="0">
                 <a:solidFill>
-                  <a:srgbClr val="2F4F6B"/>
-                </a:solidFill>
-                <a:latin typeface="Yu Gothic" pitchFamily="34" charset="0"/>
-                <a:ea typeface="Yu Gothic" pitchFamily="34" charset="-122"/>
-                <a:cs typeface="Yu Gothic" pitchFamily="34" charset="-120"/>
-              </a:rPr>
-              <a:t>演習</a:t>
+                  <a:srgbClr val="B04A2F"/>
+                </a:solidFill>
+                <a:latin typeface="Yu Gothic" pitchFamily="34" charset="0"/>
+                <a:ea typeface="Yu Gothic" pitchFamily="34" charset="-122"/>
+                <a:cs typeface="Yu Gothic" pitchFamily="34" charset="-120"/>
+              </a:rPr>
+              <a:t>想定問答</a:t>
             </a:r>
             <a:endParaRPr lang="en-US" sz="1100" dirty="0"/>
           </a:p>
@@ -8349,7 +10485,7 @@
                 <a:ea typeface="Yu Gothic" pitchFamily="34" charset="-122"/>
                 <a:cs typeface="Yu Gothic" pitchFamily="34" charset="-120"/>
               </a:rPr>
-              <a:t>今日、一緒にやること</a:t>
+              <a:t>この回で、よく聞かれること</a:t>
             </a:r>
             <a:endParaRPr lang="en-US" sz="2600" dirty="0"/>
           </a:p>
@@ -8357,53 +10493,14 @@
       </p:sp>
       <p:sp>
         <p:nvSpPr>
-          <p:cNvPr id="4" name="Text 2"/>
-          <p:cNvSpPr txBox="1"/>
-          <p:nvPr/>
-        </p:nvSpPr>
-        <p:spPr>
-          <a:xfrm>
-            <a:off x="777240" y="1572768"/>
-            <a:ext cx="10607040" cy="320040"/>
-          </a:xfrm>
-          <a:prstGeom prst="rect">
-            <a:avLst/>
-          </a:prstGeom>
-          <a:noFill/>
-          <a:ln/>
-        </p:spPr>
-        <p:txBody>
-          <a:bodyPr wrap="square" lIns="0" tIns="0" rIns="0" bIns="0" rtlCol="0" anchor="ctr"/>
-          <a:lstStyle/>
-          <a:p>
-            <a:pPr indent="0" marL="0">
-              <a:buNone/>
-            </a:pPr>
-            <a:r>
-              <a:rPr lang="en-US" sz="1250" b="1" dirty="0">
-                <a:solidFill>
-                  <a:srgbClr val="2F4F6B"/>
-                </a:solidFill>
-                <a:latin typeface="Yu Gothic" pitchFamily="34" charset="0"/>
-                <a:ea typeface="Yu Gothic" pitchFamily="34" charset="-122"/>
-                <a:cs typeface="Yu Gothic" pitchFamily="34" charset="-120"/>
-              </a:rPr>
-              <a:t>55分。操作するのはご自身です。</a:t>
-            </a:r>
-            <a:endParaRPr lang="en-US" sz="1250" dirty="0"/>
-          </a:p>
-        </p:txBody>
-      </p:sp>
-      <p:sp>
-        <p:nvSpPr>
-          <p:cNvPr id="5" name="Shape 3"/>
+          <p:cNvPr id="4" name="Shape 2"/>
           <p:cNvSpPr/>
           <p:nvPr/>
         </p:nvSpPr>
         <p:spPr>
           <a:xfrm>
-            <a:off x="777240" y="2148840"/>
-            <a:ext cx="3383280" cy="2880360"/>
+            <a:off x="777240" y="1737360"/>
+            <a:ext cx="10607040" cy="1170432"/>
           </a:xfrm>
           <a:prstGeom prst="rect">
             <a:avLst/>
@@ -8421,16 +10518,16 @@
       </p:sp>
       <p:sp>
         <p:nvSpPr>
-          <p:cNvPr id="6" name="Shape 4"/>
+          <p:cNvPr id="5" name="Shape 3"/>
           <p:cNvSpPr/>
           <p:nvPr/>
         </p:nvSpPr>
         <p:spPr>
           <a:xfrm>
-            <a:off x="1051560" y="2395728"/>
-            <a:ext cx="438912" cy="438912"/>
-          </a:xfrm>
-          <a:prstGeom prst="ellipse">
+            <a:off x="777240" y="1737360"/>
+            <a:ext cx="54864" cy="1170432"/>
+          </a:xfrm>
+          <a:prstGeom prst="rect">
             <a:avLst/>
           </a:prstGeom>
           <a:solidFill>
@@ -8446,95 +10543,53 @@
       </p:sp>
       <p:sp>
         <p:nvSpPr>
+          <p:cNvPr id="6" name="Text 4"/>
+          <p:cNvSpPr txBox="1"/>
+          <p:nvPr/>
+        </p:nvSpPr>
+        <p:spPr>
+          <a:xfrm>
+            <a:off x="1097280" y="1828800"/>
+            <a:ext cx="9966960" cy="384048"/>
+          </a:xfrm>
+          <a:prstGeom prst="rect">
+            <a:avLst/>
+          </a:prstGeom>
+          <a:noFill/>
+          <a:ln/>
+        </p:spPr>
+        <p:txBody>
+          <a:bodyPr wrap="square" lIns="0" tIns="0" rIns="0" bIns="0" rtlCol="0" anchor="ctr"/>
+          <a:lstStyle/>
+          <a:p>
+            <a:pPr indent="0" marL="0">
+              <a:buNone/>
+            </a:pPr>
+            <a:r>
+              <a:rPr lang="en-US" sz="1400" b="1" dirty="0">
+                <a:solidFill>
+                  <a:srgbClr val="2F4F6B"/>
+                </a:solidFill>
+                <a:latin typeface="Yu Gothic" pitchFamily="34" charset="0"/>
+                <a:ea typeface="Yu Gothic" pitchFamily="34" charset="-122"/>
+                <a:cs typeface="Yu Gothic" pitchFamily="34" charset="-120"/>
+              </a:rPr>
+              <a:t>「結局、自分で計算するなら手間は変わらないのでは」</a:t>
+            </a:r>
+            <a:endParaRPr lang="en-US" sz="1400" dirty="0"/>
+          </a:p>
+        </p:txBody>
+      </p:sp>
+      <p:sp>
+        <p:nvSpPr>
           <p:cNvPr id="7" name="Text 5"/>
           <p:cNvSpPr txBox="1"/>
           <p:nvPr/>
         </p:nvSpPr>
         <p:spPr>
           <a:xfrm>
-            <a:off x="1051560" y="2395728"/>
-            <a:ext cx="438912" cy="438912"/>
-          </a:xfrm>
-          <a:prstGeom prst="rect">
-            <a:avLst/>
-          </a:prstGeom>
-          <a:noFill/>
-          <a:ln/>
-        </p:spPr>
-        <p:txBody>
-          <a:bodyPr wrap="square" lIns="0" tIns="0" rIns="0" bIns="0" rtlCol="0" anchor="ctr"/>
-          <a:lstStyle/>
-          <a:p>
-            <a:pPr algn="ctr" indent="0" marL="0">
-              <a:buNone/>
-            </a:pPr>
-            <a:r>
-              <a:rPr lang="en-US" sz="1300" b="1" dirty="0">
-                <a:solidFill>
-                  <a:srgbClr val="FFFFFF"/>
-                </a:solidFill>
-                <a:latin typeface="Yu Gothic" pitchFamily="34" charset="0"/>
-                <a:ea typeface="Yu Gothic" pitchFamily="34" charset="-122"/>
-                <a:cs typeface="Yu Gothic" pitchFamily="34" charset="-120"/>
-              </a:rPr>
-              <a:t>1</a:t>
-            </a:r>
-            <a:endParaRPr lang="en-US" sz="1300" dirty="0"/>
-          </a:p>
-        </p:txBody>
-      </p:sp>
-      <p:sp>
-        <p:nvSpPr>
-          <p:cNvPr id="8" name="Text 6"/>
-          <p:cNvSpPr txBox="1"/>
-          <p:nvPr/>
-        </p:nvSpPr>
-        <p:spPr>
-          <a:xfrm>
-            <a:off x="1051560" y="2944368"/>
-            <a:ext cx="2834640" cy="731520"/>
-          </a:xfrm>
-          <a:prstGeom prst="rect">
-            <a:avLst/>
-          </a:prstGeom>
-          <a:noFill/>
-          <a:ln/>
-        </p:spPr>
-        <p:txBody>
-          <a:bodyPr wrap="square" lIns="0" tIns="0" rIns="0" bIns="0" rtlCol="0" anchor="ctr"/>
-          <a:lstStyle/>
-          <a:p>
-            <a:pPr indent="0" marL="0">
-              <a:lnSpc>
-                <a:spcPct val="125000"/>
-              </a:lnSpc>
-              <a:buNone/>
-            </a:pPr>
-            <a:r>
-              <a:rPr lang="en-US" sz="1450" b="1" dirty="0">
-                <a:solidFill>
-                  <a:srgbClr val="23201D"/>
-                </a:solidFill>
-                <a:latin typeface="Yu Gothic" pitchFamily="34" charset="0"/>
-                <a:ea typeface="Yu Gothic" pitchFamily="34" charset="-122"/>
-                <a:cs typeface="Yu Gothic" pitchFamily="34" charset="-120"/>
-              </a:rPr>
-              <a:t>実データを読ませる</a:t>
-            </a:r>
-            <a:endParaRPr lang="en-US" sz="1450" dirty="0"/>
-          </a:p>
-        </p:txBody>
-      </p:sp>
-      <p:sp>
-        <p:nvSpPr>
-          <p:cNvPr id="9" name="Text 7"/>
-          <p:cNvSpPr txBox="1"/>
-          <p:nvPr/>
-        </p:nvSpPr>
-        <p:spPr>
-          <a:xfrm>
-            <a:off x="1051560" y="3703320"/>
-            <a:ext cx="2834640" cy="1188720"/>
+            <a:off x="1097280" y="2231136"/>
+            <a:ext cx="9966960" cy="603504"/>
           </a:xfrm>
           <a:prstGeom prst="rect">
             <a:avLst/>
@@ -8553,30 +10608,30 @@
               <a:buNone/>
             </a:pPr>
             <a:r>
-              <a:rPr lang="en-US" sz="1150" dirty="0">
-                <a:solidFill>
-                  <a:srgbClr val="5A534A"/>
-                </a:solidFill>
-                <a:latin typeface="Yu Gothic" pitchFamily="34" charset="0"/>
-                <a:ea typeface="Yu Gothic" pitchFamily="34" charset="-122"/>
-                <a:cs typeface="Yu Gothic" pitchFamily="34" charset="-120"/>
-              </a:rPr>
-              <a:t>個人情報の列は先に落とします。落とし方をその場でお伝えします</a:t>
-            </a:r>
-            <a:endParaRPr lang="en-US" sz="1150" dirty="0"/>
-          </a:p>
-        </p:txBody>
-      </p:sp>
-      <p:sp>
-        <p:nvSpPr>
-          <p:cNvPr id="10" name="Shape 8"/>
+              <a:rPr lang="en-US" sz="1250" dirty="0">
+                <a:solidFill>
+                  <a:srgbClr val="3F3933"/>
+                </a:solidFill>
+                <a:latin typeface="Yu Gothic" pitchFamily="34" charset="0"/>
+                <a:ea typeface="Yu Gothic" pitchFamily="34" charset="-122"/>
+                <a:cs typeface="Yu Gothic" pitchFamily="34" charset="-120"/>
+              </a:rPr>
+              <a:t>集計は元々表計算でやっていたはずです。変わるのは、そこから先の『なぜこうなったか』を考える部分の速さです。</a:t>
+            </a:r>
+            <a:endParaRPr lang="en-US" sz="1250" dirty="0"/>
+          </a:p>
+        </p:txBody>
+      </p:sp>
+      <p:sp>
+        <p:nvSpPr>
+          <p:cNvPr id="8" name="Shape 6"/>
           <p:cNvSpPr/>
           <p:nvPr/>
         </p:nvSpPr>
         <p:spPr>
           <a:xfrm>
-            <a:off x="4389120" y="2148840"/>
-            <a:ext cx="3383280" cy="2880360"/>
+            <a:off x="777240" y="3035808"/>
+            <a:ext cx="10607040" cy="1170432"/>
           </a:xfrm>
           <a:prstGeom prst="rect">
             <a:avLst/>
@@ -8594,16 +10649,16 @@
       </p:sp>
       <p:sp>
         <p:nvSpPr>
-          <p:cNvPr id="11" name="Shape 9"/>
+          <p:cNvPr id="9" name="Shape 7"/>
           <p:cNvSpPr/>
           <p:nvPr/>
         </p:nvSpPr>
         <p:spPr>
           <a:xfrm>
-            <a:off x="4663440" y="2395728"/>
-            <a:ext cx="438912" cy="438912"/>
-          </a:xfrm>
-          <a:prstGeom prst="ellipse">
+            <a:off x="777240" y="3035808"/>
+            <a:ext cx="54864" cy="1170432"/>
+          </a:xfrm>
+          <a:prstGeom prst="rect">
             <a:avLst/>
           </a:prstGeom>
           <a:solidFill>
@@ -8619,95 +10674,53 @@
       </p:sp>
       <p:sp>
         <p:nvSpPr>
-          <p:cNvPr id="12" name="Text 10"/>
-          <p:cNvSpPr txBox="1"/>
-          <p:nvPr/>
-        </p:nvSpPr>
-        <p:spPr>
-          <a:xfrm>
-            <a:off x="4663440" y="2395728"/>
-            <a:ext cx="438912" cy="438912"/>
-          </a:xfrm>
-          <a:prstGeom prst="rect">
-            <a:avLst/>
-          </a:prstGeom>
-          <a:noFill/>
-          <a:ln/>
-        </p:spPr>
-        <p:txBody>
-          <a:bodyPr wrap="square" lIns="0" tIns="0" rIns="0" bIns="0" rtlCol="0" anchor="ctr"/>
-          <a:lstStyle/>
-          <a:p>
-            <a:pPr algn="ctr" indent="0" marL="0">
-              <a:buNone/>
-            </a:pPr>
-            <a:r>
-              <a:rPr lang="en-US" sz="1300" b="1" dirty="0">
-                <a:solidFill>
-                  <a:srgbClr val="FFFFFF"/>
-                </a:solidFill>
-                <a:latin typeface="Yu Gothic" pitchFamily="34" charset="0"/>
-                <a:ea typeface="Yu Gothic" pitchFamily="34" charset="-122"/>
-                <a:cs typeface="Yu Gothic" pitchFamily="34" charset="-120"/>
-              </a:rPr>
-              <a:t>2</a:t>
-            </a:r>
-            <a:endParaRPr lang="en-US" sz="1300" dirty="0"/>
-          </a:p>
-        </p:txBody>
-      </p:sp>
-      <p:sp>
-        <p:nvSpPr>
-          <p:cNvPr id="13" name="Text 11"/>
-          <p:cNvSpPr txBox="1"/>
-          <p:nvPr/>
-        </p:nvSpPr>
-        <p:spPr>
-          <a:xfrm>
-            <a:off x="4663440" y="2944368"/>
-            <a:ext cx="2834640" cy="731520"/>
-          </a:xfrm>
-          <a:prstGeom prst="rect">
-            <a:avLst/>
-          </a:prstGeom>
-          <a:noFill/>
-          <a:ln/>
-        </p:spPr>
-        <p:txBody>
-          <a:bodyPr wrap="square" lIns="0" tIns="0" rIns="0" bIns="0" rtlCol="0" anchor="ctr"/>
-          <a:lstStyle/>
-          <a:p>
-            <a:pPr indent="0" marL="0">
-              <a:lnSpc>
-                <a:spcPct val="125000"/>
-              </a:lnSpc>
-              <a:buNone/>
-            </a:pPr>
-            <a:r>
-              <a:rPr lang="en-US" sz="1450" b="1" dirty="0">
-                <a:solidFill>
-                  <a:srgbClr val="23201D"/>
-                </a:solidFill>
-                <a:latin typeface="Yu Gothic" pitchFamily="34" charset="0"/>
-                <a:ea typeface="Yu Gothic" pitchFamily="34" charset="-122"/>
-                <a:cs typeface="Yu Gothic" pitchFamily="34" charset="-120"/>
-              </a:rPr>
-              <a:t>示唆を3つ引き出して、検算する</a:t>
-            </a:r>
-            <a:endParaRPr lang="en-US" sz="1450" dirty="0"/>
-          </a:p>
-        </p:txBody>
-      </p:sp>
-      <p:sp>
-        <p:nvSpPr>
-          <p:cNvPr id="14" name="Text 12"/>
-          <p:cNvSpPr txBox="1"/>
-          <p:nvPr/>
-        </p:nvSpPr>
-        <p:spPr>
-          <a:xfrm>
-            <a:off x="4663440" y="3703320"/>
-            <a:ext cx="2834640" cy="1188720"/>
+          <p:cNvPr id="10" name="Text 8"/>
+          <p:cNvSpPr txBox="1"/>
+          <p:nvPr/>
+        </p:nvSpPr>
+        <p:spPr>
+          <a:xfrm>
+            <a:off x="1097280" y="3127248"/>
+            <a:ext cx="9966960" cy="384048"/>
+          </a:xfrm>
+          <a:prstGeom prst="rect">
+            <a:avLst/>
+          </a:prstGeom>
+          <a:noFill/>
+          <a:ln/>
+        </p:spPr>
+        <p:txBody>
+          <a:bodyPr wrap="square" lIns="0" tIns="0" rIns="0" bIns="0" rtlCol="0" anchor="ctr"/>
+          <a:lstStyle/>
+          <a:p>
+            <a:pPr indent="0" marL="0">
+              <a:buNone/>
+            </a:pPr>
+            <a:r>
+              <a:rPr lang="en-US" sz="1400" b="1" dirty="0">
+                <a:solidFill>
+                  <a:srgbClr val="2F4F6B"/>
+                </a:solidFill>
+                <a:latin typeface="Yu Gothic" pitchFamily="34" charset="0"/>
+                <a:ea typeface="Yu Gothic" pitchFamily="34" charset="-122"/>
+                <a:cs typeface="Yu Gothic" pitchFamily="34" charset="-120"/>
+              </a:rPr>
+              <a:t>「AIの出した仮説は、当たっていますか」</a:t>
+            </a:r>
+            <a:endParaRPr lang="en-US" sz="1400" dirty="0"/>
+          </a:p>
+        </p:txBody>
+      </p:sp>
+      <p:sp>
+        <p:nvSpPr>
+          <p:cNvPr id="11" name="Text 9"/>
+          <p:cNvSpPr txBox="1"/>
+          <p:nvPr/>
+        </p:nvSpPr>
+        <p:spPr>
+          <a:xfrm>
+            <a:off x="1097280" y="3529584"/>
+            <a:ext cx="9966960" cy="603504"/>
           </a:xfrm>
           <a:prstGeom prst="rect">
             <a:avLst/>
@@ -8726,30 +10739,30 @@
               <a:buNone/>
             </a:pPr>
             <a:r>
-              <a:rPr lang="en-US" sz="1150" dirty="0">
-                <a:solidFill>
-                  <a:srgbClr val="5A534A"/>
-                </a:solidFill>
-                <a:latin typeface="Yu Gothic" pitchFamily="34" charset="0"/>
-                <a:ea typeface="Yu Gothic" pitchFamily="34" charset="-122"/>
-                <a:cs typeface="Yu Gothic" pitchFamily="34" charset="-120"/>
-              </a:rPr>
-              <a:t>合計を突き合わせるところまでを手順にします</a:t>
-            </a:r>
-            <a:endParaRPr lang="en-US" sz="1150" dirty="0"/>
-          </a:p>
-        </p:txBody>
-      </p:sp>
-      <p:sp>
-        <p:nvSpPr>
-          <p:cNvPr id="15" name="Shape 13"/>
+              <a:rPr lang="en-US" sz="1250" dirty="0">
+                <a:solidFill>
+                  <a:srgbClr val="3F3933"/>
+                </a:solidFill>
+                <a:latin typeface="Yu Gothic" pitchFamily="34" charset="0"/>
+                <a:ea typeface="Yu Gothic" pitchFamily="34" charset="-122"/>
+                <a:cs typeface="Yu Gothic" pitchFamily="34" charset="-120"/>
+              </a:rPr>
+              <a:t>最初の3か月はほとんど外れます。前提情報が足りないためです。書き足していくと4か月目から使えるようになります。</a:t>
+            </a:r>
+            <a:endParaRPr lang="en-US" sz="1250" dirty="0"/>
+          </a:p>
+        </p:txBody>
+      </p:sp>
+      <p:sp>
+        <p:nvSpPr>
+          <p:cNvPr id="12" name="Shape 10"/>
           <p:cNvSpPr/>
           <p:nvPr/>
         </p:nvSpPr>
         <p:spPr>
           <a:xfrm>
-            <a:off x="8001000" y="2148840"/>
-            <a:ext cx="3383280" cy="2880360"/>
+            <a:off x="777240" y="4334256"/>
+            <a:ext cx="10607040" cy="1170432"/>
           </a:xfrm>
           <a:prstGeom prst="rect">
             <a:avLst/>
@@ -8767,16 +10780,16 @@
       </p:sp>
       <p:sp>
         <p:nvSpPr>
-          <p:cNvPr id="16" name="Shape 14"/>
+          <p:cNvPr id="13" name="Shape 11"/>
           <p:cNvSpPr/>
           <p:nvPr/>
         </p:nvSpPr>
         <p:spPr>
           <a:xfrm>
-            <a:off x="8275320" y="2395728"/>
-            <a:ext cx="438912" cy="438912"/>
-          </a:xfrm>
-          <a:prstGeom prst="ellipse">
+            <a:off x="777240" y="4334256"/>
+            <a:ext cx="54864" cy="1170432"/>
+          </a:xfrm>
+          <a:prstGeom prst="rect">
             <a:avLst/>
           </a:prstGeom>
           <a:solidFill>
@@ -8792,95 +10805,53 @@
       </p:sp>
       <p:sp>
         <p:nvSpPr>
-          <p:cNvPr id="17" name="Text 15"/>
-          <p:cNvSpPr txBox="1"/>
-          <p:nvPr/>
-        </p:nvSpPr>
-        <p:spPr>
-          <a:xfrm>
-            <a:off x="8275320" y="2395728"/>
-            <a:ext cx="438912" cy="438912"/>
-          </a:xfrm>
-          <a:prstGeom prst="rect">
-            <a:avLst/>
-          </a:prstGeom>
-          <a:noFill/>
-          <a:ln/>
-        </p:spPr>
-        <p:txBody>
-          <a:bodyPr wrap="square" lIns="0" tIns="0" rIns="0" bIns="0" rtlCol="0" anchor="ctr"/>
-          <a:lstStyle/>
-          <a:p>
-            <a:pPr algn="ctr" indent="0" marL="0">
-              <a:buNone/>
-            </a:pPr>
-            <a:r>
-              <a:rPr lang="en-US" sz="1300" b="1" dirty="0">
-                <a:solidFill>
-                  <a:srgbClr val="FFFFFF"/>
-                </a:solidFill>
-                <a:latin typeface="Yu Gothic" pitchFamily="34" charset="0"/>
-                <a:ea typeface="Yu Gothic" pitchFamily="34" charset="-122"/>
-                <a:cs typeface="Yu Gothic" pitchFamily="34" charset="-120"/>
-              </a:rPr>
-              <a:t>3</a:t>
-            </a:r>
-            <a:endParaRPr lang="en-US" sz="1300" dirty="0"/>
-          </a:p>
-        </p:txBody>
-      </p:sp>
-      <p:sp>
-        <p:nvSpPr>
-          <p:cNvPr id="18" name="Text 16"/>
-          <p:cNvSpPr txBox="1"/>
-          <p:nvPr/>
-        </p:nvSpPr>
-        <p:spPr>
-          <a:xfrm>
-            <a:off x="8275320" y="2944368"/>
-            <a:ext cx="2834640" cy="731520"/>
-          </a:xfrm>
-          <a:prstGeom prst="rect">
-            <a:avLst/>
-          </a:prstGeom>
-          <a:noFill/>
-          <a:ln/>
-        </p:spPr>
-        <p:txBody>
-          <a:bodyPr wrap="square" lIns="0" tIns="0" rIns="0" bIns="0" rtlCol="0" anchor="ctr"/>
-          <a:lstStyle/>
-          <a:p>
-            <a:pPr indent="0" marL="0">
-              <a:lnSpc>
-                <a:spcPct val="125000"/>
-              </a:lnSpc>
-              <a:buNone/>
-            </a:pPr>
-            <a:r>
-              <a:rPr lang="en-US" sz="1450" b="1" dirty="0">
-                <a:solidFill>
-                  <a:srgbClr val="23201D"/>
-                </a:solidFill>
-                <a:latin typeface="Yu Gothic" pitchFamily="34" charset="0"/>
-                <a:ea typeface="Yu Gothic" pitchFamily="34" charset="-122"/>
-                <a:cs typeface="Yu Gothic" pitchFamily="34" charset="-120"/>
-              </a:rPr>
-              <a:t>月次レポートの雛形にする</a:t>
-            </a:r>
-            <a:endParaRPr lang="en-US" sz="1450" dirty="0"/>
-          </a:p>
-        </p:txBody>
-      </p:sp>
-      <p:sp>
-        <p:nvSpPr>
-          <p:cNvPr id="19" name="Text 17"/>
-          <p:cNvSpPr txBox="1"/>
-          <p:nvPr/>
-        </p:nvSpPr>
-        <p:spPr>
-          <a:xfrm>
-            <a:off x="8275320" y="3703320"/>
-            <a:ext cx="2834640" cy="1188720"/>
+          <p:cNvPr id="14" name="Text 12"/>
+          <p:cNvSpPr txBox="1"/>
+          <p:nvPr/>
+        </p:nvSpPr>
+        <p:spPr>
+          <a:xfrm>
+            <a:off x="1097280" y="4425696"/>
+            <a:ext cx="9966960" cy="384048"/>
+          </a:xfrm>
+          <a:prstGeom prst="rect">
+            <a:avLst/>
+          </a:prstGeom>
+          <a:noFill/>
+          <a:ln/>
+        </p:spPr>
+        <p:txBody>
+          <a:bodyPr wrap="square" lIns="0" tIns="0" rIns="0" bIns="0" rtlCol="0" anchor="ctr"/>
+          <a:lstStyle/>
+          <a:p>
+            <a:pPr indent="0" marL="0">
+              <a:buNone/>
+            </a:pPr>
+            <a:r>
+              <a:rPr lang="en-US" sz="1400" b="1" dirty="0">
+                <a:solidFill>
+                  <a:srgbClr val="2F4F6B"/>
+                </a:solidFill>
+                <a:latin typeface="Yu Gothic" pitchFamily="34" charset="0"/>
+                <a:ea typeface="Yu Gothic" pitchFamily="34" charset="-122"/>
+                <a:cs typeface="Yu Gothic" pitchFamily="34" charset="-120"/>
+              </a:rPr>
+              <a:t>「売上データを入れても大丈夫ですか」</a:t>
+            </a:r>
+            <a:endParaRPr lang="en-US" sz="1400" dirty="0"/>
+          </a:p>
+        </p:txBody>
+      </p:sp>
+      <p:sp>
+        <p:nvSpPr>
+          <p:cNvPr id="15" name="Text 13"/>
+          <p:cNvSpPr txBox="1"/>
+          <p:nvPr/>
+        </p:nvSpPr>
+        <p:spPr>
+          <a:xfrm>
+            <a:off x="1097280" y="4828032"/>
+            <a:ext cx="9966960" cy="603504"/>
           </a:xfrm>
           <a:prstGeom prst="rect">
             <a:avLst/>
@@ -8899,23 +10870,23 @@
               <a:buNone/>
             </a:pPr>
             <a:r>
-              <a:rPr lang="en-US" sz="1150" dirty="0">
-                <a:solidFill>
-                  <a:srgbClr val="5A534A"/>
-                </a:solidFill>
-                <a:latin typeface="Yu Gothic" pitchFamily="34" charset="0"/>
-                <a:ea typeface="Yu Gothic" pitchFamily="34" charset="-122"/>
-                <a:cs typeface="Yu Gothic" pitchFamily="34" charset="-120"/>
-              </a:rPr>
-              <a:t>来月から同じ形で回せるようにします</a:t>
-            </a:r>
-            <a:endParaRPr lang="en-US" sz="1150" dirty="0"/>
-          </a:p>
-        </p:txBody>
-      </p:sp>
-      <p:sp>
-        <p:nvSpPr>
-          <p:cNvPr id="20" name="Text 18"/>
+              <a:rPr lang="en-US" sz="1250" dirty="0">
+                <a:solidFill>
+                  <a:srgbClr val="3F3933"/>
+                </a:solidFill>
+                <a:latin typeface="Yu Gothic" pitchFamily="34" charset="0"/>
+                <a:ea typeface="Yu Gothic" pitchFamily="34" charset="-122"/>
+                <a:cs typeface="Yu Gothic" pitchFamily="34" charset="-120"/>
+              </a:rPr>
+              <a:t>個人名と取引先名を外せば問題ありません。今日、その落とし方を一緒にやります。</a:t>
+            </a:r>
+            <a:endParaRPr lang="en-US" sz="1250" dirty="0"/>
+          </a:p>
+        </p:txBody>
+      </p:sp>
+      <p:sp>
+        <p:nvSpPr>
+          <p:cNvPr id="16" name="Text 14"/>
           <p:cNvSpPr txBox="1"/>
           <p:nvPr/>
         </p:nvSpPr>
@@ -8954,7 +10925,7 @@
       </p:sp>
       <p:sp>
         <p:nvSpPr>
-          <p:cNvPr id="21" name="Text 19"/>
+          <p:cNvPr id="17" name="Text 15"/>
           <p:cNvSpPr txBox="1"/>
           <p:nvPr/>
         </p:nvSpPr>
@@ -8985,7 +10956,7 @@
                 <a:ea typeface="Yu Gothic" pitchFamily="34" charset="-122"/>
                 <a:cs typeface="Yu Gothic" pitchFamily="34" charset="-120"/>
               </a:rPr>
-              <a:t>演習</a:t>
+              <a:t>想定問答</a:t>
             </a:r>
             <a:endParaRPr lang="en-US" sz="900" dirty="0"/>
           </a:p>

--- a/slides/pptx/第04回_数字と判断のAI化.pptx
+++ b/slides/pptx/第04回_数字と判断のAI化.pptx
@@ -4604,7 +4604,7 @@
                 <a:ea typeface="Yu Gothic" pitchFamily="34" charset="-122"/>
                 <a:cs typeface="Yu Gothic" pitchFamily="34" charset="-120"/>
               </a:rPr>
-              <a:t>他社では</a:t>
+              <a:t>よくある型</a:t>
             </a:r>
             <a:endParaRPr lang="en-US" sz="900" dirty="0"/>
           </a:p>
@@ -4646,7 +4646,7 @@
                 <a:ea typeface="Yu Gothic" pitchFamily="34" charset="-122"/>
                 <a:cs typeface="Yu Gothic" pitchFamily="34" charset="-120"/>
               </a:rPr>
-              <a:t>毎月の売上会議の資料づくりに2日かけていた会社が、雛形化で半日にしました。ただし最初の3か月の示唆はほとんど的外れで、前提を書き足し続けた結果、4か月目から使えるようになりました。</a:t>
+              <a:t>月次の資料づくりは雛形化で短くなるが、最初の数か月は示唆が的外れになりやすい。前提を書き足し続けて3〜4か月目から使えるようになる、という進み方が普通。</a:t>
             </a:r>
             <a:endParaRPr lang="en-US" sz="1250" dirty="0"/>
           </a:p>

--- a/slides/pptx/第04回_数字と判断のAI化.pptx
+++ b/slides/pptx/第04回_数字と判断のAI化.pptx
@@ -4873,7 +4873,7 @@
                 <a:ea typeface="Yu Gothic" pitchFamily="34" charset="-122"/>
                 <a:cs typeface="Yu Gothic" pitchFamily="34" charset="-120"/>
               </a:rPr>
-              <a:t>次回は、ここまでの成果物を1つのツールに束ねます。社員が触れる形にします。</a:t>
+              <a:t>次回は、ここまでの成果物を1つのツールに束ねます。毎日開く道具にします。</a:t>
             </a:r>
             <a:endParaRPr lang="en-US" sz="1400" dirty="0"/>
           </a:p>

--- a/slides/pptx/第04回_数字と判断のAI化.pptx
+++ b/slides/pptx/第04回_数字と判断のAI化.pptx
@@ -1660,7 +1660,7 @@
           <a:p>
             <a:r>
               <a:rPr lang="en-US" dirty="0"/>
-              <a:t>2つ目（個人情報）は必ずその場で一緒に手を動かす。口で説明しても、実際の列を前にすると迷う。</a:t>
+              <a:t>2つ目（個人情報）は必ずその場で、講師が実際の列を画面で伏せて見せる。口で説明しても、実際の列を前にすると迷う。</a:t>
             </a:r>
             <a:endParaRPr lang="en-US" dirty="0"/>
           </a:p>
@@ -2304,6 +2304,10 @@
             <a:prstDash val="solid"/>
           </a:ln>
         </p:spPr>
+        <p:txBody>
+          <a:bodyPr/>
+          <a:p/>
+        </p:txBody>
       </p:sp>
       <p:sp>
         <p:nvSpPr>
@@ -2517,6 +2521,10 @@
             <a:prstDash val="solid"/>
           </a:ln>
         </p:spPr>
+        <p:txBody>
+          <a:bodyPr/>
+          <a:p/>
+        </p:txBody>
       </p:sp>
       <p:sp>
         <p:nvSpPr>
@@ -2581,6 +2589,10 @@
             <a:prstDash val="solid"/>
           </a:ln>
         </p:spPr>
+        <p:txBody>
+          <a:bodyPr/>
+          <a:p/>
+        </p:txBody>
       </p:sp>
       <p:sp>
         <p:nvSpPr>
@@ -2648,6 +2660,10 @@
             <a:prstDash val="solid"/>
           </a:ln>
         </p:spPr>
+        <p:txBody>
+          <a:bodyPr/>
+          <a:p/>
+        </p:txBody>
       </p:sp>
       <p:sp>
         <p:nvSpPr>
@@ -2712,6 +2728,10 @@
             <a:prstDash val="solid"/>
           </a:ln>
         </p:spPr>
+        <p:txBody>
+          <a:bodyPr/>
+          <a:p/>
+        </p:txBody>
       </p:sp>
       <p:sp>
         <p:nvSpPr>
@@ -2779,6 +2799,10 @@
             <a:prstDash val="solid"/>
           </a:ln>
         </p:spPr>
+        <p:txBody>
+          <a:bodyPr/>
+          <a:p/>
+        </p:txBody>
       </p:sp>
       <p:sp>
         <p:nvSpPr>
@@ -2843,6 +2867,10 @@
             <a:prstDash val="solid"/>
           </a:ln>
         </p:spPr>
+        <p:txBody>
+          <a:bodyPr/>
+          <a:p/>
+        </p:txBody>
       </p:sp>
       <p:sp>
         <p:nvSpPr>
@@ -3068,7 +3096,7 @@
                 <a:ea typeface="Yu Gothic" pitchFamily="34" charset="-122"/>
                 <a:cs typeface="Yu Gothic" pitchFamily="34" charset="-120"/>
               </a:rPr>
-              <a:t>演習</a:t>
+              <a:t>実演</a:t>
             </a:r>
             <a:endParaRPr lang="en-US" sz="1100" dirty="0"/>
           </a:p>
@@ -3107,7 +3135,7 @@
                 <a:ea typeface="Yu Gothic" pitchFamily="34" charset="-122"/>
                 <a:cs typeface="Yu Gothic" pitchFamily="34" charset="-120"/>
               </a:rPr>
-              <a:t>今日、一緒にやること</a:t>
+              <a:t>今日、画面でお見せすること</a:t>
             </a:r>
             <a:endParaRPr lang="en-US" sz="2600" dirty="0"/>
           </a:p>
@@ -3146,7 +3174,7 @@
                 <a:ea typeface="Yu Gothic" pitchFamily="34" charset="-122"/>
                 <a:cs typeface="Yu Gothic" pitchFamily="34" charset="-120"/>
               </a:rPr>
-              <a:t>55分。操作するのはご自身です。</a:t>
+              <a:t>55分。講師の画面でお見せします。</a:t>
             </a:r>
             <a:endParaRPr lang="en-US" sz="1250" dirty="0"/>
           </a:p>
@@ -3176,6 +3204,10 @@
             <a:prstDash val="solid"/>
           </a:ln>
         </p:spPr>
+        <p:txBody>
+          <a:bodyPr/>
+          <a:p/>
+        </p:txBody>
       </p:sp>
       <p:sp>
         <p:nvSpPr>
@@ -3201,6 +3233,10 @@
             <a:prstDash val="solid"/>
           </a:ln>
         </p:spPr>
+        <p:txBody>
+          <a:bodyPr/>
+          <a:p/>
+        </p:txBody>
       </p:sp>
       <p:sp>
         <p:nvSpPr>
@@ -3349,6 +3385,10 @@
             <a:prstDash val="solid"/>
           </a:ln>
         </p:spPr>
+        <p:txBody>
+          <a:bodyPr/>
+          <a:p/>
+        </p:txBody>
       </p:sp>
       <p:sp>
         <p:nvSpPr>
@@ -3374,6 +3414,10 @@
             <a:prstDash val="solid"/>
           </a:ln>
         </p:spPr>
+        <p:txBody>
+          <a:bodyPr/>
+          <a:p/>
+        </p:txBody>
       </p:sp>
       <p:sp>
         <p:nvSpPr>
@@ -3522,6 +3566,10 @@
             <a:prstDash val="solid"/>
           </a:ln>
         </p:spPr>
+        <p:txBody>
+          <a:bodyPr/>
+          <a:p/>
+        </p:txBody>
       </p:sp>
       <p:sp>
         <p:nvSpPr>
@@ -3547,6 +3595,10 @@
             <a:prstDash val="solid"/>
           </a:ln>
         </p:spPr>
+        <p:txBody>
+          <a:bodyPr/>
+          <a:p/>
+        </p:txBody>
       </p:sp>
       <p:sp>
         <p:nvSpPr>
@@ -3743,7 +3795,7 @@
                 <a:ea typeface="Yu Gothic" pitchFamily="34" charset="-122"/>
                 <a:cs typeface="Yu Gothic" pitchFamily="34" charset="-120"/>
               </a:rPr>
-              <a:t>演習</a:t>
+              <a:t>実演</a:t>
             </a:r>
             <a:endParaRPr lang="en-US" sz="900" dirty="0"/>
           </a:p>
@@ -3922,6 +3974,10 @@
             <a:prstDash val="solid"/>
           </a:ln>
         </p:spPr>
+        <p:txBody>
+          <a:bodyPr/>
+          <a:p/>
+        </p:txBody>
       </p:sp>
       <p:sp>
         <p:nvSpPr>
@@ -3947,6 +4003,10 @@
             <a:prstDash val="solid"/>
           </a:ln>
         </p:spPr>
+        <p:txBody>
+          <a:bodyPr/>
+          <a:p/>
+        </p:txBody>
       </p:sp>
       <p:sp>
         <p:nvSpPr>
@@ -4053,6 +4113,10 @@
             <a:prstDash val="solid"/>
           </a:ln>
         </p:spPr>
+        <p:txBody>
+          <a:bodyPr/>
+          <a:p/>
+        </p:txBody>
       </p:sp>
       <p:sp>
         <p:nvSpPr>
@@ -4078,6 +4142,10 @@
             <a:prstDash val="solid"/>
           </a:ln>
         </p:spPr>
+        <p:txBody>
+          <a:bodyPr/>
+          <a:p/>
+        </p:txBody>
       </p:sp>
       <p:sp>
         <p:nvSpPr>
@@ -4184,6 +4252,10 @@
             <a:prstDash val="solid"/>
           </a:ln>
         </p:spPr>
+        <p:txBody>
+          <a:bodyPr/>
+          <a:p/>
+        </p:txBody>
       </p:sp>
       <p:sp>
         <p:nvSpPr>
@@ -4209,6 +4281,10 @@
             <a:prstDash val="solid"/>
           </a:ln>
         </p:spPr>
+        <p:txBody>
+          <a:bodyPr/>
+          <a:p/>
+        </p:txBody>
       </p:sp>
       <p:sp>
         <p:nvSpPr>
@@ -4503,6 +4579,10 @@
             <a:prstDash val="solid"/>
           </a:ln>
         </p:spPr>
+        <p:txBody>
+          <a:bodyPr/>
+          <a:p/>
+        </p:txBody>
       </p:sp>
       <p:sp>
         <p:nvSpPr>
@@ -4570,6 +4650,10 @@
             <a:prstDash val="solid"/>
           </a:ln>
         </p:spPr>
+        <p:txBody>
+          <a:bodyPr/>
+          <a:p/>
+        </p:txBody>
       </p:sp>
       <p:sp>
         <p:nvSpPr>
@@ -4903,6 +4987,10 @@
             <a:prstDash val="solid"/>
           </a:ln>
         </p:spPr>
+        <p:txBody>
+          <a:bodyPr/>
+          <a:p/>
+        </p:txBody>
       </p:sp>
       <p:sp>
         <p:nvSpPr>
@@ -5009,6 +5097,10 @@
             <a:prstDash val="solid"/>
           </a:ln>
         </p:spPr>
+        <p:txBody>
+          <a:bodyPr/>
+          <a:p/>
+        </p:txBody>
       </p:sp>
       <p:sp>
         <p:nvSpPr>
@@ -5115,6 +5207,10 @@
             <a:prstDash val="solid"/>
           </a:ln>
         </p:spPr>
+        <p:txBody>
+          <a:bodyPr/>
+          <a:p/>
+        </p:txBody>
       </p:sp>
       <p:sp>
         <p:nvSpPr>
@@ -5367,6 +5463,10 @@
             <a:prstDash val="solid"/>
           </a:ln>
         </p:spPr>
+        <p:txBody>
+          <a:bodyPr/>
+          <a:p/>
+        </p:txBody>
       </p:sp>
       <p:sp>
         <p:nvSpPr>
@@ -5664,6 +5764,10 @@
             <a:prstDash val="solid"/>
           </a:ln>
         </p:spPr>
+        <p:txBody>
+          <a:bodyPr/>
+          <a:p/>
+        </p:txBody>
       </p:sp>
       <p:sp>
         <p:nvSpPr>
@@ -5767,6 +5871,10 @@
             <a:prstDash val="solid"/>
           </a:ln>
         </p:spPr>
+        <p:txBody>
+          <a:bodyPr/>
+          <a:p/>
+        </p:txBody>
       </p:sp>
       <p:sp>
         <p:nvSpPr>
@@ -5870,6 +5978,10 @@
             <a:prstDash val="solid"/>
           </a:ln>
         </p:spPr>
+        <p:txBody>
+          <a:bodyPr/>
+          <a:p/>
+        </p:txBody>
       </p:sp>
       <p:sp>
         <p:nvSpPr>
@@ -5973,6 +6085,10 @@
             <a:prstDash val="solid"/>
           </a:ln>
         </p:spPr>
+        <p:txBody>
+          <a:bodyPr/>
+          <a:p/>
+        </p:txBody>
       </p:sp>
       <p:sp>
         <p:nvSpPr>
@@ -6231,6 +6347,10 @@
             <a:prstDash val="solid"/>
           </a:ln>
         </p:spPr>
+        <p:txBody>
+          <a:bodyPr/>
+          <a:p/>
+        </p:txBody>
       </p:sp>
       <p:sp>
         <p:nvSpPr>
@@ -6298,6 +6418,10 @@
             <a:prstDash val="solid"/>
           </a:ln>
         </p:spPr>
+        <p:txBody>
+          <a:bodyPr/>
+          <a:p/>
+        </p:txBody>
       </p:sp>
       <p:sp>
         <p:nvSpPr>
@@ -6527,7 +6651,7 @@
                 <a:ea typeface="Yu Gothic" pitchFamily="34" charset="-122"/>
                 <a:cs typeface="Yu Gothic" pitchFamily="34" charset="-120"/>
               </a:rPr>
-              <a:t>一緒に手を動かす</a:t>
+              <a:t>画面で順にお見せする</a:t>
             </a:r>
             <a:endParaRPr lang="en-US" sz="1100" dirty="0"/>
           </a:p>
@@ -6901,6 +7025,10 @@
             <a:prstDash val="solid"/>
           </a:ln>
         </p:spPr>
+        <p:txBody>
+          <a:bodyPr/>
+          <a:p/>
+        </p:txBody>
       </p:sp>
       <p:sp>
         <p:nvSpPr>
@@ -6926,6 +7054,10 @@
             <a:prstDash val="solid"/>
           </a:ln>
         </p:spPr>
+        <p:txBody>
+          <a:bodyPr/>
+          <a:p/>
+        </p:txBody>
       </p:sp>
       <p:sp>
         <p:nvSpPr>
@@ -7071,6 +7203,10 @@
             <a:prstDash val="solid"/>
           </a:ln>
         </p:spPr>
+        <p:txBody>
+          <a:bodyPr/>
+          <a:p/>
+        </p:txBody>
       </p:sp>
       <p:sp>
         <p:nvSpPr>
@@ -7096,6 +7232,10 @@
             <a:prstDash val="solid"/>
           </a:ln>
         </p:spPr>
+        <p:txBody>
+          <a:bodyPr/>
+          <a:p/>
+        </p:txBody>
       </p:sp>
       <p:sp>
         <p:nvSpPr>
@@ -7241,6 +7381,10 @@
             <a:prstDash val="solid"/>
           </a:ln>
         </p:spPr>
+        <p:txBody>
+          <a:bodyPr/>
+          <a:p/>
+        </p:txBody>
       </p:sp>
       <p:sp>
         <p:nvSpPr>
@@ -7266,6 +7410,10 @@
             <a:prstDash val="solid"/>
           </a:ln>
         </p:spPr>
+        <p:txBody>
+          <a:bodyPr/>
+          <a:p/>
+        </p:txBody>
       </p:sp>
       <p:sp>
         <p:nvSpPr>
@@ -7638,6 +7786,10 @@
             <a:prstDash val="solid"/>
           </a:ln>
         </p:spPr>
+        <p:txBody>
+          <a:bodyPr/>
+          <a:p/>
+        </p:txBody>
       </p:sp>
       <p:sp>
         <p:nvSpPr>
@@ -7663,6 +7815,10 @@
             <a:prstDash val="solid"/>
           </a:ln>
         </p:spPr>
+        <p:txBody>
+          <a:bodyPr/>
+          <a:p/>
+        </p:txBody>
       </p:sp>
       <p:sp>
         <p:nvSpPr>
@@ -8377,6 +8533,10 @@
             <a:prstDash val="solid"/>
           </a:ln>
         </p:spPr>
+        <p:txBody>
+          <a:bodyPr/>
+          <a:p/>
+        </p:txBody>
       </p:sp>
       <p:sp>
         <p:nvSpPr>
@@ -8483,6 +8643,10 @@
             <a:prstDash val="solid"/>
           </a:ln>
         </p:spPr>
+        <p:txBody>
+          <a:bodyPr/>
+          <a:p/>
+        </p:txBody>
       </p:sp>
       <p:sp>
         <p:nvSpPr>
@@ -8715,6 +8879,10 @@
             <a:prstDash val="solid"/>
           </a:ln>
         </p:spPr>
+        <p:txBody>
+          <a:bodyPr/>
+          <a:p/>
+        </p:txBody>
       </p:sp>
       <p:sp>
         <p:nvSpPr>
@@ -8782,6 +8950,10 @@
             <a:prstDash val="solid"/>
           </a:ln>
         </p:spPr>
+        <p:txBody>
+          <a:bodyPr/>
+          <a:p/>
+        </p:txBody>
       </p:sp>
       <p:sp>
         <p:nvSpPr>
@@ -9034,6 +9206,10 @@
             <a:prstDash val="solid"/>
           </a:ln>
         </p:spPr>
+        <p:txBody>
+          <a:bodyPr/>
+          <a:p/>
+        </p:txBody>
       </p:sp>
       <p:sp>
         <p:nvSpPr>
@@ -9140,6 +9316,10 @@
             <a:prstDash val="solid"/>
           </a:ln>
         </p:spPr>
+        <p:txBody>
+          <a:bodyPr/>
+          <a:p/>
+        </p:txBody>
       </p:sp>
       <p:sp>
         <p:nvSpPr>
@@ -9372,6 +9552,10 @@
             <a:prstDash val="solid"/>
           </a:ln>
         </p:spPr>
+        <p:txBody>
+          <a:bodyPr/>
+          <a:p/>
+        </p:txBody>
       </p:sp>
       <p:sp>
         <p:nvSpPr>
@@ -9439,6 +9623,10 @@
             <a:prstDash val="solid"/>
           </a:ln>
         </p:spPr>
+        <p:txBody>
+          <a:bodyPr/>
+          <a:p/>
+        </p:txBody>
       </p:sp>
       <p:sp>
         <p:nvSpPr>
@@ -9691,6 +9879,10 @@
             <a:prstDash val="solid"/>
           </a:ln>
         </p:spPr>
+        <p:txBody>
+          <a:bodyPr/>
+          <a:p/>
+        </p:txBody>
       </p:sp>
       <p:sp>
         <p:nvSpPr>
@@ -9797,6 +9989,10 @@
             <a:prstDash val="solid"/>
           </a:ln>
         </p:spPr>
+        <p:txBody>
+          <a:bodyPr/>
+          <a:p/>
+        </p:txBody>
       </p:sp>
       <p:sp>
         <p:nvSpPr>
@@ -9903,6 +10099,10 @@
             <a:prstDash val="solid"/>
           </a:ln>
         </p:spPr>
+        <p:txBody>
+          <a:bodyPr/>
+          <a:p/>
+        </p:txBody>
       </p:sp>
       <p:sp>
         <p:nvSpPr>
@@ -10009,6 +10209,10 @@
             <a:prstDash val="solid"/>
           </a:ln>
         </p:spPr>
+        <p:txBody>
+          <a:bodyPr/>
+          <a:p/>
+        </p:txBody>
       </p:sp>
       <p:sp>
         <p:nvSpPr>
@@ -10115,6 +10319,10 @@
             <a:prstDash val="solid"/>
           </a:ln>
         </p:spPr>
+        <p:txBody>
+          <a:bodyPr/>
+          <a:p/>
+        </p:txBody>
       </p:sp>
       <p:sp>
         <p:nvSpPr>
@@ -10221,6 +10429,10 @@
             <a:prstDash val="solid"/>
           </a:ln>
         </p:spPr>
+        <p:txBody>
+          <a:bodyPr/>
+          <a:p/>
+        </p:txBody>
       </p:sp>
       <p:sp>
         <p:nvSpPr>
@@ -10515,6 +10727,10 @@
             <a:prstDash val="solid"/>
           </a:ln>
         </p:spPr>
+        <p:txBody>
+          <a:bodyPr/>
+          <a:p/>
+        </p:txBody>
       </p:sp>
       <p:sp>
         <p:nvSpPr>
@@ -10540,6 +10756,10 @@
             <a:prstDash val="solid"/>
           </a:ln>
         </p:spPr>
+        <p:txBody>
+          <a:bodyPr/>
+          <a:p/>
+        </p:txBody>
       </p:sp>
       <p:sp>
         <p:nvSpPr>
@@ -10646,6 +10866,10 @@
             <a:prstDash val="solid"/>
           </a:ln>
         </p:spPr>
+        <p:txBody>
+          <a:bodyPr/>
+          <a:p/>
+        </p:txBody>
       </p:sp>
       <p:sp>
         <p:nvSpPr>
@@ -10671,6 +10895,10 @@
             <a:prstDash val="solid"/>
           </a:ln>
         </p:spPr>
+        <p:txBody>
+          <a:bodyPr/>
+          <a:p/>
+        </p:txBody>
       </p:sp>
       <p:sp>
         <p:nvSpPr>
@@ -10777,6 +11005,10 @@
             <a:prstDash val="solid"/>
           </a:ln>
         </p:spPr>
+        <p:txBody>
+          <a:bodyPr/>
+          <a:p/>
+        </p:txBody>
       </p:sp>
       <p:sp>
         <p:nvSpPr>
@@ -10802,6 +11034,10 @@
             <a:prstDash val="solid"/>
           </a:ln>
         </p:spPr>
+        <p:txBody>
+          <a:bodyPr/>
+          <a:p/>
+        </p:txBody>
       </p:sp>
       <p:sp>
         <p:nvSpPr>
